--- a/Final/Figures/wavepacket_l=0.pptx
+++ b/Final/Figures/wavepacket_l=0.pptx
@@ -253,7 +253,7 @@
           <a:p>
             <a:fld id="{B4A272A4-1B6B-4C0A-B74D-70EF2D8C7D55}" type="datetimeFigureOut">
               <a:rPr lang="zh-TW" altLang="en-US" smtClean="0"/>
-              <a:t>2026/5/26</a:t>
+              <a:t>2026/5/27</a:t>
             </a:fld>
             <a:endParaRPr lang="zh-TW" altLang="en-US"/>
           </a:p>
@@ -423,7 +423,7 @@
           <a:p>
             <a:fld id="{B4A272A4-1B6B-4C0A-B74D-70EF2D8C7D55}" type="datetimeFigureOut">
               <a:rPr lang="zh-TW" altLang="en-US" smtClean="0"/>
-              <a:t>2026/5/26</a:t>
+              <a:t>2026/5/27</a:t>
             </a:fld>
             <a:endParaRPr lang="zh-TW" altLang="en-US"/>
           </a:p>
@@ -603,7 +603,7 @@
           <a:p>
             <a:fld id="{B4A272A4-1B6B-4C0A-B74D-70EF2D8C7D55}" type="datetimeFigureOut">
               <a:rPr lang="zh-TW" altLang="en-US" smtClean="0"/>
-              <a:t>2026/5/26</a:t>
+              <a:t>2026/5/27</a:t>
             </a:fld>
             <a:endParaRPr lang="zh-TW" altLang="en-US"/>
           </a:p>
@@ -773,7 +773,7 @@
           <a:p>
             <a:fld id="{B4A272A4-1B6B-4C0A-B74D-70EF2D8C7D55}" type="datetimeFigureOut">
               <a:rPr lang="zh-TW" altLang="en-US" smtClean="0"/>
-              <a:t>2026/5/26</a:t>
+              <a:t>2026/5/27</a:t>
             </a:fld>
             <a:endParaRPr lang="zh-TW" altLang="en-US"/>
           </a:p>
@@ -1017,7 +1017,7 @@
           <a:p>
             <a:fld id="{B4A272A4-1B6B-4C0A-B74D-70EF2D8C7D55}" type="datetimeFigureOut">
               <a:rPr lang="zh-TW" altLang="en-US" smtClean="0"/>
-              <a:t>2026/5/26</a:t>
+              <a:t>2026/5/27</a:t>
             </a:fld>
             <a:endParaRPr lang="zh-TW" altLang="en-US"/>
           </a:p>
@@ -1249,7 +1249,7 @@
           <a:p>
             <a:fld id="{B4A272A4-1B6B-4C0A-B74D-70EF2D8C7D55}" type="datetimeFigureOut">
               <a:rPr lang="zh-TW" altLang="en-US" smtClean="0"/>
-              <a:t>2026/5/26</a:t>
+              <a:t>2026/5/27</a:t>
             </a:fld>
             <a:endParaRPr lang="zh-TW" altLang="en-US"/>
           </a:p>
@@ -1616,7 +1616,7 @@
           <a:p>
             <a:fld id="{B4A272A4-1B6B-4C0A-B74D-70EF2D8C7D55}" type="datetimeFigureOut">
               <a:rPr lang="zh-TW" altLang="en-US" smtClean="0"/>
-              <a:t>2026/5/26</a:t>
+              <a:t>2026/5/27</a:t>
             </a:fld>
             <a:endParaRPr lang="zh-TW" altLang="en-US"/>
           </a:p>
@@ -1734,7 +1734,7 @@
           <a:p>
             <a:fld id="{B4A272A4-1B6B-4C0A-B74D-70EF2D8C7D55}" type="datetimeFigureOut">
               <a:rPr lang="zh-TW" altLang="en-US" smtClean="0"/>
-              <a:t>2026/5/26</a:t>
+              <a:t>2026/5/27</a:t>
             </a:fld>
             <a:endParaRPr lang="zh-TW" altLang="en-US"/>
           </a:p>
@@ -1829,7 +1829,7 @@
           <a:p>
             <a:fld id="{B4A272A4-1B6B-4C0A-B74D-70EF2D8C7D55}" type="datetimeFigureOut">
               <a:rPr lang="zh-TW" altLang="en-US" smtClean="0"/>
-              <a:t>2026/5/26</a:t>
+              <a:t>2026/5/27</a:t>
             </a:fld>
             <a:endParaRPr lang="zh-TW" altLang="en-US"/>
           </a:p>
@@ -2106,7 +2106,7 @@
           <a:p>
             <a:fld id="{B4A272A4-1B6B-4C0A-B74D-70EF2D8C7D55}" type="datetimeFigureOut">
               <a:rPr lang="zh-TW" altLang="en-US" smtClean="0"/>
-              <a:t>2026/5/26</a:t>
+              <a:t>2026/5/27</a:t>
             </a:fld>
             <a:endParaRPr lang="zh-TW" altLang="en-US"/>
           </a:p>
@@ -2363,7 +2363,7 @@
           <a:p>
             <a:fld id="{B4A272A4-1B6B-4C0A-B74D-70EF2D8C7D55}" type="datetimeFigureOut">
               <a:rPr lang="zh-TW" altLang="en-US" smtClean="0"/>
-              <a:t>2026/5/26</a:t>
+              <a:t>2026/5/27</a:t>
             </a:fld>
             <a:endParaRPr lang="zh-TW" altLang="en-US"/>
           </a:p>
@@ -2576,7 +2576,7 @@
           <a:p>
             <a:fld id="{B4A272A4-1B6B-4C0A-B74D-70EF2D8C7D55}" type="datetimeFigureOut">
               <a:rPr lang="zh-TW" altLang="en-US" smtClean="0"/>
-              <a:t>2026/5/26</a:t>
+              <a:t>2026/5/27</a:t>
             </a:fld>
             <a:endParaRPr lang="zh-TW" altLang="en-US"/>
           </a:p>
@@ -4042,8 +4042,8 @@
           </a:prstGeom>
         </p:spPr>
       </p:pic>
-      <mc:AlternateContent xmlns:mc="http://schemas.openxmlformats.org/markup-compatibility/2006">
-        <mc:Choice xmlns:a14="http://schemas.microsoft.com/office/drawing/2010/main" Requires="a14">
+      <mc:AlternateContent xmlns:mc="http://schemas.openxmlformats.org/markup-compatibility/2006" xmlns:a14="http://schemas.microsoft.com/office/drawing/2010/main">
+        <mc:Choice Requires="a14">
           <p:sp>
             <p:nvSpPr>
               <p:cNvPr id="8" name="矩形 7">
@@ -4229,7 +4229,7 @@
             </p:txBody>
           </p:sp>
         </mc:Choice>
-        <mc:Fallback>
+        <mc:Fallback xmlns="">
           <p:sp>
             <p:nvSpPr>
               <p:cNvPr id="8" name="矩形 7">
@@ -4274,8 +4274,8 @@
           </p:sp>
         </mc:Fallback>
       </mc:AlternateContent>
-      <mc:AlternateContent xmlns:mc="http://schemas.openxmlformats.org/markup-compatibility/2006">
-        <mc:Choice xmlns:a14="http://schemas.microsoft.com/office/drawing/2010/main" Requires="a14">
+      <mc:AlternateContent xmlns:mc="http://schemas.openxmlformats.org/markup-compatibility/2006" xmlns:a14="http://schemas.microsoft.com/office/drawing/2010/main">
+        <mc:Choice Requires="a14">
           <p:sp>
             <p:nvSpPr>
               <p:cNvPr id="18" name="矩形 17">
@@ -4557,7 +4557,7 @@
             </p:txBody>
           </p:sp>
         </mc:Choice>
-        <mc:Fallback>
+        <mc:Fallback xmlns="">
           <p:sp>
             <p:nvSpPr>
               <p:cNvPr id="18" name="矩形 17">
@@ -4602,8 +4602,8 @@
           </p:sp>
         </mc:Fallback>
       </mc:AlternateContent>
-      <mc:AlternateContent xmlns:mc="http://schemas.openxmlformats.org/markup-compatibility/2006">
-        <mc:Choice xmlns:a14="http://schemas.microsoft.com/office/drawing/2010/main" Requires="a14">
+      <mc:AlternateContent xmlns:mc="http://schemas.openxmlformats.org/markup-compatibility/2006" xmlns:a14="http://schemas.microsoft.com/office/drawing/2010/main">
+        <mc:Choice Requires="a14">
           <p:sp>
             <p:nvSpPr>
               <p:cNvPr id="19" name="矩形 18">
@@ -4664,7 +4664,7 @@
             </p:txBody>
           </p:sp>
         </mc:Choice>
-        <mc:Fallback>
+        <mc:Fallback xmlns="">
           <p:sp>
             <p:nvSpPr>
               <p:cNvPr id="19" name="矩形 18">
@@ -4709,8 +4709,8 @@
           </p:sp>
         </mc:Fallback>
       </mc:AlternateContent>
-      <mc:AlternateContent xmlns:mc="http://schemas.openxmlformats.org/markup-compatibility/2006">
-        <mc:Choice xmlns:a14="http://schemas.microsoft.com/office/drawing/2010/main" Requires="a14">
+      <mc:AlternateContent xmlns:mc="http://schemas.openxmlformats.org/markup-compatibility/2006" xmlns:a14="http://schemas.microsoft.com/office/drawing/2010/main">
+        <mc:Choice Requires="a14">
           <p:sp>
             <p:nvSpPr>
               <p:cNvPr id="20" name="矩形 19">
@@ -4777,7 +4777,7 @@
             </p:txBody>
           </p:sp>
         </mc:Choice>
-        <mc:Fallback>
+        <mc:Fallback xmlns="">
           <p:sp>
             <p:nvSpPr>
               <p:cNvPr id="20" name="矩形 19">
@@ -5141,8 +5141,8 @@
           </a:prstGeom>
         </p:spPr>
       </p:pic>
-      <mc:AlternateContent xmlns:mc="http://schemas.openxmlformats.org/markup-compatibility/2006">
-        <mc:Choice xmlns:a14="http://schemas.microsoft.com/office/drawing/2010/main" Requires="a14">
+      <mc:AlternateContent xmlns:mc="http://schemas.openxmlformats.org/markup-compatibility/2006" xmlns:a14="http://schemas.microsoft.com/office/drawing/2010/main">
+        <mc:Choice Requires="a14">
           <p:sp>
             <p:nvSpPr>
               <p:cNvPr id="8" name="矩形 7">
@@ -5328,7 +5328,7 @@
             </p:txBody>
           </p:sp>
         </mc:Choice>
-        <mc:Fallback>
+        <mc:Fallback xmlns="">
           <p:sp>
             <p:nvSpPr>
               <p:cNvPr id="8" name="矩形 7">
@@ -5373,8 +5373,8 @@
           </p:sp>
         </mc:Fallback>
       </mc:AlternateContent>
-      <mc:AlternateContent xmlns:mc="http://schemas.openxmlformats.org/markup-compatibility/2006">
-        <mc:Choice xmlns:a14="http://schemas.microsoft.com/office/drawing/2010/main" Requires="a14">
+      <mc:AlternateContent xmlns:mc="http://schemas.openxmlformats.org/markup-compatibility/2006" xmlns:a14="http://schemas.microsoft.com/office/drawing/2010/main">
+        <mc:Choice Requires="a14">
           <p:sp>
             <p:nvSpPr>
               <p:cNvPr id="18" name="矩形 17">
@@ -5656,7 +5656,7 @@
             </p:txBody>
           </p:sp>
         </mc:Choice>
-        <mc:Fallback>
+        <mc:Fallback xmlns="">
           <p:sp>
             <p:nvSpPr>
               <p:cNvPr id="18" name="矩形 17">
@@ -5701,8 +5701,8 @@
           </p:sp>
         </mc:Fallback>
       </mc:AlternateContent>
-      <mc:AlternateContent xmlns:mc="http://schemas.openxmlformats.org/markup-compatibility/2006">
-        <mc:Choice xmlns:a14="http://schemas.microsoft.com/office/drawing/2010/main" Requires="a14">
+      <mc:AlternateContent xmlns:mc="http://schemas.openxmlformats.org/markup-compatibility/2006" xmlns:a14="http://schemas.microsoft.com/office/drawing/2010/main">
+        <mc:Choice Requires="a14">
           <p:sp>
             <p:nvSpPr>
               <p:cNvPr id="19" name="矩形 18">
@@ -5763,7 +5763,7 @@
             </p:txBody>
           </p:sp>
         </mc:Choice>
-        <mc:Fallback>
+        <mc:Fallback xmlns="">
           <p:sp>
             <p:nvSpPr>
               <p:cNvPr id="19" name="矩形 18">
@@ -5808,8 +5808,8 @@
           </p:sp>
         </mc:Fallback>
       </mc:AlternateContent>
-      <mc:AlternateContent xmlns:mc="http://schemas.openxmlformats.org/markup-compatibility/2006">
-        <mc:Choice xmlns:a14="http://schemas.microsoft.com/office/drawing/2010/main" Requires="a14">
+      <mc:AlternateContent xmlns:mc="http://schemas.openxmlformats.org/markup-compatibility/2006" xmlns:a14="http://schemas.microsoft.com/office/drawing/2010/main">
+        <mc:Choice Requires="a14">
           <p:sp>
             <p:nvSpPr>
               <p:cNvPr id="20" name="矩形 19">
@@ -5876,7 +5876,7 @@
             </p:txBody>
           </p:sp>
         </mc:Choice>
-        <mc:Fallback>
+        <mc:Fallback xmlns="">
           <p:sp>
             <p:nvSpPr>
               <p:cNvPr id="20" name="矩形 19">
@@ -6305,8 +6305,8 @@
             </a:prstGeom>
           </p:spPr>
         </p:pic>
-        <mc:AlternateContent xmlns:mc="http://schemas.openxmlformats.org/markup-compatibility/2006">
-          <mc:Choice xmlns:a14="http://schemas.microsoft.com/office/drawing/2010/main" Requires="a14">
+        <mc:AlternateContent xmlns:mc="http://schemas.openxmlformats.org/markup-compatibility/2006" xmlns:a14="http://schemas.microsoft.com/office/drawing/2010/main">
+          <mc:Choice Requires="a14">
             <p:sp>
               <p:nvSpPr>
                 <p:cNvPr id="37" name="矩形 36">
@@ -6462,7 +6462,7 @@
               </p:txBody>
             </p:sp>
           </mc:Choice>
-          <mc:Fallback>
+          <mc:Fallback xmlns="">
             <p:sp>
               <p:nvSpPr>
                 <p:cNvPr id="37" name="矩形 36">
@@ -6507,8 +6507,8 @@
             </p:sp>
           </mc:Fallback>
         </mc:AlternateContent>
-        <mc:AlternateContent xmlns:mc="http://schemas.openxmlformats.org/markup-compatibility/2006">
-          <mc:Choice xmlns:a14="http://schemas.microsoft.com/office/drawing/2010/main" Requires="a14">
+        <mc:AlternateContent xmlns:mc="http://schemas.openxmlformats.org/markup-compatibility/2006" xmlns:a14="http://schemas.microsoft.com/office/drawing/2010/main">
+          <mc:Choice Requires="a14">
             <p:sp>
               <p:nvSpPr>
                 <p:cNvPr id="38" name="矩形 37">
@@ -6576,7 +6576,7 @@
               </p:txBody>
             </p:sp>
           </mc:Choice>
-          <mc:Fallback>
+          <mc:Fallback xmlns="">
             <p:sp>
               <p:nvSpPr>
                 <p:cNvPr id="38" name="矩形 37">
@@ -6709,8 +6709,8 @@
             </a:fontRef>
           </p:style>
         </p:cxnSp>
-        <mc:AlternateContent xmlns:mc="http://schemas.openxmlformats.org/markup-compatibility/2006">
-          <mc:Choice xmlns:a14="http://schemas.microsoft.com/office/drawing/2010/main" Requires="a14">
+        <mc:AlternateContent xmlns:mc="http://schemas.openxmlformats.org/markup-compatibility/2006" xmlns:a14="http://schemas.microsoft.com/office/drawing/2010/main">
+          <mc:Choice Requires="a14">
             <p:sp>
               <p:nvSpPr>
                 <p:cNvPr id="41" name="矩形 40">
@@ -6759,7 +6759,7 @@
               </p:txBody>
             </p:sp>
           </mc:Choice>
-          <mc:Fallback>
+          <mc:Fallback xmlns="">
             <p:sp>
               <p:nvSpPr>
                 <p:cNvPr id="41" name="矩形 40">
@@ -6804,8 +6804,8 @@
             </p:sp>
           </mc:Fallback>
         </mc:AlternateContent>
-        <mc:AlternateContent xmlns:mc="http://schemas.openxmlformats.org/markup-compatibility/2006">
-          <mc:Choice xmlns:a14="http://schemas.microsoft.com/office/drawing/2010/main" Requires="a14">
+        <mc:AlternateContent xmlns:mc="http://schemas.openxmlformats.org/markup-compatibility/2006" xmlns:a14="http://schemas.microsoft.com/office/drawing/2010/main">
+          <mc:Choice Requires="a14">
             <p:sp>
               <p:nvSpPr>
                 <p:cNvPr id="42" name="矩形 41">
@@ -6854,7 +6854,7 @@
               </p:txBody>
             </p:sp>
           </mc:Choice>
-          <mc:Fallback>
+          <mc:Fallback xmlns="">
             <p:sp>
               <p:nvSpPr>
                 <p:cNvPr id="42" name="矩形 41">
@@ -6899,8 +6899,8 @@
             </p:sp>
           </mc:Fallback>
         </mc:AlternateContent>
-        <mc:AlternateContent xmlns:mc="http://schemas.openxmlformats.org/markup-compatibility/2006">
-          <mc:Choice xmlns:a14="http://schemas.microsoft.com/office/drawing/2010/main" Requires="a14">
+        <mc:AlternateContent xmlns:mc="http://schemas.openxmlformats.org/markup-compatibility/2006" xmlns:a14="http://schemas.microsoft.com/office/drawing/2010/main">
+          <mc:Choice Requires="a14">
             <p:sp>
               <p:nvSpPr>
                 <p:cNvPr id="43" name="矩形 42">
@@ -7083,7 +7083,7 @@
               </p:txBody>
             </p:sp>
           </mc:Choice>
-          <mc:Fallback>
+          <mc:Fallback xmlns="">
             <p:sp>
               <p:nvSpPr>
                 <p:cNvPr id="43" name="矩形 42">
@@ -7128,8 +7128,8 @@
             </p:sp>
           </mc:Fallback>
         </mc:AlternateContent>
-        <mc:AlternateContent xmlns:mc="http://schemas.openxmlformats.org/markup-compatibility/2006">
-          <mc:Choice xmlns:a14="http://schemas.microsoft.com/office/drawing/2010/main" Requires="a14">
+        <mc:AlternateContent xmlns:mc="http://schemas.openxmlformats.org/markup-compatibility/2006" xmlns:a14="http://schemas.microsoft.com/office/drawing/2010/main">
+          <mc:Choice Requires="a14">
             <p:sp>
               <p:nvSpPr>
                 <p:cNvPr id="44" name="矩形 43">
@@ -7190,7 +7190,7 @@
               </p:txBody>
             </p:sp>
           </mc:Choice>
-          <mc:Fallback>
+          <mc:Fallback xmlns="">
             <p:sp>
               <p:nvSpPr>
                 <p:cNvPr id="44" name="矩形 43">
@@ -7235,8 +7235,8 @@
             </p:sp>
           </mc:Fallback>
         </mc:AlternateContent>
-        <mc:AlternateContent xmlns:mc="http://schemas.openxmlformats.org/markup-compatibility/2006">
-          <mc:Choice xmlns:a14="http://schemas.microsoft.com/office/drawing/2010/main" Requires="a14">
+        <mc:AlternateContent xmlns:mc="http://schemas.openxmlformats.org/markup-compatibility/2006" xmlns:a14="http://schemas.microsoft.com/office/drawing/2010/main">
+          <mc:Choice Requires="a14">
             <p:sp>
               <p:nvSpPr>
                 <p:cNvPr id="45" name="矩形 44">
@@ -7303,7 +7303,7 @@
               </p:txBody>
             </p:sp>
           </mc:Choice>
-          <mc:Fallback>
+          <mc:Fallback xmlns="">
             <p:sp>
               <p:nvSpPr>
                 <p:cNvPr id="45" name="矩形 44">
@@ -7393,8 +7393,8 @@
             </a:prstGeom>
           </p:spPr>
         </p:pic>
-        <mc:AlternateContent xmlns:mc="http://schemas.openxmlformats.org/markup-compatibility/2006">
-          <mc:Choice xmlns:a14="http://schemas.microsoft.com/office/drawing/2010/main" Requires="a14">
+        <mc:AlternateContent xmlns:mc="http://schemas.openxmlformats.org/markup-compatibility/2006" xmlns:a14="http://schemas.microsoft.com/office/drawing/2010/main">
+          <mc:Choice Requires="a14">
             <p:sp>
               <p:nvSpPr>
                 <p:cNvPr id="47" name="文字方塊 46">
@@ -7469,7 +7469,7 @@
               </p:txBody>
             </p:sp>
           </mc:Choice>
-          <mc:Fallback>
+          <mc:Fallback xmlns="">
             <p:sp>
               <p:nvSpPr>
                 <p:cNvPr id="47" name="文字方塊 46">
@@ -7908,8 +7908,8 @@
             </mc:Fallback>
           </mc:AlternateContent>
         </p:grpSp>
-        <mc:AlternateContent xmlns:mc="http://schemas.openxmlformats.org/markup-compatibility/2006">
-          <mc:Choice xmlns:a14="http://schemas.microsoft.com/office/drawing/2010/main" Requires="a14">
+        <mc:AlternateContent xmlns:mc="http://schemas.openxmlformats.org/markup-compatibility/2006" xmlns:a14="http://schemas.microsoft.com/office/drawing/2010/main">
+          <mc:Choice Requires="a14">
             <p:sp>
               <p:nvSpPr>
                 <p:cNvPr id="49" name="矩形: 圓角 48">
@@ -8032,7 +8032,7 @@
               </p:txBody>
             </p:sp>
           </mc:Choice>
-          <mc:Fallback>
+          <mc:Fallback xmlns="">
             <p:sp>
               <p:nvSpPr>
                 <p:cNvPr id="49" name="矩形: 圓角 48">
@@ -8270,8 +8270,8 @@
             </a:p>
           </p:txBody>
         </p:sp>
-        <mc:AlternateContent xmlns:mc="http://schemas.openxmlformats.org/markup-compatibility/2006">
-          <mc:Choice xmlns:a14="http://schemas.microsoft.com/office/drawing/2010/main" Requires="a14">
+        <mc:AlternateContent xmlns:mc="http://schemas.openxmlformats.org/markup-compatibility/2006" xmlns:a14="http://schemas.microsoft.com/office/drawing/2010/main">
+          <mc:Choice Requires="a14">
             <p:sp>
               <p:nvSpPr>
                 <p:cNvPr id="37" name="矩形 36">
@@ -8427,7 +8427,7 @@
               </p:txBody>
             </p:sp>
           </mc:Choice>
-          <mc:Fallback>
+          <mc:Fallback xmlns="">
             <p:sp>
               <p:nvSpPr>
                 <p:cNvPr id="37" name="矩形 36">
@@ -8472,8 +8472,8 @@
             </p:sp>
           </mc:Fallback>
         </mc:AlternateContent>
-        <mc:AlternateContent xmlns:mc="http://schemas.openxmlformats.org/markup-compatibility/2006">
-          <mc:Choice xmlns:a14="http://schemas.microsoft.com/office/drawing/2010/main" Requires="a14">
+        <mc:AlternateContent xmlns:mc="http://schemas.openxmlformats.org/markup-compatibility/2006" xmlns:a14="http://schemas.microsoft.com/office/drawing/2010/main">
+          <mc:Choice Requires="a14">
             <p:sp>
               <p:nvSpPr>
                 <p:cNvPr id="43" name="矩形 42">
@@ -8656,7 +8656,7 @@
               </p:txBody>
             </p:sp>
           </mc:Choice>
-          <mc:Fallback>
+          <mc:Fallback xmlns="">
             <p:sp>
               <p:nvSpPr>
                 <p:cNvPr id="43" name="矩形 42">
@@ -8701,8 +8701,8 @@
             </p:sp>
           </mc:Fallback>
         </mc:AlternateContent>
-        <mc:AlternateContent xmlns:mc="http://schemas.openxmlformats.org/markup-compatibility/2006">
-          <mc:Choice xmlns:a14="http://schemas.microsoft.com/office/drawing/2010/main" Requires="a14">
+        <mc:AlternateContent xmlns:mc="http://schemas.openxmlformats.org/markup-compatibility/2006" xmlns:a14="http://schemas.microsoft.com/office/drawing/2010/main">
+          <mc:Choice Requires="a14">
             <p:sp>
               <p:nvSpPr>
                 <p:cNvPr id="44" name="矩形 43">
@@ -8763,7 +8763,7 @@
               </p:txBody>
             </p:sp>
           </mc:Choice>
-          <mc:Fallback>
+          <mc:Fallback xmlns="">
             <p:sp>
               <p:nvSpPr>
                 <p:cNvPr id="44" name="矩形 43">
@@ -8808,8 +8808,8 @@
             </p:sp>
           </mc:Fallback>
         </mc:AlternateContent>
-        <mc:AlternateContent xmlns:mc="http://schemas.openxmlformats.org/markup-compatibility/2006">
-          <mc:Choice xmlns:a14="http://schemas.microsoft.com/office/drawing/2010/main" Requires="a14">
+        <mc:AlternateContent xmlns:mc="http://schemas.openxmlformats.org/markup-compatibility/2006" xmlns:a14="http://schemas.microsoft.com/office/drawing/2010/main">
+          <mc:Choice Requires="a14">
             <p:sp>
               <p:nvSpPr>
                 <p:cNvPr id="45" name="矩形 44">
@@ -8876,7 +8876,7 @@
               </p:txBody>
             </p:sp>
           </mc:Choice>
-          <mc:Fallback>
+          <mc:Fallback xmlns="">
             <p:sp>
               <p:nvSpPr>
                 <p:cNvPr id="45" name="矩形 44">
@@ -8921,8 +8921,8 @@
             </p:sp>
           </mc:Fallback>
         </mc:AlternateContent>
-        <mc:AlternateContent xmlns:mc="http://schemas.openxmlformats.org/markup-compatibility/2006">
-          <mc:Choice xmlns:a14="http://schemas.microsoft.com/office/drawing/2010/main" Requires="a14">
+        <mc:AlternateContent xmlns:mc="http://schemas.openxmlformats.org/markup-compatibility/2006" xmlns:a14="http://schemas.microsoft.com/office/drawing/2010/main">
+          <mc:Choice Requires="a14">
             <p:sp>
               <p:nvSpPr>
                 <p:cNvPr id="49" name="矩形: 圓角 48">
@@ -9045,7 +9045,7 @@
               </p:txBody>
             </p:sp>
           </mc:Choice>
-          <mc:Fallback>
+          <mc:Fallback xmlns="">
             <p:sp>
               <p:nvSpPr>
                 <p:cNvPr id="49" name="矩形: 圓角 48">
@@ -9418,8 +9418,8 @@
             </a:p>
           </p:txBody>
         </p:sp>
-        <mc:AlternateContent xmlns:mc="http://schemas.openxmlformats.org/markup-compatibility/2006">
-          <mc:Choice xmlns:a14="http://schemas.microsoft.com/office/drawing/2010/main" Requires="a14">
+        <mc:AlternateContent xmlns:mc="http://schemas.openxmlformats.org/markup-compatibility/2006" xmlns:a14="http://schemas.microsoft.com/office/drawing/2010/main">
+          <mc:Choice Requires="a14">
             <p:sp>
               <p:nvSpPr>
                 <p:cNvPr id="37" name="矩形 36">
@@ -9605,7 +9605,7 @@
               </p:txBody>
             </p:sp>
           </mc:Choice>
-          <mc:Fallback>
+          <mc:Fallback xmlns="">
             <p:sp>
               <p:nvSpPr>
                 <p:cNvPr id="37" name="矩形 36">
@@ -9650,8 +9650,8 @@
             </p:sp>
           </mc:Fallback>
         </mc:AlternateContent>
-        <mc:AlternateContent xmlns:mc="http://schemas.openxmlformats.org/markup-compatibility/2006">
-          <mc:Choice xmlns:a14="http://schemas.microsoft.com/office/drawing/2010/main" Requires="a14">
+        <mc:AlternateContent xmlns:mc="http://schemas.openxmlformats.org/markup-compatibility/2006" xmlns:a14="http://schemas.microsoft.com/office/drawing/2010/main">
+          <mc:Choice Requires="a14">
             <p:sp>
               <p:nvSpPr>
                 <p:cNvPr id="43" name="矩形 42">
@@ -9864,7 +9864,7 @@
               </p:txBody>
             </p:sp>
           </mc:Choice>
-          <mc:Fallback>
+          <mc:Fallback xmlns="">
             <p:sp>
               <p:nvSpPr>
                 <p:cNvPr id="43" name="矩形 42">
@@ -9909,8 +9909,8 @@
             </p:sp>
           </mc:Fallback>
         </mc:AlternateContent>
-        <mc:AlternateContent xmlns:mc="http://schemas.openxmlformats.org/markup-compatibility/2006">
-          <mc:Choice xmlns:a14="http://schemas.microsoft.com/office/drawing/2010/main" Requires="a14">
+        <mc:AlternateContent xmlns:mc="http://schemas.openxmlformats.org/markup-compatibility/2006" xmlns:a14="http://schemas.microsoft.com/office/drawing/2010/main">
+          <mc:Choice Requires="a14">
             <p:sp>
               <p:nvSpPr>
                 <p:cNvPr id="44" name="矩形 43">
@@ -9971,7 +9971,7 @@
               </p:txBody>
             </p:sp>
           </mc:Choice>
-          <mc:Fallback>
+          <mc:Fallback xmlns="">
             <p:sp>
               <p:nvSpPr>
                 <p:cNvPr id="44" name="矩形 43">
@@ -10016,8 +10016,8 @@
             </p:sp>
           </mc:Fallback>
         </mc:AlternateContent>
-        <mc:AlternateContent xmlns:mc="http://schemas.openxmlformats.org/markup-compatibility/2006">
-          <mc:Choice xmlns:a14="http://schemas.microsoft.com/office/drawing/2010/main" Requires="a14">
+        <mc:AlternateContent xmlns:mc="http://schemas.openxmlformats.org/markup-compatibility/2006" xmlns:a14="http://schemas.microsoft.com/office/drawing/2010/main">
+          <mc:Choice Requires="a14">
             <p:sp>
               <p:nvSpPr>
                 <p:cNvPr id="45" name="矩形 44">
@@ -10084,7 +10084,7 @@
               </p:txBody>
             </p:sp>
           </mc:Choice>
-          <mc:Fallback>
+          <mc:Fallback xmlns="">
             <p:sp>
               <p:nvSpPr>
                 <p:cNvPr id="45" name="矩形 44">
@@ -10129,8 +10129,8 @@
             </p:sp>
           </mc:Fallback>
         </mc:AlternateContent>
-        <mc:AlternateContent xmlns:mc="http://schemas.openxmlformats.org/markup-compatibility/2006">
-          <mc:Choice xmlns:a14="http://schemas.microsoft.com/office/drawing/2010/main" Requires="a14">
+        <mc:AlternateContent xmlns:mc="http://schemas.openxmlformats.org/markup-compatibility/2006" xmlns:a14="http://schemas.microsoft.com/office/drawing/2010/main">
+          <mc:Choice Requires="a14">
             <p:sp>
               <p:nvSpPr>
                 <p:cNvPr id="49" name="矩形: 圓角 48">
@@ -10298,7 +10298,7 @@
               </p:txBody>
             </p:sp>
           </mc:Choice>
-          <mc:Fallback>
+          <mc:Fallback xmlns="">
             <p:sp>
               <p:nvSpPr>
                 <p:cNvPr id="49" name="矩形: 圓角 48">
@@ -10710,8 +10710,8 @@
           </a:p>
         </p:txBody>
       </p:sp>
-      <mc:AlternateContent xmlns:mc="http://schemas.openxmlformats.org/markup-compatibility/2006">
-        <mc:Choice xmlns:a14="http://schemas.microsoft.com/office/drawing/2010/main" Requires="a14">
+      <mc:AlternateContent xmlns:mc="http://schemas.openxmlformats.org/markup-compatibility/2006" xmlns:a14="http://schemas.microsoft.com/office/drawing/2010/main">
+        <mc:Choice Requires="a14">
           <p:sp>
             <p:nvSpPr>
               <p:cNvPr id="37" name="矩形 36">
@@ -10867,7 +10867,7 @@
             </p:txBody>
           </p:sp>
         </mc:Choice>
-        <mc:Fallback>
+        <mc:Fallback xmlns="">
           <p:sp>
             <p:nvSpPr>
               <p:cNvPr id="37" name="矩形 36">
@@ -10912,8 +10912,8 @@
           </p:sp>
         </mc:Fallback>
       </mc:AlternateContent>
-      <mc:AlternateContent xmlns:mc="http://schemas.openxmlformats.org/markup-compatibility/2006">
-        <mc:Choice xmlns:a14="http://schemas.microsoft.com/office/drawing/2010/main" Requires="a14">
+      <mc:AlternateContent xmlns:mc="http://schemas.openxmlformats.org/markup-compatibility/2006" xmlns:a14="http://schemas.microsoft.com/office/drawing/2010/main">
+        <mc:Choice Requires="a14">
           <p:sp>
             <p:nvSpPr>
               <p:cNvPr id="43" name="矩形 42">
@@ -11096,7 +11096,7 @@
             </p:txBody>
           </p:sp>
         </mc:Choice>
-        <mc:Fallback>
+        <mc:Fallback xmlns="">
           <p:sp>
             <p:nvSpPr>
               <p:cNvPr id="43" name="矩形 42">
@@ -11141,8 +11141,8 @@
           </p:sp>
         </mc:Fallback>
       </mc:AlternateContent>
-      <mc:AlternateContent xmlns:mc="http://schemas.openxmlformats.org/markup-compatibility/2006">
-        <mc:Choice xmlns:a14="http://schemas.microsoft.com/office/drawing/2010/main" Requires="a14">
+      <mc:AlternateContent xmlns:mc="http://schemas.openxmlformats.org/markup-compatibility/2006" xmlns:a14="http://schemas.microsoft.com/office/drawing/2010/main">
+        <mc:Choice Requires="a14">
           <p:sp>
             <p:nvSpPr>
               <p:cNvPr id="44" name="矩形 43">
@@ -11203,7 +11203,7 @@
             </p:txBody>
           </p:sp>
         </mc:Choice>
-        <mc:Fallback>
+        <mc:Fallback xmlns="">
           <p:sp>
             <p:nvSpPr>
               <p:cNvPr id="44" name="矩形 43">
@@ -11248,8 +11248,8 @@
           </p:sp>
         </mc:Fallback>
       </mc:AlternateContent>
-      <mc:AlternateContent xmlns:mc="http://schemas.openxmlformats.org/markup-compatibility/2006">
-        <mc:Choice xmlns:a14="http://schemas.microsoft.com/office/drawing/2010/main" Requires="a14">
+      <mc:AlternateContent xmlns:mc="http://schemas.openxmlformats.org/markup-compatibility/2006" xmlns:a14="http://schemas.microsoft.com/office/drawing/2010/main">
+        <mc:Choice Requires="a14">
           <p:sp>
             <p:nvSpPr>
               <p:cNvPr id="45" name="矩形 44">
@@ -11316,7 +11316,7 @@
             </p:txBody>
           </p:sp>
         </mc:Choice>
-        <mc:Fallback>
+        <mc:Fallback xmlns="">
           <p:sp>
             <p:nvSpPr>
               <p:cNvPr id="45" name="矩形 44">
@@ -11361,8 +11361,8 @@
           </p:sp>
         </mc:Fallback>
       </mc:AlternateContent>
-      <mc:AlternateContent xmlns:mc="http://schemas.openxmlformats.org/markup-compatibility/2006">
-        <mc:Choice xmlns:a14="http://schemas.microsoft.com/office/drawing/2010/main" Requires="a14">
+      <mc:AlternateContent xmlns:mc="http://schemas.openxmlformats.org/markup-compatibility/2006" xmlns:a14="http://schemas.microsoft.com/office/drawing/2010/main">
+        <mc:Choice Requires="a14">
           <p:sp>
             <p:nvSpPr>
               <p:cNvPr id="49" name="矩形: 圓角 48">
@@ -11530,7 +11530,7 @@
             </p:txBody>
           </p:sp>
         </mc:Choice>
-        <mc:Fallback>
+        <mc:Fallback xmlns="">
           <p:sp>
             <p:nvSpPr>
               <p:cNvPr id="49" name="矩形: 圓角 48">
@@ -11885,8 +11885,8 @@
         </p:nvSpPr>
         <p:spPr>
           <a:xfrm>
-            <a:off x="842076" y="1782008"/>
-            <a:ext cx="3932177" cy="3340786"/>
+            <a:off x="892876" y="1882264"/>
+            <a:ext cx="3932177" cy="3240529"/>
           </a:xfrm>
           <a:prstGeom prst="roundRect">
             <a:avLst>
@@ -12047,7 +12047,7 @@
             </p:nvSpPr>
             <p:spPr>
               <a:xfrm>
-                <a:off x="1357999" y="1258082"/>
+                <a:off x="1357999" y="1352357"/>
                 <a:ext cx="1070998" cy="555152"/>
               </a:xfrm>
               <a:prstGeom prst="rect">
@@ -12205,7 +12205,7 @@
             </p:nvSpPr>
             <p:spPr>
               <a:xfrm>
-                <a:off x="1357999" y="1258082"/>
+                <a:off x="1357999" y="1352357"/>
                 <a:ext cx="1070998" cy="555152"/>
               </a:xfrm>
               <a:prstGeom prst="rect">
@@ -12233,8 +12233,8 @@
           </p:sp>
         </mc:Fallback>
       </mc:AlternateContent>
-      <mc:AlternateContent xmlns:mc="http://schemas.openxmlformats.org/markup-compatibility/2006">
-        <mc:Choice xmlns:a14="http://schemas.microsoft.com/office/drawing/2010/main" Requires="a14">
+      <mc:AlternateContent xmlns:mc="http://schemas.openxmlformats.org/markup-compatibility/2006" xmlns:a14="http://schemas.microsoft.com/office/drawing/2010/main">
+        <mc:Choice Requires="a14">
           <p:sp>
             <p:nvSpPr>
               <p:cNvPr id="66" name="矩形 65">
@@ -12302,7 +12302,7 @@
             </p:txBody>
           </p:sp>
         </mc:Choice>
-        <mc:Fallback>
+        <mc:Fallback xmlns="">
           <p:sp>
             <p:nvSpPr>
               <p:cNvPr id="66" name="矩形 65">
@@ -12435,8 +12435,8 @@
           </a:fontRef>
         </p:style>
       </p:cxnSp>
-      <mc:AlternateContent xmlns:mc="http://schemas.openxmlformats.org/markup-compatibility/2006">
-        <mc:Choice xmlns:a14="http://schemas.microsoft.com/office/drawing/2010/main" Requires="a14">
+      <mc:AlternateContent xmlns:mc="http://schemas.openxmlformats.org/markup-compatibility/2006" xmlns:a14="http://schemas.microsoft.com/office/drawing/2010/main">
+        <mc:Choice Requires="a14">
           <p:sp>
             <p:nvSpPr>
               <p:cNvPr id="69" name="矩形 68">
@@ -12485,7 +12485,7 @@
             </p:txBody>
           </p:sp>
         </mc:Choice>
-        <mc:Fallback>
+        <mc:Fallback xmlns="">
           <p:sp>
             <p:nvSpPr>
               <p:cNvPr id="69" name="矩形 68">
@@ -12530,8 +12530,8 @@
           </p:sp>
         </mc:Fallback>
       </mc:AlternateContent>
-      <mc:AlternateContent xmlns:mc="http://schemas.openxmlformats.org/markup-compatibility/2006">
-        <mc:Choice xmlns:a14="http://schemas.microsoft.com/office/drawing/2010/main" Requires="a14">
+      <mc:AlternateContent xmlns:mc="http://schemas.openxmlformats.org/markup-compatibility/2006" xmlns:a14="http://schemas.microsoft.com/office/drawing/2010/main">
+        <mc:Choice Requires="a14">
           <p:sp>
             <p:nvSpPr>
               <p:cNvPr id="70" name="矩形 69">
@@ -12580,7 +12580,7 @@
             </p:txBody>
           </p:sp>
         </mc:Choice>
-        <mc:Fallback>
+        <mc:Fallback xmlns="">
           <p:sp>
             <p:nvSpPr>
               <p:cNvPr id="70" name="矩形 69">
@@ -12641,8 +12641,8 @@
             </p:nvSpPr>
             <p:spPr>
               <a:xfrm>
-                <a:off x="2878440" y="1264808"/>
-                <a:ext cx="2148409" cy="528030"/>
+                <a:off x="3017747" y="1218731"/>
+                <a:ext cx="1803699" cy="688778"/>
               </a:xfrm>
               <a:prstGeom prst="rect">
                 <a:avLst/>
@@ -12664,7 +12664,7 @@
                       <m:sSup>
                         <m:sSupPr>
                           <m:ctrlPr>
-                            <a:rPr lang="en-US" altLang="zh-TW" sz="2000" i="1" dirty="0">
+                            <a:rPr lang="en-US" altLang="zh-TW" sz="1600" i="1" dirty="0" smtClean="0">
                               <a:latin typeface="Cambria Math" panose="02040503050406030204" pitchFamily="18" charset="0"/>
                               <a:ea typeface="Cambria Math" panose="02040503050406030204" pitchFamily="18" charset="0"/>
                             </a:rPr>
@@ -12676,124 +12676,188 @@
                               <m:begChr m:val="|"/>
                               <m:endChr m:val="|"/>
                               <m:ctrlPr>
-                                <a:rPr lang="en-US" altLang="zh-TW" sz="2000" i="1" dirty="0">
+                                <a:rPr lang="en-US" altLang="zh-TW" sz="1600" i="1" dirty="0">
                                   <a:latin typeface="Cambria Math" panose="02040503050406030204" pitchFamily="18" charset="0"/>
                                   <a:ea typeface="Cambria Math" panose="02040503050406030204" pitchFamily="18" charset="0"/>
                                 </a:rPr>
                               </m:ctrlPr>
                             </m:dPr>
                             <m:e>
-                              <m:sSubSup>
-                                <m:sSubSupPr>
+                              <m:nary>
+                                <m:naryPr>
+                                  <m:chr m:val="∑"/>
+                                  <m:limLoc m:val="subSup"/>
+                                  <m:supHide m:val="on"/>
                                   <m:ctrlPr>
-                                    <a:rPr lang="en-US" altLang="zh-TW" sz="2000" i="1">
+                                    <a:rPr lang="en-US" altLang="zh-TW" sz="1600" i="1" dirty="0" smtClean="0">
+                                      <a:latin typeface="Cambria Math" panose="02040503050406030204" pitchFamily="18" charset="0"/>
+                                      <a:ea typeface="Cambria Math" panose="02040503050406030204" pitchFamily="18" charset="0"/>
+                                    </a:rPr>
+                                  </m:ctrlPr>
+                                </m:naryPr>
+                                <m:sub>
+                                  <m:r>
+                                    <a:rPr lang="en-US" altLang="zh-TW" sz="1600" b="1" i="1">
                                       <a:latin typeface="Cambria Math" panose="02040503050406030204" pitchFamily="18" charset="0"/>
                                     </a:rPr>
-                                  </m:ctrlPr>
-                                </m:sSubSupPr>
-                                <m:e>
-                                  <m:r>
-                                    <a:rPr lang="en-US" altLang="zh-TW" sz="2000" i="1">
-                                      <a:latin typeface="Cambria Math" panose="02040503050406030204" pitchFamily="18" charset="0"/>
-                                    </a:rPr>
-                                    <m:t>𝑓</m:t>
-                                  </m:r>
-                                </m:e>
-                                <m:sub>
-                                  <m:r>
-                                    <a:rPr lang="en-US" altLang="zh-TW" sz="2000" i="1">
-                                      <a:latin typeface="Cambria Math" panose="02040503050406030204" pitchFamily="18" charset="0"/>
-                                    </a:rPr>
-                                    <m:t>𝑆</m:t>
+                                    <m:t>𝑸</m:t>
                                   </m:r>
                                 </m:sub>
-                                <m:sup>
-                                  <m:acc>
-                                    <m:accPr>
-                                      <m:chr m:val="̂"/>
+                                <m:sup/>
+                                <m:e>
+                                  <m:sSubSup>
+                                    <m:sSubSupPr>
                                       <m:ctrlPr>
-                                        <a:rPr lang="en-US" altLang="zh-TW" sz="2000" b="1" i="1">
+                                        <a:rPr lang="en-US" altLang="zh-TW" sz="1600" i="1">
                                           <a:latin typeface="Cambria Math" panose="02040503050406030204" pitchFamily="18" charset="0"/>
                                         </a:rPr>
                                       </m:ctrlPr>
-                                    </m:accPr>
+                                    </m:sSubSupPr>
                                     <m:e>
+                                      <m:acc>
+                                        <m:accPr>
+                                          <m:chr m:val="̃"/>
+                                          <m:ctrlPr>
+                                            <a:rPr lang="en-US" altLang="zh-TW" sz="1600" i="1">
+                                              <a:latin typeface="Cambria Math" panose="02040503050406030204" pitchFamily="18" charset="0"/>
+                                            </a:rPr>
+                                          </m:ctrlPr>
+                                        </m:accPr>
+                                        <m:e>
+                                          <m:r>
+                                            <a:rPr lang="en-US" altLang="zh-TW" sz="1600" i="1">
+                                              <a:latin typeface="Cambria Math" panose="02040503050406030204" pitchFamily="18" charset="0"/>
+                                            </a:rPr>
+                                            <m:t>𝑀</m:t>
+                                          </m:r>
+                                        </m:e>
+                                      </m:acc>
+                                    </m:e>
+                                    <m:sub>
                                       <m:r>
-                                        <a:rPr lang="zh-TW" altLang="en-US" sz="2000" b="1" i="1">
+                                        <a:rPr lang="en-US" altLang="zh-TW" sz="1600" i="1">
                                           <a:latin typeface="Cambria Math" panose="02040503050406030204" pitchFamily="18" charset="0"/>
                                         </a:rPr>
-                                        <m:t>𝜺</m:t>
+                                        <m:t>𝑆</m:t>
                                       </m:r>
-                                    </m:e>
-                                  </m:acc>
-                                  <m:r>
-                                    <a:rPr lang="en-US" altLang="zh-TW" sz="2000" i="1">
+                                      <m:r>
+                                        <a:rPr lang="en-US" altLang="zh-TW" sz="1600" i="1">
+                                          <a:latin typeface="Cambria Math" panose="02040503050406030204" pitchFamily="18" charset="0"/>
+                                        </a:rPr>
+                                        <m:t>,</m:t>
+                                      </m:r>
+                                      <m:r>
+                                        <a:rPr lang="en-US" altLang="zh-TW" sz="1600" b="1" i="1">
+                                          <a:latin typeface="Cambria Math" panose="02040503050406030204" pitchFamily="18" charset="0"/>
+                                        </a:rPr>
+                                        <m:t>𝑸</m:t>
+                                      </m:r>
+                                    </m:sub>
+                                    <m:sup>
+                                      <m:acc>
+                                        <m:accPr>
+                                          <m:chr m:val="̂"/>
+                                          <m:ctrlPr>
+                                            <a:rPr lang="en-US" altLang="zh-TW" sz="1600" b="1" i="1">
+                                              <a:latin typeface="Cambria Math" panose="02040503050406030204" pitchFamily="18" charset="0"/>
+                                            </a:rPr>
+                                          </m:ctrlPr>
+                                        </m:accPr>
+                                        <m:e>
+                                          <m:r>
+                                            <a:rPr lang="zh-TW" altLang="en-US" sz="1600" b="1" i="1">
+                                              <a:latin typeface="Cambria Math" panose="02040503050406030204" pitchFamily="18" charset="0"/>
+                                            </a:rPr>
+                                            <m:t>𝜺</m:t>
+                                          </m:r>
+                                        </m:e>
+                                      </m:acc>
+                                      <m:r>
+                                        <a:rPr lang="en-US" altLang="zh-TW" sz="1600" i="1">
+                                          <a:latin typeface="Cambria Math" panose="02040503050406030204" pitchFamily="18" charset="0"/>
+                                        </a:rPr>
+                                        <m:t>,0</m:t>
+                                      </m:r>
+                                    </m:sup>
+                                  </m:sSubSup>
+                                </m:e>
+                              </m:nary>
+                              <m:sSup>
+                                <m:sSupPr>
+                                  <m:ctrlPr>
+                                    <a:rPr lang="en-US" altLang="zh-TW" sz="1600" b="0" i="1" dirty="0" smtClean="0">
                                       <a:latin typeface="Cambria Math" panose="02040503050406030204" pitchFamily="18" charset="0"/>
-                                    </a:rPr>
-                                    <m:t>,0</m:t>
-                                  </m:r>
-                                </m:sup>
-                              </m:sSubSup>
-                              <m:d>
-                                <m:dPr>
-                                  <m:ctrlPr>
-                                    <a:rPr lang="en-US" altLang="zh-TW" sz="2000" i="1">
-                                      <a:latin typeface="Cambria Math" panose="02040503050406030204" pitchFamily="18" charset="0"/>
+                                      <a:ea typeface="Cambria Math" panose="02040503050406030204" pitchFamily="18" charset="0"/>
                                     </a:rPr>
                                   </m:ctrlPr>
-                                </m:dPr>
+                                </m:sSupPr>
                                 <m:e>
+                                  <m:r>
+                                    <a:rPr lang="en-US" altLang="zh-TW" sz="1600" b="0" i="1" dirty="0" smtClean="0">
+                                      <a:latin typeface="Cambria Math" panose="02040503050406030204" pitchFamily="18" charset="0"/>
+                                      <a:ea typeface="Cambria Math" panose="02040503050406030204" pitchFamily="18" charset="0"/>
+                                    </a:rPr>
+                                    <m:t>𝑒</m:t>
+                                  </m:r>
+                                </m:e>
+                                <m:sup>
+                                  <m:r>
+                                    <a:rPr lang="en-US" altLang="zh-TW" sz="1600" b="0" i="1" dirty="0" smtClean="0">
+                                      <a:latin typeface="Cambria Math" panose="02040503050406030204" pitchFamily="18" charset="0"/>
+                                      <a:ea typeface="Cambria Math" panose="02040503050406030204" pitchFamily="18" charset="0"/>
+                                    </a:rPr>
+                                    <m:t>𝑖</m:t>
+                                  </m:r>
+                                  <m:r>
+                                    <a:rPr lang="en-US" altLang="zh-TW" sz="1600" b="1" i="1" dirty="0" smtClean="0">
+                                      <a:latin typeface="Cambria Math" panose="02040503050406030204" pitchFamily="18" charset="0"/>
+                                      <a:ea typeface="Cambria Math" panose="02040503050406030204" pitchFamily="18" charset="0"/>
+                                    </a:rPr>
+                                    <m:t>𝑸</m:t>
+                                  </m:r>
+                                  <m:r>
+                                    <a:rPr lang="en-US" altLang="zh-TW" sz="1600" b="0" i="1" dirty="0" smtClean="0">
+                                      <a:latin typeface="Cambria Math" panose="02040503050406030204" pitchFamily="18" charset="0"/>
+                                      <a:ea typeface="Cambria Math" panose="02040503050406030204" pitchFamily="18" charset="0"/>
+                                    </a:rPr>
+                                    <m:t>⋅</m:t>
+                                  </m:r>
                                   <m:sSub>
                                     <m:sSubPr>
                                       <m:ctrlPr>
-                                        <a:rPr lang="en-US" altLang="zh-TW" sz="2000" i="1">
+                                        <a:rPr lang="en-US" altLang="zh-TW" sz="1600" b="0" i="1" dirty="0" smtClean="0">
                                           <a:latin typeface="Cambria Math" panose="02040503050406030204" pitchFamily="18" charset="0"/>
+                                          <a:ea typeface="Cambria Math" panose="02040503050406030204" pitchFamily="18" charset="0"/>
                                         </a:rPr>
                                       </m:ctrlPr>
                                     </m:sSubPr>
                                     <m:e>
                                       <m:r>
-                                        <a:rPr lang="en-US" altLang="zh-TW" sz="2000" b="1" i="1">
+                                        <a:rPr lang="en-US" altLang="zh-TW" sz="1600" b="1" i="1" dirty="0" smtClean="0">
                                           <a:latin typeface="Cambria Math" panose="02040503050406030204" pitchFamily="18" charset="0"/>
+                                          <a:ea typeface="Cambria Math" panose="02040503050406030204" pitchFamily="18" charset="0"/>
                                         </a:rPr>
                                         <m:t>𝑹</m:t>
                                       </m:r>
                                     </m:e>
                                     <m:sub>
                                       <m:r>
-                                        <a:rPr lang="en-US" altLang="zh-TW" sz="2000" i="1">
+                                        <a:rPr lang="en-US" altLang="zh-TW" sz="1600" b="0" i="1" dirty="0" smtClean="0">
                                           <a:latin typeface="Cambria Math" panose="02040503050406030204" pitchFamily="18" charset="0"/>
+                                          <a:ea typeface="Cambria Math" panose="02040503050406030204" pitchFamily="18" charset="0"/>
                                         </a:rPr>
                                         <m:t>𝑐</m:t>
                                       </m:r>
                                     </m:sub>
                                   </m:sSub>
-                                  <m:r>
-                                    <a:rPr lang="en-US" altLang="zh-TW" sz="2000" i="1">
-                                      <a:latin typeface="Cambria Math" panose="02040503050406030204" pitchFamily="18" charset="0"/>
-                                    </a:rPr>
-                                    <m:t>, </m:t>
-                                  </m:r>
-                                  <m:r>
-                                    <a:rPr lang="en-US" altLang="zh-TW" sz="2000" b="1" i="1">
-                                      <a:latin typeface="Cambria Math" panose="02040503050406030204" pitchFamily="18" charset="0"/>
-                                    </a:rPr>
-                                    <m:t>𝒓</m:t>
-                                  </m:r>
-                                  <m:r>
-                                    <a:rPr lang="en-US" altLang="zh-TW" sz="2000" i="1">
-                                      <a:latin typeface="Cambria Math" panose="02040503050406030204" pitchFamily="18" charset="0"/>
-                                    </a:rPr>
-                                    <m:t>=0</m:t>
-                                  </m:r>
-                                </m:e>
-                              </m:d>
+                                </m:sup>
+                              </m:sSup>
                             </m:e>
                           </m:d>
                         </m:e>
                         <m:sup>
                           <m:r>
-                            <a:rPr lang="en-US" altLang="zh-TW" sz="2000" i="1" dirty="0">
+                            <a:rPr lang="en-US" altLang="zh-TW" sz="1600" i="1" dirty="0">
                               <a:latin typeface="Cambria Math" panose="02040503050406030204" pitchFamily="18" charset="0"/>
                               <a:ea typeface="Cambria Math" panose="02040503050406030204" pitchFamily="18" charset="0"/>
                             </a:rPr>
@@ -12804,7 +12868,7 @@
                     </m:oMath>
                   </m:oMathPara>
                 </a14:m>
-                <a:endParaRPr lang="zh-TW" altLang="en-US" sz="2000" dirty="0"/>
+                <a:endParaRPr lang="zh-TW" altLang="en-US" sz="1600" dirty="0"/>
               </a:p>
             </p:txBody>
           </p:sp>
@@ -12826,8 +12890,8 @@
             </p:nvSpPr>
             <p:spPr>
               <a:xfrm>
-                <a:off x="2878440" y="1264808"/>
-                <a:ext cx="2148409" cy="528030"/>
+                <a:off x="3017747" y="1218731"/>
+                <a:ext cx="1803699" cy="688778"/>
               </a:xfrm>
               <a:prstGeom prst="rect">
                 <a:avLst/>
@@ -12854,8 +12918,8 @@
           </p:sp>
         </mc:Fallback>
       </mc:AlternateContent>
-      <mc:AlternateContent xmlns:mc="http://schemas.openxmlformats.org/markup-compatibility/2006">
-        <mc:Choice xmlns:a14="http://schemas.microsoft.com/office/drawing/2010/main" Requires="a14">
+      <mc:AlternateContent xmlns:mc="http://schemas.openxmlformats.org/markup-compatibility/2006" xmlns:a14="http://schemas.microsoft.com/office/drawing/2010/main">
+        <mc:Choice Requires="a14">
           <p:sp>
             <p:nvSpPr>
               <p:cNvPr id="72" name="矩形 71">
@@ -12919,7 +12983,7 @@
             </p:txBody>
           </p:sp>
         </mc:Choice>
-        <mc:Fallback>
+        <mc:Fallback xmlns="">
           <p:sp>
             <p:nvSpPr>
               <p:cNvPr id="72" name="矩形 71">
@@ -12964,8 +13028,8 @@
           </p:sp>
         </mc:Fallback>
       </mc:AlternateContent>
-      <mc:AlternateContent xmlns:mc="http://schemas.openxmlformats.org/markup-compatibility/2006">
-        <mc:Choice xmlns:a14="http://schemas.microsoft.com/office/drawing/2010/main" Requires="a14">
+      <mc:AlternateContent xmlns:mc="http://schemas.openxmlformats.org/markup-compatibility/2006" xmlns:a14="http://schemas.microsoft.com/office/drawing/2010/main">
+        <mc:Choice Requires="a14">
           <p:sp>
             <p:nvSpPr>
               <p:cNvPr id="73" name="矩形 72">
@@ -13035,7 +13099,7 @@
             </p:txBody>
           </p:sp>
         </mc:Choice>
-        <mc:Fallback>
+        <mc:Fallback xmlns="">
           <p:sp>
             <p:nvSpPr>
               <p:cNvPr id="73" name="矩形 72">
@@ -13125,8 +13189,8 @@
           </a:prstGeom>
         </p:spPr>
       </p:pic>
-      <mc:AlternateContent xmlns:mc="http://schemas.openxmlformats.org/markup-compatibility/2006">
-        <mc:Choice xmlns:a14="http://schemas.microsoft.com/office/drawing/2010/main" Requires="a14">
+      <mc:AlternateContent xmlns:mc="http://schemas.openxmlformats.org/markup-compatibility/2006" xmlns:a14="http://schemas.microsoft.com/office/drawing/2010/main">
+        <mc:Choice Requires="a14">
           <p:sp>
             <p:nvSpPr>
               <p:cNvPr id="75" name="文字方塊 74">
@@ -13201,7 +13265,7 @@
             </p:txBody>
           </p:sp>
         </mc:Choice>
-        <mc:Fallback>
+        <mc:Fallback xmlns="">
           <p:sp>
             <p:nvSpPr>
               <p:cNvPr id="75" name="文字方塊 74">
@@ -13389,8 +13453,8 @@
           </p:txBody>
         </p:sp>
       </p:grpSp>
-      <mc:AlternateContent xmlns:mc="http://schemas.openxmlformats.org/markup-compatibility/2006">
-        <mc:Choice xmlns:a14="http://schemas.microsoft.com/office/drawing/2010/main" Requires="a14">
+      <mc:AlternateContent xmlns:mc="http://schemas.openxmlformats.org/markup-compatibility/2006" xmlns:a14="http://schemas.microsoft.com/office/drawing/2010/main">
+        <mc:Choice Requires="a14">
           <p:sp>
             <p:nvSpPr>
               <p:cNvPr id="79" name="文字方塊 78">
@@ -13459,7 +13523,7 @@
             </p:txBody>
           </p:sp>
         </mc:Choice>
-        <mc:Fallback>
+        <mc:Fallback xmlns="">
           <p:sp>
             <p:nvSpPr>
               <p:cNvPr id="79" name="文字方塊 78">
@@ -13504,8 +13568,8 @@
           </p:sp>
         </mc:Fallback>
       </mc:AlternateContent>
-      <mc:AlternateContent xmlns:mc="http://schemas.openxmlformats.org/markup-compatibility/2006">
-        <mc:Choice xmlns:a14="http://schemas.microsoft.com/office/drawing/2010/main" Requires="a14">
+      <mc:AlternateContent xmlns:mc="http://schemas.openxmlformats.org/markup-compatibility/2006" xmlns:a14="http://schemas.microsoft.com/office/drawing/2010/main">
+        <mc:Choice Requires="a14">
           <p:sp>
             <p:nvSpPr>
               <p:cNvPr id="80" name="文字方塊 79">
@@ -13574,7 +13638,7 @@
             </p:txBody>
           </p:sp>
         </mc:Choice>
-        <mc:Fallback>
+        <mc:Fallback xmlns="">
           <p:sp>
             <p:nvSpPr>
               <p:cNvPr id="80" name="文字方塊 79">
@@ -13703,8 +13767,8 @@
         </p:nvSpPr>
         <p:spPr>
           <a:xfrm>
-            <a:off x="5800586" y="1779343"/>
-            <a:ext cx="3932177" cy="3340786"/>
+            <a:off x="5851386" y="1879599"/>
+            <a:ext cx="3932177" cy="3240529"/>
           </a:xfrm>
           <a:prstGeom prst="roundRect">
             <a:avLst>
@@ -13759,439 +13823,8 @@
           </a:p>
         </p:txBody>
       </p:sp>
-      <mc:AlternateContent xmlns:mc="http://schemas.openxmlformats.org/markup-compatibility/2006">
-        <mc:Choice xmlns:a14="http://schemas.microsoft.com/office/drawing/2010/main" Requires="a14">
-          <p:sp>
-            <p:nvSpPr>
-              <p:cNvPr id="90" name="矩形 89">
-                <a:extLst>
-                  <a:ext uri="{FF2B5EF4-FFF2-40B4-BE49-F238E27FC236}">
-                    <a16:creationId xmlns:a16="http://schemas.microsoft.com/office/drawing/2014/main" id="{5BF5F099-3A22-4BFC-A027-FC0142CC1E2B}"/>
-                  </a:ext>
-                </a:extLst>
-              </p:cNvPr>
-              <p:cNvSpPr/>
-              <p:nvPr/>
-            </p:nvSpPr>
-            <p:spPr>
-              <a:xfrm>
-                <a:off x="6316509" y="1255417"/>
-                <a:ext cx="1070998" cy="555152"/>
-              </a:xfrm>
-              <a:prstGeom prst="rect">
-                <a:avLst/>
-              </a:prstGeom>
-            </p:spPr>
-            <p:txBody>
-              <a:bodyPr wrap="none">
-                <a:spAutoFit/>
-              </a:bodyPr>
-              <a:lstStyle/>
-              <a:p>
-                <a:pPr algn="r"/>
-                <a14:m>
-                  <m:oMathPara xmlns:m="http://schemas.openxmlformats.org/officeDocument/2006/math">
-                    <m:oMathParaPr>
-                      <m:jc m:val="centerGroup"/>
-                    </m:oMathParaPr>
-                    <m:oMath xmlns:m="http://schemas.openxmlformats.org/officeDocument/2006/math">
-                      <m:sSup>
-                        <m:sSupPr>
-                          <m:ctrlPr>
-                            <a:rPr lang="en-US" altLang="zh-TW" sz="2000" i="1">
-                              <a:latin typeface="Cambria Math" panose="02040503050406030204" pitchFamily="18" charset="0"/>
-                            </a:rPr>
-                          </m:ctrlPr>
-                        </m:sSupPr>
-                        <m:e>
-                          <m:d>
-                            <m:dPr>
-                              <m:begChr m:val="|"/>
-                              <m:endChr m:val="|"/>
-                              <m:ctrlPr>
-                                <a:rPr lang="en-US" altLang="zh-TW" sz="2000" i="1">
-                                  <a:latin typeface="Cambria Math" panose="02040503050406030204" pitchFamily="18" charset="0"/>
-                                </a:rPr>
-                              </m:ctrlPr>
-                            </m:dPr>
-                            <m:e>
-                              <m:sSubSup>
-                                <m:sSubSupPr>
-                                  <m:ctrlPr>
-                                    <a:rPr lang="en-US" altLang="zh-TW" sz="2000" i="1">
-                                      <a:latin typeface="Cambria Math" panose="02040503050406030204" pitchFamily="18" charset="0"/>
-                                    </a:rPr>
-                                  </m:ctrlPr>
-                                </m:sSubSupPr>
-                                <m:e>
-                                  <m:acc>
-                                    <m:accPr>
-                                      <m:chr m:val="̃"/>
-                                      <m:ctrlPr>
-                                        <a:rPr lang="en-US" altLang="zh-TW" sz="2000" i="1">
-                                          <a:latin typeface="Cambria Math" panose="02040503050406030204" pitchFamily="18" charset="0"/>
-                                        </a:rPr>
-                                      </m:ctrlPr>
-                                    </m:accPr>
-                                    <m:e>
-                                      <m:r>
-                                        <a:rPr lang="en-US" altLang="zh-TW" sz="2000" i="1">
-                                          <a:latin typeface="Cambria Math" panose="02040503050406030204" pitchFamily="18" charset="0"/>
-                                        </a:rPr>
-                                        <m:t>𝑀</m:t>
-                                      </m:r>
-                                    </m:e>
-                                  </m:acc>
-                                </m:e>
-                                <m:sub>
-                                  <m:r>
-                                    <a:rPr lang="en-US" altLang="zh-TW" sz="2000" i="1">
-                                      <a:latin typeface="Cambria Math" panose="02040503050406030204" pitchFamily="18" charset="0"/>
-                                    </a:rPr>
-                                    <m:t>𝑆</m:t>
-                                  </m:r>
-                                  <m:r>
-                                    <a:rPr lang="en-US" altLang="zh-TW" sz="2000" i="1">
-                                      <a:latin typeface="Cambria Math" panose="02040503050406030204" pitchFamily="18" charset="0"/>
-                                    </a:rPr>
-                                    <m:t>,</m:t>
-                                  </m:r>
-                                  <m:r>
-                                    <a:rPr lang="en-US" altLang="zh-TW" sz="2000" b="1" i="1">
-                                      <a:latin typeface="Cambria Math" panose="02040503050406030204" pitchFamily="18" charset="0"/>
-                                    </a:rPr>
-                                    <m:t>𝑸</m:t>
-                                  </m:r>
-                                </m:sub>
-                                <m:sup>
-                                  <m:acc>
-                                    <m:accPr>
-                                      <m:chr m:val="̂"/>
-                                      <m:ctrlPr>
-                                        <a:rPr lang="en-US" altLang="zh-TW" sz="2000" b="1" i="1">
-                                          <a:latin typeface="Cambria Math" panose="02040503050406030204" pitchFamily="18" charset="0"/>
-                                        </a:rPr>
-                                      </m:ctrlPr>
-                                    </m:accPr>
-                                    <m:e>
-                                      <m:r>
-                                        <a:rPr lang="zh-TW" altLang="en-US" sz="2000" b="1" i="1">
-                                          <a:latin typeface="Cambria Math" panose="02040503050406030204" pitchFamily="18" charset="0"/>
-                                        </a:rPr>
-                                        <m:t>𝜺</m:t>
-                                      </m:r>
-                                    </m:e>
-                                  </m:acc>
-                                  <m:r>
-                                    <a:rPr lang="en-US" altLang="zh-TW" sz="2000" i="1">
-                                      <a:latin typeface="Cambria Math" panose="02040503050406030204" pitchFamily="18" charset="0"/>
-                                    </a:rPr>
-                                    <m:t>,0</m:t>
-                                  </m:r>
-                                </m:sup>
-                              </m:sSubSup>
-                            </m:e>
-                          </m:d>
-                        </m:e>
-                        <m:sup>
-                          <m:r>
-                            <a:rPr lang="en-US" altLang="zh-TW" sz="2000" i="1">
-                              <a:latin typeface="Cambria Math" panose="02040503050406030204" pitchFamily="18" charset="0"/>
-                            </a:rPr>
-                            <m:t>2</m:t>
-                          </m:r>
-                        </m:sup>
-                      </m:sSup>
-                      <m:r>
-                        <a:rPr lang="en-US" altLang="zh-TW" sz="2000" i="1">
-                          <a:latin typeface="Cambria Math" panose="02040503050406030204" pitchFamily="18" charset="0"/>
-                        </a:rPr>
-                        <m:t> </m:t>
-                      </m:r>
-                    </m:oMath>
-                  </m:oMathPara>
-                </a14:m>
-                <a:endParaRPr lang="zh-TW" altLang="en-US" sz="2000" dirty="0"/>
-              </a:p>
-            </p:txBody>
-          </p:sp>
-        </mc:Choice>
-        <mc:Fallback>
-          <p:sp>
-            <p:nvSpPr>
-              <p:cNvPr id="90" name="矩形 89">
-                <a:extLst>
-                  <a:ext uri="{FF2B5EF4-FFF2-40B4-BE49-F238E27FC236}">
-                    <a16:creationId xmlns:a16="http://schemas.microsoft.com/office/drawing/2014/main" id="{5BF5F099-3A22-4BFC-A027-FC0142CC1E2B}"/>
-                  </a:ext>
-                </a:extLst>
-              </p:cNvPr>
-              <p:cNvSpPr>
-                <a:spLocks noRot="1" noChangeAspect="1" noMove="1" noResize="1" noEditPoints="1" noAdjustHandles="1" noChangeArrowheads="1" noChangeShapeType="1" noTextEdit="1"/>
-              </p:cNvSpPr>
-              <p:nvPr/>
-            </p:nvSpPr>
-            <p:spPr>
-              <a:xfrm>
-                <a:off x="6316509" y="1255417"/>
-                <a:ext cx="1070998" cy="555152"/>
-              </a:xfrm>
-              <a:prstGeom prst="rect">
-                <a:avLst/>
-              </a:prstGeom>
-              <a:blipFill>
-                <a:blip r:embed="rId15"/>
-                <a:stretch>
-                  <a:fillRect/>
-                </a:stretch>
-              </a:blipFill>
-            </p:spPr>
-            <p:txBody>
-              <a:bodyPr/>
-              <a:lstStyle/>
-              <a:p>
-                <a:r>
-                  <a:rPr lang="zh-TW" altLang="en-US">
-                    <a:noFill/>
-                  </a:rPr>
-                  <a:t> </a:t>
-                </a:r>
-              </a:p>
-            </p:txBody>
-          </p:sp>
-        </mc:Fallback>
-      </mc:AlternateContent>
-      <mc:AlternateContent xmlns:mc="http://schemas.openxmlformats.org/markup-compatibility/2006">
-        <mc:Choice xmlns:a14="http://schemas.microsoft.com/office/drawing/2010/main" Requires="a14">
-          <p:sp>
-            <p:nvSpPr>
-              <p:cNvPr id="96" name="矩形 95">
-                <a:extLst>
-                  <a:ext uri="{FF2B5EF4-FFF2-40B4-BE49-F238E27FC236}">
-                    <a16:creationId xmlns:a16="http://schemas.microsoft.com/office/drawing/2014/main" id="{CDD52277-6DCF-44D8-B79C-3E27229C58B6}"/>
-                  </a:ext>
-                </a:extLst>
-              </p:cNvPr>
-              <p:cNvSpPr/>
-              <p:nvPr/>
-            </p:nvSpPr>
-            <p:spPr>
-              <a:xfrm>
-                <a:off x="7836950" y="1262143"/>
-                <a:ext cx="2148409" cy="528030"/>
-              </a:xfrm>
-              <a:prstGeom prst="rect">
-                <a:avLst/>
-              </a:prstGeom>
-            </p:spPr>
-            <p:txBody>
-              <a:bodyPr wrap="none">
-                <a:spAutoFit/>
-              </a:bodyPr>
-              <a:lstStyle/>
-              <a:p>
-                <a:pPr/>
-                <a14:m>
-                  <m:oMathPara xmlns:m="http://schemas.openxmlformats.org/officeDocument/2006/math">
-                    <m:oMathParaPr>
-                      <m:jc m:val="centerGroup"/>
-                    </m:oMathParaPr>
-                    <m:oMath xmlns:m="http://schemas.openxmlformats.org/officeDocument/2006/math">
-                      <m:sSup>
-                        <m:sSupPr>
-                          <m:ctrlPr>
-                            <a:rPr lang="en-US" altLang="zh-TW" sz="2000" i="1" dirty="0">
-                              <a:latin typeface="Cambria Math" panose="02040503050406030204" pitchFamily="18" charset="0"/>
-                              <a:ea typeface="Cambria Math" panose="02040503050406030204" pitchFamily="18" charset="0"/>
-                            </a:rPr>
-                          </m:ctrlPr>
-                        </m:sSupPr>
-                        <m:e>
-                          <m:d>
-                            <m:dPr>
-                              <m:begChr m:val="|"/>
-                              <m:endChr m:val="|"/>
-                              <m:ctrlPr>
-                                <a:rPr lang="en-US" altLang="zh-TW" sz="2000" i="1" dirty="0">
-                                  <a:latin typeface="Cambria Math" panose="02040503050406030204" pitchFamily="18" charset="0"/>
-                                  <a:ea typeface="Cambria Math" panose="02040503050406030204" pitchFamily="18" charset="0"/>
-                                </a:rPr>
-                              </m:ctrlPr>
-                            </m:dPr>
-                            <m:e>
-                              <m:sSubSup>
-                                <m:sSubSupPr>
-                                  <m:ctrlPr>
-                                    <a:rPr lang="en-US" altLang="zh-TW" sz="2000" i="1">
-                                      <a:latin typeface="Cambria Math" panose="02040503050406030204" pitchFamily="18" charset="0"/>
-                                    </a:rPr>
-                                  </m:ctrlPr>
-                                </m:sSubSupPr>
-                                <m:e>
-                                  <m:r>
-                                    <a:rPr lang="en-US" altLang="zh-TW" sz="2000" i="1">
-                                      <a:latin typeface="Cambria Math" panose="02040503050406030204" pitchFamily="18" charset="0"/>
-                                    </a:rPr>
-                                    <m:t>𝑓</m:t>
-                                  </m:r>
-                                </m:e>
-                                <m:sub>
-                                  <m:r>
-                                    <a:rPr lang="en-US" altLang="zh-TW" sz="2000" i="1">
-                                      <a:latin typeface="Cambria Math" panose="02040503050406030204" pitchFamily="18" charset="0"/>
-                                    </a:rPr>
-                                    <m:t>𝑆</m:t>
-                                  </m:r>
-                                </m:sub>
-                                <m:sup>
-                                  <m:acc>
-                                    <m:accPr>
-                                      <m:chr m:val="̂"/>
-                                      <m:ctrlPr>
-                                        <a:rPr lang="en-US" altLang="zh-TW" sz="2000" b="1" i="1">
-                                          <a:latin typeface="Cambria Math" panose="02040503050406030204" pitchFamily="18" charset="0"/>
-                                        </a:rPr>
-                                      </m:ctrlPr>
-                                    </m:accPr>
-                                    <m:e>
-                                      <m:r>
-                                        <a:rPr lang="zh-TW" altLang="en-US" sz="2000" b="1" i="1">
-                                          <a:latin typeface="Cambria Math" panose="02040503050406030204" pitchFamily="18" charset="0"/>
-                                        </a:rPr>
-                                        <m:t>𝜺</m:t>
-                                      </m:r>
-                                    </m:e>
-                                  </m:acc>
-                                  <m:r>
-                                    <a:rPr lang="en-US" altLang="zh-TW" sz="2000" i="1">
-                                      <a:latin typeface="Cambria Math" panose="02040503050406030204" pitchFamily="18" charset="0"/>
-                                    </a:rPr>
-                                    <m:t>,0</m:t>
-                                  </m:r>
-                                </m:sup>
-                              </m:sSubSup>
-                              <m:d>
-                                <m:dPr>
-                                  <m:ctrlPr>
-                                    <a:rPr lang="en-US" altLang="zh-TW" sz="2000" i="1">
-                                      <a:latin typeface="Cambria Math" panose="02040503050406030204" pitchFamily="18" charset="0"/>
-                                    </a:rPr>
-                                  </m:ctrlPr>
-                                </m:dPr>
-                                <m:e>
-                                  <m:sSub>
-                                    <m:sSubPr>
-                                      <m:ctrlPr>
-                                        <a:rPr lang="en-US" altLang="zh-TW" sz="2000" i="1">
-                                          <a:latin typeface="Cambria Math" panose="02040503050406030204" pitchFamily="18" charset="0"/>
-                                        </a:rPr>
-                                      </m:ctrlPr>
-                                    </m:sSubPr>
-                                    <m:e>
-                                      <m:r>
-                                        <a:rPr lang="en-US" altLang="zh-TW" sz="2000" b="1" i="1">
-                                          <a:latin typeface="Cambria Math" panose="02040503050406030204" pitchFamily="18" charset="0"/>
-                                        </a:rPr>
-                                        <m:t>𝑹</m:t>
-                                      </m:r>
-                                    </m:e>
-                                    <m:sub>
-                                      <m:r>
-                                        <a:rPr lang="en-US" altLang="zh-TW" sz="2000" i="1">
-                                          <a:latin typeface="Cambria Math" panose="02040503050406030204" pitchFamily="18" charset="0"/>
-                                        </a:rPr>
-                                        <m:t>𝑐</m:t>
-                                      </m:r>
-                                    </m:sub>
-                                  </m:sSub>
-                                  <m:r>
-                                    <a:rPr lang="en-US" altLang="zh-TW" sz="2000" i="1">
-                                      <a:latin typeface="Cambria Math" panose="02040503050406030204" pitchFamily="18" charset="0"/>
-                                    </a:rPr>
-                                    <m:t>, </m:t>
-                                  </m:r>
-                                  <m:r>
-                                    <a:rPr lang="en-US" altLang="zh-TW" sz="2000" b="1" i="1">
-                                      <a:latin typeface="Cambria Math" panose="02040503050406030204" pitchFamily="18" charset="0"/>
-                                    </a:rPr>
-                                    <m:t>𝒓</m:t>
-                                  </m:r>
-                                  <m:r>
-                                    <a:rPr lang="en-US" altLang="zh-TW" sz="2000" i="1">
-                                      <a:latin typeface="Cambria Math" panose="02040503050406030204" pitchFamily="18" charset="0"/>
-                                    </a:rPr>
-                                    <m:t>=0</m:t>
-                                  </m:r>
-                                </m:e>
-                              </m:d>
-                            </m:e>
-                          </m:d>
-                        </m:e>
-                        <m:sup>
-                          <m:r>
-                            <a:rPr lang="en-US" altLang="zh-TW" sz="2000" i="1" dirty="0">
-                              <a:latin typeface="Cambria Math" panose="02040503050406030204" pitchFamily="18" charset="0"/>
-                              <a:ea typeface="Cambria Math" panose="02040503050406030204" pitchFamily="18" charset="0"/>
-                            </a:rPr>
-                            <m:t>2</m:t>
-                          </m:r>
-                        </m:sup>
-                      </m:sSup>
-                    </m:oMath>
-                  </m:oMathPara>
-                </a14:m>
-                <a:endParaRPr lang="zh-TW" altLang="en-US" sz="2000" dirty="0"/>
-              </a:p>
-            </p:txBody>
-          </p:sp>
-        </mc:Choice>
-        <mc:Fallback>
-          <p:sp>
-            <p:nvSpPr>
-              <p:cNvPr id="96" name="矩形 95">
-                <a:extLst>
-                  <a:ext uri="{FF2B5EF4-FFF2-40B4-BE49-F238E27FC236}">
-                    <a16:creationId xmlns:a16="http://schemas.microsoft.com/office/drawing/2014/main" id="{CDD52277-6DCF-44D8-B79C-3E27229C58B6}"/>
-                  </a:ext>
-                </a:extLst>
-              </p:cNvPr>
-              <p:cNvSpPr>
-                <a:spLocks noRot="1" noChangeAspect="1" noMove="1" noResize="1" noEditPoints="1" noAdjustHandles="1" noChangeArrowheads="1" noChangeShapeType="1" noTextEdit="1"/>
-              </p:cNvSpPr>
-              <p:nvPr/>
-            </p:nvSpPr>
-            <p:spPr>
-              <a:xfrm>
-                <a:off x="7836950" y="1262143"/>
-                <a:ext cx="2148409" cy="528030"/>
-              </a:xfrm>
-              <a:prstGeom prst="rect">
-                <a:avLst/>
-              </a:prstGeom>
-              <a:blipFill>
-                <a:blip r:embed="rId16"/>
-                <a:stretch>
-                  <a:fillRect/>
-                </a:stretch>
-              </a:blipFill>
-            </p:spPr>
-            <p:txBody>
-              <a:bodyPr/>
-              <a:lstStyle/>
-              <a:p>
-                <a:r>
-                  <a:rPr lang="zh-TW" altLang="en-US">
-                    <a:noFill/>
-                  </a:rPr>
-                  <a:t> </a:t>
-                </a:r>
-              </a:p>
-            </p:txBody>
-          </p:sp>
-        </mc:Fallback>
-      </mc:AlternateContent>
-      <mc:AlternateContent xmlns:mc="http://schemas.openxmlformats.org/markup-compatibility/2006">
-        <mc:Choice xmlns:a14="http://schemas.microsoft.com/office/drawing/2010/main" Requires="a14">
+      <mc:AlternateContent xmlns:mc="http://schemas.openxmlformats.org/markup-compatibility/2006" xmlns:a14="http://schemas.microsoft.com/office/drawing/2010/main">
+        <mc:Choice Requires="a14">
           <p:sp>
             <p:nvSpPr>
               <p:cNvPr id="97" name="矩形 96">
@@ -14255,7 +13888,7 @@
             </p:txBody>
           </p:sp>
         </mc:Choice>
-        <mc:Fallback>
+        <mc:Fallback xmlns="">
           <p:sp>
             <p:nvSpPr>
               <p:cNvPr id="97" name="矩形 96">
@@ -14300,8 +13933,8 @@
           </p:sp>
         </mc:Fallback>
       </mc:AlternateContent>
-      <mc:AlternateContent xmlns:mc="http://schemas.openxmlformats.org/markup-compatibility/2006">
-        <mc:Choice xmlns:a14="http://schemas.microsoft.com/office/drawing/2010/main" Requires="a14">
+      <mc:AlternateContent xmlns:mc="http://schemas.openxmlformats.org/markup-compatibility/2006" xmlns:a14="http://schemas.microsoft.com/office/drawing/2010/main">
+        <mc:Choice Requires="a14">
           <p:sp>
             <p:nvSpPr>
               <p:cNvPr id="98" name="矩形 97">
@@ -14371,7 +14004,7 @@
             </p:txBody>
           </p:sp>
         </mc:Choice>
-        <mc:Fallback>
+        <mc:Fallback xmlns="">
           <p:sp>
             <p:nvSpPr>
               <p:cNvPr id="98" name="矩形 97">
@@ -14500,8 +14133,8 @@
         </p:nvSpPr>
         <p:spPr>
           <a:xfrm>
-            <a:off x="834913" y="6419073"/>
-            <a:ext cx="3932177" cy="3340786"/>
+            <a:off x="885713" y="6519329"/>
+            <a:ext cx="3932177" cy="3240529"/>
           </a:xfrm>
           <a:prstGeom prst="roundRect">
             <a:avLst>
@@ -14556,439 +14189,8 @@
           </a:p>
         </p:txBody>
       </p:sp>
-      <mc:AlternateContent xmlns:mc="http://schemas.openxmlformats.org/markup-compatibility/2006">
-        <mc:Choice xmlns:a14="http://schemas.microsoft.com/office/drawing/2010/main" Requires="a14">
-          <p:sp>
-            <p:nvSpPr>
-              <p:cNvPr id="111" name="矩形 110">
-                <a:extLst>
-                  <a:ext uri="{FF2B5EF4-FFF2-40B4-BE49-F238E27FC236}">
-                    <a16:creationId xmlns:a16="http://schemas.microsoft.com/office/drawing/2014/main" id="{0739E403-493B-4716-A4EF-1A406EB47EB2}"/>
-                  </a:ext>
-                </a:extLst>
-              </p:cNvPr>
-              <p:cNvSpPr/>
-              <p:nvPr/>
-            </p:nvSpPr>
-            <p:spPr>
-              <a:xfrm>
-                <a:off x="1350836" y="5895147"/>
-                <a:ext cx="1070998" cy="555152"/>
-              </a:xfrm>
-              <a:prstGeom prst="rect">
-                <a:avLst/>
-              </a:prstGeom>
-            </p:spPr>
-            <p:txBody>
-              <a:bodyPr wrap="none">
-                <a:spAutoFit/>
-              </a:bodyPr>
-              <a:lstStyle/>
-              <a:p>
-                <a:pPr algn="r"/>
-                <a14:m>
-                  <m:oMathPara xmlns:m="http://schemas.openxmlformats.org/officeDocument/2006/math">
-                    <m:oMathParaPr>
-                      <m:jc m:val="centerGroup"/>
-                    </m:oMathParaPr>
-                    <m:oMath xmlns:m="http://schemas.openxmlformats.org/officeDocument/2006/math">
-                      <m:sSup>
-                        <m:sSupPr>
-                          <m:ctrlPr>
-                            <a:rPr lang="en-US" altLang="zh-TW" sz="2000" i="1">
-                              <a:latin typeface="Cambria Math" panose="02040503050406030204" pitchFamily="18" charset="0"/>
-                            </a:rPr>
-                          </m:ctrlPr>
-                        </m:sSupPr>
-                        <m:e>
-                          <m:d>
-                            <m:dPr>
-                              <m:begChr m:val="|"/>
-                              <m:endChr m:val="|"/>
-                              <m:ctrlPr>
-                                <a:rPr lang="en-US" altLang="zh-TW" sz="2000" i="1">
-                                  <a:latin typeface="Cambria Math" panose="02040503050406030204" pitchFamily="18" charset="0"/>
-                                </a:rPr>
-                              </m:ctrlPr>
-                            </m:dPr>
-                            <m:e>
-                              <m:sSubSup>
-                                <m:sSubSupPr>
-                                  <m:ctrlPr>
-                                    <a:rPr lang="en-US" altLang="zh-TW" sz="2000" i="1">
-                                      <a:latin typeface="Cambria Math" panose="02040503050406030204" pitchFamily="18" charset="0"/>
-                                    </a:rPr>
-                                  </m:ctrlPr>
-                                </m:sSubSupPr>
-                                <m:e>
-                                  <m:acc>
-                                    <m:accPr>
-                                      <m:chr m:val="̃"/>
-                                      <m:ctrlPr>
-                                        <a:rPr lang="en-US" altLang="zh-TW" sz="2000" i="1">
-                                          <a:latin typeface="Cambria Math" panose="02040503050406030204" pitchFamily="18" charset="0"/>
-                                        </a:rPr>
-                                      </m:ctrlPr>
-                                    </m:accPr>
-                                    <m:e>
-                                      <m:r>
-                                        <a:rPr lang="en-US" altLang="zh-TW" sz="2000" i="1">
-                                          <a:latin typeface="Cambria Math" panose="02040503050406030204" pitchFamily="18" charset="0"/>
-                                        </a:rPr>
-                                        <m:t>𝑀</m:t>
-                                      </m:r>
-                                    </m:e>
-                                  </m:acc>
-                                </m:e>
-                                <m:sub>
-                                  <m:r>
-                                    <a:rPr lang="en-US" altLang="zh-TW" sz="2000" i="1">
-                                      <a:latin typeface="Cambria Math" panose="02040503050406030204" pitchFamily="18" charset="0"/>
-                                    </a:rPr>
-                                    <m:t>𝑆</m:t>
-                                  </m:r>
-                                  <m:r>
-                                    <a:rPr lang="en-US" altLang="zh-TW" sz="2000" i="1">
-                                      <a:latin typeface="Cambria Math" panose="02040503050406030204" pitchFamily="18" charset="0"/>
-                                    </a:rPr>
-                                    <m:t>,</m:t>
-                                  </m:r>
-                                  <m:r>
-                                    <a:rPr lang="en-US" altLang="zh-TW" sz="2000" b="1" i="1">
-                                      <a:latin typeface="Cambria Math" panose="02040503050406030204" pitchFamily="18" charset="0"/>
-                                    </a:rPr>
-                                    <m:t>𝑸</m:t>
-                                  </m:r>
-                                </m:sub>
-                                <m:sup>
-                                  <m:acc>
-                                    <m:accPr>
-                                      <m:chr m:val="̂"/>
-                                      <m:ctrlPr>
-                                        <a:rPr lang="en-US" altLang="zh-TW" sz="2000" b="1" i="1">
-                                          <a:latin typeface="Cambria Math" panose="02040503050406030204" pitchFamily="18" charset="0"/>
-                                        </a:rPr>
-                                      </m:ctrlPr>
-                                    </m:accPr>
-                                    <m:e>
-                                      <m:r>
-                                        <a:rPr lang="zh-TW" altLang="en-US" sz="2000" b="1" i="1">
-                                          <a:latin typeface="Cambria Math" panose="02040503050406030204" pitchFamily="18" charset="0"/>
-                                        </a:rPr>
-                                        <m:t>𝜺</m:t>
-                                      </m:r>
-                                    </m:e>
-                                  </m:acc>
-                                  <m:r>
-                                    <a:rPr lang="en-US" altLang="zh-TW" sz="2000" i="1">
-                                      <a:latin typeface="Cambria Math" panose="02040503050406030204" pitchFamily="18" charset="0"/>
-                                    </a:rPr>
-                                    <m:t>,0</m:t>
-                                  </m:r>
-                                </m:sup>
-                              </m:sSubSup>
-                            </m:e>
-                          </m:d>
-                        </m:e>
-                        <m:sup>
-                          <m:r>
-                            <a:rPr lang="en-US" altLang="zh-TW" sz="2000" i="1">
-                              <a:latin typeface="Cambria Math" panose="02040503050406030204" pitchFamily="18" charset="0"/>
-                            </a:rPr>
-                            <m:t>2</m:t>
-                          </m:r>
-                        </m:sup>
-                      </m:sSup>
-                      <m:r>
-                        <a:rPr lang="en-US" altLang="zh-TW" sz="2000" i="1">
-                          <a:latin typeface="Cambria Math" panose="02040503050406030204" pitchFamily="18" charset="0"/>
-                        </a:rPr>
-                        <m:t> </m:t>
-                      </m:r>
-                    </m:oMath>
-                  </m:oMathPara>
-                </a14:m>
-                <a:endParaRPr lang="zh-TW" altLang="en-US" sz="2000" dirty="0"/>
-              </a:p>
-            </p:txBody>
-          </p:sp>
-        </mc:Choice>
-        <mc:Fallback>
-          <p:sp>
-            <p:nvSpPr>
-              <p:cNvPr id="111" name="矩形 110">
-                <a:extLst>
-                  <a:ext uri="{FF2B5EF4-FFF2-40B4-BE49-F238E27FC236}">
-                    <a16:creationId xmlns:a16="http://schemas.microsoft.com/office/drawing/2014/main" id="{0739E403-493B-4716-A4EF-1A406EB47EB2}"/>
-                  </a:ext>
-                </a:extLst>
-              </p:cNvPr>
-              <p:cNvSpPr>
-                <a:spLocks noRot="1" noChangeAspect="1" noMove="1" noResize="1" noEditPoints="1" noAdjustHandles="1" noChangeArrowheads="1" noChangeShapeType="1" noTextEdit="1"/>
-              </p:cNvSpPr>
-              <p:nvPr/>
-            </p:nvSpPr>
-            <p:spPr>
-              <a:xfrm>
-                <a:off x="1350836" y="5895147"/>
-                <a:ext cx="1070998" cy="555152"/>
-              </a:xfrm>
-              <a:prstGeom prst="rect">
-                <a:avLst/>
-              </a:prstGeom>
-              <a:blipFill>
-                <a:blip r:embed="rId19"/>
-                <a:stretch>
-                  <a:fillRect/>
-                </a:stretch>
-              </a:blipFill>
-            </p:spPr>
-            <p:txBody>
-              <a:bodyPr/>
-              <a:lstStyle/>
-              <a:p>
-                <a:r>
-                  <a:rPr lang="zh-TW" altLang="en-US">
-                    <a:noFill/>
-                  </a:rPr>
-                  <a:t> </a:t>
-                </a:r>
-              </a:p>
-            </p:txBody>
-          </p:sp>
-        </mc:Fallback>
-      </mc:AlternateContent>
-      <mc:AlternateContent xmlns:mc="http://schemas.openxmlformats.org/markup-compatibility/2006">
-        <mc:Choice xmlns:a14="http://schemas.microsoft.com/office/drawing/2010/main" Requires="a14">
-          <p:sp>
-            <p:nvSpPr>
-              <p:cNvPr id="117" name="矩形 116">
-                <a:extLst>
-                  <a:ext uri="{FF2B5EF4-FFF2-40B4-BE49-F238E27FC236}">
-                    <a16:creationId xmlns:a16="http://schemas.microsoft.com/office/drawing/2014/main" id="{18559E02-FD45-47FF-AFBF-4C061C7AFF54}"/>
-                  </a:ext>
-                </a:extLst>
-              </p:cNvPr>
-              <p:cNvSpPr/>
-              <p:nvPr/>
-            </p:nvSpPr>
-            <p:spPr>
-              <a:xfrm>
-                <a:off x="2871277" y="5901873"/>
-                <a:ext cx="2148409" cy="528030"/>
-              </a:xfrm>
-              <a:prstGeom prst="rect">
-                <a:avLst/>
-              </a:prstGeom>
-            </p:spPr>
-            <p:txBody>
-              <a:bodyPr wrap="none">
-                <a:spAutoFit/>
-              </a:bodyPr>
-              <a:lstStyle/>
-              <a:p>
-                <a:pPr/>
-                <a14:m>
-                  <m:oMathPara xmlns:m="http://schemas.openxmlformats.org/officeDocument/2006/math">
-                    <m:oMathParaPr>
-                      <m:jc m:val="centerGroup"/>
-                    </m:oMathParaPr>
-                    <m:oMath xmlns:m="http://schemas.openxmlformats.org/officeDocument/2006/math">
-                      <m:sSup>
-                        <m:sSupPr>
-                          <m:ctrlPr>
-                            <a:rPr lang="en-US" altLang="zh-TW" sz="2000" i="1" dirty="0">
-                              <a:latin typeface="Cambria Math" panose="02040503050406030204" pitchFamily="18" charset="0"/>
-                              <a:ea typeface="Cambria Math" panose="02040503050406030204" pitchFamily="18" charset="0"/>
-                            </a:rPr>
-                          </m:ctrlPr>
-                        </m:sSupPr>
-                        <m:e>
-                          <m:d>
-                            <m:dPr>
-                              <m:begChr m:val="|"/>
-                              <m:endChr m:val="|"/>
-                              <m:ctrlPr>
-                                <a:rPr lang="en-US" altLang="zh-TW" sz="2000" i="1" dirty="0">
-                                  <a:latin typeface="Cambria Math" panose="02040503050406030204" pitchFamily="18" charset="0"/>
-                                  <a:ea typeface="Cambria Math" panose="02040503050406030204" pitchFamily="18" charset="0"/>
-                                </a:rPr>
-                              </m:ctrlPr>
-                            </m:dPr>
-                            <m:e>
-                              <m:sSubSup>
-                                <m:sSubSupPr>
-                                  <m:ctrlPr>
-                                    <a:rPr lang="en-US" altLang="zh-TW" sz="2000" i="1">
-                                      <a:latin typeface="Cambria Math" panose="02040503050406030204" pitchFamily="18" charset="0"/>
-                                    </a:rPr>
-                                  </m:ctrlPr>
-                                </m:sSubSupPr>
-                                <m:e>
-                                  <m:r>
-                                    <a:rPr lang="en-US" altLang="zh-TW" sz="2000" i="1">
-                                      <a:latin typeface="Cambria Math" panose="02040503050406030204" pitchFamily="18" charset="0"/>
-                                    </a:rPr>
-                                    <m:t>𝑓</m:t>
-                                  </m:r>
-                                </m:e>
-                                <m:sub>
-                                  <m:r>
-                                    <a:rPr lang="en-US" altLang="zh-TW" sz="2000" i="1">
-                                      <a:latin typeface="Cambria Math" panose="02040503050406030204" pitchFamily="18" charset="0"/>
-                                    </a:rPr>
-                                    <m:t>𝑆</m:t>
-                                  </m:r>
-                                </m:sub>
-                                <m:sup>
-                                  <m:acc>
-                                    <m:accPr>
-                                      <m:chr m:val="̂"/>
-                                      <m:ctrlPr>
-                                        <a:rPr lang="en-US" altLang="zh-TW" sz="2000" b="1" i="1">
-                                          <a:latin typeface="Cambria Math" panose="02040503050406030204" pitchFamily="18" charset="0"/>
-                                        </a:rPr>
-                                      </m:ctrlPr>
-                                    </m:accPr>
-                                    <m:e>
-                                      <m:r>
-                                        <a:rPr lang="zh-TW" altLang="en-US" sz="2000" b="1" i="1">
-                                          <a:latin typeface="Cambria Math" panose="02040503050406030204" pitchFamily="18" charset="0"/>
-                                        </a:rPr>
-                                        <m:t>𝜺</m:t>
-                                      </m:r>
-                                    </m:e>
-                                  </m:acc>
-                                  <m:r>
-                                    <a:rPr lang="en-US" altLang="zh-TW" sz="2000" i="1">
-                                      <a:latin typeface="Cambria Math" panose="02040503050406030204" pitchFamily="18" charset="0"/>
-                                    </a:rPr>
-                                    <m:t>,0</m:t>
-                                  </m:r>
-                                </m:sup>
-                              </m:sSubSup>
-                              <m:d>
-                                <m:dPr>
-                                  <m:ctrlPr>
-                                    <a:rPr lang="en-US" altLang="zh-TW" sz="2000" i="1">
-                                      <a:latin typeface="Cambria Math" panose="02040503050406030204" pitchFamily="18" charset="0"/>
-                                    </a:rPr>
-                                  </m:ctrlPr>
-                                </m:dPr>
-                                <m:e>
-                                  <m:sSub>
-                                    <m:sSubPr>
-                                      <m:ctrlPr>
-                                        <a:rPr lang="en-US" altLang="zh-TW" sz="2000" i="1">
-                                          <a:latin typeface="Cambria Math" panose="02040503050406030204" pitchFamily="18" charset="0"/>
-                                        </a:rPr>
-                                      </m:ctrlPr>
-                                    </m:sSubPr>
-                                    <m:e>
-                                      <m:r>
-                                        <a:rPr lang="en-US" altLang="zh-TW" sz="2000" b="1" i="1">
-                                          <a:latin typeface="Cambria Math" panose="02040503050406030204" pitchFamily="18" charset="0"/>
-                                        </a:rPr>
-                                        <m:t>𝑹</m:t>
-                                      </m:r>
-                                    </m:e>
-                                    <m:sub>
-                                      <m:r>
-                                        <a:rPr lang="en-US" altLang="zh-TW" sz="2000" i="1">
-                                          <a:latin typeface="Cambria Math" panose="02040503050406030204" pitchFamily="18" charset="0"/>
-                                        </a:rPr>
-                                        <m:t>𝑐</m:t>
-                                      </m:r>
-                                    </m:sub>
-                                  </m:sSub>
-                                  <m:r>
-                                    <a:rPr lang="en-US" altLang="zh-TW" sz="2000" i="1">
-                                      <a:latin typeface="Cambria Math" panose="02040503050406030204" pitchFamily="18" charset="0"/>
-                                    </a:rPr>
-                                    <m:t>, </m:t>
-                                  </m:r>
-                                  <m:r>
-                                    <a:rPr lang="en-US" altLang="zh-TW" sz="2000" b="1" i="1">
-                                      <a:latin typeface="Cambria Math" panose="02040503050406030204" pitchFamily="18" charset="0"/>
-                                    </a:rPr>
-                                    <m:t>𝒓</m:t>
-                                  </m:r>
-                                  <m:r>
-                                    <a:rPr lang="en-US" altLang="zh-TW" sz="2000" i="1">
-                                      <a:latin typeface="Cambria Math" panose="02040503050406030204" pitchFamily="18" charset="0"/>
-                                    </a:rPr>
-                                    <m:t>=0</m:t>
-                                  </m:r>
-                                </m:e>
-                              </m:d>
-                            </m:e>
-                          </m:d>
-                        </m:e>
-                        <m:sup>
-                          <m:r>
-                            <a:rPr lang="en-US" altLang="zh-TW" sz="2000" i="1" dirty="0">
-                              <a:latin typeface="Cambria Math" panose="02040503050406030204" pitchFamily="18" charset="0"/>
-                              <a:ea typeface="Cambria Math" panose="02040503050406030204" pitchFamily="18" charset="0"/>
-                            </a:rPr>
-                            <m:t>2</m:t>
-                          </m:r>
-                        </m:sup>
-                      </m:sSup>
-                    </m:oMath>
-                  </m:oMathPara>
-                </a14:m>
-                <a:endParaRPr lang="zh-TW" altLang="en-US" sz="2000" dirty="0"/>
-              </a:p>
-            </p:txBody>
-          </p:sp>
-        </mc:Choice>
-        <mc:Fallback>
-          <p:sp>
-            <p:nvSpPr>
-              <p:cNvPr id="117" name="矩形 116">
-                <a:extLst>
-                  <a:ext uri="{FF2B5EF4-FFF2-40B4-BE49-F238E27FC236}">
-                    <a16:creationId xmlns:a16="http://schemas.microsoft.com/office/drawing/2014/main" id="{18559E02-FD45-47FF-AFBF-4C061C7AFF54}"/>
-                  </a:ext>
-                </a:extLst>
-              </p:cNvPr>
-              <p:cNvSpPr>
-                <a:spLocks noRot="1" noChangeAspect="1" noMove="1" noResize="1" noEditPoints="1" noAdjustHandles="1" noChangeArrowheads="1" noChangeShapeType="1" noTextEdit="1"/>
-              </p:cNvSpPr>
-              <p:nvPr/>
-            </p:nvSpPr>
-            <p:spPr>
-              <a:xfrm>
-                <a:off x="2871277" y="5901873"/>
-                <a:ext cx="2148409" cy="528030"/>
-              </a:xfrm>
-              <a:prstGeom prst="rect">
-                <a:avLst/>
-              </a:prstGeom>
-              <a:blipFill>
-                <a:blip r:embed="rId20"/>
-                <a:stretch>
-                  <a:fillRect/>
-                </a:stretch>
-              </a:blipFill>
-            </p:spPr>
-            <p:txBody>
-              <a:bodyPr/>
-              <a:lstStyle/>
-              <a:p>
-                <a:r>
-                  <a:rPr lang="zh-TW" altLang="en-US">
-                    <a:noFill/>
-                  </a:rPr>
-                  <a:t> </a:t>
-                </a:r>
-              </a:p>
-            </p:txBody>
-          </p:sp>
-        </mc:Fallback>
-      </mc:AlternateContent>
-      <mc:AlternateContent xmlns:mc="http://schemas.openxmlformats.org/markup-compatibility/2006">
-        <mc:Choice xmlns:a14="http://schemas.microsoft.com/office/drawing/2010/main" Requires="a14">
+      <mc:AlternateContent xmlns:mc="http://schemas.openxmlformats.org/markup-compatibility/2006" xmlns:a14="http://schemas.microsoft.com/office/drawing/2010/main">
+        <mc:Choice Requires="a14">
           <p:sp>
             <p:nvSpPr>
               <p:cNvPr id="118" name="矩形 117">
@@ -15052,7 +14254,7 @@
             </p:txBody>
           </p:sp>
         </mc:Choice>
-        <mc:Fallback>
+        <mc:Fallback xmlns="">
           <p:sp>
             <p:nvSpPr>
               <p:cNvPr id="118" name="矩形 117">
@@ -15097,8 +14299,8 @@
           </p:sp>
         </mc:Fallback>
       </mc:AlternateContent>
-      <mc:AlternateContent xmlns:mc="http://schemas.openxmlformats.org/markup-compatibility/2006">
-        <mc:Choice xmlns:a14="http://schemas.microsoft.com/office/drawing/2010/main" Requires="a14">
+      <mc:AlternateContent xmlns:mc="http://schemas.openxmlformats.org/markup-compatibility/2006" xmlns:a14="http://schemas.microsoft.com/office/drawing/2010/main">
+        <mc:Choice Requires="a14">
           <p:sp>
             <p:nvSpPr>
               <p:cNvPr id="119" name="矩形 118">
@@ -15168,7 +14370,7 @@
             </p:txBody>
           </p:sp>
         </mc:Choice>
-        <mc:Fallback>
+        <mc:Fallback xmlns="">
           <p:sp>
             <p:nvSpPr>
               <p:cNvPr id="119" name="矩形 118">
@@ -15297,8 +14499,8 @@
         </p:nvSpPr>
         <p:spPr>
           <a:xfrm>
-            <a:off x="5793423" y="6416408"/>
-            <a:ext cx="3932177" cy="3340786"/>
+            <a:off x="5844223" y="6516664"/>
+            <a:ext cx="3932177" cy="3240529"/>
           </a:xfrm>
           <a:prstGeom prst="roundRect">
             <a:avLst>
@@ -15353,439 +14555,8 @@
           </a:p>
         </p:txBody>
       </p:sp>
-      <mc:AlternateContent xmlns:mc="http://schemas.openxmlformats.org/markup-compatibility/2006">
-        <mc:Choice xmlns:a14="http://schemas.microsoft.com/office/drawing/2010/main" Requires="a14">
-          <p:sp>
-            <p:nvSpPr>
-              <p:cNvPr id="131" name="矩形 130">
-                <a:extLst>
-                  <a:ext uri="{FF2B5EF4-FFF2-40B4-BE49-F238E27FC236}">
-                    <a16:creationId xmlns:a16="http://schemas.microsoft.com/office/drawing/2014/main" id="{17741671-43C6-40A1-A5C7-FA8E70D4A8EF}"/>
-                  </a:ext>
-                </a:extLst>
-              </p:cNvPr>
-              <p:cNvSpPr/>
-              <p:nvPr/>
-            </p:nvSpPr>
-            <p:spPr>
-              <a:xfrm>
-                <a:off x="6309346" y="5892482"/>
-                <a:ext cx="1070998" cy="555152"/>
-              </a:xfrm>
-              <a:prstGeom prst="rect">
-                <a:avLst/>
-              </a:prstGeom>
-            </p:spPr>
-            <p:txBody>
-              <a:bodyPr wrap="none">
-                <a:spAutoFit/>
-              </a:bodyPr>
-              <a:lstStyle/>
-              <a:p>
-                <a:pPr algn="r"/>
-                <a14:m>
-                  <m:oMathPara xmlns:m="http://schemas.openxmlformats.org/officeDocument/2006/math">
-                    <m:oMathParaPr>
-                      <m:jc m:val="centerGroup"/>
-                    </m:oMathParaPr>
-                    <m:oMath xmlns:m="http://schemas.openxmlformats.org/officeDocument/2006/math">
-                      <m:sSup>
-                        <m:sSupPr>
-                          <m:ctrlPr>
-                            <a:rPr lang="en-US" altLang="zh-TW" sz="2000" i="1">
-                              <a:latin typeface="Cambria Math" panose="02040503050406030204" pitchFamily="18" charset="0"/>
-                            </a:rPr>
-                          </m:ctrlPr>
-                        </m:sSupPr>
-                        <m:e>
-                          <m:d>
-                            <m:dPr>
-                              <m:begChr m:val="|"/>
-                              <m:endChr m:val="|"/>
-                              <m:ctrlPr>
-                                <a:rPr lang="en-US" altLang="zh-TW" sz="2000" i="1">
-                                  <a:latin typeface="Cambria Math" panose="02040503050406030204" pitchFamily="18" charset="0"/>
-                                </a:rPr>
-                              </m:ctrlPr>
-                            </m:dPr>
-                            <m:e>
-                              <m:sSubSup>
-                                <m:sSubSupPr>
-                                  <m:ctrlPr>
-                                    <a:rPr lang="en-US" altLang="zh-TW" sz="2000" i="1">
-                                      <a:latin typeface="Cambria Math" panose="02040503050406030204" pitchFamily="18" charset="0"/>
-                                    </a:rPr>
-                                  </m:ctrlPr>
-                                </m:sSubSupPr>
-                                <m:e>
-                                  <m:acc>
-                                    <m:accPr>
-                                      <m:chr m:val="̃"/>
-                                      <m:ctrlPr>
-                                        <a:rPr lang="en-US" altLang="zh-TW" sz="2000" i="1">
-                                          <a:latin typeface="Cambria Math" panose="02040503050406030204" pitchFamily="18" charset="0"/>
-                                        </a:rPr>
-                                      </m:ctrlPr>
-                                    </m:accPr>
-                                    <m:e>
-                                      <m:r>
-                                        <a:rPr lang="en-US" altLang="zh-TW" sz="2000" i="1">
-                                          <a:latin typeface="Cambria Math" panose="02040503050406030204" pitchFamily="18" charset="0"/>
-                                        </a:rPr>
-                                        <m:t>𝑀</m:t>
-                                      </m:r>
-                                    </m:e>
-                                  </m:acc>
-                                </m:e>
-                                <m:sub>
-                                  <m:r>
-                                    <a:rPr lang="en-US" altLang="zh-TW" sz="2000" i="1">
-                                      <a:latin typeface="Cambria Math" panose="02040503050406030204" pitchFamily="18" charset="0"/>
-                                    </a:rPr>
-                                    <m:t>𝑆</m:t>
-                                  </m:r>
-                                  <m:r>
-                                    <a:rPr lang="en-US" altLang="zh-TW" sz="2000" i="1">
-                                      <a:latin typeface="Cambria Math" panose="02040503050406030204" pitchFamily="18" charset="0"/>
-                                    </a:rPr>
-                                    <m:t>,</m:t>
-                                  </m:r>
-                                  <m:r>
-                                    <a:rPr lang="en-US" altLang="zh-TW" sz="2000" b="1" i="1">
-                                      <a:latin typeface="Cambria Math" panose="02040503050406030204" pitchFamily="18" charset="0"/>
-                                    </a:rPr>
-                                    <m:t>𝑸</m:t>
-                                  </m:r>
-                                </m:sub>
-                                <m:sup>
-                                  <m:acc>
-                                    <m:accPr>
-                                      <m:chr m:val="̂"/>
-                                      <m:ctrlPr>
-                                        <a:rPr lang="en-US" altLang="zh-TW" sz="2000" b="1" i="1">
-                                          <a:latin typeface="Cambria Math" panose="02040503050406030204" pitchFamily="18" charset="0"/>
-                                        </a:rPr>
-                                      </m:ctrlPr>
-                                    </m:accPr>
-                                    <m:e>
-                                      <m:r>
-                                        <a:rPr lang="zh-TW" altLang="en-US" sz="2000" b="1" i="1">
-                                          <a:latin typeface="Cambria Math" panose="02040503050406030204" pitchFamily="18" charset="0"/>
-                                        </a:rPr>
-                                        <m:t>𝜺</m:t>
-                                      </m:r>
-                                    </m:e>
-                                  </m:acc>
-                                  <m:r>
-                                    <a:rPr lang="en-US" altLang="zh-TW" sz="2000" i="1">
-                                      <a:latin typeface="Cambria Math" panose="02040503050406030204" pitchFamily="18" charset="0"/>
-                                    </a:rPr>
-                                    <m:t>,0</m:t>
-                                  </m:r>
-                                </m:sup>
-                              </m:sSubSup>
-                            </m:e>
-                          </m:d>
-                        </m:e>
-                        <m:sup>
-                          <m:r>
-                            <a:rPr lang="en-US" altLang="zh-TW" sz="2000" i="1">
-                              <a:latin typeface="Cambria Math" panose="02040503050406030204" pitchFamily="18" charset="0"/>
-                            </a:rPr>
-                            <m:t>2</m:t>
-                          </m:r>
-                        </m:sup>
-                      </m:sSup>
-                      <m:r>
-                        <a:rPr lang="en-US" altLang="zh-TW" sz="2000" i="1">
-                          <a:latin typeface="Cambria Math" panose="02040503050406030204" pitchFamily="18" charset="0"/>
-                        </a:rPr>
-                        <m:t> </m:t>
-                      </m:r>
-                    </m:oMath>
-                  </m:oMathPara>
-                </a14:m>
-                <a:endParaRPr lang="zh-TW" altLang="en-US" sz="2000" dirty="0"/>
-              </a:p>
-            </p:txBody>
-          </p:sp>
-        </mc:Choice>
-        <mc:Fallback>
-          <p:sp>
-            <p:nvSpPr>
-              <p:cNvPr id="131" name="矩形 130">
-                <a:extLst>
-                  <a:ext uri="{FF2B5EF4-FFF2-40B4-BE49-F238E27FC236}">
-                    <a16:creationId xmlns:a16="http://schemas.microsoft.com/office/drawing/2014/main" id="{17741671-43C6-40A1-A5C7-FA8E70D4A8EF}"/>
-                  </a:ext>
-                </a:extLst>
-              </p:cNvPr>
-              <p:cNvSpPr>
-                <a:spLocks noRot="1" noChangeAspect="1" noMove="1" noResize="1" noEditPoints="1" noAdjustHandles="1" noChangeArrowheads="1" noChangeShapeType="1" noTextEdit="1"/>
-              </p:cNvSpPr>
-              <p:nvPr/>
-            </p:nvSpPr>
-            <p:spPr>
-              <a:xfrm>
-                <a:off x="6309346" y="5892482"/>
-                <a:ext cx="1070998" cy="555152"/>
-              </a:xfrm>
-              <a:prstGeom prst="rect">
-                <a:avLst/>
-              </a:prstGeom>
-              <a:blipFill>
-                <a:blip r:embed="rId23"/>
-                <a:stretch>
-                  <a:fillRect/>
-                </a:stretch>
-              </a:blipFill>
-            </p:spPr>
-            <p:txBody>
-              <a:bodyPr/>
-              <a:lstStyle/>
-              <a:p>
-                <a:r>
-                  <a:rPr lang="zh-TW" altLang="en-US">
-                    <a:noFill/>
-                  </a:rPr>
-                  <a:t> </a:t>
-                </a:r>
-              </a:p>
-            </p:txBody>
-          </p:sp>
-        </mc:Fallback>
-      </mc:AlternateContent>
-      <mc:AlternateContent xmlns:mc="http://schemas.openxmlformats.org/markup-compatibility/2006">
-        <mc:Choice xmlns:a14="http://schemas.microsoft.com/office/drawing/2010/main" Requires="a14">
-          <p:sp>
-            <p:nvSpPr>
-              <p:cNvPr id="137" name="矩形 136">
-                <a:extLst>
-                  <a:ext uri="{FF2B5EF4-FFF2-40B4-BE49-F238E27FC236}">
-                    <a16:creationId xmlns:a16="http://schemas.microsoft.com/office/drawing/2014/main" id="{778139C7-0D2D-4EEB-8A6F-2E9519499325}"/>
-                  </a:ext>
-                </a:extLst>
-              </p:cNvPr>
-              <p:cNvSpPr/>
-              <p:nvPr/>
-            </p:nvSpPr>
-            <p:spPr>
-              <a:xfrm>
-                <a:off x="7829787" y="5899208"/>
-                <a:ext cx="2148409" cy="528030"/>
-              </a:xfrm>
-              <a:prstGeom prst="rect">
-                <a:avLst/>
-              </a:prstGeom>
-            </p:spPr>
-            <p:txBody>
-              <a:bodyPr wrap="none">
-                <a:spAutoFit/>
-              </a:bodyPr>
-              <a:lstStyle/>
-              <a:p>
-                <a:pPr/>
-                <a14:m>
-                  <m:oMathPara xmlns:m="http://schemas.openxmlformats.org/officeDocument/2006/math">
-                    <m:oMathParaPr>
-                      <m:jc m:val="centerGroup"/>
-                    </m:oMathParaPr>
-                    <m:oMath xmlns:m="http://schemas.openxmlformats.org/officeDocument/2006/math">
-                      <m:sSup>
-                        <m:sSupPr>
-                          <m:ctrlPr>
-                            <a:rPr lang="en-US" altLang="zh-TW" sz="2000" i="1" dirty="0">
-                              <a:latin typeface="Cambria Math" panose="02040503050406030204" pitchFamily="18" charset="0"/>
-                              <a:ea typeface="Cambria Math" panose="02040503050406030204" pitchFamily="18" charset="0"/>
-                            </a:rPr>
-                          </m:ctrlPr>
-                        </m:sSupPr>
-                        <m:e>
-                          <m:d>
-                            <m:dPr>
-                              <m:begChr m:val="|"/>
-                              <m:endChr m:val="|"/>
-                              <m:ctrlPr>
-                                <a:rPr lang="en-US" altLang="zh-TW" sz="2000" i="1" dirty="0">
-                                  <a:latin typeface="Cambria Math" panose="02040503050406030204" pitchFamily="18" charset="0"/>
-                                  <a:ea typeface="Cambria Math" panose="02040503050406030204" pitchFamily="18" charset="0"/>
-                                </a:rPr>
-                              </m:ctrlPr>
-                            </m:dPr>
-                            <m:e>
-                              <m:sSubSup>
-                                <m:sSubSupPr>
-                                  <m:ctrlPr>
-                                    <a:rPr lang="en-US" altLang="zh-TW" sz="2000" i="1">
-                                      <a:latin typeface="Cambria Math" panose="02040503050406030204" pitchFamily="18" charset="0"/>
-                                    </a:rPr>
-                                  </m:ctrlPr>
-                                </m:sSubSupPr>
-                                <m:e>
-                                  <m:r>
-                                    <a:rPr lang="en-US" altLang="zh-TW" sz="2000" i="1">
-                                      <a:latin typeface="Cambria Math" panose="02040503050406030204" pitchFamily="18" charset="0"/>
-                                    </a:rPr>
-                                    <m:t>𝑓</m:t>
-                                  </m:r>
-                                </m:e>
-                                <m:sub>
-                                  <m:r>
-                                    <a:rPr lang="en-US" altLang="zh-TW" sz="2000" i="1">
-                                      <a:latin typeface="Cambria Math" panose="02040503050406030204" pitchFamily="18" charset="0"/>
-                                    </a:rPr>
-                                    <m:t>𝑆</m:t>
-                                  </m:r>
-                                </m:sub>
-                                <m:sup>
-                                  <m:acc>
-                                    <m:accPr>
-                                      <m:chr m:val="̂"/>
-                                      <m:ctrlPr>
-                                        <a:rPr lang="en-US" altLang="zh-TW" sz="2000" b="1" i="1">
-                                          <a:latin typeface="Cambria Math" panose="02040503050406030204" pitchFamily="18" charset="0"/>
-                                        </a:rPr>
-                                      </m:ctrlPr>
-                                    </m:accPr>
-                                    <m:e>
-                                      <m:r>
-                                        <a:rPr lang="zh-TW" altLang="en-US" sz="2000" b="1" i="1">
-                                          <a:latin typeface="Cambria Math" panose="02040503050406030204" pitchFamily="18" charset="0"/>
-                                        </a:rPr>
-                                        <m:t>𝜺</m:t>
-                                      </m:r>
-                                    </m:e>
-                                  </m:acc>
-                                  <m:r>
-                                    <a:rPr lang="en-US" altLang="zh-TW" sz="2000" i="1">
-                                      <a:latin typeface="Cambria Math" panose="02040503050406030204" pitchFamily="18" charset="0"/>
-                                    </a:rPr>
-                                    <m:t>,0</m:t>
-                                  </m:r>
-                                </m:sup>
-                              </m:sSubSup>
-                              <m:d>
-                                <m:dPr>
-                                  <m:ctrlPr>
-                                    <a:rPr lang="en-US" altLang="zh-TW" sz="2000" i="1">
-                                      <a:latin typeface="Cambria Math" panose="02040503050406030204" pitchFamily="18" charset="0"/>
-                                    </a:rPr>
-                                  </m:ctrlPr>
-                                </m:dPr>
-                                <m:e>
-                                  <m:sSub>
-                                    <m:sSubPr>
-                                      <m:ctrlPr>
-                                        <a:rPr lang="en-US" altLang="zh-TW" sz="2000" i="1">
-                                          <a:latin typeface="Cambria Math" panose="02040503050406030204" pitchFamily="18" charset="0"/>
-                                        </a:rPr>
-                                      </m:ctrlPr>
-                                    </m:sSubPr>
-                                    <m:e>
-                                      <m:r>
-                                        <a:rPr lang="en-US" altLang="zh-TW" sz="2000" b="1" i="1">
-                                          <a:latin typeface="Cambria Math" panose="02040503050406030204" pitchFamily="18" charset="0"/>
-                                        </a:rPr>
-                                        <m:t>𝑹</m:t>
-                                      </m:r>
-                                    </m:e>
-                                    <m:sub>
-                                      <m:r>
-                                        <a:rPr lang="en-US" altLang="zh-TW" sz="2000" i="1">
-                                          <a:latin typeface="Cambria Math" panose="02040503050406030204" pitchFamily="18" charset="0"/>
-                                        </a:rPr>
-                                        <m:t>𝑐</m:t>
-                                      </m:r>
-                                    </m:sub>
-                                  </m:sSub>
-                                  <m:r>
-                                    <a:rPr lang="en-US" altLang="zh-TW" sz="2000" i="1">
-                                      <a:latin typeface="Cambria Math" panose="02040503050406030204" pitchFamily="18" charset="0"/>
-                                    </a:rPr>
-                                    <m:t>, </m:t>
-                                  </m:r>
-                                  <m:r>
-                                    <a:rPr lang="en-US" altLang="zh-TW" sz="2000" b="1" i="1">
-                                      <a:latin typeface="Cambria Math" panose="02040503050406030204" pitchFamily="18" charset="0"/>
-                                    </a:rPr>
-                                    <m:t>𝒓</m:t>
-                                  </m:r>
-                                  <m:r>
-                                    <a:rPr lang="en-US" altLang="zh-TW" sz="2000" i="1">
-                                      <a:latin typeface="Cambria Math" panose="02040503050406030204" pitchFamily="18" charset="0"/>
-                                    </a:rPr>
-                                    <m:t>=0</m:t>
-                                  </m:r>
-                                </m:e>
-                              </m:d>
-                            </m:e>
-                          </m:d>
-                        </m:e>
-                        <m:sup>
-                          <m:r>
-                            <a:rPr lang="en-US" altLang="zh-TW" sz="2000" i="1" dirty="0">
-                              <a:latin typeface="Cambria Math" panose="02040503050406030204" pitchFamily="18" charset="0"/>
-                              <a:ea typeface="Cambria Math" panose="02040503050406030204" pitchFamily="18" charset="0"/>
-                            </a:rPr>
-                            <m:t>2</m:t>
-                          </m:r>
-                        </m:sup>
-                      </m:sSup>
-                    </m:oMath>
-                  </m:oMathPara>
-                </a14:m>
-                <a:endParaRPr lang="zh-TW" altLang="en-US" sz="2000" dirty="0"/>
-              </a:p>
-            </p:txBody>
-          </p:sp>
-        </mc:Choice>
-        <mc:Fallback>
-          <p:sp>
-            <p:nvSpPr>
-              <p:cNvPr id="137" name="矩形 136">
-                <a:extLst>
-                  <a:ext uri="{FF2B5EF4-FFF2-40B4-BE49-F238E27FC236}">
-                    <a16:creationId xmlns:a16="http://schemas.microsoft.com/office/drawing/2014/main" id="{778139C7-0D2D-4EEB-8A6F-2E9519499325}"/>
-                  </a:ext>
-                </a:extLst>
-              </p:cNvPr>
-              <p:cNvSpPr>
-                <a:spLocks noRot="1" noChangeAspect="1" noMove="1" noResize="1" noEditPoints="1" noAdjustHandles="1" noChangeArrowheads="1" noChangeShapeType="1" noTextEdit="1"/>
-              </p:cNvSpPr>
-              <p:nvPr/>
-            </p:nvSpPr>
-            <p:spPr>
-              <a:xfrm>
-                <a:off x="7829787" y="5899208"/>
-                <a:ext cx="2148409" cy="528030"/>
-              </a:xfrm>
-              <a:prstGeom prst="rect">
-                <a:avLst/>
-              </a:prstGeom>
-              <a:blipFill>
-                <a:blip r:embed="rId24"/>
-                <a:stretch>
-                  <a:fillRect/>
-                </a:stretch>
-              </a:blipFill>
-            </p:spPr>
-            <p:txBody>
-              <a:bodyPr/>
-              <a:lstStyle/>
-              <a:p>
-                <a:r>
-                  <a:rPr lang="zh-TW" altLang="en-US">
-                    <a:noFill/>
-                  </a:rPr>
-                  <a:t> </a:t>
-                </a:r>
-              </a:p>
-            </p:txBody>
-          </p:sp>
-        </mc:Fallback>
-      </mc:AlternateContent>
-      <mc:AlternateContent xmlns:mc="http://schemas.openxmlformats.org/markup-compatibility/2006">
-        <mc:Choice xmlns:a14="http://schemas.microsoft.com/office/drawing/2010/main" Requires="a14">
+      <mc:AlternateContent xmlns:mc="http://schemas.openxmlformats.org/markup-compatibility/2006" xmlns:a14="http://schemas.microsoft.com/office/drawing/2010/main">
+        <mc:Choice Requires="a14">
           <p:sp>
             <p:nvSpPr>
               <p:cNvPr id="138" name="矩形 137">
@@ -15849,7 +14620,7 @@
             </p:txBody>
           </p:sp>
         </mc:Choice>
-        <mc:Fallback>
+        <mc:Fallback xmlns="">
           <p:sp>
             <p:nvSpPr>
               <p:cNvPr id="138" name="矩形 137">
@@ -15894,8 +14665,8 @@
           </p:sp>
         </mc:Fallback>
       </mc:AlternateContent>
-      <mc:AlternateContent xmlns:mc="http://schemas.openxmlformats.org/markup-compatibility/2006">
-        <mc:Choice xmlns:a14="http://schemas.microsoft.com/office/drawing/2010/main" Requires="a14">
+      <mc:AlternateContent xmlns:mc="http://schemas.openxmlformats.org/markup-compatibility/2006" xmlns:a14="http://schemas.microsoft.com/office/drawing/2010/main">
+        <mc:Choice Requires="a14">
           <p:sp>
             <p:nvSpPr>
               <p:cNvPr id="139" name="矩形 138">
@@ -15965,7 +14736,7 @@
             </p:txBody>
           </p:sp>
         </mc:Choice>
-        <mc:Fallback>
+        <mc:Fallback xmlns="">
           <p:sp>
             <p:nvSpPr>
               <p:cNvPr id="139" name="矩形 138">
@@ -16537,10 +15308,1495 @@
         <mc:Choice xmlns:a14="http://schemas.microsoft.com/office/drawing/2010/main" Requires="a14">
           <p:sp>
             <p:nvSpPr>
-              <p:cNvPr id="49" name="矩形: 圓角 48">
+              <p:cNvPr id="58" name="矩形 57">
                 <a:extLst>
                   <a:ext uri="{FF2B5EF4-FFF2-40B4-BE49-F238E27FC236}">
-                    <a16:creationId xmlns:a16="http://schemas.microsoft.com/office/drawing/2014/main" id="{16782163-D549-4658-B681-1624D52CF2B0}"/>
+                    <a16:creationId xmlns:a16="http://schemas.microsoft.com/office/drawing/2014/main" id="{A27D555D-E0E9-4263-81A9-DC721505759E}"/>
+                  </a:ext>
+                </a:extLst>
+              </p:cNvPr>
+              <p:cNvSpPr/>
+              <p:nvPr/>
+            </p:nvSpPr>
+            <p:spPr>
+              <a:xfrm>
+                <a:off x="1357999" y="5965307"/>
+                <a:ext cx="1070998" cy="555152"/>
+              </a:xfrm>
+              <a:prstGeom prst="rect">
+                <a:avLst/>
+              </a:prstGeom>
+            </p:spPr>
+            <p:txBody>
+              <a:bodyPr wrap="none">
+                <a:spAutoFit/>
+              </a:bodyPr>
+              <a:lstStyle/>
+              <a:p>
+                <a:pPr algn="r"/>
+                <a14:m>
+                  <m:oMathPara xmlns:m="http://schemas.openxmlformats.org/officeDocument/2006/math">
+                    <m:oMathParaPr>
+                      <m:jc m:val="centerGroup"/>
+                    </m:oMathParaPr>
+                    <m:oMath xmlns:m="http://schemas.openxmlformats.org/officeDocument/2006/math">
+                      <m:sSup>
+                        <m:sSupPr>
+                          <m:ctrlPr>
+                            <a:rPr lang="en-US" altLang="zh-TW" sz="2000" i="1">
+                              <a:latin typeface="Cambria Math" panose="02040503050406030204" pitchFamily="18" charset="0"/>
+                            </a:rPr>
+                          </m:ctrlPr>
+                        </m:sSupPr>
+                        <m:e>
+                          <m:d>
+                            <m:dPr>
+                              <m:begChr m:val="|"/>
+                              <m:endChr m:val="|"/>
+                              <m:ctrlPr>
+                                <a:rPr lang="en-US" altLang="zh-TW" sz="2000" i="1">
+                                  <a:latin typeface="Cambria Math" panose="02040503050406030204" pitchFamily="18" charset="0"/>
+                                </a:rPr>
+                              </m:ctrlPr>
+                            </m:dPr>
+                            <m:e>
+                              <m:sSubSup>
+                                <m:sSubSupPr>
+                                  <m:ctrlPr>
+                                    <a:rPr lang="en-US" altLang="zh-TW" sz="2000" i="1">
+                                      <a:latin typeface="Cambria Math" panose="02040503050406030204" pitchFamily="18" charset="0"/>
+                                    </a:rPr>
+                                  </m:ctrlPr>
+                                </m:sSubSupPr>
+                                <m:e>
+                                  <m:acc>
+                                    <m:accPr>
+                                      <m:chr m:val="̃"/>
+                                      <m:ctrlPr>
+                                        <a:rPr lang="en-US" altLang="zh-TW" sz="2000" i="1">
+                                          <a:latin typeface="Cambria Math" panose="02040503050406030204" pitchFamily="18" charset="0"/>
+                                        </a:rPr>
+                                      </m:ctrlPr>
+                                    </m:accPr>
+                                    <m:e>
+                                      <m:r>
+                                        <a:rPr lang="en-US" altLang="zh-TW" sz="2000" i="1">
+                                          <a:latin typeface="Cambria Math" panose="02040503050406030204" pitchFamily="18" charset="0"/>
+                                        </a:rPr>
+                                        <m:t>𝑀</m:t>
+                                      </m:r>
+                                    </m:e>
+                                  </m:acc>
+                                </m:e>
+                                <m:sub>
+                                  <m:r>
+                                    <a:rPr lang="en-US" altLang="zh-TW" sz="2000" i="1">
+                                      <a:latin typeface="Cambria Math" panose="02040503050406030204" pitchFamily="18" charset="0"/>
+                                    </a:rPr>
+                                    <m:t>𝑆</m:t>
+                                  </m:r>
+                                  <m:r>
+                                    <a:rPr lang="en-US" altLang="zh-TW" sz="2000" i="1">
+                                      <a:latin typeface="Cambria Math" panose="02040503050406030204" pitchFamily="18" charset="0"/>
+                                    </a:rPr>
+                                    <m:t>,</m:t>
+                                  </m:r>
+                                  <m:r>
+                                    <a:rPr lang="en-US" altLang="zh-TW" sz="2000" b="1" i="1">
+                                      <a:latin typeface="Cambria Math" panose="02040503050406030204" pitchFamily="18" charset="0"/>
+                                    </a:rPr>
+                                    <m:t>𝑸</m:t>
+                                  </m:r>
+                                </m:sub>
+                                <m:sup>
+                                  <m:acc>
+                                    <m:accPr>
+                                      <m:chr m:val="̂"/>
+                                      <m:ctrlPr>
+                                        <a:rPr lang="en-US" altLang="zh-TW" sz="2000" b="1" i="1">
+                                          <a:latin typeface="Cambria Math" panose="02040503050406030204" pitchFamily="18" charset="0"/>
+                                        </a:rPr>
+                                      </m:ctrlPr>
+                                    </m:accPr>
+                                    <m:e>
+                                      <m:r>
+                                        <a:rPr lang="zh-TW" altLang="en-US" sz="2000" b="1" i="1">
+                                          <a:latin typeface="Cambria Math" panose="02040503050406030204" pitchFamily="18" charset="0"/>
+                                        </a:rPr>
+                                        <m:t>𝜺</m:t>
+                                      </m:r>
+                                    </m:e>
+                                  </m:acc>
+                                  <m:r>
+                                    <a:rPr lang="en-US" altLang="zh-TW" sz="2000" i="1">
+                                      <a:latin typeface="Cambria Math" panose="02040503050406030204" pitchFamily="18" charset="0"/>
+                                    </a:rPr>
+                                    <m:t>,0</m:t>
+                                  </m:r>
+                                </m:sup>
+                              </m:sSubSup>
+                            </m:e>
+                          </m:d>
+                        </m:e>
+                        <m:sup>
+                          <m:r>
+                            <a:rPr lang="en-US" altLang="zh-TW" sz="2000" i="1">
+                              <a:latin typeface="Cambria Math" panose="02040503050406030204" pitchFamily="18" charset="0"/>
+                            </a:rPr>
+                            <m:t>2</m:t>
+                          </m:r>
+                        </m:sup>
+                      </m:sSup>
+                      <m:r>
+                        <a:rPr lang="en-US" altLang="zh-TW" sz="2000" i="1">
+                          <a:latin typeface="Cambria Math" panose="02040503050406030204" pitchFamily="18" charset="0"/>
+                        </a:rPr>
+                        <m:t> </m:t>
+                      </m:r>
+                    </m:oMath>
+                  </m:oMathPara>
+                </a14:m>
+                <a:endParaRPr lang="zh-TW" altLang="en-US" sz="2000" dirty="0"/>
+              </a:p>
+            </p:txBody>
+          </p:sp>
+        </mc:Choice>
+        <mc:Fallback>
+          <p:sp>
+            <p:nvSpPr>
+              <p:cNvPr id="58" name="矩形 57">
+                <a:extLst>
+                  <a:ext uri="{FF2B5EF4-FFF2-40B4-BE49-F238E27FC236}">
+                    <a16:creationId xmlns:a16="http://schemas.microsoft.com/office/drawing/2014/main" id="{A27D555D-E0E9-4263-81A9-DC721505759E}"/>
+                  </a:ext>
+                </a:extLst>
+              </p:cNvPr>
+              <p:cNvSpPr>
+                <a:spLocks noRot="1" noChangeAspect="1" noMove="1" noResize="1" noEditPoints="1" noAdjustHandles="1" noChangeArrowheads="1" noChangeShapeType="1" noTextEdit="1"/>
+              </p:cNvSpPr>
+              <p:nvPr/>
+            </p:nvSpPr>
+            <p:spPr>
+              <a:xfrm>
+                <a:off x="1357999" y="5965307"/>
+                <a:ext cx="1070998" cy="555152"/>
+              </a:xfrm>
+              <a:prstGeom prst="rect">
+                <a:avLst/>
+              </a:prstGeom>
+              <a:blipFill>
+                <a:blip r:embed="rId34"/>
+                <a:stretch>
+                  <a:fillRect/>
+                </a:stretch>
+              </a:blipFill>
+            </p:spPr>
+            <p:txBody>
+              <a:bodyPr/>
+              <a:lstStyle/>
+              <a:p>
+                <a:r>
+                  <a:rPr lang="zh-TW" altLang="en-US">
+                    <a:noFill/>
+                  </a:rPr>
+                  <a:t> </a:t>
+                </a:r>
+              </a:p>
+            </p:txBody>
+          </p:sp>
+        </mc:Fallback>
+      </mc:AlternateContent>
+      <mc:AlternateContent xmlns:mc="http://schemas.openxmlformats.org/markup-compatibility/2006">
+        <mc:Choice xmlns:a14="http://schemas.microsoft.com/office/drawing/2010/main" Requires="a14">
+          <p:sp>
+            <p:nvSpPr>
+              <p:cNvPr id="59" name="矩形 58">
+                <a:extLst>
+                  <a:ext uri="{FF2B5EF4-FFF2-40B4-BE49-F238E27FC236}">
+                    <a16:creationId xmlns:a16="http://schemas.microsoft.com/office/drawing/2014/main" id="{86DF7DBF-3CF5-4F4B-A69E-0FEA242323E4}"/>
+                  </a:ext>
+                </a:extLst>
+              </p:cNvPr>
+              <p:cNvSpPr/>
+              <p:nvPr/>
+            </p:nvSpPr>
+            <p:spPr>
+              <a:xfrm>
+                <a:off x="3017747" y="5831681"/>
+                <a:ext cx="1803699" cy="688778"/>
+              </a:xfrm>
+              <a:prstGeom prst="rect">
+                <a:avLst/>
+              </a:prstGeom>
+            </p:spPr>
+            <p:txBody>
+              <a:bodyPr wrap="none">
+                <a:spAutoFit/>
+              </a:bodyPr>
+              <a:lstStyle/>
+              <a:p>
+                <a:pPr/>
+                <a14:m>
+                  <m:oMathPara xmlns:m="http://schemas.openxmlformats.org/officeDocument/2006/math">
+                    <m:oMathParaPr>
+                      <m:jc m:val="centerGroup"/>
+                    </m:oMathParaPr>
+                    <m:oMath xmlns:m="http://schemas.openxmlformats.org/officeDocument/2006/math">
+                      <m:sSup>
+                        <m:sSupPr>
+                          <m:ctrlPr>
+                            <a:rPr lang="en-US" altLang="zh-TW" sz="1600" i="1" dirty="0" smtClean="0">
+                              <a:latin typeface="Cambria Math" panose="02040503050406030204" pitchFamily="18" charset="0"/>
+                              <a:ea typeface="Cambria Math" panose="02040503050406030204" pitchFamily="18" charset="0"/>
+                            </a:rPr>
+                          </m:ctrlPr>
+                        </m:sSupPr>
+                        <m:e>
+                          <m:d>
+                            <m:dPr>
+                              <m:begChr m:val="|"/>
+                              <m:endChr m:val="|"/>
+                              <m:ctrlPr>
+                                <a:rPr lang="en-US" altLang="zh-TW" sz="1600" i="1" dirty="0">
+                                  <a:latin typeface="Cambria Math" panose="02040503050406030204" pitchFamily="18" charset="0"/>
+                                  <a:ea typeface="Cambria Math" panose="02040503050406030204" pitchFamily="18" charset="0"/>
+                                </a:rPr>
+                              </m:ctrlPr>
+                            </m:dPr>
+                            <m:e>
+                              <m:nary>
+                                <m:naryPr>
+                                  <m:chr m:val="∑"/>
+                                  <m:limLoc m:val="subSup"/>
+                                  <m:supHide m:val="on"/>
+                                  <m:ctrlPr>
+                                    <a:rPr lang="en-US" altLang="zh-TW" sz="1600" i="1" dirty="0" smtClean="0">
+                                      <a:latin typeface="Cambria Math" panose="02040503050406030204" pitchFamily="18" charset="0"/>
+                                      <a:ea typeface="Cambria Math" panose="02040503050406030204" pitchFamily="18" charset="0"/>
+                                    </a:rPr>
+                                  </m:ctrlPr>
+                                </m:naryPr>
+                                <m:sub>
+                                  <m:r>
+                                    <a:rPr lang="en-US" altLang="zh-TW" sz="1600" b="1" i="1">
+                                      <a:latin typeface="Cambria Math" panose="02040503050406030204" pitchFamily="18" charset="0"/>
+                                    </a:rPr>
+                                    <m:t>𝑸</m:t>
+                                  </m:r>
+                                </m:sub>
+                                <m:sup/>
+                                <m:e>
+                                  <m:sSubSup>
+                                    <m:sSubSupPr>
+                                      <m:ctrlPr>
+                                        <a:rPr lang="en-US" altLang="zh-TW" sz="1600" i="1">
+                                          <a:latin typeface="Cambria Math" panose="02040503050406030204" pitchFamily="18" charset="0"/>
+                                        </a:rPr>
+                                      </m:ctrlPr>
+                                    </m:sSubSupPr>
+                                    <m:e>
+                                      <m:acc>
+                                        <m:accPr>
+                                          <m:chr m:val="̃"/>
+                                          <m:ctrlPr>
+                                            <a:rPr lang="en-US" altLang="zh-TW" sz="1600" i="1">
+                                              <a:latin typeface="Cambria Math" panose="02040503050406030204" pitchFamily="18" charset="0"/>
+                                            </a:rPr>
+                                          </m:ctrlPr>
+                                        </m:accPr>
+                                        <m:e>
+                                          <m:r>
+                                            <a:rPr lang="en-US" altLang="zh-TW" sz="1600" i="1">
+                                              <a:latin typeface="Cambria Math" panose="02040503050406030204" pitchFamily="18" charset="0"/>
+                                            </a:rPr>
+                                            <m:t>𝑀</m:t>
+                                          </m:r>
+                                        </m:e>
+                                      </m:acc>
+                                    </m:e>
+                                    <m:sub>
+                                      <m:r>
+                                        <a:rPr lang="en-US" altLang="zh-TW" sz="1600" i="1">
+                                          <a:latin typeface="Cambria Math" panose="02040503050406030204" pitchFamily="18" charset="0"/>
+                                        </a:rPr>
+                                        <m:t>𝑆</m:t>
+                                      </m:r>
+                                      <m:r>
+                                        <a:rPr lang="en-US" altLang="zh-TW" sz="1600" i="1">
+                                          <a:latin typeface="Cambria Math" panose="02040503050406030204" pitchFamily="18" charset="0"/>
+                                        </a:rPr>
+                                        <m:t>,</m:t>
+                                      </m:r>
+                                      <m:r>
+                                        <a:rPr lang="en-US" altLang="zh-TW" sz="1600" b="1" i="1">
+                                          <a:latin typeface="Cambria Math" panose="02040503050406030204" pitchFamily="18" charset="0"/>
+                                        </a:rPr>
+                                        <m:t>𝑸</m:t>
+                                      </m:r>
+                                    </m:sub>
+                                    <m:sup>
+                                      <m:acc>
+                                        <m:accPr>
+                                          <m:chr m:val="̂"/>
+                                          <m:ctrlPr>
+                                            <a:rPr lang="en-US" altLang="zh-TW" sz="1600" b="1" i="1">
+                                              <a:latin typeface="Cambria Math" panose="02040503050406030204" pitchFamily="18" charset="0"/>
+                                            </a:rPr>
+                                          </m:ctrlPr>
+                                        </m:accPr>
+                                        <m:e>
+                                          <m:r>
+                                            <a:rPr lang="zh-TW" altLang="en-US" sz="1600" b="1" i="1">
+                                              <a:latin typeface="Cambria Math" panose="02040503050406030204" pitchFamily="18" charset="0"/>
+                                            </a:rPr>
+                                            <m:t>𝜺</m:t>
+                                          </m:r>
+                                        </m:e>
+                                      </m:acc>
+                                      <m:r>
+                                        <a:rPr lang="en-US" altLang="zh-TW" sz="1600" i="1">
+                                          <a:latin typeface="Cambria Math" panose="02040503050406030204" pitchFamily="18" charset="0"/>
+                                        </a:rPr>
+                                        <m:t>,0</m:t>
+                                      </m:r>
+                                    </m:sup>
+                                  </m:sSubSup>
+                                </m:e>
+                              </m:nary>
+                              <m:sSup>
+                                <m:sSupPr>
+                                  <m:ctrlPr>
+                                    <a:rPr lang="en-US" altLang="zh-TW" sz="1600" b="0" i="1" dirty="0" smtClean="0">
+                                      <a:latin typeface="Cambria Math" panose="02040503050406030204" pitchFamily="18" charset="0"/>
+                                      <a:ea typeface="Cambria Math" panose="02040503050406030204" pitchFamily="18" charset="0"/>
+                                    </a:rPr>
+                                  </m:ctrlPr>
+                                </m:sSupPr>
+                                <m:e>
+                                  <m:r>
+                                    <a:rPr lang="en-US" altLang="zh-TW" sz="1600" b="0" i="1" dirty="0" smtClean="0">
+                                      <a:latin typeface="Cambria Math" panose="02040503050406030204" pitchFamily="18" charset="0"/>
+                                      <a:ea typeface="Cambria Math" panose="02040503050406030204" pitchFamily="18" charset="0"/>
+                                    </a:rPr>
+                                    <m:t>𝑒</m:t>
+                                  </m:r>
+                                </m:e>
+                                <m:sup>
+                                  <m:r>
+                                    <a:rPr lang="en-US" altLang="zh-TW" sz="1600" b="0" i="1" dirty="0" smtClean="0">
+                                      <a:latin typeface="Cambria Math" panose="02040503050406030204" pitchFamily="18" charset="0"/>
+                                      <a:ea typeface="Cambria Math" panose="02040503050406030204" pitchFamily="18" charset="0"/>
+                                    </a:rPr>
+                                    <m:t>𝑖</m:t>
+                                  </m:r>
+                                  <m:r>
+                                    <a:rPr lang="en-US" altLang="zh-TW" sz="1600" b="1" i="1" dirty="0" smtClean="0">
+                                      <a:latin typeface="Cambria Math" panose="02040503050406030204" pitchFamily="18" charset="0"/>
+                                      <a:ea typeface="Cambria Math" panose="02040503050406030204" pitchFamily="18" charset="0"/>
+                                    </a:rPr>
+                                    <m:t>𝑸</m:t>
+                                  </m:r>
+                                  <m:r>
+                                    <a:rPr lang="en-US" altLang="zh-TW" sz="1600" b="0" i="1" dirty="0" smtClean="0">
+                                      <a:latin typeface="Cambria Math" panose="02040503050406030204" pitchFamily="18" charset="0"/>
+                                      <a:ea typeface="Cambria Math" panose="02040503050406030204" pitchFamily="18" charset="0"/>
+                                    </a:rPr>
+                                    <m:t>⋅</m:t>
+                                  </m:r>
+                                  <m:sSub>
+                                    <m:sSubPr>
+                                      <m:ctrlPr>
+                                        <a:rPr lang="en-US" altLang="zh-TW" sz="1600" b="0" i="1" dirty="0" smtClean="0">
+                                          <a:latin typeface="Cambria Math" panose="02040503050406030204" pitchFamily="18" charset="0"/>
+                                          <a:ea typeface="Cambria Math" panose="02040503050406030204" pitchFamily="18" charset="0"/>
+                                        </a:rPr>
+                                      </m:ctrlPr>
+                                    </m:sSubPr>
+                                    <m:e>
+                                      <m:r>
+                                        <a:rPr lang="en-US" altLang="zh-TW" sz="1600" b="1" i="1" dirty="0" smtClean="0">
+                                          <a:latin typeface="Cambria Math" panose="02040503050406030204" pitchFamily="18" charset="0"/>
+                                          <a:ea typeface="Cambria Math" panose="02040503050406030204" pitchFamily="18" charset="0"/>
+                                        </a:rPr>
+                                        <m:t>𝑹</m:t>
+                                      </m:r>
+                                    </m:e>
+                                    <m:sub>
+                                      <m:r>
+                                        <a:rPr lang="en-US" altLang="zh-TW" sz="1600" b="0" i="1" dirty="0" smtClean="0">
+                                          <a:latin typeface="Cambria Math" panose="02040503050406030204" pitchFamily="18" charset="0"/>
+                                          <a:ea typeface="Cambria Math" panose="02040503050406030204" pitchFamily="18" charset="0"/>
+                                        </a:rPr>
+                                        <m:t>𝑐</m:t>
+                                      </m:r>
+                                    </m:sub>
+                                  </m:sSub>
+                                </m:sup>
+                              </m:sSup>
+                            </m:e>
+                          </m:d>
+                        </m:e>
+                        <m:sup>
+                          <m:r>
+                            <a:rPr lang="en-US" altLang="zh-TW" sz="1600" i="1" dirty="0">
+                              <a:latin typeface="Cambria Math" panose="02040503050406030204" pitchFamily="18" charset="0"/>
+                              <a:ea typeface="Cambria Math" panose="02040503050406030204" pitchFamily="18" charset="0"/>
+                            </a:rPr>
+                            <m:t>2</m:t>
+                          </m:r>
+                        </m:sup>
+                      </m:sSup>
+                    </m:oMath>
+                  </m:oMathPara>
+                </a14:m>
+                <a:endParaRPr lang="zh-TW" altLang="en-US" sz="1600" dirty="0"/>
+              </a:p>
+            </p:txBody>
+          </p:sp>
+        </mc:Choice>
+        <mc:Fallback>
+          <p:sp>
+            <p:nvSpPr>
+              <p:cNvPr id="59" name="矩形 58">
+                <a:extLst>
+                  <a:ext uri="{FF2B5EF4-FFF2-40B4-BE49-F238E27FC236}">
+                    <a16:creationId xmlns:a16="http://schemas.microsoft.com/office/drawing/2014/main" id="{86DF7DBF-3CF5-4F4B-A69E-0FEA242323E4}"/>
+                  </a:ext>
+                </a:extLst>
+              </p:cNvPr>
+              <p:cNvSpPr>
+                <a:spLocks noRot="1" noChangeAspect="1" noMove="1" noResize="1" noEditPoints="1" noAdjustHandles="1" noChangeArrowheads="1" noChangeShapeType="1" noTextEdit="1"/>
+              </p:cNvSpPr>
+              <p:nvPr/>
+            </p:nvSpPr>
+            <p:spPr>
+              <a:xfrm>
+                <a:off x="3017747" y="5831681"/>
+                <a:ext cx="1803699" cy="688778"/>
+              </a:xfrm>
+              <a:prstGeom prst="rect">
+                <a:avLst/>
+              </a:prstGeom>
+              <a:blipFill>
+                <a:blip r:embed="rId35"/>
+                <a:stretch>
+                  <a:fillRect/>
+                </a:stretch>
+              </a:blipFill>
+            </p:spPr>
+            <p:txBody>
+              <a:bodyPr/>
+              <a:lstStyle/>
+              <a:p>
+                <a:r>
+                  <a:rPr lang="zh-TW" altLang="en-US">
+                    <a:noFill/>
+                  </a:rPr>
+                  <a:t> </a:t>
+                </a:r>
+              </a:p>
+            </p:txBody>
+          </p:sp>
+        </mc:Fallback>
+      </mc:AlternateContent>
+      <mc:AlternateContent xmlns:mc="http://schemas.openxmlformats.org/markup-compatibility/2006">
+        <mc:Choice xmlns:a14="http://schemas.microsoft.com/office/drawing/2010/main" Requires="a14">
+          <p:sp>
+            <p:nvSpPr>
+              <p:cNvPr id="60" name="矩形 59">
+                <a:extLst>
+                  <a:ext uri="{FF2B5EF4-FFF2-40B4-BE49-F238E27FC236}">
+                    <a16:creationId xmlns:a16="http://schemas.microsoft.com/office/drawing/2014/main" id="{E6D26F11-2494-4642-BFE0-9CA02FDA84D0}"/>
+                  </a:ext>
+                </a:extLst>
+              </p:cNvPr>
+              <p:cNvSpPr/>
+              <p:nvPr/>
+            </p:nvSpPr>
+            <p:spPr>
+              <a:xfrm>
+                <a:off x="6239632" y="1352357"/>
+                <a:ext cx="1070998" cy="555152"/>
+              </a:xfrm>
+              <a:prstGeom prst="rect">
+                <a:avLst/>
+              </a:prstGeom>
+            </p:spPr>
+            <p:txBody>
+              <a:bodyPr wrap="none">
+                <a:spAutoFit/>
+              </a:bodyPr>
+              <a:lstStyle/>
+              <a:p>
+                <a:pPr algn="r"/>
+                <a14:m>
+                  <m:oMathPara xmlns:m="http://schemas.openxmlformats.org/officeDocument/2006/math">
+                    <m:oMathParaPr>
+                      <m:jc m:val="centerGroup"/>
+                    </m:oMathParaPr>
+                    <m:oMath xmlns:m="http://schemas.openxmlformats.org/officeDocument/2006/math">
+                      <m:sSup>
+                        <m:sSupPr>
+                          <m:ctrlPr>
+                            <a:rPr lang="en-US" altLang="zh-TW" sz="2000" i="1">
+                              <a:latin typeface="Cambria Math" panose="02040503050406030204" pitchFamily="18" charset="0"/>
+                            </a:rPr>
+                          </m:ctrlPr>
+                        </m:sSupPr>
+                        <m:e>
+                          <m:d>
+                            <m:dPr>
+                              <m:begChr m:val="|"/>
+                              <m:endChr m:val="|"/>
+                              <m:ctrlPr>
+                                <a:rPr lang="en-US" altLang="zh-TW" sz="2000" i="1">
+                                  <a:latin typeface="Cambria Math" panose="02040503050406030204" pitchFamily="18" charset="0"/>
+                                </a:rPr>
+                              </m:ctrlPr>
+                            </m:dPr>
+                            <m:e>
+                              <m:sSubSup>
+                                <m:sSubSupPr>
+                                  <m:ctrlPr>
+                                    <a:rPr lang="en-US" altLang="zh-TW" sz="2000" i="1">
+                                      <a:latin typeface="Cambria Math" panose="02040503050406030204" pitchFamily="18" charset="0"/>
+                                    </a:rPr>
+                                  </m:ctrlPr>
+                                </m:sSubSupPr>
+                                <m:e>
+                                  <m:acc>
+                                    <m:accPr>
+                                      <m:chr m:val="̃"/>
+                                      <m:ctrlPr>
+                                        <a:rPr lang="en-US" altLang="zh-TW" sz="2000" i="1">
+                                          <a:latin typeface="Cambria Math" panose="02040503050406030204" pitchFamily="18" charset="0"/>
+                                        </a:rPr>
+                                      </m:ctrlPr>
+                                    </m:accPr>
+                                    <m:e>
+                                      <m:r>
+                                        <a:rPr lang="en-US" altLang="zh-TW" sz="2000" i="1">
+                                          <a:latin typeface="Cambria Math" panose="02040503050406030204" pitchFamily="18" charset="0"/>
+                                        </a:rPr>
+                                        <m:t>𝑀</m:t>
+                                      </m:r>
+                                    </m:e>
+                                  </m:acc>
+                                </m:e>
+                                <m:sub>
+                                  <m:r>
+                                    <a:rPr lang="en-US" altLang="zh-TW" sz="2000" i="1">
+                                      <a:latin typeface="Cambria Math" panose="02040503050406030204" pitchFamily="18" charset="0"/>
+                                    </a:rPr>
+                                    <m:t>𝑆</m:t>
+                                  </m:r>
+                                  <m:r>
+                                    <a:rPr lang="en-US" altLang="zh-TW" sz="2000" i="1">
+                                      <a:latin typeface="Cambria Math" panose="02040503050406030204" pitchFamily="18" charset="0"/>
+                                    </a:rPr>
+                                    <m:t>,</m:t>
+                                  </m:r>
+                                  <m:r>
+                                    <a:rPr lang="en-US" altLang="zh-TW" sz="2000" b="1" i="1">
+                                      <a:latin typeface="Cambria Math" panose="02040503050406030204" pitchFamily="18" charset="0"/>
+                                    </a:rPr>
+                                    <m:t>𝑸</m:t>
+                                  </m:r>
+                                </m:sub>
+                                <m:sup>
+                                  <m:acc>
+                                    <m:accPr>
+                                      <m:chr m:val="̂"/>
+                                      <m:ctrlPr>
+                                        <a:rPr lang="en-US" altLang="zh-TW" sz="2000" b="1" i="1">
+                                          <a:latin typeface="Cambria Math" panose="02040503050406030204" pitchFamily="18" charset="0"/>
+                                        </a:rPr>
+                                      </m:ctrlPr>
+                                    </m:accPr>
+                                    <m:e>
+                                      <m:r>
+                                        <a:rPr lang="zh-TW" altLang="en-US" sz="2000" b="1" i="1">
+                                          <a:latin typeface="Cambria Math" panose="02040503050406030204" pitchFamily="18" charset="0"/>
+                                        </a:rPr>
+                                        <m:t>𝜺</m:t>
+                                      </m:r>
+                                    </m:e>
+                                  </m:acc>
+                                  <m:r>
+                                    <a:rPr lang="en-US" altLang="zh-TW" sz="2000" i="1">
+                                      <a:latin typeface="Cambria Math" panose="02040503050406030204" pitchFamily="18" charset="0"/>
+                                    </a:rPr>
+                                    <m:t>,0</m:t>
+                                  </m:r>
+                                </m:sup>
+                              </m:sSubSup>
+                            </m:e>
+                          </m:d>
+                        </m:e>
+                        <m:sup>
+                          <m:r>
+                            <a:rPr lang="en-US" altLang="zh-TW" sz="2000" i="1">
+                              <a:latin typeface="Cambria Math" panose="02040503050406030204" pitchFamily="18" charset="0"/>
+                            </a:rPr>
+                            <m:t>2</m:t>
+                          </m:r>
+                        </m:sup>
+                      </m:sSup>
+                      <m:r>
+                        <a:rPr lang="en-US" altLang="zh-TW" sz="2000" i="1">
+                          <a:latin typeface="Cambria Math" panose="02040503050406030204" pitchFamily="18" charset="0"/>
+                        </a:rPr>
+                        <m:t> </m:t>
+                      </m:r>
+                    </m:oMath>
+                  </m:oMathPara>
+                </a14:m>
+                <a:endParaRPr lang="zh-TW" altLang="en-US" sz="2000" dirty="0"/>
+              </a:p>
+            </p:txBody>
+          </p:sp>
+        </mc:Choice>
+        <mc:Fallback>
+          <p:sp>
+            <p:nvSpPr>
+              <p:cNvPr id="60" name="矩形 59">
+                <a:extLst>
+                  <a:ext uri="{FF2B5EF4-FFF2-40B4-BE49-F238E27FC236}">
+                    <a16:creationId xmlns:a16="http://schemas.microsoft.com/office/drawing/2014/main" id="{E6D26F11-2494-4642-BFE0-9CA02FDA84D0}"/>
+                  </a:ext>
+                </a:extLst>
+              </p:cNvPr>
+              <p:cNvSpPr>
+                <a:spLocks noRot="1" noChangeAspect="1" noMove="1" noResize="1" noEditPoints="1" noAdjustHandles="1" noChangeArrowheads="1" noChangeShapeType="1" noTextEdit="1"/>
+              </p:cNvSpPr>
+              <p:nvPr/>
+            </p:nvSpPr>
+            <p:spPr>
+              <a:xfrm>
+                <a:off x="6239632" y="1352357"/>
+                <a:ext cx="1070998" cy="555152"/>
+              </a:xfrm>
+              <a:prstGeom prst="rect">
+                <a:avLst/>
+              </a:prstGeom>
+              <a:blipFill>
+                <a:blip r:embed="rId36"/>
+                <a:stretch>
+                  <a:fillRect/>
+                </a:stretch>
+              </a:blipFill>
+            </p:spPr>
+            <p:txBody>
+              <a:bodyPr/>
+              <a:lstStyle/>
+              <a:p>
+                <a:r>
+                  <a:rPr lang="zh-TW" altLang="en-US">
+                    <a:noFill/>
+                  </a:rPr>
+                  <a:t> </a:t>
+                </a:r>
+              </a:p>
+            </p:txBody>
+          </p:sp>
+        </mc:Fallback>
+      </mc:AlternateContent>
+      <mc:AlternateContent xmlns:mc="http://schemas.openxmlformats.org/markup-compatibility/2006">
+        <mc:Choice xmlns:a14="http://schemas.microsoft.com/office/drawing/2010/main" Requires="a14">
+          <p:sp>
+            <p:nvSpPr>
+              <p:cNvPr id="61" name="矩形 60">
+                <a:extLst>
+                  <a:ext uri="{FF2B5EF4-FFF2-40B4-BE49-F238E27FC236}">
+                    <a16:creationId xmlns:a16="http://schemas.microsoft.com/office/drawing/2014/main" id="{5AE04757-F78B-4D53-B64B-2C20CA7BC827}"/>
+                  </a:ext>
+                </a:extLst>
+              </p:cNvPr>
+              <p:cNvSpPr/>
+              <p:nvPr/>
+            </p:nvSpPr>
+            <p:spPr>
+              <a:xfrm>
+                <a:off x="7899380" y="1218731"/>
+                <a:ext cx="1803699" cy="688778"/>
+              </a:xfrm>
+              <a:prstGeom prst="rect">
+                <a:avLst/>
+              </a:prstGeom>
+            </p:spPr>
+            <p:txBody>
+              <a:bodyPr wrap="none">
+                <a:spAutoFit/>
+              </a:bodyPr>
+              <a:lstStyle/>
+              <a:p>
+                <a:pPr/>
+                <a14:m>
+                  <m:oMathPara xmlns:m="http://schemas.openxmlformats.org/officeDocument/2006/math">
+                    <m:oMathParaPr>
+                      <m:jc m:val="centerGroup"/>
+                    </m:oMathParaPr>
+                    <m:oMath xmlns:m="http://schemas.openxmlformats.org/officeDocument/2006/math">
+                      <m:sSup>
+                        <m:sSupPr>
+                          <m:ctrlPr>
+                            <a:rPr lang="en-US" altLang="zh-TW" sz="1600" i="1" dirty="0" smtClean="0">
+                              <a:latin typeface="Cambria Math" panose="02040503050406030204" pitchFamily="18" charset="0"/>
+                              <a:ea typeface="Cambria Math" panose="02040503050406030204" pitchFamily="18" charset="0"/>
+                            </a:rPr>
+                          </m:ctrlPr>
+                        </m:sSupPr>
+                        <m:e>
+                          <m:d>
+                            <m:dPr>
+                              <m:begChr m:val="|"/>
+                              <m:endChr m:val="|"/>
+                              <m:ctrlPr>
+                                <a:rPr lang="en-US" altLang="zh-TW" sz="1600" i="1" dirty="0">
+                                  <a:latin typeface="Cambria Math" panose="02040503050406030204" pitchFamily="18" charset="0"/>
+                                  <a:ea typeface="Cambria Math" panose="02040503050406030204" pitchFamily="18" charset="0"/>
+                                </a:rPr>
+                              </m:ctrlPr>
+                            </m:dPr>
+                            <m:e>
+                              <m:nary>
+                                <m:naryPr>
+                                  <m:chr m:val="∑"/>
+                                  <m:limLoc m:val="subSup"/>
+                                  <m:supHide m:val="on"/>
+                                  <m:ctrlPr>
+                                    <a:rPr lang="en-US" altLang="zh-TW" sz="1600" i="1" dirty="0" smtClean="0">
+                                      <a:latin typeface="Cambria Math" panose="02040503050406030204" pitchFamily="18" charset="0"/>
+                                      <a:ea typeface="Cambria Math" panose="02040503050406030204" pitchFamily="18" charset="0"/>
+                                    </a:rPr>
+                                  </m:ctrlPr>
+                                </m:naryPr>
+                                <m:sub>
+                                  <m:r>
+                                    <a:rPr lang="en-US" altLang="zh-TW" sz="1600" b="1" i="1">
+                                      <a:latin typeface="Cambria Math" panose="02040503050406030204" pitchFamily="18" charset="0"/>
+                                    </a:rPr>
+                                    <m:t>𝑸</m:t>
+                                  </m:r>
+                                </m:sub>
+                                <m:sup/>
+                                <m:e>
+                                  <m:sSubSup>
+                                    <m:sSubSupPr>
+                                      <m:ctrlPr>
+                                        <a:rPr lang="en-US" altLang="zh-TW" sz="1600" i="1">
+                                          <a:latin typeface="Cambria Math" panose="02040503050406030204" pitchFamily="18" charset="0"/>
+                                        </a:rPr>
+                                      </m:ctrlPr>
+                                    </m:sSubSupPr>
+                                    <m:e>
+                                      <m:acc>
+                                        <m:accPr>
+                                          <m:chr m:val="̃"/>
+                                          <m:ctrlPr>
+                                            <a:rPr lang="en-US" altLang="zh-TW" sz="1600" i="1">
+                                              <a:latin typeface="Cambria Math" panose="02040503050406030204" pitchFamily="18" charset="0"/>
+                                            </a:rPr>
+                                          </m:ctrlPr>
+                                        </m:accPr>
+                                        <m:e>
+                                          <m:r>
+                                            <a:rPr lang="en-US" altLang="zh-TW" sz="1600" i="1">
+                                              <a:latin typeface="Cambria Math" panose="02040503050406030204" pitchFamily="18" charset="0"/>
+                                            </a:rPr>
+                                            <m:t>𝑀</m:t>
+                                          </m:r>
+                                        </m:e>
+                                      </m:acc>
+                                    </m:e>
+                                    <m:sub>
+                                      <m:r>
+                                        <a:rPr lang="en-US" altLang="zh-TW" sz="1600" i="1">
+                                          <a:latin typeface="Cambria Math" panose="02040503050406030204" pitchFamily="18" charset="0"/>
+                                        </a:rPr>
+                                        <m:t>𝑆</m:t>
+                                      </m:r>
+                                      <m:r>
+                                        <a:rPr lang="en-US" altLang="zh-TW" sz="1600" i="1">
+                                          <a:latin typeface="Cambria Math" panose="02040503050406030204" pitchFamily="18" charset="0"/>
+                                        </a:rPr>
+                                        <m:t>,</m:t>
+                                      </m:r>
+                                      <m:r>
+                                        <a:rPr lang="en-US" altLang="zh-TW" sz="1600" b="1" i="1">
+                                          <a:latin typeface="Cambria Math" panose="02040503050406030204" pitchFamily="18" charset="0"/>
+                                        </a:rPr>
+                                        <m:t>𝑸</m:t>
+                                      </m:r>
+                                    </m:sub>
+                                    <m:sup>
+                                      <m:acc>
+                                        <m:accPr>
+                                          <m:chr m:val="̂"/>
+                                          <m:ctrlPr>
+                                            <a:rPr lang="en-US" altLang="zh-TW" sz="1600" b="1" i="1">
+                                              <a:latin typeface="Cambria Math" panose="02040503050406030204" pitchFamily="18" charset="0"/>
+                                            </a:rPr>
+                                          </m:ctrlPr>
+                                        </m:accPr>
+                                        <m:e>
+                                          <m:r>
+                                            <a:rPr lang="zh-TW" altLang="en-US" sz="1600" b="1" i="1">
+                                              <a:latin typeface="Cambria Math" panose="02040503050406030204" pitchFamily="18" charset="0"/>
+                                            </a:rPr>
+                                            <m:t>𝜺</m:t>
+                                          </m:r>
+                                        </m:e>
+                                      </m:acc>
+                                      <m:r>
+                                        <a:rPr lang="en-US" altLang="zh-TW" sz="1600" i="1">
+                                          <a:latin typeface="Cambria Math" panose="02040503050406030204" pitchFamily="18" charset="0"/>
+                                        </a:rPr>
+                                        <m:t>,0</m:t>
+                                      </m:r>
+                                    </m:sup>
+                                  </m:sSubSup>
+                                </m:e>
+                              </m:nary>
+                              <m:sSup>
+                                <m:sSupPr>
+                                  <m:ctrlPr>
+                                    <a:rPr lang="en-US" altLang="zh-TW" sz="1600" b="0" i="1" dirty="0" smtClean="0">
+                                      <a:latin typeface="Cambria Math" panose="02040503050406030204" pitchFamily="18" charset="0"/>
+                                      <a:ea typeface="Cambria Math" panose="02040503050406030204" pitchFamily="18" charset="0"/>
+                                    </a:rPr>
+                                  </m:ctrlPr>
+                                </m:sSupPr>
+                                <m:e>
+                                  <m:r>
+                                    <a:rPr lang="en-US" altLang="zh-TW" sz="1600" b="0" i="1" dirty="0" smtClean="0">
+                                      <a:latin typeface="Cambria Math" panose="02040503050406030204" pitchFamily="18" charset="0"/>
+                                      <a:ea typeface="Cambria Math" panose="02040503050406030204" pitchFamily="18" charset="0"/>
+                                    </a:rPr>
+                                    <m:t>𝑒</m:t>
+                                  </m:r>
+                                </m:e>
+                                <m:sup>
+                                  <m:r>
+                                    <a:rPr lang="en-US" altLang="zh-TW" sz="1600" b="0" i="1" dirty="0" smtClean="0">
+                                      <a:latin typeface="Cambria Math" panose="02040503050406030204" pitchFamily="18" charset="0"/>
+                                      <a:ea typeface="Cambria Math" panose="02040503050406030204" pitchFamily="18" charset="0"/>
+                                    </a:rPr>
+                                    <m:t>𝑖</m:t>
+                                  </m:r>
+                                  <m:r>
+                                    <a:rPr lang="en-US" altLang="zh-TW" sz="1600" b="1" i="1" dirty="0" smtClean="0">
+                                      <a:latin typeface="Cambria Math" panose="02040503050406030204" pitchFamily="18" charset="0"/>
+                                      <a:ea typeface="Cambria Math" panose="02040503050406030204" pitchFamily="18" charset="0"/>
+                                    </a:rPr>
+                                    <m:t>𝑸</m:t>
+                                  </m:r>
+                                  <m:r>
+                                    <a:rPr lang="en-US" altLang="zh-TW" sz="1600" b="0" i="1" dirty="0" smtClean="0">
+                                      <a:latin typeface="Cambria Math" panose="02040503050406030204" pitchFamily="18" charset="0"/>
+                                      <a:ea typeface="Cambria Math" panose="02040503050406030204" pitchFamily="18" charset="0"/>
+                                    </a:rPr>
+                                    <m:t>⋅</m:t>
+                                  </m:r>
+                                  <m:sSub>
+                                    <m:sSubPr>
+                                      <m:ctrlPr>
+                                        <a:rPr lang="en-US" altLang="zh-TW" sz="1600" b="0" i="1" dirty="0" smtClean="0">
+                                          <a:latin typeface="Cambria Math" panose="02040503050406030204" pitchFamily="18" charset="0"/>
+                                          <a:ea typeface="Cambria Math" panose="02040503050406030204" pitchFamily="18" charset="0"/>
+                                        </a:rPr>
+                                      </m:ctrlPr>
+                                    </m:sSubPr>
+                                    <m:e>
+                                      <m:r>
+                                        <a:rPr lang="en-US" altLang="zh-TW" sz="1600" b="1" i="1" dirty="0" smtClean="0">
+                                          <a:latin typeface="Cambria Math" panose="02040503050406030204" pitchFamily="18" charset="0"/>
+                                          <a:ea typeface="Cambria Math" panose="02040503050406030204" pitchFamily="18" charset="0"/>
+                                        </a:rPr>
+                                        <m:t>𝑹</m:t>
+                                      </m:r>
+                                    </m:e>
+                                    <m:sub>
+                                      <m:r>
+                                        <a:rPr lang="en-US" altLang="zh-TW" sz="1600" b="0" i="1" dirty="0" smtClean="0">
+                                          <a:latin typeface="Cambria Math" panose="02040503050406030204" pitchFamily="18" charset="0"/>
+                                          <a:ea typeface="Cambria Math" panose="02040503050406030204" pitchFamily="18" charset="0"/>
+                                        </a:rPr>
+                                        <m:t>𝑐</m:t>
+                                      </m:r>
+                                    </m:sub>
+                                  </m:sSub>
+                                </m:sup>
+                              </m:sSup>
+                            </m:e>
+                          </m:d>
+                        </m:e>
+                        <m:sup>
+                          <m:r>
+                            <a:rPr lang="en-US" altLang="zh-TW" sz="1600" i="1" dirty="0">
+                              <a:latin typeface="Cambria Math" panose="02040503050406030204" pitchFamily="18" charset="0"/>
+                              <a:ea typeface="Cambria Math" panose="02040503050406030204" pitchFamily="18" charset="0"/>
+                            </a:rPr>
+                            <m:t>2</m:t>
+                          </m:r>
+                        </m:sup>
+                      </m:sSup>
+                    </m:oMath>
+                  </m:oMathPara>
+                </a14:m>
+                <a:endParaRPr lang="zh-TW" altLang="en-US" sz="1600" dirty="0"/>
+              </a:p>
+            </p:txBody>
+          </p:sp>
+        </mc:Choice>
+        <mc:Fallback>
+          <p:sp>
+            <p:nvSpPr>
+              <p:cNvPr id="61" name="矩形 60">
+                <a:extLst>
+                  <a:ext uri="{FF2B5EF4-FFF2-40B4-BE49-F238E27FC236}">
+                    <a16:creationId xmlns:a16="http://schemas.microsoft.com/office/drawing/2014/main" id="{5AE04757-F78B-4D53-B64B-2C20CA7BC827}"/>
+                  </a:ext>
+                </a:extLst>
+              </p:cNvPr>
+              <p:cNvSpPr>
+                <a:spLocks noRot="1" noChangeAspect="1" noMove="1" noResize="1" noEditPoints="1" noAdjustHandles="1" noChangeArrowheads="1" noChangeShapeType="1" noTextEdit="1"/>
+              </p:cNvSpPr>
+              <p:nvPr/>
+            </p:nvSpPr>
+            <p:spPr>
+              <a:xfrm>
+                <a:off x="7899380" y="1218731"/>
+                <a:ext cx="1803699" cy="688778"/>
+              </a:xfrm>
+              <a:prstGeom prst="rect">
+                <a:avLst/>
+              </a:prstGeom>
+              <a:blipFill>
+                <a:blip r:embed="rId37"/>
+                <a:stretch>
+                  <a:fillRect/>
+                </a:stretch>
+              </a:blipFill>
+            </p:spPr>
+            <p:txBody>
+              <a:bodyPr/>
+              <a:lstStyle/>
+              <a:p>
+                <a:r>
+                  <a:rPr lang="zh-TW" altLang="en-US">
+                    <a:noFill/>
+                  </a:rPr>
+                  <a:t> </a:t>
+                </a:r>
+              </a:p>
+            </p:txBody>
+          </p:sp>
+        </mc:Fallback>
+      </mc:AlternateContent>
+      <mc:AlternateContent xmlns:mc="http://schemas.openxmlformats.org/markup-compatibility/2006">
+        <mc:Choice xmlns:a14="http://schemas.microsoft.com/office/drawing/2010/main" Requires="a14">
+          <p:sp>
+            <p:nvSpPr>
+              <p:cNvPr id="76" name="矩形 75">
+                <a:extLst>
+                  <a:ext uri="{FF2B5EF4-FFF2-40B4-BE49-F238E27FC236}">
+                    <a16:creationId xmlns:a16="http://schemas.microsoft.com/office/drawing/2014/main" id="{D987A762-019B-46D3-9CB8-EDAF171F6489}"/>
+                  </a:ext>
+                </a:extLst>
+              </p:cNvPr>
+              <p:cNvSpPr/>
+              <p:nvPr/>
+            </p:nvSpPr>
+            <p:spPr>
+              <a:xfrm>
+                <a:off x="6239632" y="5965307"/>
+                <a:ext cx="1070998" cy="555152"/>
+              </a:xfrm>
+              <a:prstGeom prst="rect">
+                <a:avLst/>
+              </a:prstGeom>
+            </p:spPr>
+            <p:txBody>
+              <a:bodyPr wrap="none">
+                <a:spAutoFit/>
+              </a:bodyPr>
+              <a:lstStyle/>
+              <a:p>
+                <a:pPr algn="r"/>
+                <a14:m>
+                  <m:oMathPara xmlns:m="http://schemas.openxmlformats.org/officeDocument/2006/math">
+                    <m:oMathParaPr>
+                      <m:jc m:val="centerGroup"/>
+                    </m:oMathParaPr>
+                    <m:oMath xmlns:m="http://schemas.openxmlformats.org/officeDocument/2006/math">
+                      <m:sSup>
+                        <m:sSupPr>
+                          <m:ctrlPr>
+                            <a:rPr lang="en-US" altLang="zh-TW" sz="2000" i="1">
+                              <a:latin typeface="Cambria Math" panose="02040503050406030204" pitchFamily="18" charset="0"/>
+                            </a:rPr>
+                          </m:ctrlPr>
+                        </m:sSupPr>
+                        <m:e>
+                          <m:d>
+                            <m:dPr>
+                              <m:begChr m:val="|"/>
+                              <m:endChr m:val="|"/>
+                              <m:ctrlPr>
+                                <a:rPr lang="en-US" altLang="zh-TW" sz="2000" i="1">
+                                  <a:latin typeface="Cambria Math" panose="02040503050406030204" pitchFamily="18" charset="0"/>
+                                </a:rPr>
+                              </m:ctrlPr>
+                            </m:dPr>
+                            <m:e>
+                              <m:sSubSup>
+                                <m:sSubSupPr>
+                                  <m:ctrlPr>
+                                    <a:rPr lang="en-US" altLang="zh-TW" sz="2000" i="1">
+                                      <a:latin typeface="Cambria Math" panose="02040503050406030204" pitchFamily="18" charset="0"/>
+                                    </a:rPr>
+                                  </m:ctrlPr>
+                                </m:sSubSupPr>
+                                <m:e>
+                                  <m:acc>
+                                    <m:accPr>
+                                      <m:chr m:val="̃"/>
+                                      <m:ctrlPr>
+                                        <a:rPr lang="en-US" altLang="zh-TW" sz="2000" i="1">
+                                          <a:latin typeface="Cambria Math" panose="02040503050406030204" pitchFamily="18" charset="0"/>
+                                        </a:rPr>
+                                      </m:ctrlPr>
+                                    </m:accPr>
+                                    <m:e>
+                                      <m:r>
+                                        <a:rPr lang="en-US" altLang="zh-TW" sz="2000" i="1">
+                                          <a:latin typeface="Cambria Math" panose="02040503050406030204" pitchFamily="18" charset="0"/>
+                                        </a:rPr>
+                                        <m:t>𝑀</m:t>
+                                      </m:r>
+                                    </m:e>
+                                  </m:acc>
+                                </m:e>
+                                <m:sub>
+                                  <m:r>
+                                    <a:rPr lang="en-US" altLang="zh-TW" sz="2000" i="1">
+                                      <a:latin typeface="Cambria Math" panose="02040503050406030204" pitchFamily="18" charset="0"/>
+                                    </a:rPr>
+                                    <m:t>𝑆</m:t>
+                                  </m:r>
+                                  <m:r>
+                                    <a:rPr lang="en-US" altLang="zh-TW" sz="2000" i="1">
+                                      <a:latin typeface="Cambria Math" panose="02040503050406030204" pitchFamily="18" charset="0"/>
+                                    </a:rPr>
+                                    <m:t>,</m:t>
+                                  </m:r>
+                                  <m:r>
+                                    <a:rPr lang="en-US" altLang="zh-TW" sz="2000" b="1" i="1">
+                                      <a:latin typeface="Cambria Math" panose="02040503050406030204" pitchFamily="18" charset="0"/>
+                                    </a:rPr>
+                                    <m:t>𝑸</m:t>
+                                  </m:r>
+                                </m:sub>
+                                <m:sup>
+                                  <m:acc>
+                                    <m:accPr>
+                                      <m:chr m:val="̂"/>
+                                      <m:ctrlPr>
+                                        <a:rPr lang="en-US" altLang="zh-TW" sz="2000" b="1" i="1">
+                                          <a:latin typeface="Cambria Math" panose="02040503050406030204" pitchFamily="18" charset="0"/>
+                                        </a:rPr>
+                                      </m:ctrlPr>
+                                    </m:accPr>
+                                    <m:e>
+                                      <m:r>
+                                        <a:rPr lang="zh-TW" altLang="en-US" sz="2000" b="1" i="1">
+                                          <a:latin typeface="Cambria Math" panose="02040503050406030204" pitchFamily="18" charset="0"/>
+                                        </a:rPr>
+                                        <m:t>𝜺</m:t>
+                                      </m:r>
+                                    </m:e>
+                                  </m:acc>
+                                  <m:r>
+                                    <a:rPr lang="en-US" altLang="zh-TW" sz="2000" i="1">
+                                      <a:latin typeface="Cambria Math" panose="02040503050406030204" pitchFamily="18" charset="0"/>
+                                    </a:rPr>
+                                    <m:t>,0</m:t>
+                                  </m:r>
+                                </m:sup>
+                              </m:sSubSup>
+                            </m:e>
+                          </m:d>
+                        </m:e>
+                        <m:sup>
+                          <m:r>
+                            <a:rPr lang="en-US" altLang="zh-TW" sz="2000" i="1">
+                              <a:latin typeface="Cambria Math" panose="02040503050406030204" pitchFamily="18" charset="0"/>
+                            </a:rPr>
+                            <m:t>2</m:t>
+                          </m:r>
+                        </m:sup>
+                      </m:sSup>
+                      <m:r>
+                        <a:rPr lang="en-US" altLang="zh-TW" sz="2000" i="1">
+                          <a:latin typeface="Cambria Math" panose="02040503050406030204" pitchFamily="18" charset="0"/>
+                        </a:rPr>
+                        <m:t> </m:t>
+                      </m:r>
+                    </m:oMath>
+                  </m:oMathPara>
+                </a14:m>
+                <a:endParaRPr lang="zh-TW" altLang="en-US" sz="2000" dirty="0"/>
+              </a:p>
+            </p:txBody>
+          </p:sp>
+        </mc:Choice>
+        <mc:Fallback>
+          <p:sp>
+            <p:nvSpPr>
+              <p:cNvPr id="76" name="矩形 75">
+                <a:extLst>
+                  <a:ext uri="{FF2B5EF4-FFF2-40B4-BE49-F238E27FC236}">
+                    <a16:creationId xmlns:a16="http://schemas.microsoft.com/office/drawing/2014/main" id="{D987A762-019B-46D3-9CB8-EDAF171F6489}"/>
+                  </a:ext>
+                </a:extLst>
+              </p:cNvPr>
+              <p:cNvSpPr>
+                <a:spLocks noRot="1" noChangeAspect="1" noMove="1" noResize="1" noEditPoints="1" noAdjustHandles="1" noChangeArrowheads="1" noChangeShapeType="1" noTextEdit="1"/>
+              </p:cNvSpPr>
+              <p:nvPr/>
+            </p:nvSpPr>
+            <p:spPr>
+              <a:xfrm>
+                <a:off x="6239632" y="5965307"/>
+                <a:ext cx="1070998" cy="555152"/>
+              </a:xfrm>
+              <a:prstGeom prst="rect">
+                <a:avLst/>
+              </a:prstGeom>
+              <a:blipFill>
+                <a:blip r:embed="rId38"/>
+                <a:stretch>
+                  <a:fillRect/>
+                </a:stretch>
+              </a:blipFill>
+            </p:spPr>
+            <p:txBody>
+              <a:bodyPr/>
+              <a:lstStyle/>
+              <a:p>
+                <a:r>
+                  <a:rPr lang="zh-TW" altLang="en-US">
+                    <a:noFill/>
+                  </a:rPr>
+                  <a:t> </a:t>
+                </a:r>
+              </a:p>
+            </p:txBody>
+          </p:sp>
+        </mc:Fallback>
+      </mc:AlternateContent>
+      <mc:AlternateContent xmlns:mc="http://schemas.openxmlformats.org/markup-compatibility/2006">
+        <mc:Choice xmlns:a14="http://schemas.microsoft.com/office/drawing/2010/main" Requires="a14">
+          <p:sp>
+            <p:nvSpPr>
+              <p:cNvPr id="83" name="矩形 82">
+                <a:extLst>
+                  <a:ext uri="{FF2B5EF4-FFF2-40B4-BE49-F238E27FC236}">
+                    <a16:creationId xmlns:a16="http://schemas.microsoft.com/office/drawing/2014/main" id="{E9278611-997A-4C33-A522-E671784693B9}"/>
+                  </a:ext>
+                </a:extLst>
+              </p:cNvPr>
+              <p:cNvSpPr/>
+              <p:nvPr/>
+            </p:nvSpPr>
+            <p:spPr>
+              <a:xfrm>
+                <a:off x="7899380" y="5831681"/>
+                <a:ext cx="1803699" cy="688778"/>
+              </a:xfrm>
+              <a:prstGeom prst="rect">
+                <a:avLst/>
+              </a:prstGeom>
+            </p:spPr>
+            <p:txBody>
+              <a:bodyPr wrap="none">
+                <a:spAutoFit/>
+              </a:bodyPr>
+              <a:lstStyle/>
+              <a:p>
+                <a:pPr/>
+                <a14:m>
+                  <m:oMathPara xmlns:m="http://schemas.openxmlformats.org/officeDocument/2006/math">
+                    <m:oMathParaPr>
+                      <m:jc m:val="centerGroup"/>
+                    </m:oMathParaPr>
+                    <m:oMath xmlns:m="http://schemas.openxmlformats.org/officeDocument/2006/math">
+                      <m:sSup>
+                        <m:sSupPr>
+                          <m:ctrlPr>
+                            <a:rPr lang="en-US" altLang="zh-TW" sz="1600" i="1" dirty="0" smtClean="0">
+                              <a:latin typeface="Cambria Math" panose="02040503050406030204" pitchFamily="18" charset="0"/>
+                              <a:ea typeface="Cambria Math" panose="02040503050406030204" pitchFamily="18" charset="0"/>
+                            </a:rPr>
+                          </m:ctrlPr>
+                        </m:sSupPr>
+                        <m:e>
+                          <m:d>
+                            <m:dPr>
+                              <m:begChr m:val="|"/>
+                              <m:endChr m:val="|"/>
+                              <m:ctrlPr>
+                                <a:rPr lang="en-US" altLang="zh-TW" sz="1600" i="1" dirty="0">
+                                  <a:latin typeface="Cambria Math" panose="02040503050406030204" pitchFamily="18" charset="0"/>
+                                  <a:ea typeface="Cambria Math" panose="02040503050406030204" pitchFamily="18" charset="0"/>
+                                </a:rPr>
+                              </m:ctrlPr>
+                            </m:dPr>
+                            <m:e>
+                              <m:nary>
+                                <m:naryPr>
+                                  <m:chr m:val="∑"/>
+                                  <m:limLoc m:val="subSup"/>
+                                  <m:supHide m:val="on"/>
+                                  <m:ctrlPr>
+                                    <a:rPr lang="en-US" altLang="zh-TW" sz="1600" i="1" dirty="0" smtClean="0">
+                                      <a:latin typeface="Cambria Math" panose="02040503050406030204" pitchFamily="18" charset="0"/>
+                                      <a:ea typeface="Cambria Math" panose="02040503050406030204" pitchFamily="18" charset="0"/>
+                                    </a:rPr>
+                                  </m:ctrlPr>
+                                </m:naryPr>
+                                <m:sub>
+                                  <m:r>
+                                    <a:rPr lang="en-US" altLang="zh-TW" sz="1600" b="1" i="1">
+                                      <a:latin typeface="Cambria Math" panose="02040503050406030204" pitchFamily="18" charset="0"/>
+                                    </a:rPr>
+                                    <m:t>𝑸</m:t>
+                                  </m:r>
+                                </m:sub>
+                                <m:sup/>
+                                <m:e>
+                                  <m:sSubSup>
+                                    <m:sSubSupPr>
+                                      <m:ctrlPr>
+                                        <a:rPr lang="en-US" altLang="zh-TW" sz="1600" i="1">
+                                          <a:latin typeface="Cambria Math" panose="02040503050406030204" pitchFamily="18" charset="0"/>
+                                        </a:rPr>
+                                      </m:ctrlPr>
+                                    </m:sSubSupPr>
+                                    <m:e>
+                                      <m:acc>
+                                        <m:accPr>
+                                          <m:chr m:val="̃"/>
+                                          <m:ctrlPr>
+                                            <a:rPr lang="en-US" altLang="zh-TW" sz="1600" i="1">
+                                              <a:latin typeface="Cambria Math" panose="02040503050406030204" pitchFamily="18" charset="0"/>
+                                            </a:rPr>
+                                          </m:ctrlPr>
+                                        </m:accPr>
+                                        <m:e>
+                                          <m:r>
+                                            <a:rPr lang="en-US" altLang="zh-TW" sz="1600" i="1">
+                                              <a:latin typeface="Cambria Math" panose="02040503050406030204" pitchFamily="18" charset="0"/>
+                                            </a:rPr>
+                                            <m:t>𝑀</m:t>
+                                          </m:r>
+                                        </m:e>
+                                      </m:acc>
+                                    </m:e>
+                                    <m:sub>
+                                      <m:r>
+                                        <a:rPr lang="en-US" altLang="zh-TW" sz="1600" i="1">
+                                          <a:latin typeface="Cambria Math" panose="02040503050406030204" pitchFamily="18" charset="0"/>
+                                        </a:rPr>
+                                        <m:t>𝑆</m:t>
+                                      </m:r>
+                                      <m:r>
+                                        <a:rPr lang="en-US" altLang="zh-TW" sz="1600" i="1">
+                                          <a:latin typeface="Cambria Math" panose="02040503050406030204" pitchFamily="18" charset="0"/>
+                                        </a:rPr>
+                                        <m:t>,</m:t>
+                                      </m:r>
+                                      <m:r>
+                                        <a:rPr lang="en-US" altLang="zh-TW" sz="1600" b="1" i="1">
+                                          <a:latin typeface="Cambria Math" panose="02040503050406030204" pitchFamily="18" charset="0"/>
+                                        </a:rPr>
+                                        <m:t>𝑸</m:t>
+                                      </m:r>
+                                    </m:sub>
+                                    <m:sup>
+                                      <m:acc>
+                                        <m:accPr>
+                                          <m:chr m:val="̂"/>
+                                          <m:ctrlPr>
+                                            <a:rPr lang="en-US" altLang="zh-TW" sz="1600" b="1" i="1">
+                                              <a:latin typeface="Cambria Math" panose="02040503050406030204" pitchFamily="18" charset="0"/>
+                                            </a:rPr>
+                                          </m:ctrlPr>
+                                        </m:accPr>
+                                        <m:e>
+                                          <m:r>
+                                            <a:rPr lang="zh-TW" altLang="en-US" sz="1600" b="1" i="1">
+                                              <a:latin typeface="Cambria Math" panose="02040503050406030204" pitchFamily="18" charset="0"/>
+                                            </a:rPr>
+                                            <m:t>𝜺</m:t>
+                                          </m:r>
+                                        </m:e>
+                                      </m:acc>
+                                      <m:r>
+                                        <a:rPr lang="en-US" altLang="zh-TW" sz="1600" i="1">
+                                          <a:latin typeface="Cambria Math" panose="02040503050406030204" pitchFamily="18" charset="0"/>
+                                        </a:rPr>
+                                        <m:t>,0</m:t>
+                                      </m:r>
+                                    </m:sup>
+                                  </m:sSubSup>
+                                </m:e>
+                              </m:nary>
+                              <m:sSup>
+                                <m:sSupPr>
+                                  <m:ctrlPr>
+                                    <a:rPr lang="en-US" altLang="zh-TW" sz="1600" b="0" i="1" dirty="0" smtClean="0">
+                                      <a:latin typeface="Cambria Math" panose="02040503050406030204" pitchFamily="18" charset="0"/>
+                                      <a:ea typeface="Cambria Math" panose="02040503050406030204" pitchFamily="18" charset="0"/>
+                                    </a:rPr>
+                                  </m:ctrlPr>
+                                </m:sSupPr>
+                                <m:e>
+                                  <m:r>
+                                    <a:rPr lang="en-US" altLang="zh-TW" sz="1600" b="0" i="1" dirty="0" smtClean="0">
+                                      <a:latin typeface="Cambria Math" panose="02040503050406030204" pitchFamily="18" charset="0"/>
+                                      <a:ea typeface="Cambria Math" panose="02040503050406030204" pitchFamily="18" charset="0"/>
+                                    </a:rPr>
+                                    <m:t>𝑒</m:t>
+                                  </m:r>
+                                </m:e>
+                                <m:sup>
+                                  <m:r>
+                                    <a:rPr lang="en-US" altLang="zh-TW" sz="1600" b="0" i="1" dirty="0" smtClean="0">
+                                      <a:latin typeface="Cambria Math" panose="02040503050406030204" pitchFamily="18" charset="0"/>
+                                      <a:ea typeface="Cambria Math" panose="02040503050406030204" pitchFamily="18" charset="0"/>
+                                    </a:rPr>
+                                    <m:t>𝑖</m:t>
+                                  </m:r>
+                                  <m:r>
+                                    <a:rPr lang="en-US" altLang="zh-TW" sz="1600" b="1" i="1" dirty="0" smtClean="0">
+                                      <a:latin typeface="Cambria Math" panose="02040503050406030204" pitchFamily="18" charset="0"/>
+                                      <a:ea typeface="Cambria Math" panose="02040503050406030204" pitchFamily="18" charset="0"/>
+                                    </a:rPr>
+                                    <m:t>𝑸</m:t>
+                                  </m:r>
+                                  <m:r>
+                                    <a:rPr lang="en-US" altLang="zh-TW" sz="1600" b="0" i="1" dirty="0" smtClean="0">
+                                      <a:latin typeface="Cambria Math" panose="02040503050406030204" pitchFamily="18" charset="0"/>
+                                      <a:ea typeface="Cambria Math" panose="02040503050406030204" pitchFamily="18" charset="0"/>
+                                    </a:rPr>
+                                    <m:t>⋅</m:t>
+                                  </m:r>
+                                  <m:sSub>
+                                    <m:sSubPr>
+                                      <m:ctrlPr>
+                                        <a:rPr lang="en-US" altLang="zh-TW" sz="1600" b="0" i="1" dirty="0" smtClean="0">
+                                          <a:latin typeface="Cambria Math" panose="02040503050406030204" pitchFamily="18" charset="0"/>
+                                          <a:ea typeface="Cambria Math" panose="02040503050406030204" pitchFamily="18" charset="0"/>
+                                        </a:rPr>
+                                      </m:ctrlPr>
+                                    </m:sSubPr>
+                                    <m:e>
+                                      <m:r>
+                                        <a:rPr lang="en-US" altLang="zh-TW" sz="1600" b="1" i="1" dirty="0" smtClean="0">
+                                          <a:latin typeface="Cambria Math" panose="02040503050406030204" pitchFamily="18" charset="0"/>
+                                          <a:ea typeface="Cambria Math" panose="02040503050406030204" pitchFamily="18" charset="0"/>
+                                        </a:rPr>
+                                        <m:t>𝑹</m:t>
+                                      </m:r>
+                                    </m:e>
+                                    <m:sub>
+                                      <m:r>
+                                        <a:rPr lang="en-US" altLang="zh-TW" sz="1600" b="0" i="1" dirty="0" smtClean="0">
+                                          <a:latin typeface="Cambria Math" panose="02040503050406030204" pitchFamily="18" charset="0"/>
+                                          <a:ea typeface="Cambria Math" panose="02040503050406030204" pitchFamily="18" charset="0"/>
+                                        </a:rPr>
+                                        <m:t>𝑐</m:t>
+                                      </m:r>
+                                    </m:sub>
+                                  </m:sSub>
+                                </m:sup>
+                              </m:sSup>
+                            </m:e>
+                          </m:d>
+                        </m:e>
+                        <m:sup>
+                          <m:r>
+                            <a:rPr lang="en-US" altLang="zh-TW" sz="1600" i="1" dirty="0">
+                              <a:latin typeface="Cambria Math" panose="02040503050406030204" pitchFamily="18" charset="0"/>
+                              <a:ea typeface="Cambria Math" panose="02040503050406030204" pitchFamily="18" charset="0"/>
+                            </a:rPr>
+                            <m:t>2</m:t>
+                          </m:r>
+                        </m:sup>
+                      </m:sSup>
+                    </m:oMath>
+                  </m:oMathPara>
+                </a14:m>
+                <a:endParaRPr lang="zh-TW" altLang="en-US" sz="1600" dirty="0"/>
+              </a:p>
+            </p:txBody>
+          </p:sp>
+        </mc:Choice>
+        <mc:Fallback>
+          <p:sp>
+            <p:nvSpPr>
+              <p:cNvPr id="83" name="矩形 82">
+                <a:extLst>
+                  <a:ext uri="{FF2B5EF4-FFF2-40B4-BE49-F238E27FC236}">
+                    <a16:creationId xmlns:a16="http://schemas.microsoft.com/office/drawing/2014/main" id="{E9278611-997A-4C33-A522-E671784693B9}"/>
+                  </a:ext>
+                </a:extLst>
+              </p:cNvPr>
+              <p:cNvSpPr>
+                <a:spLocks noRot="1" noChangeAspect="1" noMove="1" noResize="1" noEditPoints="1" noAdjustHandles="1" noChangeArrowheads="1" noChangeShapeType="1" noTextEdit="1"/>
+              </p:cNvSpPr>
+              <p:nvPr/>
+            </p:nvSpPr>
+            <p:spPr>
+              <a:xfrm>
+                <a:off x="7899380" y="5831681"/>
+                <a:ext cx="1803699" cy="688778"/>
+              </a:xfrm>
+              <a:prstGeom prst="rect">
+                <a:avLst/>
+              </a:prstGeom>
+              <a:blipFill>
+                <a:blip r:embed="rId39"/>
+                <a:stretch>
+                  <a:fillRect/>
+                </a:stretch>
+              </a:blipFill>
+            </p:spPr>
+            <p:txBody>
+              <a:bodyPr/>
+              <a:lstStyle/>
+              <a:p>
+                <a:r>
+                  <a:rPr lang="zh-TW" altLang="en-US">
+                    <a:noFill/>
+                  </a:rPr>
+                  <a:t> </a:t>
+                </a:r>
+              </a:p>
+            </p:txBody>
+          </p:sp>
+        </mc:Fallback>
+      </mc:AlternateContent>
+      <mc:AlternateContent xmlns:mc="http://schemas.openxmlformats.org/markup-compatibility/2006">
+        <mc:Choice xmlns:a14="http://schemas.microsoft.com/office/drawing/2010/main" Requires="a14">
+          <p:sp>
+            <p:nvSpPr>
+              <p:cNvPr id="84" name="矩形: 圓角 83">
+                <a:extLst>
+                  <a:ext uri="{FF2B5EF4-FFF2-40B4-BE49-F238E27FC236}">
+                    <a16:creationId xmlns:a16="http://schemas.microsoft.com/office/drawing/2014/main" id="{700C7DF5-8189-4879-9F88-BF7F38B939F1}"/>
                   </a:ext>
                 </a:extLst>
               </p:cNvPr>
@@ -16550,7 +16806,7 @@
             <p:spPr>
               <a:xfrm>
                 <a:off x="4956000" y="5330731"/>
-                <a:ext cx="1702800" cy="604800"/>
+                <a:ext cx="2068914" cy="604800"/>
               </a:xfrm>
               <a:prstGeom prst="roundRect">
                 <a:avLst>
@@ -16608,7 +16864,7 @@
                         <m:accPr>
                           <m:chr m:val="̂"/>
                           <m:ctrlPr>
-                            <a:rPr lang="en-US" altLang="zh-TW" sz="2000" b="1" i="1">
+                            <a:rPr lang="en-US" altLang="zh-TW" sz="2000" b="1" i="1" smtClean="0">
                               <a:latin typeface="Cambria Math" panose="02040503050406030204" pitchFamily="18" charset="0"/>
                             </a:rPr>
                           </m:ctrlPr>
@@ -16628,54 +16884,90 @@
                         </a:rPr>
                         <m:t>=</m:t>
                       </m:r>
-                      <m:acc>
-                        <m:accPr>
-                          <m:chr m:val="̂"/>
+                      <m:d>
+                        <m:dPr>
+                          <m:ctrlPr>
+                            <a:rPr lang="en-US" altLang="zh-TW" sz="2000" b="1" i="1" smtClean="0">
+                              <a:latin typeface="Cambria Math" panose="02040503050406030204" pitchFamily="18" charset="0"/>
+                            </a:rPr>
+                          </m:ctrlPr>
+                        </m:dPr>
+                        <m:e>
+                          <m:acc>
+                            <m:accPr>
+                              <m:chr m:val="̂"/>
+                              <m:ctrlPr>
+                                <a:rPr lang="en-US" altLang="zh-TW" sz="2000" b="1" i="1">
+                                  <a:latin typeface="Cambria Math" panose="02040503050406030204" pitchFamily="18" charset="0"/>
+                                </a:rPr>
+                              </m:ctrlPr>
+                            </m:accPr>
+                            <m:e>
+                              <m:r>
+                                <a:rPr lang="en-US" altLang="zh-TW" sz="2000" b="1" i="1">
+                                  <a:latin typeface="Cambria Math" panose="02040503050406030204" pitchFamily="18" charset="0"/>
+                                </a:rPr>
+                                <m:t>𝒙</m:t>
+                              </m:r>
+                            </m:e>
+                          </m:acc>
+                          <m:r>
+                            <a:rPr lang="en-US" altLang="zh-TW" sz="2000" i="1">
+                              <a:latin typeface="Cambria Math" panose="02040503050406030204" pitchFamily="18" charset="0"/>
+                            </a:rPr>
+                            <m:t>−</m:t>
+                          </m:r>
+                          <m:r>
+                            <a:rPr lang="en-US" altLang="zh-TW" sz="2000" i="1">
+                              <a:latin typeface="Cambria Math" panose="02040503050406030204" pitchFamily="18" charset="0"/>
+                            </a:rPr>
+                            <m:t>𝑖</m:t>
+                          </m:r>
+                          <m:acc>
+                            <m:accPr>
+                              <m:chr m:val="̂"/>
+                              <m:ctrlPr>
+                                <a:rPr lang="en-US" altLang="zh-TW" sz="2000" b="1" i="1">
+                                  <a:latin typeface="Cambria Math" panose="02040503050406030204" pitchFamily="18" charset="0"/>
+                                </a:rPr>
+                              </m:ctrlPr>
+                            </m:accPr>
+                            <m:e>
+                              <m:r>
+                                <a:rPr lang="en-US" altLang="zh-TW" sz="2000" b="1" i="1">
+                                  <a:latin typeface="Cambria Math" panose="02040503050406030204" pitchFamily="18" charset="0"/>
+                                </a:rPr>
+                                <m:t>𝒚</m:t>
+                              </m:r>
+                            </m:e>
+                          </m:acc>
+                        </m:e>
+                      </m:d>
+                      <m:r>
+                        <a:rPr lang="en-US" altLang="zh-TW" sz="2000" b="1" i="1">
+                          <a:latin typeface="Cambria Math" panose="02040503050406030204" pitchFamily="18" charset="0"/>
+                        </a:rPr>
+                        <m:t>/</m:t>
+                      </m:r>
+                      <m:rad>
+                        <m:radPr>
+                          <m:degHide m:val="on"/>
                           <m:ctrlPr>
                             <a:rPr lang="en-US" altLang="zh-TW" sz="2000" b="1" i="1">
                               <a:latin typeface="Cambria Math" panose="02040503050406030204" pitchFamily="18" charset="0"/>
                             </a:rPr>
                           </m:ctrlPr>
-                        </m:accPr>
+                        </m:radPr>
+                        <m:deg/>
                         <m:e>
                           <m:r>
                             <a:rPr lang="en-US" altLang="zh-TW" sz="2000" b="1" i="1">
                               <a:latin typeface="Cambria Math" panose="02040503050406030204" pitchFamily="18" charset="0"/>
                             </a:rPr>
-                            <m:t>𝒙</m:t>
+                            <m:t>𝟐</m:t>
                           </m:r>
                         </m:e>
-                      </m:acc>
-                      <m:r>
-                        <a:rPr lang="en-US" altLang="zh-TW" sz="2000" i="1">
-                          <a:latin typeface="Cambria Math" panose="02040503050406030204" pitchFamily="18" charset="0"/>
-                        </a:rPr>
-                        <m:t>−</m:t>
-                      </m:r>
-                      <m:r>
-                        <a:rPr lang="en-US" altLang="zh-TW" sz="2000" i="1">
-                          <a:latin typeface="Cambria Math" panose="02040503050406030204" pitchFamily="18" charset="0"/>
-                        </a:rPr>
-                        <m:t>𝑖</m:t>
-                      </m:r>
-                      <m:acc>
-                        <m:accPr>
-                          <m:chr m:val="̂"/>
-                          <m:ctrlPr>
-                            <a:rPr lang="en-US" altLang="zh-TW" sz="2000" b="1" i="1">
-                              <a:latin typeface="Cambria Math" panose="02040503050406030204" pitchFamily="18" charset="0"/>
-                            </a:rPr>
-                          </m:ctrlPr>
-                        </m:accPr>
-                        <m:e>
-                          <m:r>
-                            <a:rPr lang="en-US" altLang="zh-TW" sz="2000" b="1" i="1">
-                              <a:latin typeface="Cambria Math" panose="02040503050406030204" pitchFamily="18" charset="0"/>
-                            </a:rPr>
-                            <m:t>𝒚</m:t>
-                          </m:r>
-                        </m:e>
-                      </m:acc>
+                      </m:rad>
                     </m:oMath>
                   </m:oMathPara>
                 </a14:m>
@@ -16690,10 +16982,10 @@
         <mc:Fallback>
           <p:sp>
             <p:nvSpPr>
-              <p:cNvPr id="49" name="矩形: 圓角 48">
+              <p:cNvPr id="84" name="矩形: 圓角 83">
                 <a:extLst>
                   <a:ext uri="{FF2B5EF4-FFF2-40B4-BE49-F238E27FC236}">
-                    <a16:creationId xmlns:a16="http://schemas.microsoft.com/office/drawing/2014/main" id="{16782163-D549-4658-B681-1624D52CF2B0}"/>
+                    <a16:creationId xmlns:a16="http://schemas.microsoft.com/office/drawing/2014/main" id="{700C7DF5-8189-4879-9F88-BF7F38B939F1}"/>
                   </a:ext>
                 </a:extLst>
               </p:cNvPr>
@@ -16705,7 +16997,7 @@
             <p:spPr>
               <a:xfrm>
                 <a:off x="4956000" y="5330731"/>
-                <a:ext cx="1702800" cy="604800"/>
+                <a:ext cx="2068914" cy="604800"/>
               </a:xfrm>
               <a:prstGeom prst="roundRect">
                 <a:avLst>
@@ -16713,9 +17005,9 @@
                 </a:avLst>
               </a:prstGeom>
               <a:blipFill>
-                <a:blip r:embed="rId34"/>
+                <a:blip r:embed="rId40"/>
                 <a:stretch>
-                  <a:fillRect r="-12857"/>
+                  <a:fillRect/>
                 </a:stretch>
               </a:blipFill>
             </p:spPr>
@@ -16738,10 +17030,10 @@
         <mc:Choice xmlns:a14="http://schemas.microsoft.com/office/drawing/2010/main" Requires="a14">
           <p:sp>
             <p:nvSpPr>
-              <p:cNvPr id="25" name="矩形: 圓角 24">
+              <p:cNvPr id="88" name="矩形: 圓角 87">
                 <a:extLst>
                   <a:ext uri="{FF2B5EF4-FFF2-40B4-BE49-F238E27FC236}">
-                    <a16:creationId xmlns:a16="http://schemas.microsoft.com/office/drawing/2014/main" id="{CEC40CB2-A1BD-4A66-96C7-4BC48FD7A79D}"/>
+                    <a16:creationId xmlns:a16="http://schemas.microsoft.com/office/drawing/2014/main" id="{32697F98-EADA-4703-90A0-A73234FC8435}"/>
                   </a:ext>
                 </a:extLst>
               </p:cNvPr>
@@ -16751,7 +17043,7 @@
             <p:spPr>
               <a:xfrm>
                 <a:off x="3000" y="5330731"/>
-                <a:ext cx="1702800" cy="604800"/>
+                <a:ext cx="2068914" cy="604800"/>
               </a:xfrm>
               <a:prstGeom prst="roundRect">
                 <a:avLst>
@@ -16809,7 +17101,7 @@
                         <m:accPr>
                           <m:chr m:val="̂"/>
                           <m:ctrlPr>
-                            <a:rPr lang="en-US" altLang="zh-TW" sz="2000" b="1" i="1">
+                            <a:rPr lang="en-US" altLang="zh-TW" sz="2000" b="1" i="1" smtClean="0">
                               <a:latin typeface="Cambria Math" panose="02040503050406030204" pitchFamily="18" charset="0"/>
                             </a:rPr>
                           </m:ctrlPr>
@@ -16829,54 +17121,90 @@
                         </a:rPr>
                         <m:t>=</m:t>
                       </m:r>
-                      <m:acc>
-                        <m:accPr>
-                          <m:chr m:val="̂"/>
+                      <m:d>
+                        <m:dPr>
                           <m:ctrlPr>
-                            <a:rPr lang="en-US" altLang="zh-TW" sz="2000" b="1" i="1">
+                            <a:rPr lang="en-US" altLang="zh-TW" sz="2000" b="1" i="1" smtClean="0">
                               <a:latin typeface="Cambria Math" panose="02040503050406030204" pitchFamily="18" charset="0"/>
                             </a:rPr>
                           </m:ctrlPr>
-                        </m:accPr>
+                        </m:dPr>
                         <m:e>
+                          <m:acc>
+                            <m:accPr>
+                              <m:chr m:val="̂"/>
+                              <m:ctrlPr>
+                                <a:rPr lang="en-US" altLang="zh-TW" sz="2000" b="1" i="1">
+                                  <a:latin typeface="Cambria Math" panose="02040503050406030204" pitchFamily="18" charset="0"/>
+                                </a:rPr>
+                              </m:ctrlPr>
+                            </m:accPr>
+                            <m:e>
+                              <m:r>
+                                <a:rPr lang="en-US" altLang="zh-TW" sz="2000" b="1" i="1">
+                                  <a:latin typeface="Cambria Math" panose="02040503050406030204" pitchFamily="18" charset="0"/>
+                                </a:rPr>
+                                <m:t>𝒙</m:t>
+                              </m:r>
+                            </m:e>
+                          </m:acc>
                           <m:r>
-                            <a:rPr lang="en-US" altLang="zh-TW" sz="2000" b="1" i="1">
+                            <a:rPr lang="en-US" altLang="zh-TW" sz="2000" i="1">
                               <a:latin typeface="Cambria Math" panose="02040503050406030204" pitchFamily="18" charset="0"/>
                             </a:rPr>
-                            <m:t>𝒙</m:t>
+                            <m:t>+</m:t>
                           </m:r>
+                          <m:r>
+                            <a:rPr lang="en-US" altLang="zh-TW" sz="2000" i="1">
+                              <a:latin typeface="Cambria Math" panose="02040503050406030204" pitchFamily="18" charset="0"/>
+                            </a:rPr>
+                            <m:t>𝑖</m:t>
+                          </m:r>
+                          <m:acc>
+                            <m:accPr>
+                              <m:chr m:val="̂"/>
+                              <m:ctrlPr>
+                                <a:rPr lang="en-US" altLang="zh-TW" sz="2000" b="1" i="1">
+                                  <a:latin typeface="Cambria Math" panose="02040503050406030204" pitchFamily="18" charset="0"/>
+                                </a:rPr>
+                              </m:ctrlPr>
+                            </m:accPr>
+                            <m:e>
+                              <m:r>
+                                <a:rPr lang="en-US" altLang="zh-TW" sz="2000" b="1" i="1">
+                                  <a:latin typeface="Cambria Math" panose="02040503050406030204" pitchFamily="18" charset="0"/>
+                                </a:rPr>
+                                <m:t>𝒚</m:t>
+                              </m:r>
+                            </m:e>
+                          </m:acc>
                         </m:e>
-                      </m:acc>
+                      </m:d>
                       <m:r>
-                        <a:rPr lang="en-US" altLang="zh-TW" sz="2000" i="1">
+                        <a:rPr lang="en-US" altLang="zh-TW" sz="2000" b="1" i="1" smtClean="0">
                           <a:latin typeface="Cambria Math" panose="02040503050406030204" pitchFamily="18" charset="0"/>
                         </a:rPr>
-                        <m:t>+</m:t>
+                        <m:t>/</m:t>
                       </m:r>
-                      <m:r>
-                        <a:rPr lang="en-US" altLang="zh-TW" sz="2000" i="1">
-                          <a:latin typeface="Cambria Math" panose="02040503050406030204" pitchFamily="18" charset="0"/>
-                        </a:rPr>
-                        <m:t>𝑖</m:t>
-                      </m:r>
-                      <m:acc>
-                        <m:accPr>
-                          <m:chr m:val="̂"/>
+                      <m:rad>
+                        <m:radPr>
+                          <m:degHide m:val="on"/>
                           <m:ctrlPr>
-                            <a:rPr lang="en-US" altLang="zh-TW" sz="2000" b="1" i="1">
+                            <a:rPr lang="en-US" altLang="zh-TW" sz="2000" b="1" i="1" smtClean="0">
                               <a:latin typeface="Cambria Math" panose="02040503050406030204" pitchFamily="18" charset="0"/>
                             </a:rPr>
                           </m:ctrlPr>
-                        </m:accPr>
+                        </m:radPr>
+                        <m:deg/>
                         <m:e>
                           <m:r>
-                            <a:rPr lang="en-US" altLang="zh-TW" sz="2000" b="1" i="1">
+                            <a:rPr lang="en-US" altLang="zh-TW" sz="2000" b="1" i="1" smtClean="0">
                               <a:latin typeface="Cambria Math" panose="02040503050406030204" pitchFamily="18" charset="0"/>
                             </a:rPr>
-                            <m:t>𝒚</m:t>
+                            <m:t>𝟐</m:t>
                           </m:r>
                         </m:e>
-                      </m:acc>
+                      </m:rad>
                     </m:oMath>
                   </m:oMathPara>
                 </a14:m>
@@ -16891,10 +17219,10 @@
         <mc:Fallback>
           <p:sp>
             <p:nvSpPr>
-              <p:cNvPr id="25" name="矩形: 圓角 24">
+              <p:cNvPr id="88" name="矩形: 圓角 87">
                 <a:extLst>
                   <a:ext uri="{FF2B5EF4-FFF2-40B4-BE49-F238E27FC236}">
-                    <a16:creationId xmlns:a16="http://schemas.microsoft.com/office/drawing/2014/main" id="{CEC40CB2-A1BD-4A66-96C7-4BC48FD7A79D}"/>
+                    <a16:creationId xmlns:a16="http://schemas.microsoft.com/office/drawing/2014/main" id="{32697F98-EADA-4703-90A0-A73234FC8435}"/>
                   </a:ext>
                 </a:extLst>
               </p:cNvPr>
@@ -16906,7 +17234,7 @@
             <p:spPr>
               <a:xfrm>
                 <a:off x="3000" y="5330731"/>
-                <a:ext cx="1702800" cy="604800"/>
+                <a:ext cx="2068914" cy="604800"/>
               </a:xfrm>
               <a:prstGeom prst="roundRect">
                 <a:avLst>
@@ -16914,9 +17242,9 @@
                 </a:avLst>
               </a:prstGeom>
               <a:blipFill>
-                <a:blip r:embed="rId35"/>
+                <a:blip r:embed="rId41"/>
                 <a:stretch>
-                  <a:fillRect r="-12811"/>
+                  <a:fillRect/>
                 </a:stretch>
               </a:blipFill>
             </p:spPr>
@@ -16939,10 +17267,10 @@
         <mc:Choice xmlns:a14="http://schemas.microsoft.com/office/drawing/2010/main" Requires="a14">
           <p:sp>
             <p:nvSpPr>
-              <p:cNvPr id="56" name="矩形: 圓角 55">
+              <p:cNvPr id="89" name="矩形: 圓角 88">
                 <a:extLst>
                   <a:ext uri="{FF2B5EF4-FFF2-40B4-BE49-F238E27FC236}">
-                    <a16:creationId xmlns:a16="http://schemas.microsoft.com/office/drawing/2014/main" id="{648483D5-B90C-497C-A957-8DD87AD9DEE4}"/>
+                    <a16:creationId xmlns:a16="http://schemas.microsoft.com/office/drawing/2014/main" id="{905BCB3E-828C-4008-87E5-42A2664346D1}"/>
                   </a:ext>
                 </a:extLst>
               </p:cNvPr>
@@ -16952,7 +17280,7 @@
             <p:spPr>
               <a:xfrm>
                 <a:off x="4956000" y="695233"/>
-                <a:ext cx="1702800" cy="604800"/>
+                <a:ext cx="2068914" cy="604800"/>
               </a:xfrm>
               <a:prstGeom prst="roundRect">
                 <a:avLst>
@@ -17062,10 +17390,10 @@
         <mc:Fallback>
           <p:sp>
             <p:nvSpPr>
-              <p:cNvPr id="56" name="矩形: 圓角 55">
+              <p:cNvPr id="89" name="矩形: 圓角 88">
                 <a:extLst>
                   <a:ext uri="{FF2B5EF4-FFF2-40B4-BE49-F238E27FC236}">
-                    <a16:creationId xmlns:a16="http://schemas.microsoft.com/office/drawing/2014/main" id="{648483D5-B90C-497C-A957-8DD87AD9DEE4}"/>
+                    <a16:creationId xmlns:a16="http://schemas.microsoft.com/office/drawing/2014/main" id="{905BCB3E-828C-4008-87E5-42A2664346D1}"/>
                   </a:ext>
                 </a:extLst>
               </p:cNvPr>
@@ -17077,7 +17405,7 @@
             <p:spPr>
               <a:xfrm>
                 <a:off x="4956000" y="695233"/>
-                <a:ext cx="1702800" cy="604800"/>
+                <a:ext cx="2068914" cy="604800"/>
               </a:xfrm>
               <a:prstGeom prst="roundRect">
                 <a:avLst>
@@ -17085,7 +17413,7 @@
                 </a:avLst>
               </a:prstGeom>
               <a:blipFill>
-                <a:blip r:embed="rId36"/>
+                <a:blip r:embed="rId42"/>
                 <a:stretch>
                   <a:fillRect/>
                 </a:stretch>
@@ -17110,10 +17438,10 @@
         <mc:Choice xmlns:a14="http://schemas.microsoft.com/office/drawing/2010/main" Requires="a14">
           <p:sp>
             <p:nvSpPr>
-              <p:cNvPr id="77" name="矩形: 圓角 76">
+              <p:cNvPr id="91" name="矩形: 圓角 90">
                 <a:extLst>
                   <a:ext uri="{FF2B5EF4-FFF2-40B4-BE49-F238E27FC236}">
-                    <a16:creationId xmlns:a16="http://schemas.microsoft.com/office/drawing/2014/main" id="{C20D6C90-D565-43BD-81B8-ABB4F5D15ABC}"/>
+                    <a16:creationId xmlns:a16="http://schemas.microsoft.com/office/drawing/2014/main" id="{6343D8BE-A727-49D3-A55A-946EAE5AE0FB}"/>
                   </a:ext>
                 </a:extLst>
               </p:cNvPr>
@@ -17123,7 +17451,7 @@
             <p:spPr>
               <a:xfrm>
                 <a:off x="3000" y="695841"/>
-                <a:ext cx="1702800" cy="604800"/>
+                <a:ext cx="2068914" cy="604800"/>
               </a:xfrm>
               <a:prstGeom prst="roundRect">
                 <a:avLst>
@@ -17233,10 +17561,10 @@
         <mc:Fallback>
           <p:sp>
             <p:nvSpPr>
-              <p:cNvPr id="77" name="矩形: 圓角 76">
+              <p:cNvPr id="91" name="矩形: 圓角 90">
                 <a:extLst>
                   <a:ext uri="{FF2B5EF4-FFF2-40B4-BE49-F238E27FC236}">
-                    <a16:creationId xmlns:a16="http://schemas.microsoft.com/office/drawing/2014/main" id="{C20D6C90-D565-43BD-81B8-ABB4F5D15ABC}"/>
+                    <a16:creationId xmlns:a16="http://schemas.microsoft.com/office/drawing/2014/main" id="{6343D8BE-A727-49D3-A55A-946EAE5AE0FB}"/>
                   </a:ext>
                 </a:extLst>
               </p:cNvPr>
@@ -17248,7 +17576,7 @@
             <p:spPr>
               <a:xfrm>
                 <a:off x="3000" y="695841"/>
-                <a:ext cx="1702800" cy="604800"/>
+                <a:ext cx="2068914" cy="604800"/>
               </a:xfrm>
               <a:prstGeom prst="roundRect">
                 <a:avLst>
@@ -17256,7 +17584,7 @@
                 </a:avLst>
               </a:prstGeom>
               <a:blipFill>
-                <a:blip r:embed="rId37"/>
+                <a:blip r:embed="rId43"/>
                 <a:stretch>
                   <a:fillRect/>
                 </a:stretch>
@@ -17422,8 +17750,8 @@
           </a:prstGeom>
         </p:spPr>
       </p:pic>
-      <mc:AlternateContent xmlns:mc="http://schemas.openxmlformats.org/markup-compatibility/2006">
-        <mc:Choice xmlns:a14="http://schemas.microsoft.com/office/drawing/2010/main" Requires="a14">
+      <mc:AlternateContent xmlns:mc="http://schemas.openxmlformats.org/markup-compatibility/2006" xmlns:a14="http://schemas.microsoft.com/office/drawing/2010/main">
+        <mc:Choice Requires="a14">
           <p:sp>
             <p:nvSpPr>
               <p:cNvPr id="7" name="矩形 6">
@@ -17614,7 +17942,7 @@
             </p:txBody>
           </p:sp>
         </mc:Choice>
-        <mc:Fallback>
+        <mc:Fallback xmlns="">
           <p:sp>
             <p:nvSpPr>
               <p:cNvPr id="7" name="矩形 6">
@@ -17659,8 +17987,8 @@
           </p:sp>
         </mc:Fallback>
       </mc:AlternateContent>
-      <mc:AlternateContent xmlns:mc="http://schemas.openxmlformats.org/markup-compatibility/2006">
-        <mc:Choice xmlns:a14="http://schemas.microsoft.com/office/drawing/2010/main" Requires="a14">
+      <mc:AlternateContent xmlns:mc="http://schemas.openxmlformats.org/markup-compatibility/2006" xmlns:a14="http://schemas.microsoft.com/office/drawing/2010/main">
+        <mc:Choice Requires="a14">
           <p:sp>
             <p:nvSpPr>
               <p:cNvPr id="21" name="文字方塊 20">
@@ -17735,7 +18063,7 @@
             </p:txBody>
           </p:sp>
         </mc:Choice>
-        <mc:Fallback>
+        <mc:Fallback xmlns="">
           <p:sp>
             <p:nvSpPr>
               <p:cNvPr id="21" name="文字方塊 20">
@@ -18389,8 +18717,8 @@
           </a:prstGeom>
         </p:spPr>
       </p:pic>
-      <mc:AlternateContent xmlns:mc="http://schemas.openxmlformats.org/markup-compatibility/2006">
-        <mc:Choice xmlns:a14="http://schemas.microsoft.com/office/drawing/2010/main" Requires="a14">
+      <mc:AlternateContent xmlns:mc="http://schemas.openxmlformats.org/markup-compatibility/2006" xmlns:a14="http://schemas.microsoft.com/office/drawing/2010/main">
+        <mc:Choice Requires="a14">
           <p:sp>
             <p:nvSpPr>
               <p:cNvPr id="8" name="矩形 7">
@@ -18546,7 +18874,7 @@
             </p:txBody>
           </p:sp>
         </mc:Choice>
-        <mc:Fallback>
+        <mc:Fallback xmlns="">
           <p:sp>
             <p:nvSpPr>
               <p:cNvPr id="8" name="矩形 7">
@@ -18591,8 +18919,8 @@
           </p:sp>
         </mc:Fallback>
       </mc:AlternateContent>
-      <mc:AlternateContent xmlns:mc="http://schemas.openxmlformats.org/markup-compatibility/2006">
-        <mc:Choice xmlns:a14="http://schemas.microsoft.com/office/drawing/2010/main" Requires="a14">
+      <mc:AlternateContent xmlns:mc="http://schemas.openxmlformats.org/markup-compatibility/2006" xmlns:a14="http://schemas.microsoft.com/office/drawing/2010/main">
+        <mc:Choice Requires="a14">
           <p:sp>
             <p:nvSpPr>
               <p:cNvPr id="10" name="矩形 9">
@@ -18660,7 +18988,7 @@
             </p:txBody>
           </p:sp>
         </mc:Choice>
-        <mc:Fallback>
+        <mc:Fallback xmlns="">
           <p:sp>
             <p:nvSpPr>
               <p:cNvPr id="10" name="矩形 9">
@@ -18793,8 +19121,8 @@
           </a:fontRef>
         </p:style>
       </p:cxnSp>
-      <mc:AlternateContent xmlns:mc="http://schemas.openxmlformats.org/markup-compatibility/2006">
-        <mc:Choice xmlns:a14="http://schemas.microsoft.com/office/drawing/2010/main" Requires="a14">
+      <mc:AlternateContent xmlns:mc="http://schemas.openxmlformats.org/markup-compatibility/2006" xmlns:a14="http://schemas.microsoft.com/office/drawing/2010/main">
+        <mc:Choice Requires="a14">
           <p:sp>
             <p:nvSpPr>
               <p:cNvPr id="13" name="矩形 12">
@@ -18843,7 +19171,7 @@
             </p:txBody>
           </p:sp>
         </mc:Choice>
-        <mc:Fallback>
+        <mc:Fallback xmlns="">
           <p:sp>
             <p:nvSpPr>
               <p:cNvPr id="13" name="矩形 12">
@@ -18888,8 +19216,8 @@
           </p:sp>
         </mc:Fallback>
       </mc:AlternateContent>
-      <mc:AlternateContent xmlns:mc="http://schemas.openxmlformats.org/markup-compatibility/2006">
-        <mc:Choice xmlns:a14="http://schemas.microsoft.com/office/drawing/2010/main" Requires="a14">
+      <mc:AlternateContent xmlns:mc="http://schemas.openxmlformats.org/markup-compatibility/2006" xmlns:a14="http://schemas.microsoft.com/office/drawing/2010/main">
+        <mc:Choice Requires="a14">
           <p:sp>
             <p:nvSpPr>
               <p:cNvPr id="14" name="矩形 13">
@@ -18938,7 +19266,7 @@
             </p:txBody>
           </p:sp>
         </mc:Choice>
-        <mc:Fallback>
+        <mc:Fallback xmlns="">
           <p:sp>
             <p:nvSpPr>
               <p:cNvPr id="14" name="矩形 13">
@@ -18983,8 +19311,8 @@
           </p:sp>
         </mc:Fallback>
       </mc:AlternateContent>
-      <mc:AlternateContent xmlns:mc="http://schemas.openxmlformats.org/markup-compatibility/2006">
-        <mc:Choice xmlns:a14="http://schemas.microsoft.com/office/drawing/2010/main" Requires="a14">
+      <mc:AlternateContent xmlns:mc="http://schemas.openxmlformats.org/markup-compatibility/2006" xmlns:a14="http://schemas.microsoft.com/office/drawing/2010/main">
+        <mc:Choice Requires="a14">
           <p:sp>
             <p:nvSpPr>
               <p:cNvPr id="18" name="矩形 17">
@@ -19236,7 +19564,7 @@
             </p:txBody>
           </p:sp>
         </mc:Choice>
-        <mc:Fallback>
+        <mc:Fallback xmlns="">
           <p:sp>
             <p:nvSpPr>
               <p:cNvPr id="18" name="矩形 17">
@@ -19281,8 +19609,8 @@
           </p:sp>
         </mc:Fallback>
       </mc:AlternateContent>
-      <mc:AlternateContent xmlns:mc="http://schemas.openxmlformats.org/markup-compatibility/2006">
-        <mc:Choice xmlns:a14="http://schemas.microsoft.com/office/drawing/2010/main" Requires="a14">
+      <mc:AlternateContent xmlns:mc="http://schemas.openxmlformats.org/markup-compatibility/2006" xmlns:a14="http://schemas.microsoft.com/office/drawing/2010/main">
+        <mc:Choice Requires="a14">
           <p:sp>
             <p:nvSpPr>
               <p:cNvPr id="19" name="矩形 18">
@@ -19343,7 +19671,7 @@
             </p:txBody>
           </p:sp>
         </mc:Choice>
-        <mc:Fallback>
+        <mc:Fallback xmlns="">
           <p:sp>
             <p:nvSpPr>
               <p:cNvPr id="19" name="矩形 18">
@@ -19388,8 +19716,8 @@
           </p:sp>
         </mc:Fallback>
       </mc:AlternateContent>
-      <mc:AlternateContent xmlns:mc="http://schemas.openxmlformats.org/markup-compatibility/2006">
-        <mc:Choice xmlns:a14="http://schemas.microsoft.com/office/drawing/2010/main" Requires="a14">
+      <mc:AlternateContent xmlns:mc="http://schemas.openxmlformats.org/markup-compatibility/2006" xmlns:a14="http://schemas.microsoft.com/office/drawing/2010/main">
+        <mc:Choice Requires="a14">
           <p:sp>
             <p:nvSpPr>
               <p:cNvPr id="20" name="矩形 19">
@@ -19456,7 +19784,7 @@
             </p:txBody>
           </p:sp>
         </mc:Choice>
-        <mc:Fallback>
+        <mc:Fallback xmlns="">
           <p:sp>
             <p:nvSpPr>
               <p:cNvPr id="20" name="矩形 19">
@@ -19501,8 +19829,8 @@
           </p:sp>
         </mc:Fallback>
       </mc:AlternateContent>
-      <mc:AlternateContent xmlns:mc="http://schemas.openxmlformats.org/markup-compatibility/2006">
-        <mc:Choice xmlns:a14="http://schemas.microsoft.com/office/drawing/2010/main" Requires="a14">
+      <mc:AlternateContent xmlns:mc="http://schemas.openxmlformats.org/markup-compatibility/2006" xmlns:a14="http://schemas.microsoft.com/office/drawing/2010/main">
+        <mc:Choice Requires="a14">
           <p:sp>
             <p:nvSpPr>
               <p:cNvPr id="21" name="文字方塊 20">
@@ -19577,7 +19905,7 @@
             </p:txBody>
           </p:sp>
         </mc:Choice>
-        <mc:Fallback>
+        <mc:Fallback xmlns="">
           <p:sp>
             <p:nvSpPr>
               <p:cNvPr id="21" name="文字方塊 20">
@@ -20186,8 +20514,8 @@
           </a:p>
         </p:txBody>
       </p:sp>
-      <mc:AlternateContent xmlns:mc="http://schemas.openxmlformats.org/markup-compatibility/2006">
-        <mc:Choice xmlns:a14="http://schemas.microsoft.com/office/drawing/2010/main" Requires="a14">
+      <mc:AlternateContent xmlns:mc="http://schemas.openxmlformats.org/markup-compatibility/2006" xmlns:a14="http://schemas.microsoft.com/office/drawing/2010/main">
+        <mc:Choice Requires="a14">
           <p:sp>
             <p:nvSpPr>
               <p:cNvPr id="19" name="矩形 18">
@@ -20248,7 +20576,7 @@
             </p:txBody>
           </p:sp>
         </mc:Choice>
-        <mc:Fallback>
+        <mc:Fallback xmlns="">
           <p:sp>
             <p:nvSpPr>
               <p:cNvPr id="19" name="矩形 18">
@@ -20293,8 +20621,8 @@
           </p:sp>
         </mc:Fallback>
       </mc:AlternateContent>
-      <mc:AlternateContent xmlns:mc="http://schemas.openxmlformats.org/markup-compatibility/2006">
-        <mc:Choice xmlns:a14="http://schemas.microsoft.com/office/drawing/2010/main" Requires="a14">
+      <mc:AlternateContent xmlns:mc="http://schemas.openxmlformats.org/markup-compatibility/2006" xmlns:a14="http://schemas.microsoft.com/office/drawing/2010/main">
+        <mc:Choice Requires="a14">
           <p:sp>
             <p:nvSpPr>
               <p:cNvPr id="20" name="矩形 19">
@@ -20361,7 +20689,7 @@
             </p:txBody>
           </p:sp>
         </mc:Choice>
-        <mc:Fallback>
+        <mc:Fallback xmlns="">
           <p:sp>
             <p:nvSpPr>
               <p:cNvPr id="20" name="矩形 19">
@@ -20406,8 +20734,8 @@
           </p:sp>
         </mc:Fallback>
       </mc:AlternateContent>
-      <mc:AlternateContent xmlns:mc="http://schemas.openxmlformats.org/markup-compatibility/2006">
-        <mc:Choice xmlns:a14="http://schemas.microsoft.com/office/drawing/2010/main" Requires="a14">
+      <mc:AlternateContent xmlns:mc="http://schemas.openxmlformats.org/markup-compatibility/2006" xmlns:a14="http://schemas.microsoft.com/office/drawing/2010/main">
+        <mc:Choice Requires="a14">
           <p:sp>
             <p:nvSpPr>
               <p:cNvPr id="40" name="矩形 39">
@@ -20563,7 +20891,7 @@
             </p:txBody>
           </p:sp>
         </mc:Choice>
-        <mc:Fallback>
+        <mc:Fallback xmlns="">
           <p:sp>
             <p:nvSpPr>
               <p:cNvPr id="40" name="矩形 39">
@@ -20608,8 +20936,8 @@
           </p:sp>
         </mc:Fallback>
       </mc:AlternateContent>
-      <mc:AlternateContent xmlns:mc="http://schemas.openxmlformats.org/markup-compatibility/2006">
-        <mc:Choice xmlns:a14="http://schemas.microsoft.com/office/drawing/2010/main" Requires="a14">
+      <mc:AlternateContent xmlns:mc="http://schemas.openxmlformats.org/markup-compatibility/2006" xmlns:a14="http://schemas.microsoft.com/office/drawing/2010/main">
+        <mc:Choice Requires="a14">
           <p:sp>
             <p:nvSpPr>
               <p:cNvPr id="41" name="矩形 40">
@@ -20861,7 +21189,7 @@
             </p:txBody>
           </p:sp>
         </mc:Choice>
-        <mc:Fallback>
+        <mc:Fallback xmlns="">
           <p:sp>
             <p:nvSpPr>
               <p:cNvPr id="41" name="矩形 40">

--- a/Final/Figures/wavepacket_l=0.pptx
+++ b/Final/Figures/wavepacket_l=0.pptx
@@ -253,7 +253,7 @@
           <a:p>
             <a:fld id="{B4A272A4-1B6B-4C0A-B74D-70EF2D8C7D55}" type="datetimeFigureOut">
               <a:rPr lang="zh-TW" altLang="en-US" smtClean="0"/>
-              <a:t>2026/5/27</a:t>
+              <a:t>2026/7/1</a:t>
             </a:fld>
             <a:endParaRPr lang="zh-TW" altLang="en-US"/>
           </a:p>
@@ -423,7 +423,7 @@
           <a:p>
             <a:fld id="{B4A272A4-1B6B-4C0A-B74D-70EF2D8C7D55}" type="datetimeFigureOut">
               <a:rPr lang="zh-TW" altLang="en-US" smtClean="0"/>
-              <a:t>2026/5/27</a:t>
+              <a:t>2026/7/1</a:t>
             </a:fld>
             <a:endParaRPr lang="zh-TW" altLang="en-US"/>
           </a:p>
@@ -603,7 +603,7 @@
           <a:p>
             <a:fld id="{B4A272A4-1B6B-4C0A-B74D-70EF2D8C7D55}" type="datetimeFigureOut">
               <a:rPr lang="zh-TW" altLang="en-US" smtClean="0"/>
-              <a:t>2026/5/27</a:t>
+              <a:t>2026/7/1</a:t>
             </a:fld>
             <a:endParaRPr lang="zh-TW" altLang="en-US"/>
           </a:p>
@@ -773,7 +773,7 @@
           <a:p>
             <a:fld id="{B4A272A4-1B6B-4C0A-B74D-70EF2D8C7D55}" type="datetimeFigureOut">
               <a:rPr lang="zh-TW" altLang="en-US" smtClean="0"/>
-              <a:t>2026/5/27</a:t>
+              <a:t>2026/7/1</a:t>
             </a:fld>
             <a:endParaRPr lang="zh-TW" altLang="en-US"/>
           </a:p>
@@ -1017,7 +1017,7 @@
           <a:p>
             <a:fld id="{B4A272A4-1B6B-4C0A-B74D-70EF2D8C7D55}" type="datetimeFigureOut">
               <a:rPr lang="zh-TW" altLang="en-US" smtClean="0"/>
-              <a:t>2026/5/27</a:t>
+              <a:t>2026/7/1</a:t>
             </a:fld>
             <a:endParaRPr lang="zh-TW" altLang="en-US"/>
           </a:p>
@@ -1249,7 +1249,7 @@
           <a:p>
             <a:fld id="{B4A272A4-1B6B-4C0A-B74D-70EF2D8C7D55}" type="datetimeFigureOut">
               <a:rPr lang="zh-TW" altLang="en-US" smtClean="0"/>
-              <a:t>2026/5/27</a:t>
+              <a:t>2026/7/1</a:t>
             </a:fld>
             <a:endParaRPr lang="zh-TW" altLang="en-US"/>
           </a:p>
@@ -1616,7 +1616,7 @@
           <a:p>
             <a:fld id="{B4A272A4-1B6B-4C0A-B74D-70EF2D8C7D55}" type="datetimeFigureOut">
               <a:rPr lang="zh-TW" altLang="en-US" smtClean="0"/>
-              <a:t>2026/5/27</a:t>
+              <a:t>2026/7/1</a:t>
             </a:fld>
             <a:endParaRPr lang="zh-TW" altLang="en-US"/>
           </a:p>
@@ -1734,7 +1734,7 @@
           <a:p>
             <a:fld id="{B4A272A4-1B6B-4C0A-B74D-70EF2D8C7D55}" type="datetimeFigureOut">
               <a:rPr lang="zh-TW" altLang="en-US" smtClean="0"/>
-              <a:t>2026/5/27</a:t>
+              <a:t>2026/7/1</a:t>
             </a:fld>
             <a:endParaRPr lang="zh-TW" altLang="en-US"/>
           </a:p>
@@ -1829,7 +1829,7 @@
           <a:p>
             <a:fld id="{B4A272A4-1B6B-4C0A-B74D-70EF2D8C7D55}" type="datetimeFigureOut">
               <a:rPr lang="zh-TW" altLang="en-US" smtClean="0"/>
-              <a:t>2026/5/27</a:t>
+              <a:t>2026/7/1</a:t>
             </a:fld>
             <a:endParaRPr lang="zh-TW" altLang="en-US"/>
           </a:p>
@@ -2106,7 +2106,7 @@
           <a:p>
             <a:fld id="{B4A272A4-1B6B-4C0A-B74D-70EF2D8C7D55}" type="datetimeFigureOut">
               <a:rPr lang="zh-TW" altLang="en-US" smtClean="0"/>
-              <a:t>2026/5/27</a:t>
+              <a:t>2026/7/1</a:t>
             </a:fld>
             <a:endParaRPr lang="zh-TW" altLang="en-US"/>
           </a:p>
@@ -2363,7 +2363,7 @@
           <a:p>
             <a:fld id="{B4A272A4-1B6B-4C0A-B74D-70EF2D8C7D55}" type="datetimeFigureOut">
               <a:rPr lang="zh-TW" altLang="en-US" smtClean="0"/>
-              <a:t>2026/5/27</a:t>
+              <a:t>2026/7/1</a:t>
             </a:fld>
             <a:endParaRPr lang="zh-TW" altLang="en-US"/>
           </a:p>
@@ -2576,7 +2576,7 @@
           <a:p>
             <a:fld id="{B4A272A4-1B6B-4C0A-B74D-70EF2D8C7D55}" type="datetimeFigureOut">
               <a:rPr lang="zh-TW" altLang="en-US" smtClean="0"/>
-              <a:t>2026/5/27</a:t>
+              <a:t>2026/7/1</a:t>
             </a:fld>
             <a:endParaRPr lang="zh-TW" altLang="en-US"/>
           </a:p>
@@ -12031,208 +12031,6 @@
           </a:prstGeom>
         </p:spPr>
       </p:pic>
-      <mc:AlternateContent xmlns:mc="http://schemas.openxmlformats.org/markup-compatibility/2006">
-        <mc:Choice xmlns:a14="http://schemas.microsoft.com/office/drawing/2010/main" Requires="a14">
-          <p:sp>
-            <p:nvSpPr>
-              <p:cNvPr id="65" name="矩形 64">
-                <a:extLst>
-                  <a:ext uri="{FF2B5EF4-FFF2-40B4-BE49-F238E27FC236}">
-                    <a16:creationId xmlns:a16="http://schemas.microsoft.com/office/drawing/2014/main" id="{178D7801-2716-418F-8120-C1D43243C2D9}"/>
-                  </a:ext>
-                </a:extLst>
-              </p:cNvPr>
-              <p:cNvSpPr/>
-              <p:nvPr/>
-            </p:nvSpPr>
-            <p:spPr>
-              <a:xfrm>
-                <a:off x="1357999" y="1352357"/>
-                <a:ext cx="1070998" cy="555152"/>
-              </a:xfrm>
-              <a:prstGeom prst="rect">
-                <a:avLst/>
-              </a:prstGeom>
-            </p:spPr>
-            <p:txBody>
-              <a:bodyPr wrap="none">
-                <a:spAutoFit/>
-              </a:bodyPr>
-              <a:lstStyle/>
-              <a:p>
-                <a:pPr algn="r"/>
-                <a14:m>
-                  <m:oMathPara xmlns:m="http://schemas.openxmlformats.org/officeDocument/2006/math">
-                    <m:oMathParaPr>
-                      <m:jc m:val="centerGroup"/>
-                    </m:oMathParaPr>
-                    <m:oMath xmlns:m="http://schemas.openxmlformats.org/officeDocument/2006/math">
-                      <m:sSup>
-                        <m:sSupPr>
-                          <m:ctrlPr>
-                            <a:rPr lang="en-US" altLang="zh-TW" sz="2000" i="1">
-                              <a:latin typeface="Cambria Math" panose="02040503050406030204" pitchFamily="18" charset="0"/>
-                            </a:rPr>
-                          </m:ctrlPr>
-                        </m:sSupPr>
-                        <m:e>
-                          <m:d>
-                            <m:dPr>
-                              <m:begChr m:val="|"/>
-                              <m:endChr m:val="|"/>
-                              <m:ctrlPr>
-                                <a:rPr lang="en-US" altLang="zh-TW" sz="2000" i="1">
-                                  <a:latin typeface="Cambria Math" panose="02040503050406030204" pitchFamily="18" charset="0"/>
-                                </a:rPr>
-                              </m:ctrlPr>
-                            </m:dPr>
-                            <m:e>
-                              <m:sSubSup>
-                                <m:sSubSupPr>
-                                  <m:ctrlPr>
-                                    <a:rPr lang="en-US" altLang="zh-TW" sz="2000" i="1">
-                                      <a:latin typeface="Cambria Math" panose="02040503050406030204" pitchFamily="18" charset="0"/>
-                                    </a:rPr>
-                                  </m:ctrlPr>
-                                </m:sSubSupPr>
-                                <m:e>
-                                  <m:acc>
-                                    <m:accPr>
-                                      <m:chr m:val="̃"/>
-                                      <m:ctrlPr>
-                                        <a:rPr lang="en-US" altLang="zh-TW" sz="2000" i="1">
-                                          <a:latin typeface="Cambria Math" panose="02040503050406030204" pitchFamily="18" charset="0"/>
-                                        </a:rPr>
-                                      </m:ctrlPr>
-                                    </m:accPr>
-                                    <m:e>
-                                      <m:r>
-                                        <a:rPr lang="en-US" altLang="zh-TW" sz="2000" i="1">
-                                          <a:latin typeface="Cambria Math" panose="02040503050406030204" pitchFamily="18" charset="0"/>
-                                        </a:rPr>
-                                        <m:t>𝑀</m:t>
-                                      </m:r>
-                                    </m:e>
-                                  </m:acc>
-                                </m:e>
-                                <m:sub>
-                                  <m:r>
-                                    <a:rPr lang="en-US" altLang="zh-TW" sz="2000" i="1">
-                                      <a:latin typeface="Cambria Math" panose="02040503050406030204" pitchFamily="18" charset="0"/>
-                                    </a:rPr>
-                                    <m:t>𝑆</m:t>
-                                  </m:r>
-                                  <m:r>
-                                    <a:rPr lang="en-US" altLang="zh-TW" sz="2000" i="1">
-                                      <a:latin typeface="Cambria Math" panose="02040503050406030204" pitchFamily="18" charset="0"/>
-                                    </a:rPr>
-                                    <m:t>,</m:t>
-                                  </m:r>
-                                  <m:r>
-                                    <a:rPr lang="en-US" altLang="zh-TW" sz="2000" b="1" i="1">
-                                      <a:latin typeface="Cambria Math" panose="02040503050406030204" pitchFamily="18" charset="0"/>
-                                    </a:rPr>
-                                    <m:t>𝑸</m:t>
-                                  </m:r>
-                                </m:sub>
-                                <m:sup>
-                                  <m:acc>
-                                    <m:accPr>
-                                      <m:chr m:val="̂"/>
-                                      <m:ctrlPr>
-                                        <a:rPr lang="en-US" altLang="zh-TW" sz="2000" b="1" i="1">
-                                          <a:latin typeface="Cambria Math" panose="02040503050406030204" pitchFamily="18" charset="0"/>
-                                        </a:rPr>
-                                      </m:ctrlPr>
-                                    </m:accPr>
-                                    <m:e>
-                                      <m:r>
-                                        <a:rPr lang="zh-TW" altLang="en-US" sz="2000" b="1" i="1">
-                                          <a:latin typeface="Cambria Math" panose="02040503050406030204" pitchFamily="18" charset="0"/>
-                                        </a:rPr>
-                                        <m:t>𝜺</m:t>
-                                      </m:r>
-                                    </m:e>
-                                  </m:acc>
-                                  <m:r>
-                                    <a:rPr lang="en-US" altLang="zh-TW" sz="2000" i="1">
-                                      <a:latin typeface="Cambria Math" panose="02040503050406030204" pitchFamily="18" charset="0"/>
-                                    </a:rPr>
-                                    <m:t>,0</m:t>
-                                  </m:r>
-                                </m:sup>
-                              </m:sSubSup>
-                            </m:e>
-                          </m:d>
-                        </m:e>
-                        <m:sup>
-                          <m:r>
-                            <a:rPr lang="en-US" altLang="zh-TW" sz="2000" i="1">
-                              <a:latin typeface="Cambria Math" panose="02040503050406030204" pitchFamily="18" charset="0"/>
-                            </a:rPr>
-                            <m:t>2</m:t>
-                          </m:r>
-                        </m:sup>
-                      </m:sSup>
-                      <m:r>
-                        <a:rPr lang="en-US" altLang="zh-TW" sz="2000" i="1">
-                          <a:latin typeface="Cambria Math" panose="02040503050406030204" pitchFamily="18" charset="0"/>
-                        </a:rPr>
-                        <m:t> </m:t>
-                      </m:r>
-                    </m:oMath>
-                  </m:oMathPara>
-                </a14:m>
-                <a:endParaRPr lang="zh-TW" altLang="en-US" sz="2000" dirty="0"/>
-              </a:p>
-            </p:txBody>
-          </p:sp>
-        </mc:Choice>
-        <mc:Fallback>
-          <p:sp>
-            <p:nvSpPr>
-              <p:cNvPr id="65" name="矩形 64">
-                <a:extLst>
-                  <a:ext uri="{FF2B5EF4-FFF2-40B4-BE49-F238E27FC236}">
-                    <a16:creationId xmlns:a16="http://schemas.microsoft.com/office/drawing/2014/main" id="{178D7801-2716-418F-8120-C1D43243C2D9}"/>
-                  </a:ext>
-                </a:extLst>
-              </p:cNvPr>
-              <p:cNvSpPr>
-                <a:spLocks noRot="1" noChangeAspect="1" noMove="1" noResize="1" noEditPoints="1" noAdjustHandles="1" noChangeArrowheads="1" noChangeShapeType="1" noTextEdit="1"/>
-              </p:cNvSpPr>
-              <p:nvPr/>
-            </p:nvSpPr>
-            <p:spPr>
-              <a:xfrm>
-                <a:off x="1357999" y="1352357"/>
-                <a:ext cx="1070998" cy="555152"/>
-              </a:xfrm>
-              <a:prstGeom prst="rect">
-                <a:avLst/>
-              </a:prstGeom>
-              <a:blipFill>
-                <a:blip r:embed="rId4"/>
-                <a:stretch>
-                  <a:fillRect/>
-                </a:stretch>
-              </a:blipFill>
-            </p:spPr>
-            <p:txBody>
-              <a:bodyPr/>
-              <a:lstStyle/>
-              <a:p>
-                <a:r>
-                  <a:rPr lang="zh-TW" altLang="en-US">
-                    <a:noFill/>
-                  </a:rPr>
-                  <a:t> </a:t>
-                </a:r>
-              </a:p>
-            </p:txBody>
-          </p:sp>
-        </mc:Fallback>
-      </mc:AlternateContent>
       <mc:AlternateContent xmlns:mc="http://schemas.openxmlformats.org/markup-compatibility/2006" xmlns:a14="http://schemas.microsoft.com/office/drawing/2010/main">
         <mc:Choice Requires="a14">
           <p:sp>
@@ -12607,299 +12405,6 @@
                 <a:blip r:embed="rId7"/>
                 <a:stretch>
                   <a:fillRect b="-7576"/>
-                </a:stretch>
-              </a:blipFill>
-            </p:spPr>
-            <p:txBody>
-              <a:bodyPr/>
-              <a:lstStyle/>
-              <a:p>
-                <a:r>
-                  <a:rPr lang="zh-TW" altLang="en-US">
-                    <a:noFill/>
-                  </a:rPr>
-                  <a:t> </a:t>
-                </a:r>
-              </a:p>
-            </p:txBody>
-          </p:sp>
-        </mc:Fallback>
-      </mc:AlternateContent>
-      <mc:AlternateContent xmlns:mc="http://schemas.openxmlformats.org/markup-compatibility/2006">
-        <mc:Choice xmlns:a14="http://schemas.microsoft.com/office/drawing/2010/main" Requires="a14">
-          <p:sp>
-            <p:nvSpPr>
-              <p:cNvPr id="71" name="矩形 70">
-                <a:extLst>
-                  <a:ext uri="{FF2B5EF4-FFF2-40B4-BE49-F238E27FC236}">
-                    <a16:creationId xmlns:a16="http://schemas.microsoft.com/office/drawing/2014/main" id="{3CDA9FBC-47B5-4E7F-8853-D819D057A7DC}"/>
-                  </a:ext>
-                </a:extLst>
-              </p:cNvPr>
-              <p:cNvSpPr/>
-              <p:nvPr/>
-            </p:nvSpPr>
-            <p:spPr>
-              <a:xfrm>
-                <a:off x="3017747" y="1218731"/>
-                <a:ext cx="1803699" cy="688778"/>
-              </a:xfrm>
-              <a:prstGeom prst="rect">
-                <a:avLst/>
-              </a:prstGeom>
-            </p:spPr>
-            <p:txBody>
-              <a:bodyPr wrap="none">
-                <a:spAutoFit/>
-              </a:bodyPr>
-              <a:lstStyle/>
-              <a:p>
-                <a:pPr/>
-                <a14:m>
-                  <m:oMathPara xmlns:m="http://schemas.openxmlformats.org/officeDocument/2006/math">
-                    <m:oMathParaPr>
-                      <m:jc m:val="centerGroup"/>
-                    </m:oMathParaPr>
-                    <m:oMath xmlns:m="http://schemas.openxmlformats.org/officeDocument/2006/math">
-                      <m:sSup>
-                        <m:sSupPr>
-                          <m:ctrlPr>
-                            <a:rPr lang="en-US" altLang="zh-TW" sz="1600" i="1" dirty="0" smtClean="0">
-                              <a:latin typeface="Cambria Math" panose="02040503050406030204" pitchFamily="18" charset="0"/>
-                              <a:ea typeface="Cambria Math" panose="02040503050406030204" pitchFamily="18" charset="0"/>
-                            </a:rPr>
-                          </m:ctrlPr>
-                        </m:sSupPr>
-                        <m:e>
-                          <m:d>
-                            <m:dPr>
-                              <m:begChr m:val="|"/>
-                              <m:endChr m:val="|"/>
-                              <m:ctrlPr>
-                                <a:rPr lang="en-US" altLang="zh-TW" sz="1600" i="1" dirty="0">
-                                  <a:latin typeface="Cambria Math" panose="02040503050406030204" pitchFamily="18" charset="0"/>
-                                  <a:ea typeface="Cambria Math" panose="02040503050406030204" pitchFamily="18" charset="0"/>
-                                </a:rPr>
-                              </m:ctrlPr>
-                            </m:dPr>
-                            <m:e>
-                              <m:nary>
-                                <m:naryPr>
-                                  <m:chr m:val="∑"/>
-                                  <m:limLoc m:val="subSup"/>
-                                  <m:supHide m:val="on"/>
-                                  <m:ctrlPr>
-                                    <a:rPr lang="en-US" altLang="zh-TW" sz="1600" i="1" dirty="0" smtClean="0">
-                                      <a:latin typeface="Cambria Math" panose="02040503050406030204" pitchFamily="18" charset="0"/>
-                                      <a:ea typeface="Cambria Math" panose="02040503050406030204" pitchFamily="18" charset="0"/>
-                                    </a:rPr>
-                                  </m:ctrlPr>
-                                </m:naryPr>
-                                <m:sub>
-                                  <m:r>
-                                    <a:rPr lang="en-US" altLang="zh-TW" sz="1600" b="1" i="1">
-                                      <a:latin typeface="Cambria Math" panose="02040503050406030204" pitchFamily="18" charset="0"/>
-                                    </a:rPr>
-                                    <m:t>𝑸</m:t>
-                                  </m:r>
-                                </m:sub>
-                                <m:sup/>
-                                <m:e>
-                                  <m:sSubSup>
-                                    <m:sSubSupPr>
-                                      <m:ctrlPr>
-                                        <a:rPr lang="en-US" altLang="zh-TW" sz="1600" i="1">
-                                          <a:latin typeface="Cambria Math" panose="02040503050406030204" pitchFamily="18" charset="0"/>
-                                        </a:rPr>
-                                      </m:ctrlPr>
-                                    </m:sSubSupPr>
-                                    <m:e>
-                                      <m:acc>
-                                        <m:accPr>
-                                          <m:chr m:val="̃"/>
-                                          <m:ctrlPr>
-                                            <a:rPr lang="en-US" altLang="zh-TW" sz="1600" i="1">
-                                              <a:latin typeface="Cambria Math" panose="02040503050406030204" pitchFamily="18" charset="0"/>
-                                            </a:rPr>
-                                          </m:ctrlPr>
-                                        </m:accPr>
-                                        <m:e>
-                                          <m:r>
-                                            <a:rPr lang="en-US" altLang="zh-TW" sz="1600" i="1">
-                                              <a:latin typeface="Cambria Math" panose="02040503050406030204" pitchFamily="18" charset="0"/>
-                                            </a:rPr>
-                                            <m:t>𝑀</m:t>
-                                          </m:r>
-                                        </m:e>
-                                      </m:acc>
-                                    </m:e>
-                                    <m:sub>
-                                      <m:r>
-                                        <a:rPr lang="en-US" altLang="zh-TW" sz="1600" i="1">
-                                          <a:latin typeface="Cambria Math" panose="02040503050406030204" pitchFamily="18" charset="0"/>
-                                        </a:rPr>
-                                        <m:t>𝑆</m:t>
-                                      </m:r>
-                                      <m:r>
-                                        <a:rPr lang="en-US" altLang="zh-TW" sz="1600" i="1">
-                                          <a:latin typeface="Cambria Math" panose="02040503050406030204" pitchFamily="18" charset="0"/>
-                                        </a:rPr>
-                                        <m:t>,</m:t>
-                                      </m:r>
-                                      <m:r>
-                                        <a:rPr lang="en-US" altLang="zh-TW" sz="1600" b="1" i="1">
-                                          <a:latin typeface="Cambria Math" panose="02040503050406030204" pitchFamily="18" charset="0"/>
-                                        </a:rPr>
-                                        <m:t>𝑸</m:t>
-                                      </m:r>
-                                    </m:sub>
-                                    <m:sup>
-                                      <m:acc>
-                                        <m:accPr>
-                                          <m:chr m:val="̂"/>
-                                          <m:ctrlPr>
-                                            <a:rPr lang="en-US" altLang="zh-TW" sz="1600" b="1" i="1">
-                                              <a:latin typeface="Cambria Math" panose="02040503050406030204" pitchFamily="18" charset="0"/>
-                                            </a:rPr>
-                                          </m:ctrlPr>
-                                        </m:accPr>
-                                        <m:e>
-                                          <m:r>
-                                            <a:rPr lang="zh-TW" altLang="en-US" sz="1600" b="1" i="1">
-                                              <a:latin typeface="Cambria Math" panose="02040503050406030204" pitchFamily="18" charset="0"/>
-                                            </a:rPr>
-                                            <m:t>𝜺</m:t>
-                                          </m:r>
-                                        </m:e>
-                                      </m:acc>
-                                      <m:r>
-                                        <a:rPr lang="en-US" altLang="zh-TW" sz="1600" i="1">
-                                          <a:latin typeface="Cambria Math" panose="02040503050406030204" pitchFamily="18" charset="0"/>
-                                        </a:rPr>
-                                        <m:t>,0</m:t>
-                                      </m:r>
-                                    </m:sup>
-                                  </m:sSubSup>
-                                </m:e>
-                              </m:nary>
-                              <m:sSup>
-                                <m:sSupPr>
-                                  <m:ctrlPr>
-                                    <a:rPr lang="en-US" altLang="zh-TW" sz="1600" b="0" i="1" dirty="0" smtClean="0">
-                                      <a:latin typeface="Cambria Math" panose="02040503050406030204" pitchFamily="18" charset="0"/>
-                                      <a:ea typeface="Cambria Math" panose="02040503050406030204" pitchFamily="18" charset="0"/>
-                                    </a:rPr>
-                                  </m:ctrlPr>
-                                </m:sSupPr>
-                                <m:e>
-                                  <m:r>
-                                    <a:rPr lang="en-US" altLang="zh-TW" sz="1600" b="0" i="1" dirty="0" smtClean="0">
-                                      <a:latin typeface="Cambria Math" panose="02040503050406030204" pitchFamily="18" charset="0"/>
-                                      <a:ea typeface="Cambria Math" panose="02040503050406030204" pitchFamily="18" charset="0"/>
-                                    </a:rPr>
-                                    <m:t>𝑒</m:t>
-                                  </m:r>
-                                </m:e>
-                                <m:sup>
-                                  <m:r>
-                                    <a:rPr lang="en-US" altLang="zh-TW" sz="1600" b="0" i="1" dirty="0" smtClean="0">
-                                      <a:latin typeface="Cambria Math" panose="02040503050406030204" pitchFamily="18" charset="0"/>
-                                      <a:ea typeface="Cambria Math" panose="02040503050406030204" pitchFamily="18" charset="0"/>
-                                    </a:rPr>
-                                    <m:t>𝑖</m:t>
-                                  </m:r>
-                                  <m:r>
-                                    <a:rPr lang="en-US" altLang="zh-TW" sz="1600" b="1" i="1" dirty="0" smtClean="0">
-                                      <a:latin typeface="Cambria Math" panose="02040503050406030204" pitchFamily="18" charset="0"/>
-                                      <a:ea typeface="Cambria Math" panose="02040503050406030204" pitchFamily="18" charset="0"/>
-                                    </a:rPr>
-                                    <m:t>𝑸</m:t>
-                                  </m:r>
-                                  <m:r>
-                                    <a:rPr lang="en-US" altLang="zh-TW" sz="1600" b="0" i="1" dirty="0" smtClean="0">
-                                      <a:latin typeface="Cambria Math" panose="02040503050406030204" pitchFamily="18" charset="0"/>
-                                      <a:ea typeface="Cambria Math" panose="02040503050406030204" pitchFamily="18" charset="0"/>
-                                    </a:rPr>
-                                    <m:t>⋅</m:t>
-                                  </m:r>
-                                  <m:sSub>
-                                    <m:sSubPr>
-                                      <m:ctrlPr>
-                                        <a:rPr lang="en-US" altLang="zh-TW" sz="1600" b="0" i="1" dirty="0" smtClean="0">
-                                          <a:latin typeface="Cambria Math" panose="02040503050406030204" pitchFamily="18" charset="0"/>
-                                          <a:ea typeface="Cambria Math" panose="02040503050406030204" pitchFamily="18" charset="0"/>
-                                        </a:rPr>
-                                      </m:ctrlPr>
-                                    </m:sSubPr>
-                                    <m:e>
-                                      <m:r>
-                                        <a:rPr lang="en-US" altLang="zh-TW" sz="1600" b="1" i="1" dirty="0" smtClean="0">
-                                          <a:latin typeface="Cambria Math" panose="02040503050406030204" pitchFamily="18" charset="0"/>
-                                          <a:ea typeface="Cambria Math" panose="02040503050406030204" pitchFamily="18" charset="0"/>
-                                        </a:rPr>
-                                        <m:t>𝑹</m:t>
-                                      </m:r>
-                                    </m:e>
-                                    <m:sub>
-                                      <m:r>
-                                        <a:rPr lang="en-US" altLang="zh-TW" sz="1600" b="0" i="1" dirty="0" smtClean="0">
-                                          <a:latin typeface="Cambria Math" panose="02040503050406030204" pitchFamily="18" charset="0"/>
-                                          <a:ea typeface="Cambria Math" panose="02040503050406030204" pitchFamily="18" charset="0"/>
-                                        </a:rPr>
-                                        <m:t>𝑐</m:t>
-                                      </m:r>
-                                    </m:sub>
-                                  </m:sSub>
-                                </m:sup>
-                              </m:sSup>
-                            </m:e>
-                          </m:d>
-                        </m:e>
-                        <m:sup>
-                          <m:r>
-                            <a:rPr lang="en-US" altLang="zh-TW" sz="1600" i="1" dirty="0">
-                              <a:latin typeface="Cambria Math" panose="02040503050406030204" pitchFamily="18" charset="0"/>
-                              <a:ea typeface="Cambria Math" panose="02040503050406030204" pitchFamily="18" charset="0"/>
-                            </a:rPr>
-                            <m:t>2</m:t>
-                          </m:r>
-                        </m:sup>
-                      </m:sSup>
-                    </m:oMath>
-                  </m:oMathPara>
-                </a14:m>
-                <a:endParaRPr lang="zh-TW" altLang="en-US" sz="1600" dirty="0"/>
-              </a:p>
-            </p:txBody>
-          </p:sp>
-        </mc:Choice>
-        <mc:Fallback>
-          <p:sp>
-            <p:nvSpPr>
-              <p:cNvPr id="71" name="矩形 70">
-                <a:extLst>
-                  <a:ext uri="{FF2B5EF4-FFF2-40B4-BE49-F238E27FC236}">
-                    <a16:creationId xmlns:a16="http://schemas.microsoft.com/office/drawing/2014/main" id="{3CDA9FBC-47B5-4E7F-8853-D819D057A7DC}"/>
-                  </a:ext>
-                </a:extLst>
-              </p:cNvPr>
-              <p:cNvSpPr>
-                <a:spLocks noRot="1" noChangeAspect="1" noMove="1" noResize="1" noEditPoints="1" noAdjustHandles="1" noChangeArrowheads="1" noChangeShapeType="1" noTextEdit="1"/>
-              </p:cNvSpPr>
-              <p:nvPr/>
-            </p:nvSpPr>
-            <p:spPr>
-              <a:xfrm>
-                <a:off x="3017747" y="1218731"/>
-                <a:ext cx="1803699" cy="688778"/>
-              </a:xfrm>
-              <a:prstGeom prst="rect">
-                <a:avLst/>
-              </a:prstGeom>
-              <a:blipFill>
-                <a:blip r:embed="rId8"/>
-                <a:stretch>
-                  <a:fillRect/>
                 </a:stretch>
               </a:blipFill>
             </p:spPr>
@@ -15304,1493 +14809,8 @@
           </a:p>
         </p:txBody>
       </p:sp>
-      <mc:AlternateContent xmlns:mc="http://schemas.openxmlformats.org/markup-compatibility/2006">
-        <mc:Choice xmlns:a14="http://schemas.microsoft.com/office/drawing/2010/main" Requires="a14">
-          <p:sp>
-            <p:nvSpPr>
-              <p:cNvPr id="58" name="矩形 57">
-                <a:extLst>
-                  <a:ext uri="{FF2B5EF4-FFF2-40B4-BE49-F238E27FC236}">
-                    <a16:creationId xmlns:a16="http://schemas.microsoft.com/office/drawing/2014/main" id="{A27D555D-E0E9-4263-81A9-DC721505759E}"/>
-                  </a:ext>
-                </a:extLst>
-              </p:cNvPr>
-              <p:cNvSpPr/>
-              <p:nvPr/>
-            </p:nvSpPr>
-            <p:spPr>
-              <a:xfrm>
-                <a:off x="1357999" y="5965307"/>
-                <a:ext cx="1070998" cy="555152"/>
-              </a:xfrm>
-              <a:prstGeom prst="rect">
-                <a:avLst/>
-              </a:prstGeom>
-            </p:spPr>
-            <p:txBody>
-              <a:bodyPr wrap="none">
-                <a:spAutoFit/>
-              </a:bodyPr>
-              <a:lstStyle/>
-              <a:p>
-                <a:pPr algn="r"/>
-                <a14:m>
-                  <m:oMathPara xmlns:m="http://schemas.openxmlformats.org/officeDocument/2006/math">
-                    <m:oMathParaPr>
-                      <m:jc m:val="centerGroup"/>
-                    </m:oMathParaPr>
-                    <m:oMath xmlns:m="http://schemas.openxmlformats.org/officeDocument/2006/math">
-                      <m:sSup>
-                        <m:sSupPr>
-                          <m:ctrlPr>
-                            <a:rPr lang="en-US" altLang="zh-TW" sz="2000" i="1">
-                              <a:latin typeface="Cambria Math" panose="02040503050406030204" pitchFamily="18" charset="0"/>
-                            </a:rPr>
-                          </m:ctrlPr>
-                        </m:sSupPr>
-                        <m:e>
-                          <m:d>
-                            <m:dPr>
-                              <m:begChr m:val="|"/>
-                              <m:endChr m:val="|"/>
-                              <m:ctrlPr>
-                                <a:rPr lang="en-US" altLang="zh-TW" sz="2000" i="1">
-                                  <a:latin typeface="Cambria Math" panose="02040503050406030204" pitchFamily="18" charset="0"/>
-                                </a:rPr>
-                              </m:ctrlPr>
-                            </m:dPr>
-                            <m:e>
-                              <m:sSubSup>
-                                <m:sSubSupPr>
-                                  <m:ctrlPr>
-                                    <a:rPr lang="en-US" altLang="zh-TW" sz="2000" i="1">
-                                      <a:latin typeface="Cambria Math" panose="02040503050406030204" pitchFamily="18" charset="0"/>
-                                    </a:rPr>
-                                  </m:ctrlPr>
-                                </m:sSubSupPr>
-                                <m:e>
-                                  <m:acc>
-                                    <m:accPr>
-                                      <m:chr m:val="̃"/>
-                                      <m:ctrlPr>
-                                        <a:rPr lang="en-US" altLang="zh-TW" sz="2000" i="1">
-                                          <a:latin typeface="Cambria Math" panose="02040503050406030204" pitchFamily="18" charset="0"/>
-                                        </a:rPr>
-                                      </m:ctrlPr>
-                                    </m:accPr>
-                                    <m:e>
-                                      <m:r>
-                                        <a:rPr lang="en-US" altLang="zh-TW" sz="2000" i="1">
-                                          <a:latin typeface="Cambria Math" panose="02040503050406030204" pitchFamily="18" charset="0"/>
-                                        </a:rPr>
-                                        <m:t>𝑀</m:t>
-                                      </m:r>
-                                    </m:e>
-                                  </m:acc>
-                                </m:e>
-                                <m:sub>
-                                  <m:r>
-                                    <a:rPr lang="en-US" altLang="zh-TW" sz="2000" i="1">
-                                      <a:latin typeface="Cambria Math" panose="02040503050406030204" pitchFamily="18" charset="0"/>
-                                    </a:rPr>
-                                    <m:t>𝑆</m:t>
-                                  </m:r>
-                                  <m:r>
-                                    <a:rPr lang="en-US" altLang="zh-TW" sz="2000" i="1">
-                                      <a:latin typeface="Cambria Math" panose="02040503050406030204" pitchFamily="18" charset="0"/>
-                                    </a:rPr>
-                                    <m:t>,</m:t>
-                                  </m:r>
-                                  <m:r>
-                                    <a:rPr lang="en-US" altLang="zh-TW" sz="2000" b="1" i="1">
-                                      <a:latin typeface="Cambria Math" panose="02040503050406030204" pitchFamily="18" charset="0"/>
-                                    </a:rPr>
-                                    <m:t>𝑸</m:t>
-                                  </m:r>
-                                </m:sub>
-                                <m:sup>
-                                  <m:acc>
-                                    <m:accPr>
-                                      <m:chr m:val="̂"/>
-                                      <m:ctrlPr>
-                                        <a:rPr lang="en-US" altLang="zh-TW" sz="2000" b="1" i="1">
-                                          <a:latin typeface="Cambria Math" panose="02040503050406030204" pitchFamily="18" charset="0"/>
-                                        </a:rPr>
-                                      </m:ctrlPr>
-                                    </m:accPr>
-                                    <m:e>
-                                      <m:r>
-                                        <a:rPr lang="zh-TW" altLang="en-US" sz="2000" b="1" i="1">
-                                          <a:latin typeface="Cambria Math" panose="02040503050406030204" pitchFamily="18" charset="0"/>
-                                        </a:rPr>
-                                        <m:t>𝜺</m:t>
-                                      </m:r>
-                                    </m:e>
-                                  </m:acc>
-                                  <m:r>
-                                    <a:rPr lang="en-US" altLang="zh-TW" sz="2000" i="1">
-                                      <a:latin typeface="Cambria Math" panose="02040503050406030204" pitchFamily="18" charset="0"/>
-                                    </a:rPr>
-                                    <m:t>,0</m:t>
-                                  </m:r>
-                                </m:sup>
-                              </m:sSubSup>
-                            </m:e>
-                          </m:d>
-                        </m:e>
-                        <m:sup>
-                          <m:r>
-                            <a:rPr lang="en-US" altLang="zh-TW" sz="2000" i="1">
-                              <a:latin typeface="Cambria Math" panose="02040503050406030204" pitchFamily="18" charset="0"/>
-                            </a:rPr>
-                            <m:t>2</m:t>
-                          </m:r>
-                        </m:sup>
-                      </m:sSup>
-                      <m:r>
-                        <a:rPr lang="en-US" altLang="zh-TW" sz="2000" i="1">
-                          <a:latin typeface="Cambria Math" panose="02040503050406030204" pitchFamily="18" charset="0"/>
-                        </a:rPr>
-                        <m:t> </m:t>
-                      </m:r>
-                    </m:oMath>
-                  </m:oMathPara>
-                </a14:m>
-                <a:endParaRPr lang="zh-TW" altLang="en-US" sz="2000" dirty="0"/>
-              </a:p>
-            </p:txBody>
-          </p:sp>
-        </mc:Choice>
-        <mc:Fallback>
-          <p:sp>
-            <p:nvSpPr>
-              <p:cNvPr id="58" name="矩形 57">
-                <a:extLst>
-                  <a:ext uri="{FF2B5EF4-FFF2-40B4-BE49-F238E27FC236}">
-                    <a16:creationId xmlns:a16="http://schemas.microsoft.com/office/drawing/2014/main" id="{A27D555D-E0E9-4263-81A9-DC721505759E}"/>
-                  </a:ext>
-                </a:extLst>
-              </p:cNvPr>
-              <p:cNvSpPr>
-                <a:spLocks noRot="1" noChangeAspect="1" noMove="1" noResize="1" noEditPoints="1" noAdjustHandles="1" noChangeArrowheads="1" noChangeShapeType="1" noTextEdit="1"/>
-              </p:cNvSpPr>
-              <p:nvPr/>
-            </p:nvSpPr>
-            <p:spPr>
-              <a:xfrm>
-                <a:off x="1357999" y="5965307"/>
-                <a:ext cx="1070998" cy="555152"/>
-              </a:xfrm>
-              <a:prstGeom prst="rect">
-                <a:avLst/>
-              </a:prstGeom>
-              <a:blipFill>
-                <a:blip r:embed="rId34"/>
-                <a:stretch>
-                  <a:fillRect/>
-                </a:stretch>
-              </a:blipFill>
-            </p:spPr>
-            <p:txBody>
-              <a:bodyPr/>
-              <a:lstStyle/>
-              <a:p>
-                <a:r>
-                  <a:rPr lang="zh-TW" altLang="en-US">
-                    <a:noFill/>
-                  </a:rPr>
-                  <a:t> </a:t>
-                </a:r>
-              </a:p>
-            </p:txBody>
-          </p:sp>
-        </mc:Fallback>
-      </mc:AlternateContent>
-      <mc:AlternateContent xmlns:mc="http://schemas.openxmlformats.org/markup-compatibility/2006">
-        <mc:Choice xmlns:a14="http://schemas.microsoft.com/office/drawing/2010/main" Requires="a14">
-          <p:sp>
-            <p:nvSpPr>
-              <p:cNvPr id="59" name="矩形 58">
-                <a:extLst>
-                  <a:ext uri="{FF2B5EF4-FFF2-40B4-BE49-F238E27FC236}">
-                    <a16:creationId xmlns:a16="http://schemas.microsoft.com/office/drawing/2014/main" id="{86DF7DBF-3CF5-4F4B-A69E-0FEA242323E4}"/>
-                  </a:ext>
-                </a:extLst>
-              </p:cNvPr>
-              <p:cNvSpPr/>
-              <p:nvPr/>
-            </p:nvSpPr>
-            <p:spPr>
-              <a:xfrm>
-                <a:off x="3017747" y="5831681"/>
-                <a:ext cx="1803699" cy="688778"/>
-              </a:xfrm>
-              <a:prstGeom prst="rect">
-                <a:avLst/>
-              </a:prstGeom>
-            </p:spPr>
-            <p:txBody>
-              <a:bodyPr wrap="none">
-                <a:spAutoFit/>
-              </a:bodyPr>
-              <a:lstStyle/>
-              <a:p>
-                <a:pPr/>
-                <a14:m>
-                  <m:oMathPara xmlns:m="http://schemas.openxmlformats.org/officeDocument/2006/math">
-                    <m:oMathParaPr>
-                      <m:jc m:val="centerGroup"/>
-                    </m:oMathParaPr>
-                    <m:oMath xmlns:m="http://schemas.openxmlformats.org/officeDocument/2006/math">
-                      <m:sSup>
-                        <m:sSupPr>
-                          <m:ctrlPr>
-                            <a:rPr lang="en-US" altLang="zh-TW" sz="1600" i="1" dirty="0" smtClean="0">
-                              <a:latin typeface="Cambria Math" panose="02040503050406030204" pitchFamily="18" charset="0"/>
-                              <a:ea typeface="Cambria Math" panose="02040503050406030204" pitchFamily="18" charset="0"/>
-                            </a:rPr>
-                          </m:ctrlPr>
-                        </m:sSupPr>
-                        <m:e>
-                          <m:d>
-                            <m:dPr>
-                              <m:begChr m:val="|"/>
-                              <m:endChr m:val="|"/>
-                              <m:ctrlPr>
-                                <a:rPr lang="en-US" altLang="zh-TW" sz="1600" i="1" dirty="0">
-                                  <a:latin typeface="Cambria Math" panose="02040503050406030204" pitchFamily="18" charset="0"/>
-                                  <a:ea typeface="Cambria Math" panose="02040503050406030204" pitchFamily="18" charset="0"/>
-                                </a:rPr>
-                              </m:ctrlPr>
-                            </m:dPr>
-                            <m:e>
-                              <m:nary>
-                                <m:naryPr>
-                                  <m:chr m:val="∑"/>
-                                  <m:limLoc m:val="subSup"/>
-                                  <m:supHide m:val="on"/>
-                                  <m:ctrlPr>
-                                    <a:rPr lang="en-US" altLang="zh-TW" sz="1600" i="1" dirty="0" smtClean="0">
-                                      <a:latin typeface="Cambria Math" panose="02040503050406030204" pitchFamily="18" charset="0"/>
-                                      <a:ea typeface="Cambria Math" panose="02040503050406030204" pitchFamily="18" charset="0"/>
-                                    </a:rPr>
-                                  </m:ctrlPr>
-                                </m:naryPr>
-                                <m:sub>
-                                  <m:r>
-                                    <a:rPr lang="en-US" altLang="zh-TW" sz="1600" b="1" i="1">
-                                      <a:latin typeface="Cambria Math" panose="02040503050406030204" pitchFamily="18" charset="0"/>
-                                    </a:rPr>
-                                    <m:t>𝑸</m:t>
-                                  </m:r>
-                                </m:sub>
-                                <m:sup/>
-                                <m:e>
-                                  <m:sSubSup>
-                                    <m:sSubSupPr>
-                                      <m:ctrlPr>
-                                        <a:rPr lang="en-US" altLang="zh-TW" sz="1600" i="1">
-                                          <a:latin typeface="Cambria Math" panose="02040503050406030204" pitchFamily="18" charset="0"/>
-                                        </a:rPr>
-                                      </m:ctrlPr>
-                                    </m:sSubSupPr>
-                                    <m:e>
-                                      <m:acc>
-                                        <m:accPr>
-                                          <m:chr m:val="̃"/>
-                                          <m:ctrlPr>
-                                            <a:rPr lang="en-US" altLang="zh-TW" sz="1600" i="1">
-                                              <a:latin typeface="Cambria Math" panose="02040503050406030204" pitchFamily="18" charset="0"/>
-                                            </a:rPr>
-                                          </m:ctrlPr>
-                                        </m:accPr>
-                                        <m:e>
-                                          <m:r>
-                                            <a:rPr lang="en-US" altLang="zh-TW" sz="1600" i="1">
-                                              <a:latin typeface="Cambria Math" panose="02040503050406030204" pitchFamily="18" charset="0"/>
-                                            </a:rPr>
-                                            <m:t>𝑀</m:t>
-                                          </m:r>
-                                        </m:e>
-                                      </m:acc>
-                                    </m:e>
-                                    <m:sub>
-                                      <m:r>
-                                        <a:rPr lang="en-US" altLang="zh-TW" sz="1600" i="1">
-                                          <a:latin typeface="Cambria Math" panose="02040503050406030204" pitchFamily="18" charset="0"/>
-                                        </a:rPr>
-                                        <m:t>𝑆</m:t>
-                                      </m:r>
-                                      <m:r>
-                                        <a:rPr lang="en-US" altLang="zh-TW" sz="1600" i="1">
-                                          <a:latin typeface="Cambria Math" panose="02040503050406030204" pitchFamily="18" charset="0"/>
-                                        </a:rPr>
-                                        <m:t>,</m:t>
-                                      </m:r>
-                                      <m:r>
-                                        <a:rPr lang="en-US" altLang="zh-TW" sz="1600" b="1" i="1">
-                                          <a:latin typeface="Cambria Math" panose="02040503050406030204" pitchFamily="18" charset="0"/>
-                                        </a:rPr>
-                                        <m:t>𝑸</m:t>
-                                      </m:r>
-                                    </m:sub>
-                                    <m:sup>
-                                      <m:acc>
-                                        <m:accPr>
-                                          <m:chr m:val="̂"/>
-                                          <m:ctrlPr>
-                                            <a:rPr lang="en-US" altLang="zh-TW" sz="1600" b="1" i="1">
-                                              <a:latin typeface="Cambria Math" panose="02040503050406030204" pitchFamily="18" charset="0"/>
-                                            </a:rPr>
-                                          </m:ctrlPr>
-                                        </m:accPr>
-                                        <m:e>
-                                          <m:r>
-                                            <a:rPr lang="zh-TW" altLang="en-US" sz="1600" b="1" i="1">
-                                              <a:latin typeface="Cambria Math" panose="02040503050406030204" pitchFamily="18" charset="0"/>
-                                            </a:rPr>
-                                            <m:t>𝜺</m:t>
-                                          </m:r>
-                                        </m:e>
-                                      </m:acc>
-                                      <m:r>
-                                        <a:rPr lang="en-US" altLang="zh-TW" sz="1600" i="1">
-                                          <a:latin typeface="Cambria Math" panose="02040503050406030204" pitchFamily="18" charset="0"/>
-                                        </a:rPr>
-                                        <m:t>,0</m:t>
-                                      </m:r>
-                                    </m:sup>
-                                  </m:sSubSup>
-                                </m:e>
-                              </m:nary>
-                              <m:sSup>
-                                <m:sSupPr>
-                                  <m:ctrlPr>
-                                    <a:rPr lang="en-US" altLang="zh-TW" sz="1600" b="0" i="1" dirty="0" smtClean="0">
-                                      <a:latin typeface="Cambria Math" panose="02040503050406030204" pitchFamily="18" charset="0"/>
-                                      <a:ea typeface="Cambria Math" panose="02040503050406030204" pitchFamily="18" charset="0"/>
-                                    </a:rPr>
-                                  </m:ctrlPr>
-                                </m:sSupPr>
-                                <m:e>
-                                  <m:r>
-                                    <a:rPr lang="en-US" altLang="zh-TW" sz="1600" b="0" i="1" dirty="0" smtClean="0">
-                                      <a:latin typeface="Cambria Math" panose="02040503050406030204" pitchFamily="18" charset="0"/>
-                                      <a:ea typeface="Cambria Math" panose="02040503050406030204" pitchFamily="18" charset="0"/>
-                                    </a:rPr>
-                                    <m:t>𝑒</m:t>
-                                  </m:r>
-                                </m:e>
-                                <m:sup>
-                                  <m:r>
-                                    <a:rPr lang="en-US" altLang="zh-TW" sz="1600" b="0" i="1" dirty="0" smtClean="0">
-                                      <a:latin typeface="Cambria Math" panose="02040503050406030204" pitchFamily="18" charset="0"/>
-                                      <a:ea typeface="Cambria Math" panose="02040503050406030204" pitchFamily="18" charset="0"/>
-                                    </a:rPr>
-                                    <m:t>𝑖</m:t>
-                                  </m:r>
-                                  <m:r>
-                                    <a:rPr lang="en-US" altLang="zh-TW" sz="1600" b="1" i="1" dirty="0" smtClean="0">
-                                      <a:latin typeface="Cambria Math" panose="02040503050406030204" pitchFamily="18" charset="0"/>
-                                      <a:ea typeface="Cambria Math" panose="02040503050406030204" pitchFamily="18" charset="0"/>
-                                    </a:rPr>
-                                    <m:t>𝑸</m:t>
-                                  </m:r>
-                                  <m:r>
-                                    <a:rPr lang="en-US" altLang="zh-TW" sz="1600" b="0" i="1" dirty="0" smtClean="0">
-                                      <a:latin typeface="Cambria Math" panose="02040503050406030204" pitchFamily="18" charset="0"/>
-                                      <a:ea typeface="Cambria Math" panose="02040503050406030204" pitchFamily="18" charset="0"/>
-                                    </a:rPr>
-                                    <m:t>⋅</m:t>
-                                  </m:r>
-                                  <m:sSub>
-                                    <m:sSubPr>
-                                      <m:ctrlPr>
-                                        <a:rPr lang="en-US" altLang="zh-TW" sz="1600" b="0" i="1" dirty="0" smtClean="0">
-                                          <a:latin typeface="Cambria Math" panose="02040503050406030204" pitchFamily="18" charset="0"/>
-                                          <a:ea typeface="Cambria Math" panose="02040503050406030204" pitchFamily="18" charset="0"/>
-                                        </a:rPr>
-                                      </m:ctrlPr>
-                                    </m:sSubPr>
-                                    <m:e>
-                                      <m:r>
-                                        <a:rPr lang="en-US" altLang="zh-TW" sz="1600" b="1" i="1" dirty="0" smtClean="0">
-                                          <a:latin typeface="Cambria Math" panose="02040503050406030204" pitchFamily="18" charset="0"/>
-                                          <a:ea typeface="Cambria Math" panose="02040503050406030204" pitchFamily="18" charset="0"/>
-                                        </a:rPr>
-                                        <m:t>𝑹</m:t>
-                                      </m:r>
-                                    </m:e>
-                                    <m:sub>
-                                      <m:r>
-                                        <a:rPr lang="en-US" altLang="zh-TW" sz="1600" b="0" i="1" dirty="0" smtClean="0">
-                                          <a:latin typeface="Cambria Math" panose="02040503050406030204" pitchFamily="18" charset="0"/>
-                                          <a:ea typeface="Cambria Math" panose="02040503050406030204" pitchFamily="18" charset="0"/>
-                                        </a:rPr>
-                                        <m:t>𝑐</m:t>
-                                      </m:r>
-                                    </m:sub>
-                                  </m:sSub>
-                                </m:sup>
-                              </m:sSup>
-                            </m:e>
-                          </m:d>
-                        </m:e>
-                        <m:sup>
-                          <m:r>
-                            <a:rPr lang="en-US" altLang="zh-TW" sz="1600" i="1" dirty="0">
-                              <a:latin typeface="Cambria Math" panose="02040503050406030204" pitchFamily="18" charset="0"/>
-                              <a:ea typeface="Cambria Math" panose="02040503050406030204" pitchFamily="18" charset="0"/>
-                            </a:rPr>
-                            <m:t>2</m:t>
-                          </m:r>
-                        </m:sup>
-                      </m:sSup>
-                    </m:oMath>
-                  </m:oMathPara>
-                </a14:m>
-                <a:endParaRPr lang="zh-TW" altLang="en-US" sz="1600" dirty="0"/>
-              </a:p>
-            </p:txBody>
-          </p:sp>
-        </mc:Choice>
-        <mc:Fallback>
-          <p:sp>
-            <p:nvSpPr>
-              <p:cNvPr id="59" name="矩形 58">
-                <a:extLst>
-                  <a:ext uri="{FF2B5EF4-FFF2-40B4-BE49-F238E27FC236}">
-                    <a16:creationId xmlns:a16="http://schemas.microsoft.com/office/drawing/2014/main" id="{86DF7DBF-3CF5-4F4B-A69E-0FEA242323E4}"/>
-                  </a:ext>
-                </a:extLst>
-              </p:cNvPr>
-              <p:cNvSpPr>
-                <a:spLocks noRot="1" noChangeAspect="1" noMove="1" noResize="1" noEditPoints="1" noAdjustHandles="1" noChangeArrowheads="1" noChangeShapeType="1" noTextEdit="1"/>
-              </p:cNvSpPr>
-              <p:nvPr/>
-            </p:nvSpPr>
-            <p:spPr>
-              <a:xfrm>
-                <a:off x="3017747" y="5831681"/>
-                <a:ext cx="1803699" cy="688778"/>
-              </a:xfrm>
-              <a:prstGeom prst="rect">
-                <a:avLst/>
-              </a:prstGeom>
-              <a:blipFill>
-                <a:blip r:embed="rId35"/>
-                <a:stretch>
-                  <a:fillRect/>
-                </a:stretch>
-              </a:blipFill>
-            </p:spPr>
-            <p:txBody>
-              <a:bodyPr/>
-              <a:lstStyle/>
-              <a:p>
-                <a:r>
-                  <a:rPr lang="zh-TW" altLang="en-US">
-                    <a:noFill/>
-                  </a:rPr>
-                  <a:t> </a:t>
-                </a:r>
-              </a:p>
-            </p:txBody>
-          </p:sp>
-        </mc:Fallback>
-      </mc:AlternateContent>
-      <mc:AlternateContent xmlns:mc="http://schemas.openxmlformats.org/markup-compatibility/2006">
-        <mc:Choice xmlns:a14="http://schemas.microsoft.com/office/drawing/2010/main" Requires="a14">
-          <p:sp>
-            <p:nvSpPr>
-              <p:cNvPr id="60" name="矩形 59">
-                <a:extLst>
-                  <a:ext uri="{FF2B5EF4-FFF2-40B4-BE49-F238E27FC236}">
-                    <a16:creationId xmlns:a16="http://schemas.microsoft.com/office/drawing/2014/main" id="{E6D26F11-2494-4642-BFE0-9CA02FDA84D0}"/>
-                  </a:ext>
-                </a:extLst>
-              </p:cNvPr>
-              <p:cNvSpPr/>
-              <p:nvPr/>
-            </p:nvSpPr>
-            <p:spPr>
-              <a:xfrm>
-                <a:off x="6239632" y="1352357"/>
-                <a:ext cx="1070998" cy="555152"/>
-              </a:xfrm>
-              <a:prstGeom prst="rect">
-                <a:avLst/>
-              </a:prstGeom>
-            </p:spPr>
-            <p:txBody>
-              <a:bodyPr wrap="none">
-                <a:spAutoFit/>
-              </a:bodyPr>
-              <a:lstStyle/>
-              <a:p>
-                <a:pPr algn="r"/>
-                <a14:m>
-                  <m:oMathPara xmlns:m="http://schemas.openxmlformats.org/officeDocument/2006/math">
-                    <m:oMathParaPr>
-                      <m:jc m:val="centerGroup"/>
-                    </m:oMathParaPr>
-                    <m:oMath xmlns:m="http://schemas.openxmlformats.org/officeDocument/2006/math">
-                      <m:sSup>
-                        <m:sSupPr>
-                          <m:ctrlPr>
-                            <a:rPr lang="en-US" altLang="zh-TW" sz="2000" i="1">
-                              <a:latin typeface="Cambria Math" panose="02040503050406030204" pitchFamily="18" charset="0"/>
-                            </a:rPr>
-                          </m:ctrlPr>
-                        </m:sSupPr>
-                        <m:e>
-                          <m:d>
-                            <m:dPr>
-                              <m:begChr m:val="|"/>
-                              <m:endChr m:val="|"/>
-                              <m:ctrlPr>
-                                <a:rPr lang="en-US" altLang="zh-TW" sz="2000" i="1">
-                                  <a:latin typeface="Cambria Math" panose="02040503050406030204" pitchFamily="18" charset="0"/>
-                                </a:rPr>
-                              </m:ctrlPr>
-                            </m:dPr>
-                            <m:e>
-                              <m:sSubSup>
-                                <m:sSubSupPr>
-                                  <m:ctrlPr>
-                                    <a:rPr lang="en-US" altLang="zh-TW" sz="2000" i="1">
-                                      <a:latin typeface="Cambria Math" panose="02040503050406030204" pitchFamily="18" charset="0"/>
-                                    </a:rPr>
-                                  </m:ctrlPr>
-                                </m:sSubSupPr>
-                                <m:e>
-                                  <m:acc>
-                                    <m:accPr>
-                                      <m:chr m:val="̃"/>
-                                      <m:ctrlPr>
-                                        <a:rPr lang="en-US" altLang="zh-TW" sz="2000" i="1">
-                                          <a:latin typeface="Cambria Math" panose="02040503050406030204" pitchFamily="18" charset="0"/>
-                                        </a:rPr>
-                                      </m:ctrlPr>
-                                    </m:accPr>
-                                    <m:e>
-                                      <m:r>
-                                        <a:rPr lang="en-US" altLang="zh-TW" sz="2000" i="1">
-                                          <a:latin typeface="Cambria Math" panose="02040503050406030204" pitchFamily="18" charset="0"/>
-                                        </a:rPr>
-                                        <m:t>𝑀</m:t>
-                                      </m:r>
-                                    </m:e>
-                                  </m:acc>
-                                </m:e>
-                                <m:sub>
-                                  <m:r>
-                                    <a:rPr lang="en-US" altLang="zh-TW" sz="2000" i="1">
-                                      <a:latin typeface="Cambria Math" panose="02040503050406030204" pitchFamily="18" charset="0"/>
-                                    </a:rPr>
-                                    <m:t>𝑆</m:t>
-                                  </m:r>
-                                  <m:r>
-                                    <a:rPr lang="en-US" altLang="zh-TW" sz="2000" i="1">
-                                      <a:latin typeface="Cambria Math" panose="02040503050406030204" pitchFamily="18" charset="0"/>
-                                    </a:rPr>
-                                    <m:t>,</m:t>
-                                  </m:r>
-                                  <m:r>
-                                    <a:rPr lang="en-US" altLang="zh-TW" sz="2000" b="1" i="1">
-                                      <a:latin typeface="Cambria Math" panose="02040503050406030204" pitchFamily="18" charset="0"/>
-                                    </a:rPr>
-                                    <m:t>𝑸</m:t>
-                                  </m:r>
-                                </m:sub>
-                                <m:sup>
-                                  <m:acc>
-                                    <m:accPr>
-                                      <m:chr m:val="̂"/>
-                                      <m:ctrlPr>
-                                        <a:rPr lang="en-US" altLang="zh-TW" sz="2000" b="1" i="1">
-                                          <a:latin typeface="Cambria Math" panose="02040503050406030204" pitchFamily="18" charset="0"/>
-                                        </a:rPr>
-                                      </m:ctrlPr>
-                                    </m:accPr>
-                                    <m:e>
-                                      <m:r>
-                                        <a:rPr lang="zh-TW" altLang="en-US" sz="2000" b="1" i="1">
-                                          <a:latin typeface="Cambria Math" panose="02040503050406030204" pitchFamily="18" charset="0"/>
-                                        </a:rPr>
-                                        <m:t>𝜺</m:t>
-                                      </m:r>
-                                    </m:e>
-                                  </m:acc>
-                                  <m:r>
-                                    <a:rPr lang="en-US" altLang="zh-TW" sz="2000" i="1">
-                                      <a:latin typeface="Cambria Math" panose="02040503050406030204" pitchFamily="18" charset="0"/>
-                                    </a:rPr>
-                                    <m:t>,0</m:t>
-                                  </m:r>
-                                </m:sup>
-                              </m:sSubSup>
-                            </m:e>
-                          </m:d>
-                        </m:e>
-                        <m:sup>
-                          <m:r>
-                            <a:rPr lang="en-US" altLang="zh-TW" sz="2000" i="1">
-                              <a:latin typeface="Cambria Math" panose="02040503050406030204" pitchFamily="18" charset="0"/>
-                            </a:rPr>
-                            <m:t>2</m:t>
-                          </m:r>
-                        </m:sup>
-                      </m:sSup>
-                      <m:r>
-                        <a:rPr lang="en-US" altLang="zh-TW" sz="2000" i="1">
-                          <a:latin typeface="Cambria Math" panose="02040503050406030204" pitchFamily="18" charset="0"/>
-                        </a:rPr>
-                        <m:t> </m:t>
-                      </m:r>
-                    </m:oMath>
-                  </m:oMathPara>
-                </a14:m>
-                <a:endParaRPr lang="zh-TW" altLang="en-US" sz="2000" dirty="0"/>
-              </a:p>
-            </p:txBody>
-          </p:sp>
-        </mc:Choice>
-        <mc:Fallback>
-          <p:sp>
-            <p:nvSpPr>
-              <p:cNvPr id="60" name="矩形 59">
-                <a:extLst>
-                  <a:ext uri="{FF2B5EF4-FFF2-40B4-BE49-F238E27FC236}">
-                    <a16:creationId xmlns:a16="http://schemas.microsoft.com/office/drawing/2014/main" id="{E6D26F11-2494-4642-BFE0-9CA02FDA84D0}"/>
-                  </a:ext>
-                </a:extLst>
-              </p:cNvPr>
-              <p:cNvSpPr>
-                <a:spLocks noRot="1" noChangeAspect="1" noMove="1" noResize="1" noEditPoints="1" noAdjustHandles="1" noChangeArrowheads="1" noChangeShapeType="1" noTextEdit="1"/>
-              </p:cNvSpPr>
-              <p:nvPr/>
-            </p:nvSpPr>
-            <p:spPr>
-              <a:xfrm>
-                <a:off x="6239632" y="1352357"/>
-                <a:ext cx="1070998" cy="555152"/>
-              </a:xfrm>
-              <a:prstGeom prst="rect">
-                <a:avLst/>
-              </a:prstGeom>
-              <a:blipFill>
-                <a:blip r:embed="rId36"/>
-                <a:stretch>
-                  <a:fillRect/>
-                </a:stretch>
-              </a:blipFill>
-            </p:spPr>
-            <p:txBody>
-              <a:bodyPr/>
-              <a:lstStyle/>
-              <a:p>
-                <a:r>
-                  <a:rPr lang="zh-TW" altLang="en-US">
-                    <a:noFill/>
-                  </a:rPr>
-                  <a:t> </a:t>
-                </a:r>
-              </a:p>
-            </p:txBody>
-          </p:sp>
-        </mc:Fallback>
-      </mc:AlternateContent>
-      <mc:AlternateContent xmlns:mc="http://schemas.openxmlformats.org/markup-compatibility/2006">
-        <mc:Choice xmlns:a14="http://schemas.microsoft.com/office/drawing/2010/main" Requires="a14">
-          <p:sp>
-            <p:nvSpPr>
-              <p:cNvPr id="61" name="矩形 60">
-                <a:extLst>
-                  <a:ext uri="{FF2B5EF4-FFF2-40B4-BE49-F238E27FC236}">
-                    <a16:creationId xmlns:a16="http://schemas.microsoft.com/office/drawing/2014/main" id="{5AE04757-F78B-4D53-B64B-2C20CA7BC827}"/>
-                  </a:ext>
-                </a:extLst>
-              </p:cNvPr>
-              <p:cNvSpPr/>
-              <p:nvPr/>
-            </p:nvSpPr>
-            <p:spPr>
-              <a:xfrm>
-                <a:off x="7899380" y="1218731"/>
-                <a:ext cx="1803699" cy="688778"/>
-              </a:xfrm>
-              <a:prstGeom prst="rect">
-                <a:avLst/>
-              </a:prstGeom>
-            </p:spPr>
-            <p:txBody>
-              <a:bodyPr wrap="none">
-                <a:spAutoFit/>
-              </a:bodyPr>
-              <a:lstStyle/>
-              <a:p>
-                <a:pPr/>
-                <a14:m>
-                  <m:oMathPara xmlns:m="http://schemas.openxmlformats.org/officeDocument/2006/math">
-                    <m:oMathParaPr>
-                      <m:jc m:val="centerGroup"/>
-                    </m:oMathParaPr>
-                    <m:oMath xmlns:m="http://schemas.openxmlformats.org/officeDocument/2006/math">
-                      <m:sSup>
-                        <m:sSupPr>
-                          <m:ctrlPr>
-                            <a:rPr lang="en-US" altLang="zh-TW" sz="1600" i="1" dirty="0" smtClean="0">
-                              <a:latin typeface="Cambria Math" panose="02040503050406030204" pitchFamily="18" charset="0"/>
-                              <a:ea typeface="Cambria Math" panose="02040503050406030204" pitchFamily="18" charset="0"/>
-                            </a:rPr>
-                          </m:ctrlPr>
-                        </m:sSupPr>
-                        <m:e>
-                          <m:d>
-                            <m:dPr>
-                              <m:begChr m:val="|"/>
-                              <m:endChr m:val="|"/>
-                              <m:ctrlPr>
-                                <a:rPr lang="en-US" altLang="zh-TW" sz="1600" i="1" dirty="0">
-                                  <a:latin typeface="Cambria Math" panose="02040503050406030204" pitchFamily="18" charset="0"/>
-                                  <a:ea typeface="Cambria Math" panose="02040503050406030204" pitchFamily="18" charset="0"/>
-                                </a:rPr>
-                              </m:ctrlPr>
-                            </m:dPr>
-                            <m:e>
-                              <m:nary>
-                                <m:naryPr>
-                                  <m:chr m:val="∑"/>
-                                  <m:limLoc m:val="subSup"/>
-                                  <m:supHide m:val="on"/>
-                                  <m:ctrlPr>
-                                    <a:rPr lang="en-US" altLang="zh-TW" sz="1600" i="1" dirty="0" smtClean="0">
-                                      <a:latin typeface="Cambria Math" panose="02040503050406030204" pitchFamily="18" charset="0"/>
-                                      <a:ea typeface="Cambria Math" panose="02040503050406030204" pitchFamily="18" charset="0"/>
-                                    </a:rPr>
-                                  </m:ctrlPr>
-                                </m:naryPr>
-                                <m:sub>
-                                  <m:r>
-                                    <a:rPr lang="en-US" altLang="zh-TW" sz="1600" b="1" i="1">
-                                      <a:latin typeface="Cambria Math" panose="02040503050406030204" pitchFamily="18" charset="0"/>
-                                    </a:rPr>
-                                    <m:t>𝑸</m:t>
-                                  </m:r>
-                                </m:sub>
-                                <m:sup/>
-                                <m:e>
-                                  <m:sSubSup>
-                                    <m:sSubSupPr>
-                                      <m:ctrlPr>
-                                        <a:rPr lang="en-US" altLang="zh-TW" sz="1600" i="1">
-                                          <a:latin typeface="Cambria Math" panose="02040503050406030204" pitchFamily="18" charset="0"/>
-                                        </a:rPr>
-                                      </m:ctrlPr>
-                                    </m:sSubSupPr>
-                                    <m:e>
-                                      <m:acc>
-                                        <m:accPr>
-                                          <m:chr m:val="̃"/>
-                                          <m:ctrlPr>
-                                            <a:rPr lang="en-US" altLang="zh-TW" sz="1600" i="1">
-                                              <a:latin typeface="Cambria Math" panose="02040503050406030204" pitchFamily="18" charset="0"/>
-                                            </a:rPr>
-                                          </m:ctrlPr>
-                                        </m:accPr>
-                                        <m:e>
-                                          <m:r>
-                                            <a:rPr lang="en-US" altLang="zh-TW" sz="1600" i="1">
-                                              <a:latin typeface="Cambria Math" panose="02040503050406030204" pitchFamily="18" charset="0"/>
-                                            </a:rPr>
-                                            <m:t>𝑀</m:t>
-                                          </m:r>
-                                        </m:e>
-                                      </m:acc>
-                                    </m:e>
-                                    <m:sub>
-                                      <m:r>
-                                        <a:rPr lang="en-US" altLang="zh-TW" sz="1600" i="1">
-                                          <a:latin typeface="Cambria Math" panose="02040503050406030204" pitchFamily="18" charset="0"/>
-                                        </a:rPr>
-                                        <m:t>𝑆</m:t>
-                                      </m:r>
-                                      <m:r>
-                                        <a:rPr lang="en-US" altLang="zh-TW" sz="1600" i="1">
-                                          <a:latin typeface="Cambria Math" panose="02040503050406030204" pitchFamily="18" charset="0"/>
-                                        </a:rPr>
-                                        <m:t>,</m:t>
-                                      </m:r>
-                                      <m:r>
-                                        <a:rPr lang="en-US" altLang="zh-TW" sz="1600" b="1" i="1">
-                                          <a:latin typeface="Cambria Math" panose="02040503050406030204" pitchFamily="18" charset="0"/>
-                                        </a:rPr>
-                                        <m:t>𝑸</m:t>
-                                      </m:r>
-                                    </m:sub>
-                                    <m:sup>
-                                      <m:acc>
-                                        <m:accPr>
-                                          <m:chr m:val="̂"/>
-                                          <m:ctrlPr>
-                                            <a:rPr lang="en-US" altLang="zh-TW" sz="1600" b="1" i="1">
-                                              <a:latin typeface="Cambria Math" panose="02040503050406030204" pitchFamily="18" charset="0"/>
-                                            </a:rPr>
-                                          </m:ctrlPr>
-                                        </m:accPr>
-                                        <m:e>
-                                          <m:r>
-                                            <a:rPr lang="zh-TW" altLang="en-US" sz="1600" b="1" i="1">
-                                              <a:latin typeface="Cambria Math" panose="02040503050406030204" pitchFamily="18" charset="0"/>
-                                            </a:rPr>
-                                            <m:t>𝜺</m:t>
-                                          </m:r>
-                                        </m:e>
-                                      </m:acc>
-                                      <m:r>
-                                        <a:rPr lang="en-US" altLang="zh-TW" sz="1600" i="1">
-                                          <a:latin typeface="Cambria Math" panose="02040503050406030204" pitchFamily="18" charset="0"/>
-                                        </a:rPr>
-                                        <m:t>,0</m:t>
-                                      </m:r>
-                                    </m:sup>
-                                  </m:sSubSup>
-                                </m:e>
-                              </m:nary>
-                              <m:sSup>
-                                <m:sSupPr>
-                                  <m:ctrlPr>
-                                    <a:rPr lang="en-US" altLang="zh-TW" sz="1600" b="0" i="1" dirty="0" smtClean="0">
-                                      <a:latin typeface="Cambria Math" panose="02040503050406030204" pitchFamily="18" charset="0"/>
-                                      <a:ea typeface="Cambria Math" panose="02040503050406030204" pitchFamily="18" charset="0"/>
-                                    </a:rPr>
-                                  </m:ctrlPr>
-                                </m:sSupPr>
-                                <m:e>
-                                  <m:r>
-                                    <a:rPr lang="en-US" altLang="zh-TW" sz="1600" b="0" i="1" dirty="0" smtClean="0">
-                                      <a:latin typeface="Cambria Math" panose="02040503050406030204" pitchFamily="18" charset="0"/>
-                                      <a:ea typeface="Cambria Math" panose="02040503050406030204" pitchFamily="18" charset="0"/>
-                                    </a:rPr>
-                                    <m:t>𝑒</m:t>
-                                  </m:r>
-                                </m:e>
-                                <m:sup>
-                                  <m:r>
-                                    <a:rPr lang="en-US" altLang="zh-TW" sz="1600" b="0" i="1" dirty="0" smtClean="0">
-                                      <a:latin typeface="Cambria Math" panose="02040503050406030204" pitchFamily="18" charset="0"/>
-                                      <a:ea typeface="Cambria Math" panose="02040503050406030204" pitchFamily="18" charset="0"/>
-                                    </a:rPr>
-                                    <m:t>𝑖</m:t>
-                                  </m:r>
-                                  <m:r>
-                                    <a:rPr lang="en-US" altLang="zh-TW" sz="1600" b="1" i="1" dirty="0" smtClean="0">
-                                      <a:latin typeface="Cambria Math" panose="02040503050406030204" pitchFamily="18" charset="0"/>
-                                      <a:ea typeface="Cambria Math" panose="02040503050406030204" pitchFamily="18" charset="0"/>
-                                    </a:rPr>
-                                    <m:t>𝑸</m:t>
-                                  </m:r>
-                                  <m:r>
-                                    <a:rPr lang="en-US" altLang="zh-TW" sz="1600" b="0" i="1" dirty="0" smtClean="0">
-                                      <a:latin typeface="Cambria Math" panose="02040503050406030204" pitchFamily="18" charset="0"/>
-                                      <a:ea typeface="Cambria Math" panose="02040503050406030204" pitchFamily="18" charset="0"/>
-                                    </a:rPr>
-                                    <m:t>⋅</m:t>
-                                  </m:r>
-                                  <m:sSub>
-                                    <m:sSubPr>
-                                      <m:ctrlPr>
-                                        <a:rPr lang="en-US" altLang="zh-TW" sz="1600" b="0" i="1" dirty="0" smtClean="0">
-                                          <a:latin typeface="Cambria Math" panose="02040503050406030204" pitchFamily="18" charset="0"/>
-                                          <a:ea typeface="Cambria Math" panose="02040503050406030204" pitchFamily="18" charset="0"/>
-                                        </a:rPr>
-                                      </m:ctrlPr>
-                                    </m:sSubPr>
-                                    <m:e>
-                                      <m:r>
-                                        <a:rPr lang="en-US" altLang="zh-TW" sz="1600" b="1" i="1" dirty="0" smtClean="0">
-                                          <a:latin typeface="Cambria Math" panose="02040503050406030204" pitchFamily="18" charset="0"/>
-                                          <a:ea typeface="Cambria Math" panose="02040503050406030204" pitchFamily="18" charset="0"/>
-                                        </a:rPr>
-                                        <m:t>𝑹</m:t>
-                                      </m:r>
-                                    </m:e>
-                                    <m:sub>
-                                      <m:r>
-                                        <a:rPr lang="en-US" altLang="zh-TW" sz="1600" b="0" i="1" dirty="0" smtClean="0">
-                                          <a:latin typeface="Cambria Math" panose="02040503050406030204" pitchFamily="18" charset="0"/>
-                                          <a:ea typeface="Cambria Math" panose="02040503050406030204" pitchFamily="18" charset="0"/>
-                                        </a:rPr>
-                                        <m:t>𝑐</m:t>
-                                      </m:r>
-                                    </m:sub>
-                                  </m:sSub>
-                                </m:sup>
-                              </m:sSup>
-                            </m:e>
-                          </m:d>
-                        </m:e>
-                        <m:sup>
-                          <m:r>
-                            <a:rPr lang="en-US" altLang="zh-TW" sz="1600" i="1" dirty="0">
-                              <a:latin typeface="Cambria Math" panose="02040503050406030204" pitchFamily="18" charset="0"/>
-                              <a:ea typeface="Cambria Math" panose="02040503050406030204" pitchFamily="18" charset="0"/>
-                            </a:rPr>
-                            <m:t>2</m:t>
-                          </m:r>
-                        </m:sup>
-                      </m:sSup>
-                    </m:oMath>
-                  </m:oMathPara>
-                </a14:m>
-                <a:endParaRPr lang="zh-TW" altLang="en-US" sz="1600" dirty="0"/>
-              </a:p>
-            </p:txBody>
-          </p:sp>
-        </mc:Choice>
-        <mc:Fallback>
-          <p:sp>
-            <p:nvSpPr>
-              <p:cNvPr id="61" name="矩形 60">
-                <a:extLst>
-                  <a:ext uri="{FF2B5EF4-FFF2-40B4-BE49-F238E27FC236}">
-                    <a16:creationId xmlns:a16="http://schemas.microsoft.com/office/drawing/2014/main" id="{5AE04757-F78B-4D53-B64B-2C20CA7BC827}"/>
-                  </a:ext>
-                </a:extLst>
-              </p:cNvPr>
-              <p:cNvSpPr>
-                <a:spLocks noRot="1" noChangeAspect="1" noMove="1" noResize="1" noEditPoints="1" noAdjustHandles="1" noChangeArrowheads="1" noChangeShapeType="1" noTextEdit="1"/>
-              </p:cNvSpPr>
-              <p:nvPr/>
-            </p:nvSpPr>
-            <p:spPr>
-              <a:xfrm>
-                <a:off x="7899380" y="1218731"/>
-                <a:ext cx="1803699" cy="688778"/>
-              </a:xfrm>
-              <a:prstGeom prst="rect">
-                <a:avLst/>
-              </a:prstGeom>
-              <a:blipFill>
-                <a:blip r:embed="rId37"/>
-                <a:stretch>
-                  <a:fillRect/>
-                </a:stretch>
-              </a:blipFill>
-            </p:spPr>
-            <p:txBody>
-              <a:bodyPr/>
-              <a:lstStyle/>
-              <a:p>
-                <a:r>
-                  <a:rPr lang="zh-TW" altLang="en-US">
-                    <a:noFill/>
-                  </a:rPr>
-                  <a:t> </a:t>
-                </a:r>
-              </a:p>
-            </p:txBody>
-          </p:sp>
-        </mc:Fallback>
-      </mc:AlternateContent>
-      <mc:AlternateContent xmlns:mc="http://schemas.openxmlformats.org/markup-compatibility/2006">
-        <mc:Choice xmlns:a14="http://schemas.microsoft.com/office/drawing/2010/main" Requires="a14">
-          <p:sp>
-            <p:nvSpPr>
-              <p:cNvPr id="76" name="矩形 75">
-                <a:extLst>
-                  <a:ext uri="{FF2B5EF4-FFF2-40B4-BE49-F238E27FC236}">
-                    <a16:creationId xmlns:a16="http://schemas.microsoft.com/office/drawing/2014/main" id="{D987A762-019B-46D3-9CB8-EDAF171F6489}"/>
-                  </a:ext>
-                </a:extLst>
-              </p:cNvPr>
-              <p:cNvSpPr/>
-              <p:nvPr/>
-            </p:nvSpPr>
-            <p:spPr>
-              <a:xfrm>
-                <a:off x="6239632" y="5965307"/>
-                <a:ext cx="1070998" cy="555152"/>
-              </a:xfrm>
-              <a:prstGeom prst="rect">
-                <a:avLst/>
-              </a:prstGeom>
-            </p:spPr>
-            <p:txBody>
-              <a:bodyPr wrap="none">
-                <a:spAutoFit/>
-              </a:bodyPr>
-              <a:lstStyle/>
-              <a:p>
-                <a:pPr algn="r"/>
-                <a14:m>
-                  <m:oMathPara xmlns:m="http://schemas.openxmlformats.org/officeDocument/2006/math">
-                    <m:oMathParaPr>
-                      <m:jc m:val="centerGroup"/>
-                    </m:oMathParaPr>
-                    <m:oMath xmlns:m="http://schemas.openxmlformats.org/officeDocument/2006/math">
-                      <m:sSup>
-                        <m:sSupPr>
-                          <m:ctrlPr>
-                            <a:rPr lang="en-US" altLang="zh-TW" sz="2000" i="1">
-                              <a:latin typeface="Cambria Math" panose="02040503050406030204" pitchFamily="18" charset="0"/>
-                            </a:rPr>
-                          </m:ctrlPr>
-                        </m:sSupPr>
-                        <m:e>
-                          <m:d>
-                            <m:dPr>
-                              <m:begChr m:val="|"/>
-                              <m:endChr m:val="|"/>
-                              <m:ctrlPr>
-                                <a:rPr lang="en-US" altLang="zh-TW" sz="2000" i="1">
-                                  <a:latin typeface="Cambria Math" panose="02040503050406030204" pitchFamily="18" charset="0"/>
-                                </a:rPr>
-                              </m:ctrlPr>
-                            </m:dPr>
-                            <m:e>
-                              <m:sSubSup>
-                                <m:sSubSupPr>
-                                  <m:ctrlPr>
-                                    <a:rPr lang="en-US" altLang="zh-TW" sz="2000" i="1">
-                                      <a:latin typeface="Cambria Math" panose="02040503050406030204" pitchFamily="18" charset="0"/>
-                                    </a:rPr>
-                                  </m:ctrlPr>
-                                </m:sSubSupPr>
-                                <m:e>
-                                  <m:acc>
-                                    <m:accPr>
-                                      <m:chr m:val="̃"/>
-                                      <m:ctrlPr>
-                                        <a:rPr lang="en-US" altLang="zh-TW" sz="2000" i="1">
-                                          <a:latin typeface="Cambria Math" panose="02040503050406030204" pitchFamily="18" charset="0"/>
-                                        </a:rPr>
-                                      </m:ctrlPr>
-                                    </m:accPr>
-                                    <m:e>
-                                      <m:r>
-                                        <a:rPr lang="en-US" altLang="zh-TW" sz="2000" i="1">
-                                          <a:latin typeface="Cambria Math" panose="02040503050406030204" pitchFamily="18" charset="0"/>
-                                        </a:rPr>
-                                        <m:t>𝑀</m:t>
-                                      </m:r>
-                                    </m:e>
-                                  </m:acc>
-                                </m:e>
-                                <m:sub>
-                                  <m:r>
-                                    <a:rPr lang="en-US" altLang="zh-TW" sz="2000" i="1">
-                                      <a:latin typeface="Cambria Math" panose="02040503050406030204" pitchFamily="18" charset="0"/>
-                                    </a:rPr>
-                                    <m:t>𝑆</m:t>
-                                  </m:r>
-                                  <m:r>
-                                    <a:rPr lang="en-US" altLang="zh-TW" sz="2000" i="1">
-                                      <a:latin typeface="Cambria Math" panose="02040503050406030204" pitchFamily="18" charset="0"/>
-                                    </a:rPr>
-                                    <m:t>,</m:t>
-                                  </m:r>
-                                  <m:r>
-                                    <a:rPr lang="en-US" altLang="zh-TW" sz="2000" b="1" i="1">
-                                      <a:latin typeface="Cambria Math" panose="02040503050406030204" pitchFamily="18" charset="0"/>
-                                    </a:rPr>
-                                    <m:t>𝑸</m:t>
-                                  </m:r>
-                                </m:sub>
-                                <m:sup>
-                                  <m:acc>
-                                    <m:accPr>
-                                      <m:chr m:val="̂"/>
-                                      <m:ctrlPr>
-                                        <a:rPr lang="en-US" altLang="zh-TW" sz="2000" b="1" i="1">
-                                          <a:latin typeface="Cambria Math" panose="02040503050406030204" pitchFamily="18" charset="0"/>
-                                        </a:rPr>
-                                      </m:ctrlPr>
-                                    </m:accPr>
-                                    <m:e>
-                                      <m:r>
-                                        <a:rPr lang="zh-TW" altLang="en-US" sz="2000" b="1" i="1">
-                                          <a:latin typeface="Cambria Math" panose="02040503050406030204" pitchFamily="18" charset="0"/>
-                                        </a:rPr>
-                                        <m:t>𝜺</m:t>
-                                      </m:r>
-                                    </m:e>
-                                  </m:acc>
-                                  <m:r>
-                                    <a:rPr lang="en-US" altLang="zh-TW" sz="2000" i="1">
-                                      <a:latin typeface="Cambria Math" panose="02040503050406030204" pitchFamily="18" charset="0"/>
-                                    </a:rPr>
-                                    <m:t>,0</m:t>
-                                  </m:r>
-                                </m:sup>
-                              </m:sSubSup>
-                            </m:e>
-                          </m:d>
-                        </m:e>
-                        <m:sup>
-                          <m:r>
-                            <a:rPr lang="en-US" altLang="zh-TW" sz="2000" i="1">
-                              <a:latin typeface="Cambria Math" panose="02040503050406030204" pitchFamily="18" charset="0"/>
-                            </a:rPr>
-                            <m:t>2</m:t>
-                          </m:r>
-                        </m:sup>
-                      </m:sSup>
-                      <m:r>
-                        <a:rPr lang="en-US" altLang="zh-TW" sz="2000" i="1">
-                          <a:latin typeface="Cambria Math" panose="02040503050406030204" pitchFamily="18" charset="0"/>
-                        </a:rPr>
-                        <m:t> </m:t>
-                      </m:r>
-                    </m:oMath>
-                  </m:oMathPara>
-                </a14:m>
-                <a:endParaRPr lang="zh-TW" altLang="en-US" sz="2000" dirty="0"/>
-              </a:p>
-            </p:txBody>
-          </p:sp>
-        </mc:Choice>
-        <mc:Fallback>
-          <p:sp>
-            <p:nvSpPr>
-              <p:cNvPr id="76" name="矩形 75">
-                <a:extLst>
-                  <a:ext uri="{FF2B5EF4-FFF2-40B4-BE49-F238E27FC236}">
-                    <a16:creationId xmlns:a16="http://schemas.microsoft.com/office/drawing/2014/main" id="{D987A762-019B-46D3-9CB8-EDAF171F6489}"/>
-                  </a:ext>
-                </a:extLst>
-              </p:cNvPr>
-              <p:cNvSpPr>
-                <a:spLocks noRot="1" noChangeAspect="1" noMove="1" noResize="1" noEditPoints="1" noAdjustHandles="1" noChangeArrowheads="1" noChangeShapeType="1" noTextEdit="1"/>
-              </p:cNvSpPr>
-              <p:nvPr/>
-            </p:nvSpPr>
-            <p:spPr>
-              <a:xfrm>
-                <a:off x="6239632" y="5965307"/>
-                <a:ext cx="1070998" cy="555152"/>
-              </a:xfrm>
-              <a:prstGeom prst="rect">
-                <a:avLst/>
-              </a:prstGeom>
-              <a:blipFill>
-                <a:blip r:embed="rId38"/>
-                <a:stretch>
-                  <a:fillRect/>
-                </a:stretch>
-              </a:blipFill>
-            </p:spPr>
-            <p:txBody>
-              <a:bodyPr/>
-              <a:lstStyle/>
-              <a:p>
-                <a:r>
-                  <a:rPr lang="zh-TW" altLang="en-US">
-                    <a:noFill/>
-                  </a:rPr>
-                  <a:t> </a:t>
-                </a:r>
-              </a:p>
-            </p:txBody>
-          </p:sp>
-        </mc:Fallback>
-      </mc:AlternateContent>
-      <mc:AlternateContent xmlns:mc="http://schemas.openxmlformats.org/markup-compatibility/2006">
-        <mc:Choice xmlns:a14="http://schemas.microsoft.com/office/drawing/2010/main" Requires="a14">
-          <p:sp>
-            <p:nvSpPr>
-              <p:cNvPr id="83" name="矩形 82">
-                <a:extLst>
-                  <a:ext uri="{FF2B5EF4-FFF2-40B4-BE49-F238E27FC236}">
-                    <a16:creationId xmlns:a16="http://schemas.microsoft.com/office/drawing/2014/main" id="{E9278611-997A-4C33-A522-E671784693B9}"/>
-                  </a:ext>
-                </a:extLst>
-              </p:cNvPr>
-              <p:cNvSpPr/>
-              <p:nvPr/>
-            </p:nvSpPr>
-            <p:spPr>
-              <a:xfrm>
-                <a:off x="7899380" y="5831681"/>
-                <a:ext cx="1803699" cy="688778"/>
-              </a:xfrm>
-              <a:prstGeom prst="rect">
-                <a:avLst/>
-              </a:prstGeom>
-            </p:spPr>
-            <p:txBody>
-              <a:bodyPr wrap="none">
-                <a:spAutoFit/>
-              </a:bodyPr>
-              <a:lstStyle/>
-              <a:p>
-                <a:pPr/>
-                <a14:m>
-                  <m:oMathPara xmlns:m="http://schemas.openxmlformats.org/officeDocument/2006/math">
-                    <m:oMathParaPr>
-                      <m:jc m:val="centerGroup"/>
-                    </m:oMathParaPr>
-                    <m:oMath xmlns:m="http://schemas.openxmlformats.org/officeDocument/2006/math">
-                      <m:sSup>
-                        <m:sSupPr>
-                          <m:ctrlPr>
-                            <a:rPr lang="en-US" altLang="zh-TW" sz="1600" i="1" dirty="0" smtClean="0">
-                              <a:latin typeface="Cambria Math" panose="02040503050406030204" pitchFamily="18" charset="0"/>
-                              <a:ea typeface="Cambria Math" panose="02040503050406030204" pitchFamily="18" charset="0"/>
-                            </a:rPr>
-                          </m:ctrlPr>
-                        </m:sSupPr>
-                        <m:e>
-                          <m:d>
-                            <m:dPr>
-                              <m:begChr m:val="|"/>
-                              <m:endChr m:val="|"/>
-                              <m:ctrlPr>
-                                <a:rPr lang="en-US" altLang="zh-TW" sz="1600" i="1" dirty="0">
-                                  <a:latin typeface="Cambria Math" panose="02040503050406030204" pitchFamily="18" charset="0"/>
-                                  <a:ea typeface="Cambria Math" panose="02040503050406030204" pitchFamily="18" charset="0"/>
-                                </a:rPr>
-                              </m:ctrlPr>
-                            </m:dPr>
-                            <m:e>
-                              <m:nary>
-                                <m:naryPr>
-                                  <m:chr m:val="∑"/>
-                                  <m:limLoc m:val="subSup"/>
-                                  <m:supHide m:val="on"/>
-                                  <m:ctrlPr>
-                                    <a:rPr lang="en-US" altLang="zh-TW" sz="1600" i="1" dirty="0" smtClean="0">
-                                      <a:latin typeface="Cambria Math" panose="02040503050406030204" pitchFamily="18" charset="0"/>
-                                      <a:ea typeface="Cambria Math" panose="02040503050406030204" pitchFamily="18" charset="0"/>
-                                    </a:rPr>
-                                  </m:ctrlPr>
-                                </m:naryPr>
-                                <m:sub>
-                                  <m:r>
-                                    <a:rPr lang="en-US" altLang="zh-TW" sz="1600" b="1" i="1">
-                                      <a:latin typeface="Cambria Math" panose="02040503050406030204" pitchFamily="18" charset="0"/>
-                                    </a:rPr>
-                                    <m:t>𝑸</m:t>
-                                  </m:r>
-                                </m:sub>
-                                <m:sup/>
-                                <m:e>
-                                  <m:sSubSup>
-                                    <m:sSubSupPr>
-                                      <m:ctrlPr>
-                                        <a:rPr lang="en-US" altLang="zh-TW" sz="1600" i="1">
-                                          <a:latin typeface="Cambria Math" panose="02040503050406030204" pitchFamily="18" charset="0"/>
-                                        </a:rPr>
-                                      </m:ctrlPr>
-                                    </m:sSubSupPr>
-                                    <m:e>
-                                      <m:acc>
-                                        <m:accPr>
-                                          <m:chr m:val="̃"/>
-                                          <m:ctrlPr>
-                                            <a:rPr lang="en-US" altLang="zh-TW" sz="1600" i="1">
-                                              <a:latin typeface="Cambria Math" panose="02040503050406030204" pitchFamily="18" charset="0"/>
-                                            </a:rPr>
-                                          </m:ctrlPr>
-                                        </m:accPr>
-                                        <m:e>
-                                          <m:r>
-                                            <a:rPr lang="en-US" altLang="zh-TW" sz="1600" i="1">
-                                              <a:latin typeface="Cambria Math" panose="02040503050406030204" pitchFamily="18" charset="0"/>
-                                            </a:rPr>
-                                            <m:t>𝑀</m:t>
-                                          </m:r>
-                                        </m:e>
-                                      </m:acc>
-                                    </m:e>
-                                    <m:sub>
-                                      <m:r>
-                                        <a:rPr lang="en-US" altLang="zh-TW" sz="1600" i="1">
-                                          <a:latin typeface="Cambria Math" panose="02040503050406030204" pitchFamily="18" charset="0"/>
-                                        </a:rPr>
-                                        <m:t>𝑆</m:t>
-                                      </m:r>
-                                      <m:r>
-                                        <a:rPr lang="en-US" altLang="zh-TW" sz="1600" i="1">
-                                          <a:latin typeface="Cambria Math" panose="02040503050406030204" pitchFamily="18" charset="0"/>
-                                        </a:rPr>
-                                        <m:t>,</m:t>
-                                      </m:r>
-                                      <m:r>
-                                        <a:rPr lang="en-US" altLang="zh-TW" sz="1600" b="1" i="1">
-                                          <a:latin typeface="Cambria Math" panose="02040503050406030204" pitchFamily="18" charset="0"/>
-                                        </a:rPr>
-                                        <m:t>𝑸</m:t>
-                                      </m:r>
-                                    </m:sub>
-                                    <m:sup>
-                                      <m:acc>
-                                        <m:accPr>
-                                          <m:chr m:val="̂"/>
-                                          <m:ctrlPr>
-                                            <a:rPr lang="en-US" altLang="zh-TW" sz="1600" b="1" i="1">
-                                              <a:latin typeface="Cambria Math" panose="02040503050406030204" pitchFamily="18" charset="0"/>
-                                            </a:rPr>
-                                          </m:ctrlPr>
-                                        </m:accPr>
-                                        <m:e>
-                                          <m:r>
-                                            <a:rPr lang="zh-TW" altLang="en-US" sz="1600" b="1" i="1">
-                                              <a:latin typeface="Cambria Math" panose="02040503050406030204" pitchFamily="18" charset="0"/>
-                                            </a:rPr>
-                                            <m:t>𝜺</m:t>
-                                          </m:r>
-                                        </m:e>
-                                      </m:acc>
-                                      <m:r>
-                                        <a:rPr lang="en-US" altLang="zh-TW" sz="1600" i="1">
-                                          <a:latin typeface="Cambria Math" panose="02040503050406030204" pitchFamily="18" charset="0"/>
-                                        </a:rPr>
-                                        <m:t>,0</m:t>
-                                      </m:r>
-                                    </m:sup>
-                                  </m:sSubSup>
-                                </m:e>
-                              </m:nary>
-                              <m:sSup>
-                                <m:sSupPr>
-                                  <m:ctrlPr>
-                                    <a:rPr lang="en-US" altLang="zh-TW" sz="1600" b="0" i="1" dirty="0" smtClean="0">
-                                      <a:latin typeface="Cambria Math" panose="02040503050406030204" pitchFamily="18" charset="0"/>
-                                      <a:ea typeface="Cambria Math" panose="02040503050406030204" pitchFamily="18" charset="0"/>
-                                    </a:rPr>
-                                  </m:ctrlPr>
-                                </m:sSupPr>
-                                <m:e>
-                                  <m:r>
-                                    <a:rPr lang="en-US" altLang="zh-TW" sz="1600" b="0" i="1" dirty="0" smtClean="0">
-                                      <a:latin typeface="Cambria Math" panose="02040503050406030204" pitchFamily="18" charset="0"/>
-                                      <a:ea typeface="Cambria Math" panose="02040503050406030204" pitchFamily="18" charset="0"/>
-                                    </a:rPr>
-                                    <m:t>𝑒</m:t>
-                                  </m:r>
-                                </m:e>
-                                <m:sup>
-                                  <m:r>
-                                    <a:rPr lang="en-US" altLang="zh-TW" sz="1600" b="0" i="1" dirty="0" smtClean="0">
-                                      <a:latin typeface="Cambria Math" panose="02040503050406030204" pitchFamily="18" charset="0"/>
-                                      <a:ea typeface="Cambria Math" panose="02040503050406030204" pitchFamily="18" charset="0"/>
-                                    </a:rPr>
-                                    <m:t>𝑖</m:t>
-                                  </m:r>
-                                  <m:r>
-                                    <a:rPr lang="en-US" altLang="zh-TW" sz="1600" b="1" i="1" dirty="0" smtClean="0">
-                                      <a:latin typeface="Cambria Math" panose="02040503050406030204" pitchFamily="18" charset="0"/>
-                                      <a:ea typeface="Cambria Math" panose="02040503050406030204" pitchFamily="18" charset="0"/>
-                                    </a:rPr>
-                                    <m:t>𝑸</m:t>
-                                  </m:r>
-                                  <m:r>
-                                    <a:rPr lang="en-US" altLang="zh-TW" sz="1600" b="0" i="1" dirty="0" smtClean="0">
-                                      <a:latin typeface="Cambria Math" panose="02040503050406030204" pitchFamily="18" charset="0"/>
-                                      <a:ea typeface="Cambria Math" panose="02040503050406030204" pitchFamily="18" charset="0"/>
-                                    </a:rPr>
-                                    <m:t>⋅</m:t>
-                                  </m:r>
-                                  <m:sSub>
-                                    <m:sSubPr>
-                                      <m:ctrlPr>
-                                        <a:rPr lang="en-US" altLang="zh-TW" sz="1600" b="0" i="1" dirty="0" smtClean="0">
-                                          <a:latin typeface="Cambria Math" panose="02040503050406030204" pitchFamily="18" charset="0"/>
-                                          <a:ea typeface="Cambria Math" panose="02040503050406030204" pitchFamily="18" charset="0"/>
-                                        </a:rPr>
-                                      </m:ctrlPr>
-                                    </m:sSubPr>
-                                    <m:e>
-                                      <m:r>
-                                        <a:rPr lang="en-US" altLang="zh-TW" sz="1600" b="1" i="1" dirty="0" smtClean="0">
-                                          <a:latin typeface="Cambria Math" panose="02040503050406030204" pitchFamily="18" charset="0"/>
-                                          <a:ea typeface="Cambria Math" panose="02040503050406030204" pitchFamily="18" charset="0"/>
-                                        </a:rPr>
-                                        <m:t>𝑹</m:t>
-                                      </m:r>
-                                    </m:e>
-                                    <m:sub>
-                                      <m:r>
-                                        <a:rPr lang="en-US" altLang="zh-TW" sz="1600" b="0" i="1" dirty="0" smtClean="0">
-                                          <a:latin typeface="Cambria Math" panose="02040503050406030204" pitchFamily="18" charset="0"/>
-                                          <a:ea typeface="Cambria Math" panose="02040503050406030204" pitchFamily="18" charset="0"/>
-                                        </a:rPr>
-                                        <m:t>𝑐</m:t>
-                                      </m:r>
-                                    </m:sub>
-                                  </m:sSub>
-                                </m:sup>
-                              </m:sSup>
-                            </m:e>
-                          </m:d>
-                        </m:e>
-                        <m:sup>
-                          <m:r>
-                            <a:rPr lang="en-US" altLang="zh-TW" sz="1600" i="1" dirty="0">
-                              <a:latin typeface="Cambria Math" panose="02040503050406030204" pitchFamily="18" charset="0"/>
-                              <a:ea typeface="Cambria Math" panose="02040503050406030204" pitchFamily="18" charset="0"/>
-                            </a:rPr>
-                            <m:t>2</m:t>
-                          </m:r>
-                        </m:sup>
-                      </m:sSup>
-                    </m:oMath>
-                  </m:oMathPara>
-                </a14:m>
-                <a:endParaRPr lang="zh-TW" altLang="en-US" sz="1600" dirty="0"/>
-              </a:p>
-            </p:txBody>
-          </p:sp>
-        </mc:Choice>
-        <mc:Fallback>
-          <p:sp>
-            <p:nvSpPr>
-              <p:cNvPr id="83" name="矩形 82">
-                <a:extLst>
-                  <a:ext uri="{FF2B5EF4-FFF2-40B4-BE49-F238E27FC236}">
-                    <a16:creationId xmlns:a16="http://schemas.microsoft.com/office/drawing/2014/main" id="{E9278611-997A-4C33-A522-E671784693B9}"/>
-                  </a:ext>
-                </a:extLst>
-              </p:cNvPr>
-              <p:cNvSpPr>
-                <a:spLocks noRot="1" noChangeAspect="1" noMove="1" noResize="1" noEditPoints="1" noAdjustHandles="1" noChangeArrowheads="1" noChangeShapeType="1" noTextEdit="1"/>
-              </p:cNvSpPr>
-              <p:nvPr/>
-            </p:nvSpPr>
-            <p:spPr>
-              <a:xfrm>
-                <a:off x="7899380" y="5831681"/>
-                <a:ext cx="1803699" cy="688778"/>
-              </a:xfrm>
-              <a:prstGeom prst="rect">
-                <a:avLst/>
-              </a:prstGeom>
-              <a:blipFill>
-                <a:blip r:embed="rId39"/>
-                <a:stretch>
-                  <a:fillRect/>
-                </a:stretch>
-              </a:blipFill>
-            </p:spPr>
-            <p:txBody>
-              <a:bodyPr/>
-              <a:lstStyle/>
-              <a:p>
-                <a:r>
-                  <a:rPr lang="zh-TW" altLang="en-US">
-                    <a:noFill/>
-                  </a:rPr>
-                  <a:t> </a:t>
-                </a:r>
-              </a:p>
-            </p:txBody>
-          </p:sp>
-        </mc:Fallback>
-      </mc:AlternateContent>
-      <mc:AlternateContent xmlns:mc="http://schemas.openxmlformats.org/markup-compatibility/2006">
-        <mc:Choice xmlns:a14="http://schemas.microsoft.com/office/drawing/2010/main" Requires="a14">
+      <mc:AlternateContent xmlns:mc="http://schemas.openxmlformats.org/markup-compatibility/2006" xmlns:a14="http://schemas.microsoft.com/office/drawing/2010/main">
+        <mc:Choice Requires="a14">
           <p:sp>
             <p:nvSpPr>
               <p:cNvPr id="84" name="矩形: 圓角 83">
@@ -16979,7 +14999,7 @@
             </p:txBody>
           </p:sp>
         </mc:Choice>
-        <mc:Fallback>
+        <mc:Fallback xmlns="">
           <p:sp>
             <p:nvSpPr>
               <p:cNvPr id="84" name="矩形: 圓角 83">
@@ -17026,8 +15046,8 @@
           </p:sp>
         </mc:Fallback>
       </mc:AlternateContent>
-      <mc:AlternateContent xmlns:mc="http://schemas.openxmlformats.org/markup-compatibility/2006">
-        <mc:Choice xmlns:a14="http://schemas.microsoft.com/office/drawing/2010/main" Requires="a14">
+      <mc:AlternateContent xmlns:mc="http://schemas.openxmlformats.org/markup-compatibility/2006" xmlns:a14="http://schemas.microsoft.com/office/drawing/2010/main">
+        <mc:Choice Requires="a14">
           <p:sp>
             <p:nvSpPr>
               <p:cNvPr id="88" name="矩形: 圓角 87">
@@ -17216,7 +15236,7 @@
             </p:txBody>
           </p:sp>
         </mc:Choice>
-        <mc:Fallback>
+        <mc:Fallback xmlns="">
           <p:sp>
             <p:nvSpPr>
               <p:cNvPr id="88" name="矩形: 圓角 87">
@@ -17263,8 +15283,8 @@
           </p:sp>
         </mc:Fallback>
       </mc:AlternateContent>
-      <mc:AlternateContent xmlns:mc="http://schemas.openxmlformats.org/markup-compatibility/2006">
-        <mc:Choice xmlns:a14="http://schemas.microsoft.com/office/drawing/2010/main" Requires="a14">
+      <mc:AlternateContent xmlns:mc="http://schemas.openxmlformats.org/markup-compatibility/2006" xmlns:a14="http://schemas.microsoft.com/office/drawing/2010/main">
+        <mc:Choice Requires="a14">
           <p:sp>
             <p:nvSpPr>
               <p:cNvPr id="89" name="矩形: 圓角 88">
@@ -17387,7 +15407,7 @@
             </p:txBody>
           </p:sp>
         </mc:Choice>
-        <mc:Fallback>
+        <mc:Fallback xmlns="">
           <p:sp>
             <p:nvSpPr>
               <p:cNvPr id="89" name="矩形: 圓角 88">
@@ -17434,8 +15454,8 @@
           </p:sp>
         </mc:Fallback>
       </mc:AlternateContent>
-      <mc:AlternateContent xmlns:mc="http://schemas.openxmlformats.org/markup-compatibility/2006">
-        <mc:Choice xmlns:a14="http://schemas.microsoft.com/office/drawing/2010/main" Requires="a14">
+      <mc:AlternateContent xmlns:mc="http://schemas.openxmlformats.org/markup-compatibility/2006" xmlns:a14="http://schemas.microsoft.com/office/drawing/2010/main">
+        <mc:Choice Requires="a14">
           <p:sp>
             <p:nvSpPr>
               <p:cNvPr id="91" name="矩形: 圓角 90">
@@ -17558,7 +15578,7 @@
             </p:txBody>
           </p:sp>
         </mc:Choice>
-        <mc:Fallback>
+        <mc:Fallback xmlns="">
           <p:sp>
             <p:nvSpPr>
               <p:cNvPr id="91" name="矩形: 圓角 90">
@@ -17585,6 +15605,1950 @@
               </a:prstGeom>
               <a:blipFill>
                 <a:blip r:embed="rId43"/>
+                <a:stretch>
+                  <a:fillRect/>
+                </a:stretch>
+              </a:blipFill>
+            </p:spPr>
+            <p:txBody>
+              <a:bodyPr/>
+              <a:lstStyle/>
+              <a:p>
+                <a:r>
+                  <a:rPr lang="zh-TW" altLang="en-US">
+                    <a:noFill/>
+                  </a:rPr>
+                  <a:t> </a:t>
+                </a:r>
+              </a:p>
+            </p:txBody>
+          </p:sp>
+        </mc:Fallback>
+      </mc:AlternateContent>
+      <mc:AlternateContent xmlns:mc="http://schemas.openxmlformats.org/markup-compatibility/2006">
+        <mc:Choice xmlns:a14="http://schemas.microsoft.com/office/drawing/2010/main" Requires="a14">
+          <p:sp>
+            <p:nvSpPr>
+              <p:cNvPr id="55" name="矩形 54">
+                <a:extLst>
+                  <a:ext uri="{FF2B5EF4-FFF2-40B4-BE49-F238E27FC236}">
+                    <a16:creationId xmlns:a16="http://schemas.microsoft.com/office/drawing/2014/main" id="{73895A47-2CF1-4238-A421-3C53B146FB6A}"/>
+                  </a:ext>
+                </a:extLst>
+              </p:cNvPr>
+              <p:cNvSpPr/>
+              <p:nvPr/>
+            </p:nvSpPr>
+            <p:spPr>
+              <a:xfrm>
+                <a:off x="1299165" y="1315026"/>
+                <a:ext cx="1177245" cy="555793"/>
+              </a:xfrm>
+              <a:prstGeom prst="rect">
+                <a:avLst/>
+              </a:prstGeom>
+            </p:spPr>
+            <p:txBody>
+              <a:bodyPr wrap="none">
+                <a:spAutoFit/>
+              </a:bodyPr>
+              <a:lstStyle/>
+              <a:p>
+                <a:pPr algn="ctr"/>
+                <a14:m>
+                  <m:oMathPara xmlns:m="http://schemas.openxmlformats.org/officeDocument/2006/math">
+                    <m:oMathParaPr>
+                      <m:jc m:val="centerGroup"/>
+                    </m:oMathParaPr>
+                    <m:oMath xmlns:m="http://schemas.openxmlformats.org/officeDocument/2006/math">
+                      <m:sSup>
+                        <m:sSupPr>
+                          <m:ctrlPr>
+                            <a:rPr lang="en-US" altLang="zh-TW" sz="2000" i="1" smtClean="0">
+                              <a:latin typeface="Cambria Math" panose="02040503050406030204" pitchFamily="18" charset="0"/>
+                            </a:rPr>
+                          </m:ctrlPr>
+                        </m:sSupPr>
+                        <m:e>
+                          <m:d>
+                            <m:dPr>
+                              <m:begChr m:val="|"/>
+                              <m:endChr m:val="|"/>
+                              <m:ctrlPr>
+                                <a:rPr lang="en-US" altLang="zh-TW" sz="2000" i="1">
+                                  <a:latin typeface="Cambria Math" panose="02040503050406030204" pitchFamily="18" charset="0"/>
+                                </a:rPr>
+                              </m:ctrlPr>
+                            </m:dPr>
+                            <m:e>
+                              <m:sSubSup>
+                                <m:sSubSupPr>
+                                  <m:ctrlPr>
+                                    <a:rPr lang="en-US" altLang="zh-TW" sz="2000" i="1">
+                                      <a:latin typeface="Cambria Math" panose="02040503050406030204" pitchFamily="18" charset="0"/>
+                                    </a:rPr>
+                                  </m:ctrlPr>
+                                </m:sSubSupPr>
+                                <m:e>
+                                  <m:acc>
+                                    <m:accPr>
+                                      <m:chr m:val="̃"/>
+                                      <m:ctrlPr>
+                                        <a:rPr lang="en-US" altLang="zh-TW" sz="2000" i="1">
+                                          <a:latin typeface="Cambria Math" panose="02040503050406030204" pitchFamily="18" charset="0"/>
+                                        </a:rPr>
+                                      </m:ctrlPr>
+                                    </m:accPr>
+                                    <m:e>
+                                      <m:r>
+                                        <a:rPr lang="en-US" altLang="zh-TW" sz="2000" i="1">
+                                          <a:latin typeface="Cambria Math" panose="02040503050406030204" pitchFamily="18" charset="0"/>
+                                        </a:rPr>
+                                        <m:t>𝑀</m:t>
+                                      </m:r>
+                                    </m:e>
+                                  </m:acc>
+                                </m:e>
+                                <m:sub>
+                                  <m:acc>
+                                    <m:accPr>
+                                      <m:chr m:val="̂"/>
+                                      <m:ctrlPr>
+                                        <a:rPr lang="en-US" altLang="zh-TW" sz="2000" b="1" i="1">
+                                          <a:latin typeface="Cambria Math" panose="02040503050406030204" pitchFamily="18" charset="0"/>
+                                        </a:rPr>
+                                      </m:ctrlPr>
+                                    </m:accPr>
+                                    <m:e>
+                                      <m:r>
+                                        <a:rPr lang="zh-TW" altLang="en-US" sz="2000" b="1" i="1">
+                                          <a:latin typeface="Cambria Math" panose="02040503050406030204" pitchFamily="18" charset="0"/>
+                                        </a:rPr>
+                                        <m:t>𝜺</m:t>
+                                      </m:r>
+                                    </m:e>
+                                  </m:acc>
+                                  <m:r>
+                                    <a:rPr lang="en-US" altLang="zh-TW" sz="2000" i="1">
+                                      <a:latin typeface="Cambria Math" panose="02040503050406030204" pitchFamily="18" charset="0"/>
+                                    </a:rPr>
+                                    <m:t>,±1</m:t>
+                                  </m:r>
+                                </m:sub>
+                                <m:sup>
+                                  <m:r>
+                                    <a:rPr lang="en-US" altLang="zh-TW" sz="2000" i="1">
+                                      <a:latin typeface="Cambria Math" panose="02040503050406030204" pitchFamily="18" charset="0"/>
+                                    </a:rPr>
+                                    <m:t>𝑆</m:t>
+                                  </m:r>
+                                  <m:r>
+                                    <a:rPr lang="en-US" altLang="zh-TW" sz="2000" i="1">
+                                      <a:latin typeface="Cambria Math" panose="02040503050406030204" pitchFamily="18" charset="0"/>
+                                    </a:rPr>
+                                    <m:t>,</m:t>
+                                  </m:r>
+                                  <m:r>
+                                    <a:rPr lang="en-US" altLang="zh-TW" sz="2000" b="1" i="1">
+                                      <a:latin typeface="Cambria Math" panose="02040503050406030204" pitchFamily="18" charset="0"/>
+                                    </a:rPr>
+                                    <m:t>𝑸</m:t>
+                                  </m:r>
+                                </m:sup>
+                              </m:sSubSup>
+                            </m:e>
+                          </m:d>
+                        </m:e>
+                        <m:sup>
+                          <m:r>
+                            <a:rPr lang="en-US" altLang="zh-TW" sz="2000" i="1">
+                              <a:latin typeface="Cambria Math" panose="02040503050406030204" pitchFamily="18" charset="0"/>
+                            </a:rPr>
+                            <m:t>2</m:t>
+                          </m:r>
+                        </m:sup>
+                      </m:sSup>
+                      <m:r>
+                        <a:rPr lang="en-US" altLang="zh-TW" sz="2000" i="1">
+                          <a:latin typeface="Cambria Math" panose="02040503050406030204" pitchFamily="18" charset="0"/>
+                        </a:rPr>
+                        <m:t> </m:t>
+                      </m:r>
+                    </m:oMath>
+                  </m:oMathPara>
+                </a14:m>
+                <a:endParaRPr lang="zh-TW" altLang="en-US" sz="2000" dirty="0"/>
+              </a:p>
+            </p:txBody>
+          </p:sp>
+        </mc:Choice>
+        <mc:Fallback>
+          <p:sp>
+            <p:nvSpPr>
+              <p:cNvPr id="55" name="矩形 54">
+                <a:extLst>
+                  <a:ext uri="{FF2B5EF4-FFF2-40B4-BE49-F238E27FC236}">
+                    <a16:creationId xmlns:a16="http://schemas.microsoft.com/office/drawing/2014/main" id="{73895A47-2CF1-4238-A421-3C53B146FB6A}"/>
+                  </a:ext>
+                </a:extLst>
+              </p:cNvPr>
+              <p:cNvSpPr>
+                <a:spLocks noRot="1" noChangeAspect="1" noMove="1" noResize="1" noEditPoints="1" noAdjustHandles="1" noChangeArrowheads="1" noChangeShapeType="1" noTextEdit="1"/>
+              </p:cNvSpPr>
+              <p:nvPr/>
+            </p:nvSpPr>
+            <p:spPr>
+              <a:xfrm>
+                <a:off x="1299165" y="1315026"/>
+                <a:ext cx="1177245" cy="555793"/>
+              </a:xfrm>
+              <a:prstGeom prst="rect">
+                <a:avLst/>
+              </a:prstGeom>
+              <a:blipFill>
+                <a:blip r:embed="rId44"/>
+                <a:stretch>
+                  <a:fillRect/>
+                </a:stretch>
+              </a:blipFill>
+            </p:spPr>
+            <p:txBody>
+              <a:bodyPr/>
+              <a:lstStyle/>
+              <a:p>
+                <a:r>
+                  <a:rPr lang="zh-TW" altLang="en-US">
+                    <a:noFill/>
+                  </a:rPr>
+                  <a:t> </a:t>
+                </a:r>
+              </a:p>
+            </p:txBody>
+          </p:sp>
+        </mc:Fallback>
+      </mc:AlternateContent>
+      <mc:AlternateContent xmlns:mc="http://schemas.openxmlformats.org/markup-compatibility/2006">
+        <mc:Choice xmlns:a14="http://schemas.microsoft.com/office/drawing/2010/main" Requires="a14">
+          <p:sp>
+            <p:nvSpPr>
+              <p:cNvPr id="56" name="矩形 55">
+                <a:extLst>
+                  <a:ext uri="{FF2B5EF4-FFF2-40B4-BE49-F238E27FC236}">
+                    <a16:creationId xmlns:a16="http://schemas.microsoft.com/office/drawing/2014/main" id="{2BC7567B-3CF3-4AA7-AE13-664537E02B19}"/>
+                  </a:ext>
+                </a:extLst>
+              </p:cNvPr>
+              <p:cNvSpPr/>
+              <p:nvPr/>
+            </p:nvSpPr>
+            <p:spPr>
+              <a:xfrm>
+                <a:off x="2611825" y="1280786"/>
+                <a:ext cx="2486552" cy="624273"/>
+              </a:xfrm>
+              <a:prstGeom prst="rect">
+                <a:avLst/>
+              </a:prstGeom>
+            </p:spPr>
+            <p:txBody>
+              <a:bodyPr wrap="square">
+                <a:spAutoFit/>
+              </a:bodyPr>
+              <a:lstStyle/>
+              <a:p>
+                <a:pPr algn="ctr"/>
+                <a14:m>
+                  <m:oMathPara xmlns:m="http://schemas.openxmlformats.org/officeDocument/2006/math">
+                    <m:oMathParaPr>
+                      <m:jc m:val="centerGroup"/>
+                    </m:oMathParaPr>
+                    <m:oMath xmlns:m="http://schemas.openxmlformats.org/officeDocument/2006/math">
+                      <m:sSup>
+                        <m:sSupPr>
+                          <m:ctrlPr>
+                            <a:rPr lang="en-US" altLang="zh-TW" sz="2000" i="1" dirty="0" smtClean="0">
+                              <a:latin typeface="Cambria Math" panose="02040503050406030204" pitchFamily="18" charset="0"/>
+                              <a:ea typeface="Cambria Math" panose="02040503050406030204" pitchFamily="18" charset="0"/>
+                            </a:rPr>
+                          </m:ctrlPr>
+                        </m:sSupPr>
+                        <m:e>
+                          <m:d>
+                            <m:dPr>
+                              <m:begChr m:val="|"/>
+                              <m:endChr m:val="|"/>
+                              <m:ctrlPr>
+                                <a:rPr lang="en-US" altLang="zh-TW" sz="2000" i="1" dirty="0">
+                                  <a:latin typeface="Cambria Math" panose="02040503050406030204" pitchFamily="18" charset="0"/>
+                                  <a:ea typeface="Cambria Math" panose="02040503050406030204" pitchFamily="18" charset="0"/>
+                                </a:rPr>
+                              </m:ctrlPr>
+                            </m:dPr>
+                            <m:e>
+                              <m:sSubSup>
+                                <m:sSubSupPr>
+                                  <m:ctrlPr>
+                                    <a:rPr lang="en-US" altLang="zh-TW" sz="2000" b="0" i="1" dirty="0" smtClean="0">
+                                      <a:latin typeface="Cambria Math" panose="02040503050406030204" pitchFamily="18" charset="0"/>
+                                      <a:ea typeface="Cambria Math" panose="02040503050406030204" pitchFamily="18" charset="0"/>
+                                    </a:rPr>
+                                  </m:ctrlPr>
+                                </m:sSubSupPr>
+                                <m:e>
+                                  <m:r>
+                                    <m:rPr>
+                                      <m:sty m:val="p"/>
+                                    </m:rPr>
+                                    <a:rPr lang="en-US" altLang="zh-TW" sz="2000" b="0" i="0" dirty="0" smtClean="0">
+                                      <a:latin typeface="Cambria Math" panose="02040503050406030204" pitchFamily="18" charset="0"/>
+                                      <a:ea typeface="Cambria Math" panose="02040503050406030204" pitchFamily="18" charset="0"/>
+                                    </a:rPr>
+                                    <m:t>Φ</m:t>
+                                  </m:r>
+                                </m:e>
+                                <m:sub>
+                                  <m:acc>
+                                    <m:accPr>
+                                      <m:chr m:val="̂"/>
+                                      <m:ctrlPr>
+                                        <a:rPr lang="en-US" altLang="zh-TW" sz="2000" b="1" i="1">
+                                          <a:latin typeface="Cambria Math" panose="02040503050406030204" pitchFamily="18" charset="0"/>
+                                        </a:rPr>
+                                      </m:ctrlPr>
+                                    </m:accPr>
+                                    <m:e>
+                                      <m:r>
+                                        <a:rPr lang="zh-TW" altLang="en-US" sz="2000" b="1" i="1">
+                                          <a:latin typeface="Cambria Math" panose="02040503050406030204" pitchFamily="18" charset="0"/>
+                                        </a:rPr>
+                                        <m:t>𝜺</m:t>
+                                      </m:r>
+                                    </m:e>
+                                  </m:acc>
+                                  <m:r>
+                                    <a:rPr lang="en-US" altLang="zh-TW" sz="2000" i="1">
+                                      <a:latin typeface="Cambria Math" panose="02040503050406030204" pitchFamily="18" charset="0"/>
+                                    </a:rPr>
+                                    <m:t>,±1</m:t>
+                                  </m:r>
+                                </m:sub>
+                                <m:sup>
+                                  <m:r>
+                                    <a:rPr lang="en-US" altLang="zh-TW" sz="2000" i="1" dirty="0">
+                                      <a:latin typeface="Cambria Math" panose="02040503050406030204" pitchFamily="18" charset="0"/>
+                                      <a:ea typeface="Cambria Math" panose="02040503050406030204" pitchFamily="18" charset="0"/>
+                                    </a:rPr>
+                                    <m:t>𝐾</m:t>
+                                  </m:r>
+                                  <m:r>
+                                    <a:rPr lang="en-US" altLang="zh-TW" sz="2000" i="1" dirty="0">
+                                      <a:latin typeface="Cambria Math" panose="02040503050406030204" pitchFamily="18" charset="0"/>
+                                      <a:ea typeface="Cambria Math" panose="02040503050406030204" pitchFamily="18" charset="0"/>
+                                    </a:rPr>
+                                    <m:t>/</m:t>
+                                  </m:r>
+                                  <m:sSup>
+                                    <m:sSupPr>
+                                      <m:ctrlPr>
+                                        <a:rPr lang="en-US" altLang="zh-TW" sz="2000" i="1" dirty="0">
+                                          <a:latin typeface="Cambria Math" panose="02040503050406030204" pitchFamily="18" charset="0"/>
+                                          <a:ea typeface="Cambria Math" panose="02040503050406030204" pitchFamily="18" charset="0"/>
+                                        </a:rPr>
+                                      </m:ctrlPr>
+                                    </m:sSupPr>
+                                    <m:e>
+                                      <m:r>
+                                        <a:rPr lang="en-US" altLang="zh-TW" sz="2000" i="1" dirty="0">
+                                          <a:latin typeface="Cambria Math" panose="02040503050406030204" pitchFamily="18" charset="0"/>
+                                          <a:ea typeface="Cambria Math" panose="02040503050406030204" pitchFamily="18" charset="0"/>
+                                        </a:rPr>
+                                        <m:t>𝐾</m:t>
+                                      </m:r>
+                                    </m:e>
+                                    <m:sup>
+                                      <m:r>
+                                        <a:rPr lang="en-US" altLang="zh-TW" sz="2000" i="1" dirty="0">
+                                          <a:latin typeface="Cambria Math" panose="02040503050406030204" pitchFamily="18" charset="0"/>
+                                          <a:ea typeface="Cambria Math" panose="02040503050406030204" pitchFamily="18" charset="0"/>
+                                        </a:rPr>
+                                        <m:t>′</m:t>
+                                      </m:r>
+                                    </m:sup>
+                                  </m:sSup>
+                                </m:sup>
+                              </m:sSubSup>
+                              <m:d>
+                                <m:dPr>
+                                  <m:ctrlPr>
+                                    <a:rPr lang="en-US" altLang="zh-TW" sz="2000" i="1" dirty="0">
+                                      <a:latin typeface="Cambria Math" panose="02040503050406030204" pitchFamily="18" charset="0"/>
+                                      <a:ea typeface="Cambria Math" panose="02040503050406030204" pitchFamily="18" charset="0"/>
+                                    </a:rPr>
+                                  </m:ctrlPr>
+                                </m:dPr>
+                                <m:e>
+                                  <m:sSub>
+                                    <m:sSubPr>
+                                      <m:ctrlPr>
+                                        <a:rPr lang="en-US" altLang="zh-TW" sz="2000" i="1" dirty="0">
+                                          <a:latin typeface="Cambria Math" panose="02040503050406030204" pitchFamily="18" charset="0"/>
+                                          <a:ea typeface="Cambria Math" panose="02040503050406030204" pitchFamily="18" charset="0"/>
+                                        </a:rPr>
+                                      </m:ctrlPr>
+                                    </m:sSubPr>
+                                    <m:e>
+                                      <m:r>
+                                        <a:rPr lang="en-US" altLang="zh-TW" sz="2000" b="1" i="1" dirty="0">
+                                          <a:latin typeface="Cambria Math" panose="02040503050406030204" pitchFamily="18" charset="0"/>
+                                          <a:ea typeface="Cambria Math" panose="02040503050406030204" pitchFamily="18" charset="0"/>
+                                        </a:rPr>
+                                        <m:t>𝑹</m:t>
+                                      </m:r>
+                                    </m:e>
+                                    <m:sub>
+                                      <m:r>
+                                        <a:rPr lang="en-US" altLang="zh-TW" sz="2000" i="1" dirty="0">
+                                          <a:latin typeface="Cambria Math" panose="02040503050406030204" pitchFamily="18" charset="0"/>
+                                          <a:ea typeface="Cambria Math" panose="02040503050406030204" pitchFamily="18" charset="0"/>
+                                        </a:rPr>
+                                        <m:t>𝑐</m:t>
+                                      </m:r>
+                                    </m:sub>
+                                  </m:sSub>
+                                  <m:r>
+                                    <a:rPr lang="en-US" altLang="zh-TW" sz="2000" i="1" dirty="0">
+                                      <a:latin typeface="Cambria Math" panose="02040503050406030204" pitchFamily="18" charset="0"/>
+                                      <a:ea typeface="Cambria Math" panose="02040503050406030204" pitchFamily="18" charset="0"/>
+                                    </a:rPr>
+                                    <m:t>, </m:t>
+                                  </m:r>
+                                  <m:r>
+                                    <a:rPr lang="en-US" altLang="zh-TW" sz="2000" b="1" i="1" dirty="0">
+                                      <a:latin typeface="Cambria Math" panose="02040503050406030204" pitchFamily="18" charset="0"/>
+                                      <a:ea typeface="Cambria Math" panose="02040503050406030204" pitchFamily="18" charset="0"/>
+                                    </a:rPr>
+                                    <m:t>𝒓</m:t>
+                                  </m:r>
+                                  <m:r>
+                                    <a:rPr lang="en-US" altLang="zh-TW" sz="2000" i="1" dirty="0">
+                                      <a:latin typeface="Cambria Math" panose="02040503050406030204" pitchFamily="18" charset="0"/>
+                                      <a:ea typeface="Cambria Math" panose="02040503050406030204" pitchFamily="18" charset="0"/>
+                                    </a:rPr>
+                                    <m:t>=</m:t>
+                                  </m:r>
+                                  <m:r>
+                                    <a:rPr lang="en-US" altLang="zh-TW" sz="2000" b="1" i="1" dirty="0">
+                                      <a:latin typeface="Cambria Math" panose="02040503050406030204" pitchFamily="18" charset="0"/>
+                                      <a:ea typeface="Cambria Math" panose="02040503050406030204" pitchFamily="18" charset="0"/>
+                                    </a:rPr>
+                                    <m:t>𝟎</m:t>
+                                  </m:r>
+                                </m:e>
+                              </m:d>
+                            </m:e>
+                          </m:d>
+                        </m:e>
+                        <m:sup>
+                          <m:r>
+                            <a:rPr lang="en-US" altLang="zh-TW" sz="2000" i="1" dirty="0">
+                              <a:latin typeface="Cambria Math" panose="02040503050406030204" pitchFamily="18" charset="0"/>
+                              <a:ea typeface="Cambria Math" panose="02040503050406030204" pitchFamily="18" charset="0"/>
+                            </a:rPr>
+                            <m:t>2</m:t>
+                          </m:r>
+                        </m:sup>
+                      </m:sSup>
+                    </m:oMath>
+                  </m:oMathPara>
+                </a14:m>
+                <a:endParaRPr lang="zh-TW" altLang="en-US" sz="1600" dirty="0"/>
+              </a:p>
+            </p:txBody>
+          </p:sp>
+        </mc:Choice>
+        <mc:Fallback>
+          <p:sp>
+            <p:nvSpPr>
+              <p:cNvPr id="56" name="矩形 55">
+                <a:extLst>
+                  <a:ext uri="{FF2B5EF4-FFF2-40B4-BE49-F238E27FC236}">
+                    <a16:creationId xmlns:a16="http://schemas.microsoft.com/office/drawing/2014/main" id="{2BC7567B-3CF3-4AA7-AE13-664537E02B19}"/>
+                  </a:ext>
+                </a:extLst>
+              </p:cNvPr>
+              <p:cNvSpPr>
+                <a:spLocks noRot="1" noChangeAspect="1" noMove="1" noResize="1" noEditPoints="1" noAdjustHandles="1" noChangeArrowheads="1" noChangeShapeType="1" noTextEdit="1"/>
+              </p:cNvSpPr>
+              <p:nvPr/>
+            </p:nvSpPr>
+            <p:spPr>
+              <a:xfrm>
+                <a:off x="2611825" y="1280786"/>
+                <a:ext cx="2486552" cy="624273"/>
+              </a:xfrm>
+              <a:prstGeom prst="rect">
+                <a:avLst/>
+              </a:prstGeom>
+              <a:blipFill>
+                <a:blip r:embed="rId45"/>
+                <a:stretch>
+                  <a:fillRect/>
+                </a:stretch>
+              </a:blipFill>
+            </p:spPr>
+            <p:txBody>
+              <a:bodyPr/>
+              <a:lstStyle/>
+              <a:p>
+                <a:r>
+                  <a:rPr lang="zh-TW" altLang="en-US">
+                    <a:noFill/>
+                  </a:rPr>
+                  <a:t> </a:t>
+                </a:r>
+              </a:p>
+            </p:txBody>
+          </p:sp>
+        </mc:Fallback>
+      </mc:AlternateContent>
+      <mc:AlternateContent xmlns:mc="http://schemas.openxmlformats.org/markup-compatibility/2006">
+        <mc:Choice xmlns:a14="http://schemas.microsoft.com/office/drawing/2010/main" Requires="a14">
+          <p:sp>
+            <p:nvSpPr>
+              <p:cNvPr id="57" name="矩形 56">
+                <a:extLst>
+                  <a:ext uri="{FF2B5EF4-FFF2-40B4-BE49-F238E27FC236}">
+                    <a16:creationId xmlns:a16="http://schemas.microsoft.com/office/drawing/2014/main" id="{683658EE-325A-409D-A4CB-8B0BDA8F18EB}"/>
+                  </a:ext>
+                </a:extLst>
+              </p:cNvPr>
+              <p:cNvSpPr/>
+              <p:nvPr/>
+            </p:nvSpPr>
+            <p:spPr>
+              <a:xfrm>
+                <a:off x="6246769" y="1315026"/>
+                <a:ext cx="1177245" cy="555793"/>
+              </a:xfrm>
+              <a:prstGeom prst="rect">
+                <a:avLst/>
+              </a:prstGeom>
+            </p:spPr>
+            <p:txBody>
+              <a:bodyPr wrap="none">
+                <a:spAutoFit/>
+              </a:bodyPr>
+              <a:lstStyle/>
+              <a:p>
+                <a:pPr algn="ctr"/>
+                <a14:m>
+                  <m:oMathPara xmlns:m="http://schemas.openxmlformats.org/officeDocument/2006/math">
+                    <m:oMathParaPr>
+                      <m:jc m:val="centerGroup"/>
+                    </m:oMathParaPr>
+                    <m:oMath xmlns:m="http://schemas.openxmlformats.org/officeDocument/2006/math">
+                      <m:sSup>
+                        <m:sSupPr>
+                          <m:ctrlPr>
+                            <a:rPr lang="en-US" altLang="zh-TW" sz="2000" i="1" smtClean="0">
+                              <a:latin typeface="Cambria Math" panose="02040503050406030204" pitchFamily="18" charset="0"/>
+                            </a:rPr>
+                          </m:ctrlPr>
+                        </m:sSupPr>
+                        <m:e>
+                          <m:d>
+                            <m:dPr>
+                              <m:begChr m:val="|"/>
+                              <m:endChr m:val="|"/>
+                              <m:ctrlPr>
+                                <a:rPr lang="en-US" altLang="zh-TW" sz="2000" i="1">
+                                  <a:latin typeface="Cambria Math" panose="02040503050406030204" pitchFamily="18" charset="0"/>
+                                </a:rPr>
+                              </m:ctrlPr>
+                            </m:dPr>
+                            <m:e>
+                              <m:sSubSup>
+                                <m:sSubSupPr>
+                                  <m:ctrlPr>
+                                    <a:rPr lang="en-US" altLang="zh-TW" sz="2000" i="1">
+                                      <a:latin typeface="Cambria Math" panose="02040503050406030204" pitchFamily="18" charset="0"/>
+                                    </a:rPr>
+                                  </m:ctrlPr>
+                                </m:sSubSupPr>
+                                <m:e>
+                                  <m:acc>
+                                    <m:accPr>
+                                      <m:chr m:val="̃"/>
+                                      <m:ctrlPr>
+                                        <a:rPr lang="en-US" altLang="zh-TW" sz="2000" i="1">
+                                          <a:latin typeface="Cambria Math" panose="02040503050406030204" pitchFamily="18" charset="0"/>
+                                        </a:rPr>
+                                      </m:ctrlPr>
+                                    </m:accPr>
+                                    <m:e>
+                                      <m:r>
+                                        <a:rPr lang="en-US" altLang="zh-TW" sz="2000" i="1">
+                                          <a:latin typeface="Cambria Math" panose="02040503050406030204" pitchFamily="18" charset="0"/>
+                                        </a:rPr>
+                                        <m:t>𝑀</m:t>
+                                      </m:r>
+                                    </m:e>
+                                  </m:acc>
+                                </m:e>
+                                <m:sub>
+                                  <m:acc>
+                                    <m:accPr>
+                                      <m:chr m:val="̂"/>
+                                      <m:ctrlPr>
+                                        <a:rPr lang="en-US" altLang="zh-TW" sz="2000" b="1" i="1">
+                                          <a:latin typeface="Cambria Math" panose="02040503050406030204" pitchFamily="18" charset="0"/>
+                                        </a:rPr>
+                                      </m:ctrlPr>
+                                    </m:accPr>
+                                    <m:e>
+                                      <m:r>
+                                        <a:rPr lang="zh-TW" altLang="en-US" sz="2000" b="1" i="1">
+                                          <a:latin typeface="Cambria Math" panose="02040503050406030204" pitchFamily="18" charset="0"/>
+                                        </a:rPr>
+                                        <m:t>𝜺</m:t>
+                                      </m:r>
+                                    </m:e>
+                                  </m:acc>
+                                  <m:r>
+                                    <a:rPr lang="en-US" altLang="zh-TW" sz="2000" i="1">
+                                      <a:latin typeface="Cambria Math" panose="02040503050406030204" pitchFamily="18" charset="0"/>
+                                    </a:rPr>
+                                    <m:t>,±1</m:t>
+                                  </m:r>
+                                </m:sub>
+                                <m:sup>
+                                  <m:r>
+                                    <a:rPr lang="en-US" altLang="zh-TW" sz="2000" i="1">
+                                      <a:latin typeface="Cambria Math" panose="02040503050406030204" pitchFamily="18" charset="0"/>
+                                    </a:rPr>
+                                    <m:t>𝑆</m:t>
+                                  </m:r>
+                                  <m:r>
+                                    <a:rPr lang="en-US" altLang="zh-TW" sz="2000" i="1">
+                                      <a:latin typeface="Cambria Math" panose="02040503050406030204" pitchFamily="18" charset="0"/>
+                                    </a:rPr>
+                                    <m:t>,</m:t>
+                                  </m:r>
+                                  <m:r>
+                                    <a:rPr lang="en-US" altLang="zh-TW" sz="2000" b="1" i="1">
+                                      <a:latin typeface="Cambria Math" panose="02040503050406030204" pitchFamily="18" charset="0"/>
+                                    </a:rPr>
+                                    <m:t>𝑸</m:t>
+                                  </m:r>
+                                </m:sup>
+                              </m:sSubSup>
+                            </m:e>
+                          </m:d>
+                        </m:e>
+                        <m:sup>
+                          <m:r>
+                            <a:rPr lang="en-US" altLang="zh-TW" sz="2000" i="1">
+                              <a:latin typeface="Cambria Math" panose="02040503050406030204" pitchFamily="18" charset="0"/>
+                            </a:rPr>
+                            <m:t>2</m:t>
+                          </m:r>
+                        </m:sup>
+                      </m:sSup>
+                      <m:r>
+                        <a:rPr lang="en-US" altLang="zh-TW" sz="2000" i="1">
+                          <a:latin typeface="Cambria Math" panose="02040503050406030204" pitchFamily="18" charset="0"/>
+                        </a:rPr>
+                        <m:t> </m:t>
+                      </m:r>
+                    </m:oMath>
+                  </m:oMathPara>
+                </a14:m>
+                <a:endParaRPr lang="zh-TW" altLang="en-US" sz="2000" dirty="0"/>
+              </a:p>
+            </p:txBody>
+          </p:sp>
+        </mc:Choice>
+        <mc:Fallback>
+          <p:sp>
+            <p:nvSpPr>
+              <p:cNvPr id="57" name="矩形 56">
+                <a:extLst>
+                  <a:ext uri="{FF2B5EF4-FFF2-40B4-BE49-F238E27FC236}">
+                    <a16:creationId xmlns:a16="http://schemas.microsoft.com/office/drawing/2014/main" id="{683658EE-325A-409D-A4CB-8B0BDA8F18EB}"/>
+                  </a:ext>
+                </a:extLst>
+              </p:cNvPr>
+              <p:cNvSpPr>
+                <a:spLocks noRot="1" noChangeAspect="1" noMove="1" noResize="1" noEditPoints="1" noAdjustHandles="1" noChangeArrowheads="1" noChangeShapeType="1" noTextEdit="1"/>
+              </p:cNvSpPr>
+              <p:nvPr/>
+            </p:nvSpPr>
+            <p:spPr>
+              <a:xfrm>
+                <a:off x="6246769" y="1315026"/>
+                <a:ext cx="1177245" cy="555793"/>
+              </a:xfrm>
+              <a:prstGeom prst="rect">
+                <a:avLst/>
+              </a:prstGeom>
+              <a:blipFill>
+                <a:blip r:embed="rId46"/>
+                <a:stretch>
+                  <a:fillRect/>
+                </a:stretch>
+              </a:blipFill>
+            </p:spPr>
+            <p:txBody>
+              <a:bodyPr/>
+              <a:lstStyle/>
+              <a:p>
+                <a:r>
+                  <a:rPr lang="zh-TW" altLang="en-US">
+                    <a:noFill/>
+                  </a:rPr>
+                  <a:t> </a:t>
+                </a:r>
+              </a:p>
+            </p:txBody>
+          </p:sp>
+        </mc:Fallback>
+      </mc:AlternateContent>
+      <mc:AlternateContent xmlns:mc="http://schemas.openxmlformats.org/markup-compatibility/2006">
+        <mc:Choice xmlns:a14="http://schemas.microsoft.com/office/drawing/2010/main" Requires="a14">
+          <p:sp>
+            <p:nvSpPr>
+              <p:cNvPr id="77" name="矩形 76">
+                <a:extLst>
+                  <a:ext uri="{FF2B5EF4-FFF2-40B4-BE49-F238E27FC236}">
+                    <a16:creationId xmlns:a16="http://schemas.microsoft.com/office/drawing/2014/main" id="{3FEE9D27-AC83-4510-A4EC-C7CE5E274817}"/>
+                  </a:ext>
+                </a:extLst>
+              </p:cNvPr>
+              <p:cNvSpPr/>
+              <p:nvPr/>
+            </p:nvSpPr>
+            <p:spPr>
+              <a:xfrm>
+                <a:off x="7590514" y="1280786"/>
+                <a:ext cx="2482440" cy="624273"/>
+              </a:xfrm>
+              <a:prstGeom prst="rect">
+                <a:avLst/>
+              </a:prstGeom>
+            </p:spPr>
+            <p:txBody>
+              <a:bodyPr wrap="square">
+                <a:spAutoFit/>
+              </a:bodyPr>
+              <a:lstStyle/>
+              <a:p>
+                <a:pPr algn="ctr"/>
+                <a14:m>
+                  <m:oMathPara xmlns:m="http://schemas.openxmlformats.org/officeDocument/2006/math">
+                    <m:oMathParaPr>
+                      <m:jc m:val="centerGroup"/>
+                    </m:oMathParaPr>
+                    <m:oMath xmlns:m="http://schemas.openxmlformats.org/officeDocument/2006/math">
+                      <m:sSup>
+                        <m:sSupPr>
+                          <m:ctrlPr>
+                            <a:rPr lang="en-US" altLang="zh-TW" sz="2000" i="1" dirty="0">
+                              <a:latin typeface="Cambria Math" panose="02040503050406030204" pitchFamily="18" charset="0"/>
+                              <a:ea typeface="Cambria Math" panose="02040503050406030204" pitchFamily="18" charset="0"/>
+                            </a:rPr>
+                          </m:ctrlPr>
+                        </m:sSupPr>
+                        <m:e>
+                          <m:d>
+                            <m:dPr>
+                              <m:begChr m:val="|"/>
+                              <m:endChr m:val="|"/>
+                              <m:ctrlPr>
+                                <a:rPr lang="en-US" altLang="zh-TW" sz="2000" i="1" dirty="0">
+                                  <a:latin typeface="Cambria Math" panose="02040503050406030204" pitchFamily="18" charset="0"/>
+                                  <a:ea typeface="Cambria Math" panose="02040503050406030204" pitchFamily="18" charset="0"/>
+                                </a:rPr>
+                              </m:ctrlPr>
+                            </m:dPr>
+                            <m:e>
+                              <m:sSubSup>
+                                <m:sSubSupPr>
+                                  <m:ctrlPr>
+                                    <a:rPr lang="en-US" altLang="zh-TW" sz="2000" i="1" dirty="0">
+                                      <a:latin typeface="Cambria Math" panose="02040503050406030204" pitchFamily="18" charset="0"/>
+                                      <a:ea typeface="Cambria Math" panose="02040503050406030204" pitchFamily="18" charset="0"/>
+                                    </a:rPr>
+                                  </m:ctrlPr>
+                                </m:sSubSupPr>
+                                <m:e>
+                                  <m:r>
+                                    <m:rPr>
+                                      <m:sty m:val="p"/>
+                                    </m:rPr>
+                                    <a:rPr lang="en-US" altLang="zh-TW" sz="2000" dirty="0">
+                                      <a:latin typeface="Cambria Math" panose="02040503050406030204" pitchFamily="18" charset="0"/>
+                                      <a:ea typeface="Cambria Math" panose="02040503050406030204" pitchFamily="18" charset="0"/>
+                                    </a:rPr>
+                                    <m:t>Φ</m:t>
+                                  </m:r>
+                                </m:e>
+                                <m:sub>
+                                  <m:acc>
+                                    <m:accPr>
+                                      <m:chr m:val="̂"/>
+                                      <m:ctrlPr>
+                                        <a:rPr lang="en-US" altLang="zh-TW" sz="2000" b="1" i="1">
+                                          <a:latin typeface="Cambria Math" panose="02040503050406030204" pitchFamily="18" charset="0"/>
+                                        </a:rPr>
+                                      </m:ctrlPr>
+                                    </m:accPr>
+                                    <m:e>
+                                      <m:r>
+                                        <a:rPr lang="zh-TW" altLang="en-US" sz="2000" b="1" i="1">
+                                          <a:latin typeface="Cambria Math" panose="02040503050406030204" pitchFamily="18" charset="0"/>
+                                        </a:rPr>
+                                        <m:t>𝜺</m:t>
+                                      </m:r>
+                                    </m:e>
+                                  </m:acc>
+                                  <m:r>
+                                    <a:rPr lang="en-US" altLang="zh-TW" sz="2000" i="1">
+                                      <a:latin typeface="Cambria Math" panose="02040503050406030204" pitchFamily="18" charset="0"/>
+                                    </a:rPr>
+                                    <m:t>,±1</m:t>
+                                  </m:r>
+                                </m:sub>
+                                <m:sup>
+                                  <m:r>
+                                    <a:rPr lang="en-US" altLang="zh-TW" sz="2000" i="1" dirty="0">
+                                      <a:latin typeface="Cambria Math" panose="02040503050406030204" pitchFamily="18" charset="0"/>
+                                      <a:ea typeface="Cambria Math" panose="02040503050406030204" pitchFamily="18" charset="0"/>
+                                    </a:rPr>
+                                    <m:t>𝐾</m:t>
+                                  </m:r>
+                                  <m:r>
+                                    <a:rPr lang="en-US" altLang="zh-TW" sz="2000" i="1" dirty="0">
+                                      <a:latin typeface="Cambria Math" panose="02040503050406030204" pitchFamily="18" charset="0"/>
+                                      <a:ea typeface="Cambria Math" panose="02040503050406030204" pitchFamily="18" charset="0"/>
+                                    </a:rPr>
+                                    <m:t>/</m:t>
+                                  </m:r>
+                                  <m:sSup>
+                                    <m:sSupPr>
+                                      <m:ctrlPr>
+                                        <a:rPr lang="en-US" altLang="zh-TW" sz="2000" i="1" dirty="0">
+                                          <a:latin typeface="Cambria Math" panose="02040503050406030204" pitchFamily="18" charset="0"/>
+                                          <a:ea typeface="Cambria Math" panose="02040503050406030204" pitchFamily="18" charset="0"/>
+                                        </a:rPr>
+                                      </m:ctrlPr>
+                                    </m:sSupPr>
+                                    <m:e>
+                                      <m:r>
+                                        <a:rPr lang="en-US" altLang="zh-TW" sz="2000" i="1" dirty="0">
+                                          <a:latin typeface="Cambria Math" panose="02040503050406030204" pitchFamily="18" charset="0"/>
+                                          <a:ea typeface="Cambria Math" panose="02040503050406030204" pitchFamily="18" charset="0"/>
+                                        </a:rPr>
+                                        <m:t>𝐾</m:t>
+                                      </m:r>
+                                    </m:e>
+                                    <m:sup>
+                                      <m:r>
+                                        <a:rPr lang="en-US" altLang="zh-TW" sz="2000" i="1" dirty="0">
+                                          <a:latin typeface="Cambria Math" panose="02040503050406030204" pitchFamily="18" charset="0"/>
+                                          <a:ea typeface="Cambria Math" panose="02040503050406030204" pitchFamily="18" charset="0"/>
+                                        </a:rPr>
+                                        <m:t>′</m:t>
+                                      </m:r>
+                                    </m:sup>
+                                  </m:sSup>
+                                </m:sup>
+                              </m:sSubSup>
+                              <m:d>
+                                <m:dPr>
+                                  <m:ctrlPr>
+                                    <a:rPr lang="en-US" altLang="zh-TW" sz="2000" i="1" dirty="0">
+                                      <a:latin typeface="Cambria Math" panose="02040503050406030204" pitchFamily="18" charset="0"/>
+                                      <a:ea typeface="Cambria Math" panose="02040503050406030204" pitchFamily="18" charset="0"/>
+                                    </a:rPr>
+                                  </m:ctrlPr>
+                                </m:dPr>
+                                <m:e>
+                                  <m:sSub>
+                                    <m:sSubPr>
+                                      <m:ctrlPr>
+                                        <a:rPr lang="en-US" altLang="zh-TW" sz="2000" i="1" dirty="0">
+                                          <a:latin typeface="Cambria Math" panose="02040503050406030204" pitchFamily="18" charset="0"/>
+                                          <a:ea typeface="Cambria Math" panose="02040503050406030204" pitchFamily="18" charset="0"/>
+                                        </a:rPr>
+                                      </m:ctrlPr>
+                                    </m:sSubPr>
+                                    <m:e>
+                                      <m:r>
+                                        <a:rPr lang="en-US" altLang="zh-TW" sz="2000" b="1" i="1" dirty="0">
+                                          <a:latin typeface="Cambria Math" panose="02040503050406030204" pitchFamily="18" charset="0"/>
+                                          <a:ea typeface="Cambria Math" panose="02040503050406030204" pitchFamily="18" charset="0"/>
+                                        </a:rPr>
+                                        <m:t>𝑹</m:t>
+                                      </m:r>
+                                    </m:e>
+                                    <m:sub>
+                                      <m:r>
+                                        <a:rPr lang="en-US" altLang="zh-TW" sz="2000" i="1" dirty="0">
+                                          <a:latin typeface="Cambria Math" panose="02040503050406030204" pitchFamily="18" charset="0"/>
+                                          <a:ea typeface="Cambria Math" panose="02040503050406030204" pitchFamily="18" charset="0"/>
+                                        </a:rPr>
+                                        <m:t>𝑐</m:t>
+                                      </m:r>
+                                    </m:sub>
+                                  </m:sSub>
+                                  <m:r>
+                                    <a:rPr lang="en-US" altLang="zh-TW" sz="2000" i="1" dirty="0">
+                                      <a:latin typeface="Cambria Math" panose="02040503050406030204" pitchFamily="18" charset="0"/>
+                                      <a:ea typeface="Cambria Math" panose="02040503050406030204" pitchFamily="18" charset="0"/>
+                                    </a:rPr>
+                                    <m:t>, </m:t>
+                                  </m:r>
+                                  <m:r>
+                                    <a:rPr lang="en-US" altLang="zh-TW" sz="2000" b="1" i="1" dirty="0">
+                                      <a:latin typeface="Cambria Math" panose="02040503050406030204" pitchFamily="18" charset="0"/>
+                                      <a:ea typeface="Cambria Math" panose="02040503050406030204" pitchFamily="18" charset="0"/>
+                                    </a:rPr>
+                                    <m:t>𝒓</m:t>
+                                  </m:r>
+                                  <m:r>
+                                    <a:rPr lang="en-US" altLang="zh-TW" sz="2000" i="1" dirty="0">
+                                      <a:latin typeface="Cambria Math" panose="02040503050406030204" pitchFamily="18" charset="0"/>
+                                      <a:ea typeface="Cambria Math" panose="02040503050406030204" pitchFamily="18" charset="0"/>
+                                    </a:rPr>
+                                    <m:t>=</m:t>
+                                  </m:r>
+                                  <m:r>
+                                    <a:rPr lang="en-US" altLang="zh-TW" sz="2000" b="1" i="1" dirty="0">
+                                      <a:latin typeface="Cambria Math" panose="02040503050406030204" pitchFamily="18" charset="0"/>
+                                      <a:ea typeface="Cambria Math" panose="02040503050406030204" pitchFamily="18" charset="0"/>
+                                    </a:rPr>
+                                    <m:t>𝟎</m:t>
+                                  </m:r>
+                                </m:e>
+                              </m:d>
+                            </m:e>
+                          </m:d>
+                        </m:e>
+                        <m:sup>
+                          <m:r>
+                            <a:rPr lang="en-US" altLang="zh-TW" sz="2000" i="1" dirty="0">
+                              <a:latin typeface="Cambria Math" panose="02040503050406030204" pitchFamily="18" charset="0"/>
+                              <a:ea typeface="Cambria Math" panose="02040503050406030204" pitchFamily="18" charset="0"/>
+                            </a:rPr>
+                            <m:t>2</m:t>
+                          </m:r>
+                        </m:sup>
+                      </m:sSup>
+                    </m:oMath>
+                  </m:oMathPara>
+                </a14:m>
+                <a:endParaRPr lang="zh-TW" altLang="en-US" sz="1600" dirty="0"/>
+              </a:p>
+            </p:txBody>
+          </p:sp>
+        </mc:Choice>
+        <mc:Fallback>
+          <p:sp>
+            <p:nvSpPr>
+              <p:cNvPr id="77" name="矩形 76">
+                <a:extLst>
+                  <a:ext uri="{FF2B5EF4-FFF2-40B4-BE49-F238E27FC236}">
+                    <a16:creationId xmlns:a16="http://schemas.microsoft.com/office/drawing/2014/main" id="{3FEE9D27-AC83-4510-A4EC-C7CE5E274817}"/>
+                  </a:ext>
+                </a:extLst>
+              </p:cNvPr>
+              <p:cNvSpPr>
+                <a:spLocks noRot="1" noChangeAspect="1" noMove="1" noResize="1" noEditPoints="1" noAdjustHandles="1" noChangeArrowheads="1" noChangeShapeType="1" noTextEdit="1"/>
+              </p:cNvSpPr>
+              <p:nvPr/>
+            </p:nvSpPr>
+            <p:spPr>
+              <a:xfrm>
+                <a:off x="7590514" y="1280786"/>
+                <a:ext cx="2482440" cy="624273"/>
+              </a:xfrm>
+              <a:prstGeom prst="rect">
+                <a:avLst/>
+              </a:prstGeom>
+              <a:blipFill>
+                <a:blip r:embed="rId47"/>
+                <a:stretch>
+                  <a:fillRect/>
+                </a:stretch>
+              </a:blipFill>
+            </p:spPr>
+            <p:txBody>
+              <a:bodyPr/>
+              <a:lstStyle/>
+              <a:p>
+                <a:r>
+                  <a:rPr lang="zh-TW" altLang="en-US">
+                    <a:noFill/>
+                  </a:rPr>
+                  <a:t> </a:t>
+                </a:r>
+              </a:p>
+            </p:txBody>
+          </p:sp>
+        </mc:Fallback>
+      </mc:AlternateContent>
+      <mc:AlternateContent xmlns:mc="http://schemas.openxmlformats.org/markup-compatibility/2006">
+        <mc:Choice xmlns:a14="http://schemas.microsoft.com/office/drawing/2010/main" Requires="a14">
+          <p:sp>
+            <p:nvSpPr>
+              <p:cNvPr id="90" name="矩形 89">
+                <a:extLst>
+                  <a:ext uri="{FF2B5EF4-FFF2-40B4-BE49-F238E27FC236}">
+                    <a16:creationId xmlns:a16="http://schemas.microsoft.com/office/drawing/2014/main" id="{44690C55-6A00-401A-A518-63EC84623E07}"/>
+                  </a:ext>
+                </a:extLst>
+              </p:cNvPr>
+              <p:cNvSpPr/>
+              <p:nvPr/>
+            </p:nvSpPr>
+            <p:spPr>
+              <a:xfrm>
+                <a:off x="1299165" y="5954392"/>
+                <a:ext cx="1177245" cy="555793"/>
+              </a:xfrm>
+              <a:prstGeom prst="rect">
+                <a:avLst/>
+              </a:prstGeom>
+            </p:spPr>
+            <p:txBody>
+              <a:bodyPr wrap="none">
+                <a:spAutoFit/>
+              </a:bodyPr>
+              <a:lstStyle/>
+              <a:p>
+                <a:pPr algn="ctr"/>
+                <a14:m>
+                  <m:oMathPara xmlns:m="http://schemas.openxmlformats.org/officeDocument/2006/math">
+                    <m:oMathParaPr>
+                      <m:jc m:val="centerGroup"/>
+                    </m:oMathParaPr>
+                    <m:oMath xmlns:m="http://schemas.openxmlformats.org/officeDocument/2006/math">
+                      <m:sSup>
+                        <m:sSupPr>
+                          <m:ctrlPr>
+                            <a:rPr lang="en-US" altLang="zh-TW" sz="2000" i="1" smtClean="0">
+                              <a:latin typeface="Cambria Math" panose="02040503050406030204" pitchFamily="18" charset="0"/>
+                            </a:rPr>
+                          </m:ctrlPr>
+                        </m:sSupPr>
+                        <m:e>
+                          <m:d>
+                            <m:dPr>
+                              <m:begChr m:val="|"/>
+                              <m:endChr m:val="|"/>
+                              <m:ctrlPr>
+                                <a:rPr lang="en-US" altLang="zh-TW" sz="2000" i="1">
+                                  <a:latin typeface="Cambria Math" panose="02040503050406030204" pitchFamily="18" charset="0"/>
+                                </a:rPr>
+                              </m:ctrlPr>
+                            </m:dPr>
+                            <m:e>
+                              <m:sSubSup>
+                                <m:sSubSupPr>
+                                  <m:ctrlPr>
+                                    <a:rPr lang="en-US" altLang="zh-TW" sz="2000" i="1">
+                                      <a:latin typeface="Cambria Math" panose="02040503050406030204" pitchFamily="18" charset="0"/>
+                                    </a:rPr>
+                                  </m:ctrlPr>
+                                </m:sSubSupPr>
+                                <m:e>
+                                  <m:acc>
+                                    <m:accPr>
+                                      <m:chr m:val="̃"/>
+                                      <m:ctrlPr>
+                                        <a:rPr lang="en-US" altLang="zh-TW" sz="2000" i="1">
+                                          <a:latin typeface="Cambria Math" panose="02040503050406030204" pitchFamily="18" charset="0"/>
+                                        </a:rPr>
+                                      </m:ctrlPr>
+                                    </m:accPr>
+                                    <m:e>
+                                      <m:r>
+                                        <a:rPr lang="en-US" altLang="zh-TW" sz="2000" i="1">
+                                          <a:latin typeface="Cambria Math" panose="02040503050406030204" pitchFamily="18" charset="0"/>
+                                        </a:rPr>
+                                        <m:t>𝑀</m:t>
+                                      </m:r>
+                                    </m:e>
+                                  </m:acc>
+                                </m:e>
+                                <m:sub>
+                                  <m:acc>
+                                    <m:accPr>
+                                      <m:chr m:val="̂"/>
+                                      <m:ctrlPr>
+                                        <a:rPr lang="en-US" altLang="zh-TW" sz="2000" b="1" i="1">
+                                          <a:latin typeface="Cambria Math" panose="02040503050406030204" pitchFamily="18" charset="0"/>
+                                        </a:rPr>
+                                      </m:ctrlPr>
+                                    </m:accPr>
+                                    <m:e>
+                                      <m:r>
+                                        <a:rPr lang="zh-TW" altLang="en-US" sz="2000" b="1" i="1">
+                                          <a:latin typeface="Cambria Math" panose="02040503050406030204" pitchFamily="18" charset="0"/>
+                                        </a:rPr>
+                                        <m:t>𝜺</m:t>
+                                      </m:r>
+                                    </m:e>
+                                  </m:acc>
+                                  <m:r>
+                                    <a:rPr lang="en-US" altLang="zh-TW" sz="2000" i="1">
+                                      <a:latin typeface="Cambria Math" panose="02040503050406030204" pitchFamily="18" charset="0"/>
+                                    </a:rPr>
+                                    <m:t>,±1</m:t>
+                                  </m:r>
+                                </m:sub>
+                                <m:sup>
+                                  <m:r>
+                                    <a:rPr lang="en-US" altLang="zh-TW" sz="2000" i="1">
+                                      <a:latin typeface="Cambria Math" panose="02040503050406030204" pitchFamily="18" charset="0"/>
+                                    </a:rPr>
+                                    <m:t>𝑆</m:t>
+                                  </m:r>
+                                  <m:r>
+                                    <a:rPr lang="en-US" altLang="zh-TW" sz="2000" i="1">
+                                      <a:latin typeface="Cambria Math" panose="02040503050406030204" pitchFamily="18" charset="0"/>
+                                    </a:rPr>
+                                    <m:t>,</m:t>
+                                  </m:r>
+                                  <m:r>
+                                    <a:rPr lang="en-US" altLang="zh-TW" sz="2000" b="1" i="1">
+                                      <a:latin typeface="Cambria Math" panose="02040503050406030204" pitchFamily="18" charset="0"/>
+                                    </a:rPr>
+                                    <m:t>𝑸</m:t>
+                                  </m:r>
+                                </m:sup>
+                              </m:sSubSup>
+                            </m:e>
+                          </m:d>
+                        </m:e>
+                        <m:sup>
+                          <m:r>
+                            <a:rPr lang="en-US" altLang="zh-TW" sz="2000" i="1">
+                              <a:latin typeface="Cambria Math" panose="02040503050406030204" pitchFamily="18" charset="0"/>
+                            </a:rPr>
+                            <m:t>2</m:t>
+                          </m:r>
+                        </m:sup>
+                      </m:sSup>
+                      <m:r>
+                        <a:rPr lang="en-US" altLang="zh-TW" sz="2000" i="1">
+                          <a:latin typeface="Cambria Math" panose="02040503050406030204" pitchFamily="18" charset="0"/>
+                        </a:rPr>
+                        <m:t> </m:t>
+                      </m:r>
+                    </m:oMath>
+                  </m:oMathPara>
+                </a14:m>
+                <a:endParaRPr lang="zh-TW" altLang="en-US" sz="2000" dirty="0"/>
+              </a:p>
+            </p:txBody>
+          </p:sp>
+        </mc:Choice>
+        <mc:Fallback>
+          <p:sp>
+            <p:nvSpPr>
+              <p:cNvPr id="90" name="矩形 89">
+                <a:extLst>
+                  <a:ext uri="{FF2B5EF4-FFF2-40B4-BE49-F238E27FC236}">
+                    <a16:creationId xmlns:a16="http://schemas.microsoft.com/office/drawing/2014/main" id="{44690C55-6A00-401A-A518-63EC84623E07}"/>
+                  </a:ext>
+                </a:extLst>
+              </p:cNvPr>
+              <p:cNvSpPr>
+                <a:spLocks noRot="1" noChangeAspect="1" noMove="1" noResize="1" noEditPoints="1" noAdjustHandles="1" noChangeArrowheads="1" noChangeShapeType="1" noTextEdit="1"/>
+              </p:cNvSpPr>
+              <p:nvPr/>
+            </p:nvSpPr>
+            <p:spPr>
+              <a:xfrm>
+                <a:off x="1299165" y="5954392"/>
+                <a:ext cx="1177245" cy="555793"/>
+              </a:xfrm>
+              <a:prstGeom prst="rect">
+                <a:avLst/>
+              </a:prstGeom>
+              <a:blipFill>
+                <a:blip r:embed="rId48"/>
+                <a:stretch>
+                  <a:fillRect/>
+                </a:stretch>
+              </a:blipFill>
+            </p:spPr>
+            <p:txBody>
+              <a:bodyPr/>
+              <a:lstStyle/>
+              <a:p>
+                <a:r>
+                  <a:rPr lang="zh-TW" altLang="en-US">
+                    <a:noFill/>
+                  </a:rPr>
+                  <a:t> </a:t>
+                </a:r>
+              </a:p>
+            </p:txBody>
+          </p:sp>
+        </mc:Fallback>
+      </mc:AlternateContent>
+      <mc:AlternateContent xmlns:mc="http://schemas.openxmlformats.org/markup-compatibility/2006">
+        <mc:Choice xmlns:a14="http://schemas.microsoft.com/office/drawing/2010/main" Requires="a14">
+          <p:sp>
+            <p:nvSpPr>
+              <p:cNvPr id="93" name="矩形 92">
+                <a:extLst>
+                  <a:ext uri="{FF2B5EF4-FFF2-40B4-BE49-F238E27FC236}">
+                    <a16:creationId xmlns:a16="http://schemas.microsoft.com/office/drawing/2014/main" id="{939A414B-222E-4E33-9D4E-C7A8E1DC7308}"/>
+                  </a:ext>
+                </a:extLst>
+              </p:cNvPr>
+              <p:cNvSpPr/>
+              <p:nvPr/>
+            </p:nvSpPr>
+            <p:spPr>
+              <a:xfrm>
+                <a:off x="6246769" y="5954392"/>
+                <a:ext cx="1177245" cy="555793"/>
+              </a:xfrm>
+              <a:prstGeom prst="rect">
+                <a:avLst/>
+              </a:prstGeom>
+            </p:spPr>
+            <p:txBody>
+              <a:bodyPr wrap="none">
+                <a:spAutoFit/>
+              </a:bodyPr>
+              <a:lstStyle/>
+              <a:p>
+                <a:pPr algn="ctr"/>
+                <a14:m>
+                  <m:oMathPara xmlns:m="http://schemas.openxmlformats.org/officeDocument/2006/math">
+                    <m:oMathParaPr>
+                      <m:jc m:val="centerGroup"/>
+                    </m:oMathParaPr>
+                    <m:oMath xmlns:m="http://schemas.openxmlformats.org/officeDocument/2006/math">
+                      <m:sSup>
+                        <m:sSupPr>
+                          <m:ctrlPr>
+                            <a:rPr lang="en-US" altLang="zh-TW" sz="2000" i="1" smtClean="0">
+                              <a:latin typeface="Cambria Math" panose="02040503050406030204" pitchFamily="18" charset="0"/>
+                            </a:rPr>
+                          </m:ctrlPr>
+                        </m:sSupPr>
+                        <m:e>
+                          <m:d>
+                            <m:dPr>
+                              <m:begChr m:val="|"/>
+                              <m:endChr m:val="|"/>
+                              <m:ctrlPr>
+                                <a:rPr lang="en-US" altLang="zh-TW" sz="2000" i="1">
+                                  <a:latin typeface="Cambria Math" panose="02040503050406030204" pitchFamily="18" charset="0"/>
+                                </a:rPr>
+                              </m:ctrlPr>
+                            </m:dPr>
+                            <m:e>
+                              <m:sSubSup>
+                                <m:sSubSupPr>
+                                  <m:ctrlPr>
+                                    <a:rPr lang="en-US" altLang="zh-TW" sz="2000" i="1">
+                                      <a:latin typeface="Cambria Math" panose="02040503050406030204" pitchFamily="18" charset="0"/>
+                                    </a:rPr>
+                                  </m:ctrlPr>
+                                </m:sSubSupPr>
+                                <m:e>
+                                  <m:acc>
+                                    <m:accPr>
+                                      <m:chr m:val="̃"/>
+                                      <m:ctrlPr>
+                                        <a:rPr lang="en-US" altLang="zh-TW" sz="2000" i="1">
+                                          <a:latin typeface="Cambria Math" panose="02040503050406030204" pitchFamily="18" charset="0"/>
+                                        </a:rPr>
+                                      </m:ctrlPr>
+                                    </m:accPr>
+                                    <m:e>
+                                      <m:r>
+                                        <a:rPr lang="en-US" altLang="zh-TW" sz="2000" i="1">
+                                          <a:latin typeface="Cambria Math" panose="02040503050406030204" pitchFamily="18" charset="0"/>
+                                        </a:rPr>
+                                        <m:t>𝑀</m:t>
+                                      </m:r>
+                                    </m:e>
+                                  </m:acc>
+                                </m:e>
+                                <m:sub>
+                                  <m:acc>
+                                    <m:accPr>
+                                      <m:chr m:val="̂"/>
+                                      <m:ctrlPr>
+                                        <a:rPr lang="en-US" altLang="zh-TW" sz="2000" b="1" i="1">
+                                          <a:latin typeface="Cambria Math" panose="02040503050406030204" pitchFamily="18" charset="0"/>
+                                        </a:rPr>
+                                      </m:ctrlPr>
+                                    </m:accPr>
+                                    <m:e>
+                                      <m:r>
+                                        <a:rPr lang="zh-TW" altLang="en-US" sz="2000" b="1" i="1">
+                                          <a:latin typeface="Cambria Math" panose="02040503050406030204" pitchFamily="18" charset="0"/>
+                                        </a:rPr>
+                                        <m:t>𝜺</m:t>
+                                      </m:r>
+                                    </m:e>
+                                  </m:acc>
+                                  <m:r>
+                                    <a:rPr lang="en-US" altLang="zh-TW" sz="2000" i="1">
+                                      <a:latin typeface="Cambria Math" panose="02040503050406030204" pitchFamily="18" charset="0"/>
+                                    </a:rPr>
+                                    <m:t>,±1</m:t>
+                                  </m:r>
+                                </m:sub>
+                                <m:sup>
+                                  <m:r>
+                                    <a:rPr lang="en-US" altLang="zh-TW" sz="2000" i="1">
+                                      <a:latin typeface="Cambria Math" panose="02040503050406030204" pitchFamily="18" charset="0"/>
+                                    </a:rPr>
+                                    <m:t>𝑆</m:t>
+                                  </m:r>
+                                  <m:r>
+                                    <a:rPr lang="en-US" altLang="zh-TW" sz="2000" i="1">
+                                      <a:latin typeface="Cambria Math" panose="02040503050406030204" pitchFamily="18" charset="0"/>
+                                    </a:rPr>
+                                    <m:t>,</m:t>
+                                  </m:r>
+                                  <m:r>
+                                    <a:rPr lang="en-US" altLang="zh-TW" sz="2000" b="1" i="1">
+                                      <a:latin typeface="Cambria Math" panose="02040503050406030204" pitchFamily="18" charset="0"/>
+                                    </a:rPr>
+                                    <m:t>𝑸</m:t>
+                                  </m:r>
+                                </m:sup>
+                              </m:sSubSup>
+                            </m:e>
+                          </m:d>
+                        </m:e>
+                        <m:sup>
+                          <m:r>
+                            <a:rPr lang="en-US" altLang="zh-TW" sz="2000" i="1">
+                              <a:latin typeface="Cambria Math" panose="02040503050406030204" pitchFamily="18" charset="0"/>
+                            </a:rPr>
+                            <m:t>2</m:t>
+                          </m:r>
+                        </m:sup>
+                      </m:sSup>
+                      <m:r>
+                        <a:rPr lang="en-US" altLang="zh-TW" sz="2000" i="1">
+                          <a:latin typeface="Cambria Math" panose="02040503050406030204" pitchFamily="18" charset="0"/>
+                        </a:rPr>
+                        <m:t> </m:t>
+                      </m:r>
+                    </m:oMath>
+                  </m:oMathPara>
+                </a14:m>
+                <a:endParaRPr lang="zh-TW" altLang="en-US" sz="2000" dirty="0"/>
+              </a:p>
+            </p:txBody>
+          </p:sp>
+        </mc:Choice>
+        <mc:Fallback>
+          <p:sp>
+            <p:nvSpPr>
+              <p:cNvPr id="93" name="矩形 92">
+                <a:extLst>
+                  <a:ext uri="{FF2B5EF4-FFF2-40B4-BE49-F238E27FC236}">
+                    <a16:creationId xmlns:a16="http://schemas.microsoft.com/office/drawing/2014/main" id="{939A414B-222E-4E33-9D4E-C7A8E1DC7308}"/>
+                  </a:ext>
+                </a:extLst>
+              </p:cNvPr>
+              <p:cNvSpPr>
+                <a:spLocks noRot="1" noChangeAspect="1" noMove="1" noResize="1" noEditPoints="1" noAdjustHandles="1" noChangeArrowheads="1" noChangeShapeType="1" noTextEdit="1"/>
+              </p:cNvSpPr>
+              <p:nvPr/>
+            </p:nvSpPr>
+            <p:spPr>
+              <a:xfrm>
+                <a:off x="6246769" y="5954392"/>
+                <a:ext cx="1177245" cy="555793"/>
+              </a:xfrm>
+              <a:prstGeom prst="rect">
+                <a:avLst/>
+              </a:prstGeom>
+              <a:blipFill>
+                <a:blip r:embed="rId49"/>
+                <a:stretch>
+                  <a:fillRect/>
+                </a:stretch>
+              </a:blipFill>
+            </p:spPr>
+            <p:txBody>
+              <a:bodyPr/>
+              <a:lstStyle/>
+              <a:p>
+                <a:r>
+                  <a:rPr lang="zh-TW" altLang="en-US">
+                    <a:noFill/>
+                  </a:rPr>
+                  <a:t> </a:t>
+                </a:r>
+              </a:p>
+            </p:txBody>
+          </p:sp>
+        </mc:Fallback>
+      </mc:AlternateContent>
+      <mc:AlternateContent xmlns:mc="http://schemas.openxmlformats.org/markup-compatibility/2006">
+        <mc:Choice xmlns:a14="http://schemas.microsoft.com/office/drawing/2010/main" Requires="a14">
+          <p:sp>
+            <p:nvSpPr>
+              <p:cNvPr id="59" name="矩形 58">
+                <a:extLst>
+                  <a:ext uri="{FF2B5EF4-FFF2-40B4-BE49-F238E27FC236}">
+                    <a16:creationId xmlns:a16="http://schemas.microsoft.com/office/drawing/2014/main" id="{E07DBC4B-B92E-4C8B-988A-721E37CBC89A}"/>
+                  </a:ext>
+                </a:extLst>
+              </p:cNvPr>
+              <p:cNvSpPr/>
+              <p:nvPr/>
+            </p:nvSpPr>
+            <p:spPr>
+              <a:xfrm>
+                <a:off x="2611825" y="5920152"/>
+                <a:ext cx="2486552" cy="624273"/>
+              </a:xfrm>
+              <a:prstGeom prst="rect">
+                <a:avLst/>
+              </a:prstGeom>
+            </p:spPr>
+            <p:txBody>
+              <a:bodyPr wrap="square">
+                <a:spAutoFit/>
+              </a:bodyPr>
+              <a:lstStyle/>
+              <a:p>
+                <a:pPr algn="ctr"/>
+                <a14:m>
+                  <m:oMathPara xmlns:m="http://schemas.openxmlformats.org/officeDocument/2006/math">
+                    <m:oMathParaPr>
+                      <m:jc m:val="centerGroup"/>
+                    </m:oMathParaPr>
+                    <m:oMath xmlns:m="http://schemas.openxmlformats.org/officeDocument/2006/math">
+                      <m:sSup>
+                        <m:sSupPr>
+                          <m:ctrlPr>
+                            <a:rPr lang="en-US" altLang="zh-TW" sz="2000" i="1" dirty="0" smtClean="0">
+                              <a:latin typeface="Cambria Math" panose="02040503050406030204" pitchFamily="18" charset="0"/>
+                              <a:ea typeface="Cambria Math" panose="02040503050406030204" pitchFamily="18" charset="0"/>
+                            </a:rPr>
+                          </m:ctrlPr>
+                        </m:sSupPr>
+                        <m:e>
+                          <m:d>
+                            <m:dPr>
+                              <m:begChr m:val="|"/>
+                              <m:endChr m:val="|"/>
+                              <m:ctrlPr>
+                                <a:rPr lang="en-US" altLang="zh-TW" sz="2000" i="1" dirty="0">
+                                  <a:latin typeface="Cambria Math" panose="02040503050406030204" pitchFamily="18" charset="0"/>
+                                  <a:ea typeface="Cambria Math" panose="02040503050406030204" pitchFamily="18" charset="0"/>
+                                </a:rPr>
+                              </m:ctrlPr>
+                            </m:dPr>
+                            <m:e>
+                              <m:sSubSup>
+                                <m:sSubSupPr>
+                                  <m:ctrlPr>
+                                    <a:rPr lang="en-US" altLang="zh-TW" sz="2000" b="0" i="1" dirty="0" smtClean="0">
+                                      <a:latin typeface="Cambria Math" panose="02040503050406030204" pitchFamily="18" charset="0"/>
+                                      <a:ea typeface="Cambria Math" panose="02040503050406030204" pitchFamily="18" charset="0"/>
+                                    </a:rPr>
+                                  </m:ctrlPr>
+                                </m:sSubSupPr>
+                                <m:e>
+                                  <m:r>
+                                    <m:rPr>
+                                      <m:sty m:val="p"/>
+                                    </m:rPr>
+                                    <a:rPr lang="en-US" altLang="zh-TW" sz="2000" b="0" i="0" dirty="0" smtClean="0">
+                                      <a:latin typeface="Cambria Math" panose="02040503050406030204" pitchFamily="18" charset="0"/>
+                                      <a:ea typeface="Cambria Math" panose="02040503050406030204" pitchFamily="18" charset="0"/>
+                                    </a:rPr>
+                                    <m:t>Φ</m:t>
+                                  </m:r>
+                                </m:e>
+                                <m:sub>
+                                  <m:acc>
+                                    <m:accPr>
+                                      <m:chr m:val="̂"/>
+                                      <m:ctrlPr>
+                                        <a:rPr lang="en-US" altLang="zh-TW" sz="2000" b="1" i="1">
+                                          <a:latin typeface="Cambria Math" panose="02040503050406030204" pitchFamily="18" charset="0"/>
+                                        </a:rPr>
+                                      </m:ctrlPr>
+                                    </m:accPr>
+                                    <m:e>
+                                      <m:r>
+                                        <a:rPr lang="zh-TW" altLang="en-US" sz="2000" b="1" i="1">
+                                          <a:latin typeface="Cambria Math" panose="02040503050406030204" pitchFamily="18" charset="0"/>
+                                        </a:rPr>
+                                        <m:t>𝜺</m:t>
+                                      </m:r>
+                                    </m:e>
+                                  </m:acc>
+                                  <m:r>
+                                    <a:rPr lang="en-US" altLang="zh-TW" sz="2000" i="1">
+                                      <a:latin typeface="Cambria Math" panose="02040503050406030204" pitchFamily="18" charset="0"/>
+                                    </a:rPr>
+                                    <m:t>,±1</m:t>
+                                  </m:r>
+                                </m:sub>
+                                <m:sup>
+                                  <m:r>
+                                    <a:rPr lang="en-US" altLang="zh-TW" sz="2000" i="1" dirty="0">
+                                      <a:latin typeface="Cambria Math" panose="02040503050406030204" pitchFamily="18" charset="0"/>
+                                      <a:ea typeface="Cambria Math" panose="02040503050406030204" pitchFamily="18" charset="0"/>
+                                    </a:rPr>
+                                    <m:t>𝐾</m:t>
+                                  </m:r>
+                                  <m:r>
+                                    <a:rPr lang="en-US" altLang="zh-TW" sz="2000" i="1" dirty="0">
+                                      <a:latin typeface="Cambria Math" panose="02040503050406030204" pitchFamily="18" charset="0"/>
+                                      <a:ea typeface="Cambria Math" panose="02040503050406030204" pitchFamily="18" charset="0"/>
+                                    </a:rPr>
+                                    <m:t>/</m:t>
+                                  </m:r>
+                                  <m:sSup>
+                                    <m:sSupPr>
+                                      <m:ctrlPr>
+                                        <a:rPr lang="en-US" altLang="zh-TW" sz="2000" i="1" dirty="0">
+                                          <a:latin typeface="Cambria Math" panose="02040503050406030204" pitchFamily="18" charset="0"/>
+                                          <a:ea typeface="Cambria Math" panose="02040503050406030204" pitchFamily="18" charset="0"/>
+                                        </a:rPr>
+                                      </m:ctrlPr>
+                                    </m:sSupPr>
+                                    <m:e>
+                                      <m:r>
+                                        <a:rPr lang="en-US" altLang="zh-TW" sz="2000" i="1" dirty="0">
+                                          <a:latin typeface="Cambria Math" panose="02040503050406030204" pitchFamily="18" charset="0"/>
+                                          <a:ea typeface="Cambria Math" panose="02040503050406030204" pitchFamily="18" charset="0"/>
+                                        </a:rPr>
+                                        <m:t>𝐾</m:t>
+                                      </m:r>
+                                    </m:e>
+                                    <m:sup>
+                                      <m:r>
+                                        <a:rPr lang="en-US" altLang="zh-TW" sz="2000" i="1" dirty="0">
+                                          <a:latin typeface="Cambria Math" panose="02040503050406030204" pitchFamily="18" charset="0"/>
+                                          <a:ea typeface="Cambria Math" panose="02040503050406030204" pitchFamily="18" charset="0"/>
+                                        </a:rPr>
+                                        <m:t>′</m:t>
+                                      </m:r>
+                                    </m:sup>
+                                  </m:sSup>
+                                </m:sup>
+                              </m:sSubSup>
+                              <m:d>
+                                <m:dPr>
+                                  <m:ctrlPr>
+                                    <a:rPr lang="en-US" altLang="zh-TW" sz="2000" i="1" dirty="0">
+                                      <a:latin typeface="Cambria Math" panose="02040503050406030204" pitchFamily="18" charset="0"/>
+                                      <a:ea typeface="Cambria Math" panose="02040503050406030204" pitchFamily="18" charset="0"/>
+                                    </a:rPr>
+                                  </m:ctrlPr>
+                                </m:dPr>
+                                <m:e>
+                                  <m:sSub>
+                                    <m:sSubPr>
+                                      <m:ctrlPr>
+                                        <a:rPr lang="en-US" altLang="zh-TW" sz="2000" i="1" dirty="0">
+                                          <a:latin typeface="Cambria Math" panose="02040503050406030204" pitchFamily="18" charset="0"/>
+                                          <a:ea typeface="Cambria Math" panose="02040503050406030204" pitchFamily="18" charset="0"/>
+                                        </a:rPr>
+                                      </m:ctrlPr>
+                                    </m:sSubPr>
+                                    <m:e>
+                                      <m:r>
+                                        <a:rPr lang="en-US" altLang="zh-TW" sz="2000" b="1" i="1" dirty="0">
+                                          <a:latin typeface="Cambria Math" panose="02040503050406030204" pitchFamily="18" charset="0"/>
+                                          <a:ea typeface="Cambria Math" panose="02040503050406030204" pitchFamily="18" charset="0"/>
+                                        </a:rPr>
+                                        <m:t>𝑹</m:t>
+                                      </m:r>
+                                    </m:e>
+                                    <m:sub>
+                                      <m:r>
+                                        <a:rPr lang="en-US" altLang="zh-TW" sz="2000" i="1" dirty="0">
+                                          <a:latin typeface="Cambria Math" panose="02040503050406030204" pitchFamily="18" charset="0"/>
+                                          <a:ea typeface="Cambria Math" panose="02040503050406030204" pitchFamily="18" charset="0"/>
+                                        </a:rPr>
+                                        <m:t>𝑐</m:t>
+                                      </m:r>
+                                    </m:sub>
+                                  </m:sSub>
+                                  <m:r>
+                                    <a:rPr lang="en-US" altLang="zh-TW" sz="2000" i="1" dirty="0">
+                                      <a:latin typeface="Cambria Math" panose="02040503050406030204" pitchFamily="18" charset="0"/>
+                                      <a:ea typeface="Cambria Math" panose="02040503050406030204" pitchFamily="18" charset="0"/>
+                                    </a:rPr>
+                                    <m:t>, </m:t>
+                                  </m:r>
+                                  <m:r>
+                                    <a:rPr lang="en-US" altLang="zh-TW" sz="2000" b="1" i="1" dirty="0">
+                                      <a:latin typeface="Cambria Math" panose="02040503050406030204" pitchFamily="18" charset="0"/>
+                                      <a:ea typeface="Cambria Math" panose="02040503050406030204" pitchFamily="18" charset="0"/>
+                                    </a:rPr>
+                                    <m:t>𝒓</m:t>
+                                  </m:r>
+                                  <m:r>
+                                    <a:rPr lang="en-US" altLang="zh-TW" sz="2000" i="1" dirty="0">
+                                      <a:latin typeface="Cambria Math" panose="02040503050406030204" pitchFamily="18" charset="0"/>
+                                      <a:ea typeface="Cambria Math" panose="02040503050406030204" pitchFamily="18" charset="0"/>
+                                    </a:rPr>
+                                    <m:t>=</m:t>
+                                  </m:r>
+                                  <m:r>
+                                    <a:rPr lang="en-US" altLang="zh-TW" sz="2000" b="1" i="1" dirty="0">
+                                      <a:latin typeface="Cambria Math" panose="02040503050406030204" pitchFamily="18" charset="0"/>
+                                      <a:ea typeface="Cambria Math" panose="02040503050406030204" pitchFamily="18" charset="0"/>
+                                    </a:rPr>
+                                    <m:t>𝟎</m:t>
+                                  </m:r>
+                                </m:e>
+                              </m:d>
+                            </m:e>
+                          </m:d>
+                        </m:e>
+                        <m:sup>
+                          <m:r>
+                            <a:rPr lang="en-US" altLang="zh-TW" sz="2000" i="1" dirty="0">
+                              <a:latin typeface="Cambria Math" panose="02040503050406030204" pitchFamily="18" charset="0"/>
+                              <a:ea typeface="Cambria Math" panose="02040503050406030204" pitchFamily="18" charset="0"/>
+                            </a:rPr>
+                            <m:t>2</m:t>
+                          </m:r>
+                        </m:sup>
+                      </m:sSup>
+                    </m:oMath>
+                  </m:oMathPara>
+                </a14:m>
+                <a:endParaRPr lang="zh-TW" altLang="en-US" sz="1600" dirty="0"/>
+              </a:p>
+            </p:txBody>
+          </p:sp>
+        </mc:Choice>
+        <mc:Fallback>
+          <p:sp>
+            <p:nvSpPr>
+              <p:cNvPr id="59" name="矩形 58">
+                <a:extLst>
+                  <a:ext uri="{FF2B5EF4-FFF2-40B4-BE49-F238E27FC236}">
+                    <a16:creationId xmlns:a16="http://schemas.microsoft.com/office/drawing/2014/main" id="{E07DBC4B-B92E-4C8B-988A-721E37CBC89A}"/>
+                  </a:ext>
+                </a:extLst>
+              </p:cNvPr>
+              <p:cNvSpPr>
+                <a:spLocks noRot="1" noChangeAspect="1" noMove="1" noResize="1" noEditPoints="1" noAdjustHandles="1" noChangeArrowheads="1" noChangeShapeType="1" noTextEdit="1"/>
+              </p:cNvSpPr>
+              <p:nvPr/>
+            </p:nvSpPr>
+            <p:spPr>
+              <a:xfrm>
+                <a:off x="2611825" y="5920152"/>
+                <a:ext cx="2486552" cy="624273"/>
+              </a:xfrm>
+              <a:prstGeom prst="rect">
+                <a:avLst/>
+              </a:prstGeom>
+              <a:blipFill>
+                <a:blip r:embed="rId50"/>
+                <a:stretch>
+                  <a:fillRect/>
+                </a:stretch>
+              </a:blipFill>
+            </p:spPr>
+            <p:txBody>
+              <a:bodyPr/>
+              <a:lstStyle/>
+              <a:p>
+                <a:r>
+                  <a:rPr lang="zh-TW" altLang="en-US">
+                    <a:noFill/>
+                  </a:rPr>
+                  <a:t> </a:t>
+                </a:r>
+              </a:p>
+            </p:txBody>
+          </p:sp>
+        </mc:Fallback>
+      </mc:AlternateContent>
+      <mc:AlternateContent xmlns:mc="http://schemas.openxmlformats.org/markup-compatibility/2006">
+        <mc:Choice xmlns:a14="http://schemas.microsoft.com/office/drawing/2010/main" Requires="a14">
+          <p:sp>
+            <p:nvSpPr>
+              <p:cNvPr id="60" name="矩形 59">
+                <a:extLst>
+                  <a:ext uri="{FF2B5EF4-FFF2-40B4-BE49-F238E27FC236}">
+                    <a16:creationId xmlns:a16="http://schemas.microsoft.com/office/drawing/2014/main" id="{9A4FE567-2655-477B-B80A-FA51F3559270}"/>
+                  </a:ext>
+                </a:extLst>
+              </p:cNvPr>
+              <p:cNvSpPr/>
+              <p:nvPr/>
+            </p:nvSpPr>
+            <p:spPr>
+              <a:xfrm>
+                <a:off x="7590514" y="5920152"/>
+                <a:ext cx="2482440" cy="624273"/>
+              </a:xfrm>
+              <a:prstGeom prst="rect">
+                <a:avLst/>
+              </a:prstGeom>
+            </p:spPr>
+            <p:txBody>
+              <a:bodyPr wrap="square">
+                <a:spAutoFit/>
+              </a:bodyPr>
+              <a:lstStyle/>
+              <a:p>
+                <a:pPr algn="ctr"/>
+                <a14:m>
+                  <m:oMathPara xmlns:m="http://schemas.openxmlformats.org/officeDocument/2006/math">
+                    <m:oMathParaPr>
+                      <m:jc m:val="centerGroup"/>
+                    </m:oMathParaPr>
+                    <m:oMath xmlns:m="http://schemas.openxmlformats.org/officeDocument/2006/math">
+                      <m:sSup>
+                        <m:sSupPr>
+                          <m:ctrlPr>
+                            <a:rPr lang="en-US" altLang="zh-TW" sz="2000" i="1" dirty="0">
+                              <a:latin typeface="Cambria Math" panose="02040503050406030204" pitchFamily="18" charset="0"/>
+                              <a:ea typeface="Cambria Math" panose="02040503050406030204" pitchFamily="18" charset="0"/>
+                            </a:rPr>
+                          </m:ctrlPr>
+                        </m:sSupPr>
+                        <m:e>
+                          <m:d>
+                            <m:dPr>
+                              <m:begChr m:val="|"/>
+                              <m:endChr m:val="|"/>
+                              <m:ctrlPr>
+                                <a:rPr lang="en-US" altLang="zh-TW" sz="2000" i="1" dirty="0">
+                                  <a:latin typeface="Cambria Math" panose="02040503050406030204" pitchFamily="18" charset="0"/>
+                                  <a:ea typeface="Cambria Math" panose="02040503050406030204" pitchFamily="18" charset="0"/>
+                                </a:rPr>
+                              </m:ctrlPr>
+                            </m:dPr>
+                            <m:e>
+                              <m:sSubSup>
+                                <m:sSubSupPr>
+                                  <m:ctrlPr>
+                                    <a:rPr lang="en-US" altLang="zh-TW" sz="2000" i="1" dirty="0">
+                                      <a:latin typeface="Cambria Math" panose="02040503050406030204" pitchFamily="18" charset="0"/>
+                                      <a:ea typeface="Cambria Math" panose="02040503050406030204" pitchFamily="18" charset="0"/>
+                                    </a:rPr>
+                                  </m:ctrlPr>
+                                </m:sSubSupPr>
+                                <m:e>
+                                  <m:r>
+                                    <m:rPr>
+                                      <m:sty m:val="p"/>
+                                    </m:rPr>
+                                    <a:rPr lang="en-US" altLang="zh-TW" sz="2000" dirty="0">
+                                      <a:latin typeface="Cambria Math" panose="02040503050406030204" pitchFamily="18" charset="0"/>
+                                      <a:ea typeface="Cambria Math" panose="02040503050406030204" pitchFamily="18" charset="0"/>
+                                    </a:rPr>
+                                    <m:t>Φ</m:t>
+                                  </m:r>
+                                </m:e>
+                                <m:sub>
+                                  <m:acc>
+                                    <m:accPr>
+                                      <m:chr m:val="̂"/>
+                                      <m:ctrlPr>
+                                        <a:rPr lang="en-US" altLang="zh-TW" sz="2000" b="1" i="1">
+                                          <a:latin typeface="Cambria Math" panose="02040503050406030204" pitchFamily="18" charset="0"/>
+                                        </a:rPr>
+                                      </m:ctrlPr>
+                                    </m:accPr>
+                                    <m:e>
+                                      <m:r>
+                                        <a:rPr lang="zh-TW" altLang="en-US" sz="2000" b="1" i="1">
+                                          <a:latin typeface="Cambria Math" panose="02040503050406030204" pitchFamily="18" charset="0"/>
+                                        </a:rPr>
+                                        <m:t>𝜺</m:t>
+                                      </m:r>
+                                    </m:e>
+                                  </m:acc>
+                                  <m:r>
+                                    <a:rPr lang="en-US" altLang="zh-TW" sz="2000" i="1">
+                                      <a:latin typeface="Cambria Math" panose="02040503050406030204" pitchFamily="18" charset="0"/>
+                                    </a:rPr>
+                                    <m:t>,±1</m:t>
+                                  </m:r>
+                                </m:sub>
+                                <m:sup>
+                                  <m:r>
+                                    <a:rPr lang="en-US" altLang="zh-TW" sz="2000" i="1" dirty="0">
+                                      <a:latin typeface="Cambria Math" panose="02040503050406030204" pitchFamily="18" charset="0"/>
+                                      <a:ea typeface="Cambria Math" panose="02040503050406030204" pitchFamily="18" charset="0"/>
+                                    </a:rPr>
+                                    <m:t>𝐾</m:t>
+                                  </m:r>
+                                  <m:r>
+                                    <a:rPr lang="en-US" altLang="zh-TW" sz="2000" i="1" dirty="0">
+                                      <a:latin typeface="Cambria Math" panose="02040503050406030204" pitchFamily="18" charset="0"/>
+                                      <a:ea typeface="Cambria Math" panose="02040503050406030204" pitchFamily="18" charset="0"/>
+                                    </a:rPr>
+                                    <m:t>/</m:t>
+                                  </m:r>
+                                  <m:sSup>
+                                    <m:sSupPr>
+                                      <m:ctrlPr>
+                                        <a:rPr lang="en-US" altLang="zh-TW" sz="2000" i="1" dirty="0">
+                                          <a:latin typeface="Cambria Math" panose="02040503050406030204" pitchFamily="18" charset="0"/>
+                                          <a:ea typeface="Cambria Math" panose="02040503050406030204" pitchFamily="18" charset="0"/>
+                                        </a:rPr>
+                                      </m:ctrlPr>
+                                    </m:sSupPr>
+                                    <m:e>
+                                      <m:r>
+                                        <a:rPr lang="en-US" altLang="zh-TW" sz="2000" i="1" dirty="0">
+                                          <a:latin typeface="Cambria Math" panose="02040503050406030204" pitchFamily="18" charset="0"/>
+                                          <a:ea typeface="Cambria Math" panose="02040503050406030204" pitchFamily="18" charset="0"/>
+                                        </a:rPr>
+                                        <m:t>𝐾</m:t>
+                                      </m:r>
+                                    </m:e>
+                                    <m:sup>
+                                      <m:r>
+                                        <a:rPr lang="en-US" altLang="zh-TW" sz="2000" i="1" dirty="0">
+                                          <a:latin typeface="Cambria Math" panose="02040503050406030204" pitchFamily="18" charset="0"/>
+                                          <a:ea typeface="Cambria Math" panose="02040503050406030204" pitchFamily="18" charset="0"/>
+                                        </a:rPr>
+                                        <m:t>′</m:t>
+                                      </m:r>
+                                    </m:sup>
+                                  </m:sSup>
+                                </m:sup>
+                              </m:sSubSup>
+                              <m:d>
+                                <m:dPr>
+                                  <m:ctrlPr>
+                                    <a:rPr lang="en-US" altLang="zh-TW" sz="2000" i="1" dirty="0">
+                                      <a:latin typeface="Cambria Math" panose="02040503050406030204" pitchFamily="18" charset="0"/>
+                                      <a:ea typeface="Cambria Math" panose="02040503050406030204" pitchFamily="18" charset="0"/>
+                                    </a:rPr>
+                                  </m:ctrlPr>
+                                </m:dPr>
+                                <m:e>
+                                  <m:sSub>
+                                    <m:sSubPr>
+                                      <m:ctrlPr>
+                                        <a:rPr lang="en-US" altLang="zh-TW" sz="2000" i="1" dirty="0">
+                                          <a:latin typeface="Cambria Math" panose="02040503050406030204" pitchFamily="18" charset="0"/>
+                                          <a:ea typeface="Cambria Math" panose="02040503050406030204" pitchFamily="18" charset="0"/>
+                                        </a:rPr>
+                                      </m:ctrlPr>
+                                    </m:sSubPr>
+                                    <m:e>
+                                      <m:r>
+                                        <a:rPr lang="en-US" altLang="zh-TW" sz="2000" b="1" i="1" dirty="0">
+                                          <a:latin typeface="Cambria Math" panose="02040503050406030204" pitchFamily="18" charset="0"/>
+                                          <a:ea typeface="Cambria Math" panose="02040503050406030204" pitchFamily="18" charset="0"/>
+                                        </a:rPr>
+                                        <m:t>𝑹</m:t>
+                                      </m:r>
+                                    </m:e>
+                                    <m:sub>
+                                      <m:r>
+                                        <a:rPr lang="en-US" altLang="zh-TW" sz="2000" i="1" dirty="0">
+                                          <a:latin typeface="Cambria Math" panose="02040503050406030204" pitchFamily="18" charset="0"/>
+                                          <a:ea typeface="Cambria Math" panose="02040503050406030204" pitchFamily="18" charset="0"/>
+                                        </a:rPr>
+                                        <m:t>𝑐</m:t>
+                                      </m:r>
+                                    </m:sub>
+                                  </m:sSub>
+                                  <m:r>
+                                    <a:rPr lang="en-US" altLang="zh-TW" sz="2000" i="1" dirty="0">
+                                      <a:latin typeface="Cambria Math" panose="02040503050406030204" pitchFamily="18" charset="0"/>
+                                      <a:ea typeface="Cambria Math" panose="02040503050406030204" pitchFamily="18" charset="0"/>
+                                    </a:rPr>
+                                    <m:t>, </m:t>
+                                  </m:r>
+                                  <m:r>
+                                    <a:rPr lang="en-US" altLang="zh-TW" sz="2000" b="1" i="1" dirty="0">
+                                      <a:latin typeface="Cambria Math" panose="02040503050406030204" pitchFamily="18" charset="0"/>
+                                      <a:ea typeface="Cambria Math" panose="02040503050406030204" pitchFamily="18" charset="0"/>
+                                    </a:rPr>
+                                    <m:t>𝒓</m:t>
+                                  </m:r>
+                                  <m:r>
+                                    <a:rPr lang="en-US" altLang="zh-TW" sz="2000" i="1" dirty="0">
+                                      <a:latin typeface="Cambria Math" panose="02040503050406030204" pitchFamily="18" charset="0"/>
+                                      <a:ea typeface="Cambria Math" panose="02040503050406030204" pitchFamily="18" charset="0"/>
+                                    </a:rPr>
+                                    <m:t>=</m:t>
+                                  </m:r>
+                                  <m:r>
+                                    <a:rPr lang="en-US" altLang="zh-TW" sz="2000" b="1" i="1" dirty="0">
+                                      <a:latin typeface="Cambria Math" panose="02040503050406030204" pitchFamily="18" charset="0"/>
+                                      <a:ea typeface="Cambria Math" panose="02040503050406030204" pitchFamily="18" charset="0"/>
+                                    </a:rPr>
+                                    <m:t>𝟎</m:t>
+                                  </m:r>
+                                </m:e>
+                              </m:d>
+                            </m:e>
+                          </m:d>
+                        </m:e>
+                        <m:sup>
+                          <m:r>
+                            <a:rPr lang="en-US" altLang="zh-TW" sz="2000" i="1" dirty="0">
+                              <a:latin typeface="Cambria Math" panose="02040503050406030204" pitchFamily="18" charset="0"/>
+                              <a:ea typeface="Cambria Math" panose="02040503050406030204" pitchFamily="18" charset="0"/>
+                            </a:rPr>
+                            <m:t>2</m:t>
+                          </m:r>
+                        </m:sup>
+                      </m:sSup>
+                    </m:oMath>
+                  </m:oMathPara>
+                </a14:m>
+                <a:endParaRPr lang="zh-TW" altLang="en-US" sz="1600" dirty="0"/>
+              </a:p>
+            </p:txBody>
+          </p:sp>
+        </mc:Choice>
+        <mc:Fallback>
+          <p:sp>
+            <p:nvSpPr>
+              <p:cNvPr id="60" name="矩形 59">
+                <a:extLst>
+                  <a:ext uri="{FF2B5EF4-FFF2-40B4-BE49-F238E27FC236}">
+                    <a16:creationId xmlns:a16="http://schemas.microsoft.com/office/drawing/2014/main" id="{9A4FE567-2655-477B-B80A-FA51F3559270}"/>
+                  </a:ext>
+                </a:extLst>
+              </p:cNvPr>
+              <p:cNvSpPr>
+                <a:spLocks noRot="1" noChangeAspect="1" noMove="1" noResize="1" noEditPoints="1" noAdjustHandles="1" noChangeArrowheads="1" noChangeShapeType="1" noTextEdit="1"/>
+              </p:cNvSpPr>
+              <p:nvPr/>
+            </p:nvSpPr>
+            <p:spPr>
+              <a:xfrm>
+                <a:off x="7590514" y="5920152"/>
+                <a:ext cx="2482440" cy="624273"/>
+              </a:xfrm>
+              <a:prstGeom prst="rect">
+                <a:avLst/>
+              </a:prstGeom>
+              <a:blipFill>
+                <a:blip r:embed="rId51"/>
                 <a:stretch>
                   <a:fillRect/>
                 </a:stretch>

--- a/Final/Figures/wavepacket_l=0.pptx
+++ b/Final/Figures/wavepacket_l=0.pptx
@@ -253,7 +253,7 @@
           <a:p>
             <a:fld id="{B4A272A4-1B6B-4C0A-B74D-70EF2D8C7D55}" type="datetimeFigureOut">
               <a:rPr lang="zh-TW" altLang="en-US" smtClean="0"/>
-              <a:t>2026/7/1</a:t>
+              <a:t>2026/7/16</a:t>
             </a:fld>
             <a:endParaRPr lang="zh-TW" altLang="en-US"/>
           </a:p>
@@ -423,7 +423,7 @@
           <a:p>
             <a:fld id="{B4A272A4-1B6B-4C0A-B74D-70EF2D8C7D55}" type="datetimeFigureOut">
               <a:rPr lang="zh-TW" altLang="en-US" smtClean="0"/>
-              <a:t>2026/7/1</a:t>
+              <a:t>2026/7/16</a:t>
             </a:fld>
             <a:endParaRPr lang="zh-TW" altLang="en-US"/>
           </a:p>
@@ -603,7 +603,7 @@
           <a:p>
             <a:fld id="{B4A272A4-1B6B-4C0A-B74D-70EF2D8C7D55}" type="datetimeFigureOut">
               <a:rPr lang="zh-TW" altLang="en-US" smtClean="0"/>
-              <a:t>2026/7/1</a:t>
+              <a:t>2026/7/16</a:t>
             </a:fld>
             <a:endParaRPr lang="zh-TW" altLang="en-US"/>
           </a:p>
@@ -773,7 +773,7 @@
           <a:p>
             <a:fld id="{B4A272A4-1B6B-4C0A-B74D-70EF2D8C7D55}" type="datetimeFigureOut">
               <a:rPr lang="zh-TW" altLang="en-US" smtClean="0"/>
-              <a:t>2026/7/1</a:t>
+              <a:t>2026/7/16</a:t>
             </a:fld>
             <a:endParaRPr lang="zh-TW" altLang="en-US"/>
           </a:p>
@@ -1017,7 +1017,7 @@
           <a:p>
             <a:fld id="{B4A272A4-1B6B-4C0A-B74D-70EF2D8C7D55}" type="datetimeFigureOut">
               <a:rPr lang="zh-TW" altLang="en-US" smtClean="0"/>
-              <a:t>2026/7/1</a:t>
+              <a:t>2026/7/16</a:t>
             </a:fld>
             <a:endParaRPr lang="zh-TW" altLang="en-US"/>
           </a:p>
@@ -1249,7 +1249,7 @@
           <a:p>
             <a:fld id="{B4A272A4-1B6B-4C0A-B74D-70EF2D8C7D55}" type="datetimeFigureOut">
               <a:rPr lang="zh-TW" altLang="en-US" smtClean="0"/>
-              <a:t>2026/7/1</a:t>
+              <a:t>2026/7/16</a:t>
             </a:fld>
             <a:endParaRPr lang="zh-TW" altLang="en-US"/>
           </a:p>
@@ -1616,7 +1616,7 @@
           <a:p>
             <a:fld id="{B4A272A4-1B6B-4C0A-B74D-70EF2D8C7D55}" type="datetimeFigureOut">
               <a:rPr lang="zh-TW" altLang="en-US" smtClean="0"/>
-              <a:t>2026/7/1</a:t>
+              <a:t>2026/7/16</a:t>
             </a:fld>
             <a:endParaRPr lang="zh-TW" altLang="en-US"/>
           </a:p>
@@ -1734,7 +1734,7 @@
           <a:p>
             <a:fld id="{B4A272A4-1B6B-4C0A-B74D-70EF2D8C7D55}" type="datetimeFigureOut">
               <a:rPr lang="zh-TW" altLang="en-US" smtClean="0"/>
-              <a:t>2026/7/1</a:t>
+              <a:t>2026/7/16</a:t>
             </a:fld>
             <a:endParaRPr lang="zh-TW" altLang="en-US"/>
           </a:p>
@@ -1829,7 +1829,7 @@
           <a:p>
             <a:fld id="{B4A272A4-1B6B-4C0A-B74D-70EF2D8C7D55}" type="datetimeFigureOut">
               <a:rPr lang="zh-TW" altLang="en-US" smtClean="0"/>
-              <a:t>2026/7/1</a:t>
+              <a:t>2026/7/16</a:t>
             </a:fld>
             <a:endParaRPr lang="zh-TW" altLang="en-US"/>
           </a:p>
@@ -2106,7 +2106,7 @@
           <a:p>
             <a:fld id="{B4A272A4-1B6B-4C0A-B74D-70EF2D8C7D55}" type="datetimeFigureOut">
               <a:rPr lang="zh-TW" altLang="en-US" smtClean="0"/>
-              <a:t>2026/7/1</a:t>
+              <a:t>2026/7/16</a:t>
             </a:fld>
             <a:endParaRPr lang="zh-TW" altLang="en-US"/>
           </a:p>
@@ -2363,7 +2363,7 @@
           <a:p>
             <a:fld id="{B4A272A4-1B6B-4C0A-B74D-70EF2D8C7D55}" type="datetimeFigureOut">
               <a:rPr lang="zh-TW" altLang="en-US" smtClean="0"/>
-              <a:t>2026/7/1</a:t>
+              <a:t>2026/7/16</a:t>
             </a:fld>
             <a:endParaRPr lang="zh-TW" altLang="en-US"/>
           </a:p>
@@ -2576,7 +2576,7 @@
           <a:p>
             <a:fld id="{B4A272A4-1B6B-4C0A-B74D-70EF2D8C7D55}" type="datetimeFigureOut">
               <a:rPr lang="zh-TW" altLang="en-US" smtClean="0"/>
-              <a:t>2026/7/1</a:t>
+              <a:t>2026/7/16</a:t>
             </a:fld>
             <a:endParaRPr lang="zh-TW" altLang="en-US"/>
           </a:p>
@@ -15641,8 +15641,8 @@
             </p:nvSpPr>
             <p:spPr>
               <a:xfrm>
-                <a:off x="1299165" y="1315026"/>
-                <a:ext cx="1177245" cy="555793"/>
+                <a:off x="1335008" y="1315026"/>
+                <a:ext cx="1105559" cy="555793"/>
               </a:xfrm>
               <a:prstGeom prst="rect">
                 <a:avLst/>
@@ -15732,7 +15732,13 @@
                                     <a:rPr lang="en-US" altLang="zh-TW" sz="2000" i="1">
                                       <a:latin typeface="Cambria Math" panose="02040503050406030204" pitchFamily="18" charset="0"/>
                                     </a:rPr>
-                                    <m:t>,±1</m:t>
+                                    <m:t>,</m:t>
+                                  </m:r>
+                                  <m:r>
+                                    <a:rPr lang="en-US" altLang="zh-TW" sz="2000" b="0" i="1" smtClean="0">
+                                      <a:latin typeface="Cambria Math" panose="02040503050406030204" pitchFamily="18" charset="0"/>
+                                    </a:rPr>
+                                    <m:t>0</m:t>
                                   </m:r>
                                 </m:sub>
                                 <m:sup>
@@ -15799,8 +15805,8 @@
             </p:nvSpPr>
             <p:spPr>
               <a:xfrm>
-                <a:off x="1299165" y="1315026"/>
-                <a:ext cx="1177245" cy="555793"/>
+                <a:off x="1335008" y="1315026"/>
+                <a:ext cx="1105559" cy="555793"/>
               </a:xfrm>
               <a:prstGeom prst="rect">
                 <a:avLst/>
@@ -15929,7 +15935,13 @@
                                     <a:rPr lang="en-US" altLang="zh-TW" sz="2000" i="1">
                                       <a:latin typeface="Cambria Math" panose="02040503050406030204" pitchFamily="18" charset="0"/>
                                     </a:rPr>
-                                    <m:t>,±1</m:t>
+                                    <m:t>,</m:t>
+                                  </m:r>
+                                  <m:r>
+                                    <a:rPr lang="en-US" altLang="zh-TW" sz="2000" b="0" i="1" smtClean="0">
+                                      <a:latin typeface="Cambria Math" panose="02040503050406030204" pitchFamily="18" charset="0"/>
+                                    </a:rPr>
+                                    <m:t>0</m:t>
                                   </m:r>
                                 </m:sub>
                                 <m:sup>
@@ -16127,8 +16139,8 @@
             </p:nvSpPr>
             <p:spPr>
               <a:xfrm>
-                <a:off x="6246769" y="1315026"/>
-                <a:ext cx="1177245" cy="555793"/>
+                <a:off x="6282612" y="1315026"/>
+                <a:ext cx="1105559" cy="555793"/>
               </a:xfrm>
               <a:prstGeom prst="rect">
                 <a:avLst/>
@@ -16218,7 +16230,13 @@
                                     <a:rPr lang="en-US" altLang="zh-TW" sz="2000" i="1">
                                       <a:latin typeface="Cambria Math" panose="02040503050406030204" pitchFamily="18" charset="0"/>
                                     </a:rPr>
-                                    <m:t>,±1</m:t>
+                                    <m:t>,</m:t>
+                                  </m:r>
+                                  <m:r>
+                                    <a:rPr lang="en-US" altLang="zh-TW" sz="2000" b="0" i="1" smtClean="0">
+                                      <a:latin typeface="Cambria Math" panose="02040503050406030204" pitchFamily="18" charset="0"/>
+                                    </a:rPr>
+                                    <m:t>0</m:t>
                                   </m:r>
                                 </m:sub>
                                 <m:sup>
@@ -16285,8 +16303,8 @@
             </p:nvSpPr>
             <p:spPr>
               <a:xfrm>
-                <a:off x="6246769" y="1315026"/>
-                <a:ext cx="1177245" cy="555793"/>
+                <a:off x="6282612" y="1315026"/>
+                <a:ext cx="1105559" cy="555793"/>
               </a:xfrm>
               <a:prstGeom prst="rect">
                 <a:avLst/>
@@ -16352,7 +16370,7 @@
                       <m:sSup>
                         <m:sSupPr>
                           <m:ctrlPr>
-                            <a:rPr lang="en-US" altLang="zh-TW" sz="2000" i="1" dirty="0">
+                            <a:rPr lang="en-US" altLang="zh-TW" sz="2000" i="1" dirty="0" smtClean="0">
                               <a:latin typeface="Cambria Math" panose="02040503050406030204" pitchFamily="18" charset="0"/>
                               <a:ea typeface="Cambria Math" panose="02040503050406030204" pitchFamily="18" charset="0"/>
                             </a:rPr>
@@ -16415,7 +16433,13 @@
                                     <a:rPr lang="en-US" altLang="zh-TW" sz="2000" i="1">
                                       <a:latin typeface="Cambria Math" panose="02040503050406030204" pitchFamily="18" charset="0"/>
                                     </a:rPr>
-                                    <m:t>,±1</m:t>
+                                    <m:t>,</m:t>
+                                  </m:r>
+                                  <m:r>
+                                    <a:rPr lang="en-US" altLang="zh-TW" sz="2000" b="0" i="1" smtClean="0">
+                                      <a:latin typeface="Cambria Math" panose="02040503050406030204" pitchFamily="18" charset="0"/>
+                                    </a:rPr>
+                                    <m:t>0</m:t>
                                   </m:r>
                                 </m:sub>
                                 <m:sup>
@@ -16613,8 +16637,8 @@
             </p:nvSpPr>
             <p:spPr>
               <a:xfrm>
-                <a:off x="1299165" y="5954392"/>
-                <a:ext cx="1177245" cy="555793"/>
+                <a:off x="1335008" y="5954392"/>
+                <a:ext cx="1105559" cy="555793"/>
               </a:xfrm>
               <a:prstGeom prst="rect">
                 <a:avLst/>
@@ -16704,7 +16728,13 @@
                                     <a:rPr lang="en-US" altLang="zh-TW" sz="2000" i="1">
                                       <a:latin typeface="Cambria Math" panose="02040503050406030204" pitchFamily="18" charset="0"/>
                                     </a:rPr>
-                                    <m:t>,±1</m:t>
+                                    <m:t>,</m:t>
+                                  </m:r>
+                                  <m:r>
+                                    <a:rPr lang="en-US" altLang="zh-TW" sz="2000" b="0" i="1" smtClean="0">
+                                      <a:latin typeface="Cambria Math" panose="02040503050406030204" pitchFamily="18" charset="0"/>
+                                    </a:rPr>
+                                    <m:t>0</m:t>
                                   </m:r>
                                 </m:sub>
                                 <m:sup>
@@ -16771,8 +16801,8 @@
             </p:nvSpPr>
             <p:spPr>
               <a:xfrm>
-                <a:off x="1299165" y="5954392"/>
-                <a:ext cx="1177245" cy="555793"/>
+                <a:off x="1335008" y="5954392"/>
+                <a:ext cx="1105559" cy="555793"/>
               </a:xfrm>
               <a:prstGeom prst="rect">
                 <a:avLst/>
@@ -16815,8 +16845,8 @@
             </p:nvSpPr>
             <p:spPr>
               <a:xfrm>
-                <a:off x="6246769" y="5954392"/>
-                <a:ext cx="1177245" cy="555793"/>
+                <a:off x="6282612" y="5954392"/>
+                <a:ext cx="1105559" cy="555793"/>
               </a:xfrm>
               <a:prstGeom prst="rect">
                 <a:avLst/>
@@ -16906,7 +16936,13 @@
                                     <a:rPr lang="en-US" altLang="zh-TW" sz="2000" i="1">
                                       <a:latin typeface="Cambria Math" panose="02040503050406030204" pitchFamily="18" charset="0"/>
                                     </a:rPr>
-                                    <m:t>,±1</m:t>
+                                    <m:t>,</m:t>
+                                  </m:r>
+                                  <m:r>
+                                    <a:rPr lang="en-US" altLang="zh-TW" sz="2000" b="0" i="1" smtClean="0">
+                                      <a:latin typeface="Cambria Math" panose="02040503050406030204" pitchFamily="18" charset="0"/>
+                                    </a:rPr>
+                                    <m:t>0</m:t>
                                   </m:r>
                                 </m:sub>
                                 <m:sup>
@@ -16973,8 +17009,8 @@
             </p:nvSpPr>
             <p:spPr>
               <a:xfrm>
-                <a:off x="6246769" y="5954392"/>
-                <a:ext cx="1177245" cy="555793"/>
+                <a:off x="6282612" y="5954392"/>
+                <a:ext cx="1105559" cy="555793"/>
               </a:xfrm>
               <a:prstGeom prst="rect">
                 <a:avLst/>
@@ -17100,10 +17136,16 @@
                                     </m:e>
                                   </m:acc>
                                   <m:r>
-                                    <a:rPr lang="en-US" altLang="zh-TW" sz="2000" i="1">
+                                    <a:rPr lang="en-US" altLang="zh-TW" sz="2000" i="1" smtClean="0">
                                       <a:latin typeface="Cambria Math" panose="02040503050406030204" pitchFamily="18" charset="0"/>
                                     </a:rPr>
-                                    <m:t>,±1</m:t>
+                                    <m:t>,</m:t>
+                                  </m:r>
+                                  <m:r>
+                                    <a:rPr lang="en-US" altLang="zh-TW" sz="2000" b="0" i="1" smtClean="0">
+                                      <a:latin typeface="Cambria Math" panose="02040503050406030204" pitchFamily="18" charset="0"/>
+                                    </a:rPr>
+                                    <m:t>0</m:t>
                                   </m:r>
                                 </m:sub>
                                 <m:sup>
@@ -17324,7 +17366,7 @@
                       <m:sSup>
                         <m:sSupPr>
                           <m:ctrlPr>
-                            <a:rPr lang="en-US" altLang="zh-TW" sz="2000" i="1" dirty="0">
+                            <a:rPr lang="en-US" altLang="zh-TW" sz="2000" i="1" dirty="0" smtClean="0">
                               <a:latin typeface="Cambria Math" panose="02040503050406030204" pitchFamily="18" charset="0"/>
                               <a:ea typeface="Cambria Math" panose="02040503050406030204" pitchFamily="18" charset="0"/>
                             </a:rPr>
@@ -17387,7 +17429,13 @@
                                     <a:rPr lang="en-US" altLang="zh-TW" sz="2000" i="1">
                                       <a:latin typeface="Cambria Math" panose="02040503050406030204" pitchFamily="18" charset="0"/>
                                     </a:rPr>
-                                    <m:t>,±1</m:t>
+                                    <m:t>,</m:t>
+                                  </m:r>
+                                  <m:r>
+                                    <a:rPr lang="en-US" altLang="zh-TW" sz="2000" b="0" i="1" smtClean="0">
+                                      <a:latin typeface="Cambria Math" panose="02040503050406030204" pitchFamily="18" charset="0"/>
+                                    </a:rPr>
+                                    <m:t>0</m:t>
                                   </m:r>
                                 </m:sub>
                                 <m:sup>
